--- a/_Ref/_Architecture.pptx
+++ b/_Ref/_Architecture.pptx
@@ -5,10 +5,10 @@
     <p:sldMasterId id="2147483649" r:id="rId4"/>
   </p:sldMasterIdLst>
   <p:notesMasterIdLst>
-    <p:notesMasterId r:id="rId16"/>
+    <p:notesMasterId r:id="rId17"/>
   </p:notesMasterIdLst>
   <p:handoutMasterIdLst>
-    <p:handoutMasterId r:id="rId17"/>
+    <p:handoutMasterId r:id="rId18"/>
   </p:handoutMasterIdLst>
   <p:sldIdLst>
     <p:sldId id="257" r:id="rId5"/>
@@ -17,11 +17,12 @@
     <p:sldId id="1734" r:id="rId8"/>
     <p:sldId id="1782" r:id="rId9"/>
     <p:sldId id="1848" r:id="rId10"/>
-    <p:sldId id="1846" r:id="rId11"/>
-    <p:sldId id="1769" r:id="rId12"/>
-    <p:sldId id="1844" r:id="rId13"/>
-    <p:sldId id="1845" r:id="rId14"/>
-    <p:sldId id="1789" r:id="rId15"/>
+    <p:sldId id="1849" r:id="rId11"/>
+    <p:sldId id="1846" r:id="rId12"/>
+    <p:sldId id="1769" r:id="rId13"/>
+    <p:sldId id="1844" r:id="rId14"/>
+    <p:sldId id="1845" r:id="rId15"/>
+    <p:sldId id="1789" r:id="rId16"/>
   </p:sldIdLst>
   <p:sldSz cx="12192000" cy="6858000"/>
   <p:notesSz cx="6858000" cy="9144000"/>
@@ -129,20 +130,21 @@
             <p14:sldId id="1755"/>
           </p14:sldIdLst>
         </p14:section>
-        <p14:section name="Pattern" id="{D3DC1810-4E8C-4CE8-A54B-4823B10DFE76}">
+        <p14:section name="Architecture" id="{D3DC1810-4E8C-4CE8-A54B-4823B10DFE76}">
           <p14:sldIdLst>
             <p14:sldId id="1827"/>
             <p14:sldId id="1734"/>
             <p14:sldId id="1782"/>
             <p14:sldId id="1848"/>
+            <p14:sldId id="1849"/>
+          </p14:sldIdLst>
+        </p14:section>
+        <p14:section name="Components" id="{345B63CE-1C1A-4800-B9DF-6044AF9FF723}">
+          <p14:sldIdLst>
             <p14:sldId id="1846"/>
             <p14:sldId id="1769"/>
             <p14:sldId id="1844"/>
             <p14:sldId id="1845"/>
-          </p14:sldIdLst>
-        </p14:section>
-        <p14:section name="Annexe" id="{CF3F04AB-7D1E-4581-9149-F795ADC87016}">
-          <p14:sldIdLst>
             <p14:sldId id="1789"/>
           </p14:sldIdLst>
         </p14:section>
@@ -17038,45 +17040,6 @@
     </pc:docChg>
   </pc:docChgLst>
 </pc:chgInfo>
-</file>
-
-<file path=ppt/comments/modernComment_6C6_BD03B7D0.xml><?xml version="1.0" encoding="utf-8"?>
-<p188:cmLst xmlns:a="http://schemas.openxmlformats.org/drawingml/2006/main" xmlns:r="http://schemas.openxmlformats.org/officeDocument/2006/relationships" xmlns:p188="http://schemas.microsoft.com/office/powerpoint/2018/8/main">
-  <p188:cm id="{B8FD6BCC-7993-4AF5-80CF-577F3E1DC1A0}" authorId="{FD341820-5CC1-30A7-C59F-9FF8CBD05A90}" created="2023-08-19T19:05:40.848">
-    <ac:deMkLst xmlns:ac="http://schemas.microsoft.com/office/drawing/2013/main/command">
-      <pc:docMk xmlns:pc="http://schemas.microsoft.com/office/powerpoint/2013/main/command"/>
-      <pc:sldMk xmlns:pc="http://schemas.microsoft.com/office/powerpoint/2013/main/command" cId="3171137488" sldId="1734"/>
-      <ac:spMk id="103" creationId="{7B35EB49-C1C4-40D9-8CAA-FCE2275A6DF4}"/>
-    </ac:deMkLst>
-    <p188:txBody>
-      <a:bodyPr/>
-      <a:lstStyle/>
-      <a:p>
-        <a:r>
-          <a:rPr lang="en-US"/>
-          <a:t>shoppinglistappback.azurewebsites.net</a:t>
-        </a:r>
-      </a:p>
-    </p188:txBody>
-  </p188:cm>
-  <p188:cm id="{B6C2F84F-3344-4276-8CF5-CD461A0E54D3}" authorId="{FD341820-5CC1-30A7-C59F-9FF8CBD05A90}" created="2023-08-19T19:07:42.027">
-    <ac:deMkLst xmlns:ac="http://schemas.microsoft.com/office/drawing/2013/main/command">
-      <pc:docMk xmlns:pc="http://schemas.microsoft.com/office/powerpoint/2013/main/command"/>
-      <pc:sldMk xmlns:pc="http://schemas.microsoft.com/office/powerpoint/2013/main/command" cId="3171137488" sldId="1734"/>
-      <ac:spMk id="10" creationId="{517302A5-1414-4925-8129-DD7D2FE262F1}"/>
-    </ac:deMkLst>
-    <p188:txBody>
-      <a:bodyPr/>
-      <a:lstStyle/>
-      <a:p>
-        <a:r>
-          <a:rPr lang="en-US"/>
-          <a:t>shoppinglistapp-44a01.web.app</a:t>
-        </a:r>
-      </a:p>
-    </p188:txBody>
-  </p188:cm>
-</p188:cmLst>
 </file>
 
 <file path=ppt/handoutMasters/handoutMaster1.xml><?xml version="1.0" encoding="utf-8"?>
@@ -17173,7 +17136,7 @@
           <a:p>
             <a:fld id="{F869B831-4E69-4D2A-AD19-BF4301D60DCB}" type="datetimeFigureOut">
               <a:rPr lang="fr-FR" smtClean="0"/>
-              <a:t>12/02/2024</a:t>
+              <a:t>23/04/2025</a:t>
             </a:fld>
             <a:endParaRPr lang="fr-FR"/>
           </a:p>
@@ -17251,7 +17214,7 @@
           <a:p>
             <a:fld id="{96F4F53E-5B08-447E-A5A6-1405897979A7}" type="slidenum">
               <a:rPr lang="fr-FR" smtClean="0"/>
-              <a:t>‹N°›</a:t>
+              <a:t>‹#›</a:t>
             </a:fld>
             <a:endParaRPr lang="fr-FR"/>
           </a:p>
@@ -17350,7 +17313,7 @@
           <a:p>
             <a:fld id="{21CD3A5E-BD05-4410-88B3-BEFECD2D9F92}" type="datetimeFigureOut">
               <a:rPr lang="fr-FR" smtClean="0"/>
-              <a:t>12/02/2024</a:t>
+              <a:t>23/04/2025</a:t>
             </a:fld>
             <a:endParaRPr lang="fr-FR"/>
           </a:p>
@@ -17508,7 +17471,7 @@
           <a:p>
             <a:fld id="{7B05D11B-0242-421F-A54B-8A2F6741ECDA}" type="slidenum">
               <a:rPr lang="fr-FR" smtClean="0"/>
-              <a:t>‹N°›</a:t>
+              <a:t>‹#›</a:t>
             </a:fld>
             <a:endParaRPr lang="fr-FR"/>
           </a:p>
@@ -18212,7 +18175,7 @@
           <a:p>
             <a:fld id="{E14D0CC5-784E-4B7E-B9F4-EE71C08DA69C}" type="slidenum">
               <a:rPr lang="fr-FR" smtClean="0"/>
-              <a:t>‹N°›</a:t>
+              <a:t>‹#›</a:t>
             </a:fld>
             <a:endParaRPr lang="fr-FR"/>
           </a:p>
@@ -20038,7 +20001,7 @@
           <a:p>
             <a:fld id="{E14D0CC5-784E-4B7E-B9F4-EE71C08DA69C}" type="slidenum">
               <a:rPr lang="fr-FR" smtClean="0"/>
-              <a:t>‹N°›</a:t>
+              <a:t>‹#›</a:t>
             </a:fld>
             <a:endParaRPr lang="fr-FR"/>
           </a:p>
@@ -20152,7 +20115,7 @@
           <a:p>
             <a:fld id="{E14D0CC5-784E-4B7E-B9F4-EE71C08DA69C}" type="slidenum">
               <a:rPr lang="fr-FR" smtClean="0"/>
-              <a:t>‹N°›</a:t>
+              <a:t>‹#›</a:t>
             </a:fld>
             <a:endParaRPr lang="fr-FR"/>
           </a:p>
@@ -20528,7 +20491,7 @@
           <a:p>
             <a:fld id="{E14D0CC5-784E-4B7E-B9F4-EE71C08DA69C}" type="slidenum">
               <a:rPr lang="fr-FR" smtClean="0"/>
-              <a:t>‹N°›</a:t>
+              <a:t>‹#›</a:t>
             </a:fld>
             <a:endParaRPr lang="fr-FR"/>
           </a:p>
@@ -21051,7 +21014,7 @@
           <a:p>
             <a:fld id="{E14D0CC5-784E-4B7E-B9F4-EE71C08DA69C}" type="slidenum">
               <a:rPr lang="fr-FR" smtClean="0"/>
-              <a:t>‹N°›</a:t>
+              <a:t>‹#›</a:t>
             </a:fld>
             <a:endParaRPr lang="fr-FR"/>
           </a:p>
@@ -21262,7 +21225,7 @@
           <a:p>
             <a:fld id="{E14D0CC5-784E-4B7E-B9F4-EE71C08DA69C}" type="slidenum">
               <a:rPr lang="fr-FR" smtClean="0"/>
-              <a:t>‹N°›</a:t>
+              <a:t>‹#›</a:t>
             </a:fld>
             <a:endParaRPr lang="fr-FR"/>
           </a:p>
@@ -21930,7 +21893,7 @@
             <a:fld id="{E14D0CC5-784E-4B7E-B9F4-EE71C08DA69C}" type="slidenum">
               <a:rPr lang="fr-FR" smtClean="0"/>
               <a:pPr/>
-              <a:t>‹N°›</a:t>
+              <a:t>‹#›</a:t>
             </a:fld>
             <a:endParaRPr lang="fr-FR"/>
           </a:p>
@@ -22536,6 +22499,2234 @@
       </p:sp>
       <p:sp>
         <p:nvSpPr>
+          <p:cNvPr id="9" name="Text Placeholder 8">
+            <a:extLst>
+              <a:ext uri="{FF2B5EF4-FFF2-40B4-BE49-F238E27FC236}">
+                <a16:creationId xmlns:a16="http://schemas.microsoft.com/office/drawing/2014/main" id="{297AE6FE-5EE5-CA1C-4DD0-B67C6A19747A}"/>
+              </a:ext>
+            </a:extLst>
+          </p:cNvPr>
+          <p:cNvSpPr>
+            <a:spLocks noGrp="1"/>
+          </p:cNvSpPr>
+          <p:nvPr>
+            <p:ph type="body" sz="quarter" idx="19"/>
+          </p:nvPr>
+        </p:nvSpPr>
+        <p:spPr>
+          <a:xfrm>
+            <a:off x="838200" y="1089499"/>
+            <a:ext cx="7047271" cy="1638642"/>
+          </a:xfrm>
+          <a:prstGeom prst="roundRect">
+            <a:avLst>
+              <a:gd name="adj" fmla="val 11863"/>
+            </a:avLst>
+          </a:prstGeom>
+        </p:spPr>
+        <p:txBody>
+          <a:bodyPr/>
+          <a:lstStyle/>
+          <a:p>
+            <a:pPr marL="72000" indent="0" algn="ctr">
+              <a:spcBef>
+                <a:spcPts val="300"/>
+              </a:spcBef>
+              <a:buNone/>
+            </a:pPr>
+            <a:r>
+              <a:rPr lang="fr-FR" dirty="0"/>
+              <a:t>Stratégie de </a:t>
+            </a:r>
+            <a:r>
+              <a:rPr lang="fr-FR" dirty="0" err="1"/>
+              <a:t>sync</a:t>
+            </a:r>
+            <a:r>
+              <a:rPr lang="fr-FR" dirty="0"/>
+              <a:t> App-Api</a:t>
+            </a:r>
+          </a:p>
+          <a:p>
+            <a:pPr marL="360000" lvl="1" indent="0">
+              <a:spcBef>
+                <a:spcPts val="300"/>
+              </a:spcBef>
+              <a:buNone/>
+            </a:pPr>
+            <a:r>
+              <a:rPr lang="fr-FR" dirty="0">
+                <a:ea typeface="+mn-lt"/>
+                <a:cs typeface="+mn-lt"/>
+              </a:rPr>
+              <a:t>Optimiste. </a:t>
+            </a:r>
+            <a:r>
+              <a:rPr lang="fr-FR" b="0" dirty="0">
+                <a:ea typeface="+mn-lt"/>
+                <a:cs typeface="+mn-lt"/>
+              </a:rPr>
+              <a:t>Maj Ui avant rep Api</a:t>
+            </a:r>
+          </a:p>
+          <a:p>
+            <a:pPr marL="504000" lvl="1" indent="-144000">
+              <a:spcBef>
+                <a:spcPts val="300"/>
+              </a:spcBef>
+            </a:pPr>
+            <a:r>
+              <a:rPr lang="fr-FR" dirty="0">
+                <a:solidFill>
+                  <a:schemeClr val="tx2"/>
+                </a:solidFill>
+                <a:ea typeface="+mn-lt"/>
+                <a:cs typeface="+mn-lt"/>
+              </a:rPr>
+              <a:t>+ Sur. </a:t>
+            </a:r>
+            <a:r>
+              <a:rPr lang="fr-FR" b="0" dirty="0">
+                <a:ea typeface="+mn-lt"/>
+                <a:cs typeface="+mn-lt"/>
+              </a:rPr>
+              <a:t>Maj Ui quand Api a répondu</a:t>
+            </a:r>
+          </a:p>
+          <a:p>
+            <a:pPr marL="504000" lvl="1" indent="-144000">
+              <a:spcBef>
+                <a:spcPts val="300"/>
+              </a:spcBef>
+            </a:pPr>
+            <a:r>
+              <a:rPr lang="fr-FR" b="0" dirty="0">
+                <a:solidFill>
+                  <a:schemeClr val="tx2"/>
+                </a:solidFill>
+                <a:ea typeface="+mn-lt"/>
+                <a:cs typeface="+mn-lt"/>
+              </a:rPr>
+              <a:t>Choisir selon la sensibilité de l’info (coordonnée fusée vs nom user)</a:t>
+            </a:r>
+            <a:endParaRPr lang="en-US" b="0" dirty="0">
+              <a:solidFill>
+                <a:schemeClr val="tx2"/>
+              </a:solidFill>
+              <a:ea typeface="+mn-lt"/>
+              <a:cs typeface="+mn-lt"/>
+            </a:endParaRPr>
+          </a:p>
+          <a:p>
+            <a:pPr marL="0" indent="0">
+              <a:buNone/>
+            </a:pPr>
+            <a:endParaRPr lang="en-US" dirty="0"/>
+          </a:p>
+        </p:txBody>
+      </p:sp>
+      <p:sp>
+        <p:nvSpPr>
+          <p:cNvPr id="7" name="Espace réservé du texte 6">
+            <a:extLst>
+              <a:ext uri="{FF2B5EF4-FFF2-40B4-BE49-F238E27FC236}">
+                <a16:creationId xmlns:a16="http://schemas.microsoft.com/office/drawing/2014/main" id="{BC9C685F-33E7-44F5-9E08-33C92172C97D}"/>
+              </a:ext>
+            </a:extLst>
+          </p:cNvPr>
+          <p:cNvSpPr>
+            <a:spLocks noGrp="1"/>
+          </p:cNvSpPr>
+          <p:nvPr>
+            <p:ph type="body" sz="quarter" idx="16"/>
+          </p:nvPr>
+        </p:nvSpPr>
+        <p:spPr/>
+        <p:txBody>
+          <a:bodyPr/>
+          <a:lstStyle/>
+          <a:p>
+            <a:r>
+              <a:rPr lang="fr-FR" dirty="0">
+                <a:latin typeface="Arial"/>
+                <a:cs typeface="Arial"/>
+              </a:rPr>
+              <a:t>Components</a:t>
+            </a:r>
+            <a:endParaRPr lang="fr-FR" dirty="0"/>
+          </a:p>
+        </p:txBody>
+      </p:sp>
+      <p:sp>
+        <p:nvSpPr>
+          <p:cNvPr id="2" name="Titre 1">
+            <a:extLst>
+              <a:ext uri="{FF2B5EF4-FFF2-40B4-BE49-F238E27FC236}">
+                <a16:creationId xmlns:a16="http://schemas.microsoft.com/office/drawing/2014/main" id="{81B4020D-2DE6-4B6C-822C-676A9E68ECFA}"/>
+              </a:ext>
+            </a:extLst>
+          </p:cNvPr>
+          <p:cNvSpPr>
+            <a:spLocks noGrp="1"/>
+          </p:cNvSpPr>
+          <p:nvPr>
+            <p:ph type="title"/>
+          </p:nvPr>
+        </p:nvSpPr>
+        <p:spPr/>
+        <p:txBody>
+          <a:bodyPr/>
+          <a:lstStyle/>
+          <a:p>
+            <a:r>
+              <a:rPr lang="fr-FR" dirty="0"/>
+              <a:t>App &amp; Api | Commun</a:t>
+            </a:r>
+            <a:endParaRPr lang="fr-LU" dirty="0"/>
+          </a:p>
+        </p:txBody>
+      </p:sp>
+      <p:sp>
+        <p:nvSpPr>
+          <p:cNvPr id="14" name="Espace réservé du pied de page 5">
+            <a:extLst>
+              <a:ext uri="{FF2B5EF4-FFF2-40B4-BE49-F238E27FC236}">
+                <a16:creationId xmlns:a16="http://schemas.microsoft.com/office/drawing/2014/main" id="{70578D5F-6465-4780-BC67-4A5616A81F4F}"/>
+              </a:ext>
+            </a:extLst>
+          </p:cNvPr>
+          <p:cNvSpPr>
+            <a:spLocks noGrp="1"/>
+          </p:cNvSpPr>
+          <p:nvPr>
+            <p:ph type="ftr" sz="quarter" idx="3"/>
+          </p:nvPr>
+        </p:nvSpPr>
+        <p:spPr>
+          <a:prstGeom prst="roundRect">
+            <a:avLst>
+              <a:gd name="adj" fmla="val 33687"/>
+            </a:avLst>
+          </a:prstGeom>
+          <a:ln w="19050">
+            <a:solidFill>
+              <a:schemeClr val="tx1"/>
+            </a:solidFill>
+          </a:ln>
+        </p:spPr>
+        <p:txBody>
+          <a:bodyPr vert="horz" lIns="91440" tIns="45720" rIns="91440" bIns="45720" rtlCol="0" anchor="ctr"/>
+          <a:lstStyle>
+            <a:lvl1pPr algn="ctr">
+              <a:defRPr lang="fr-FR" sz="1400" b="0" kern="1200" dirty="0" err="1">
+                <a:solidFill>
+                  <a:schemeClr val="tx2"/>
+                </a:solidFill>
+                <a:latin typeface="+mn-lt"/>
+                <a:ea typeface="+mn-ea"/>
+                <a:cs typeface="+mn-cs"/>
+              </a:defRPr>
+            </a:lvl1pPr>
+          </a:lstStyle>
+          <a:p>
+            <a:r>
+              <a:rPr lang="fr-LU" dirty="0"/>
+              <a:t>Unlocked By | K</a:t>
+            </a:r>
+            <a:endParaRPr lang="fr-FR" dirty="0"/>
+          </a:p>
+        </p:txBody>
+      </p:sp>
+      <p:sp>
+        <p:nvSpPr>
+          <p:cNvPr id="4" name="Text Placeholder 8">
+            <a:extLst>
+              <a:ext uri="{FF2B5EF4-FFF2-40B4-BE49-F238E27FC236}">
+                <a16:creationId xmlns:a16="http://schemas.microsoft.com/office/drawing/2014/main" id="{9E7F5667-2B5E-8238-34C4-F2DF22D4244A}"/>
+              </a:ext>
+            </a:extLst>
+          </p:cNvPr>
+          <p:cNvSpPr txBox="1">
+            <a:spLocks/>
+          </p:cNvSpPr>
+          <p:nvPr/>
+        </p:nvSpPr>
+        <p:spPr>
+          <a:xfrm>
+            <a:off x="838199" y="2877290"/>
+            <a:ext cx="3527324" cy="1441767"/>
+          </a:xfrm>
+          <a:prstGeom prst="roundRect">
+            <a:avLst>
+              <a:gd name="adj" fmla="val 12529"/>
+            </a:avLst>
+          </a:prstGeom>
+          <a:ln w="15875">
+            <a:solidFill>
+              <a:schemeClr val="accent1"/>
+            </a:solidFill>
+          </a:ln>
+        </p:spPr>
+        <p:txBody>
+          <a:bodyPr vert="horz" lIns="0" tIns="0" rIns="0" bIns="0" rtlCol="0">
+            <a:noAutofit/>
+          </a:bodyPr>
+          <a:lstStyle>
+            <a:lvl1pPr marL="360000" indent="-360000" algn="l" defTabSz="914400" rtl="0" eaLnBrk="1" latinLnBrk="0" hangingPunct="1">
+              <a:lnSpc>
+                <a:spcPct val="90000"/>
+              </a:lnSpc>
+              <a:spcBef>
+                <a:spcPts val="1000"/>
+              </a:spcBef>
+              <a:buFont typeface="Arial" panose="020B0604020202020204" pitchFamily="34" charset="0"/>
+              <a:buChar char="•"/>
+              <a:defRPr sz="2000" b="1" kern="1200">
+                <a:solidFill>
+                  <a:schemeClr val="tx1"/>
+                </a:solidFill>
+                <a:latin typeface="+mn-lt"/>
+                <a:ea typeface="+mn-ea"/>
+                <a:cs typeface="+mn-cs"/>
+              </a:defRPr>
+            </a:lvl1pPr>
+            <a:lvl2pPr marL="648000" indent="-360000" algn="l" defTabSz="914400" rtl="0" eaLnBrk="1" latinLnBrk="0" hangingPunct="1">
+              <a:lnSpc>
+                <a:spcPct val="90000"/>
+              </a:lnSpc>
+              <a:spcBef>
+                <a:spcPts val="1200"/>
+              </a:spcBef>
+              <a:buFont typeface="Arial" panose="020B0604020202020204" pitchFamily="34" charset="0"/>
+              <a:buChar char="•"/>
+              <a:defRPr sz="1800" b="1" kern="1200">
+                <a:solidFill>
+                  <a:schemeClr val="tx2"/>
+                </a:solidFill>
+                <a:latin typeface="+mn-lt"/>
+                <a:ea typeface="+mn-ea"/>
+                <a:cs typeface="+mn-cs"/>
+              </a:defRPr>
+            </a:lvl2pPr>
+            <a:lvl3pPr marL="648000" indent="-360000" algn="l" defTabSz="914400" rtl="0" eaLnBrk="1" latinLnBrk="0" hangingPunct="1">
+              <a:lnSpc>
+                <a:spcPct val="90000"/>
+              </a:lnSpc>
+              <a:spcBef>
+                <a:spcPts val="1200"/>
+              </a:spcBef>
+              <a:buFont typeface="Arial" panose="020B0604020202020204" pitchFamily="34" charset="0"/>
+              <a:buChar char="•"/>
+              <a:defRPr lang="fr-FR" sz="1400" b="1" kern="1200" dirty="0">
+                <a:solidFill>
+                  <a:schemeClr val="bg1">
+                    <a:lumMod val="65000"/>
+                  </a:schemeClr>
+                </a:solidFill>
+                <a:latin typeface="+mn-lt"/>
+                <a:ea typeface="+mn-lt"/>
+                <a:cs typeface="+mn-lt"/>
+              </a:defRPr>
+            </a:lvl3pPr>
+            <a:lvl4pPr marL="720000" indent="-270000" algn="l" defTabSz="914400" rtl="0" eaLnBrk="1" latinLnBrk="0" hangingPunct="1">
+              <a:lnSpc>
+                <a:spcPct val="90000"/>
+              </a:lnSpc>
+              <a:spcBef>
+                <a:spcPts val="1000"/>
+              </a:spcBef>
+              <a:buFont typeface="Arial" panose="020B0604020202020204" pitchFamily="34" charset="0"/>
+              <a:buChar char="•"/>
+              <a:defRPr sz="1600" kern="1200">
+                <a:solidFill>
+                  <a:schemeClr val="tx2"/>
+                </a:solidFill>
+                <a:latin typeface="+mn-lt"/>
+                <a:ea typeface="+mn-ea"/>
+                <a:cs typeface="+mn-cs"/>
+              </a:defRPr>
+            </a:lvl4pPr>
+            <a:lvl5pPr marL="630000" indent="-270000" algn="l" defTabSz="914400" rtl="0" eaLnBrk="1" latinLnBrk="0" hangingPunct="1">
+              <a:lnSpc>
+                <a:spcPct val="90000"/>
+              </a:lnSpc>
+              <a:spcBef>
+                <a:spcPts val="1000"/>
+              </a:spcBef>
+              <a:buFont typeface="Arial" panose="020B0604020202020204" pitchFamily="34" charset="0"/>
+              <a:buChar char="•"/>
+              <a:defRPr sz="1600" kern="1200">
+                <a:solidFill>
+                  <a:schemeClr val="tx2"/>
+                </a:solidFill>
+                <a:latin typeface="+mn-lt"/>
+                <a:ea typeface="+mn-ea"/>
+                <a:cs typeface="+mn-cs"/>
+              </a:defRPr>
+            </a:lvl5pPr>
+            <a:lvl6pPr marL="2514600" indent="-228600" algn="l" defTabSz="914400" rtl="0" eaLnBrk="1" latinLnBrk="0" hangingPunct="1">
+              <a:lnSpc>
+                <a:spcPct val="90000"/>
+              </a:lnSpc>
+              <a:spcBef>
+                <a:spcPts val="500"/>
+              </a:spcBef>
+              <a:buFont typeface="Arial" panose="020B0604020202020204" pitchFamily="34" charset="0"/>
+              <a:buChar char="•"/>
+              <a:defRPr sz="1800" kern="1200">
+                <a:solidFill>
+                  <a:schemeClr val="tx1"/>
+                </a:solidFill>
+                <a:latin typeface="+mn-lt"/>
+                <a:ea typeface="+mn-ea"/>
+                <a:cs typeface="+mn-cs"/>
+              </a:defRPr>
+            </a:lvl6pPr>
+            <a:lvl7pPr marL="2971800" indent="-228600" algn="l" defTabSz="914400" rtl="0" eaLnBrk="1" latinLnBrk="0" hangingPunct="1">
+              <a:lnSpc>
+                <a:spcPct val="90000"/>
+              </a:lnSpc>
+              <a:spcBef>
+                <a:spcPts val="500"/>
+              </a:spcBef>
+              <a:buFont typeface="Arial" panose="020B0604020202020204" pitchFamily="34" charset="0"/>
+              <a:buChar char="•"/>
+              <a:defRPr sz="1800" kern="1200">
+                <a:solidFill>
+                  <a:schemeClr val="tx1"/>
+                </a:solidFill>
+                <a:latin typeface="+mn-lt"/>
+                <a:ea typeface="+mn-ea"/>
+                <a:cs typeface="+mn-cs"/>
+              </a:defRPr>
+            </a:lvl7pPr>
+            <a:lvl8pPr marL="3429000" indent="-228600" algn="l" defTabSz="914400" rtl="0" eaLnBrk="1" latinLnBrk="0" hangingPunct="1">
+              <a:lnSpc>
+                <a:spcPct val="90000"/>
+              </a:lnSpc>
+              <a:spcBef>
+                <a:spcPts val="500"/>
+              </a:spcBef>
+              <a:buFont typeface="Arial" panose="020B0604020202020204" pitchFamily="34" charset="0"/>
+              <a:buChar char="•"/>
+              <a:defRPr sz="1800" kern="1200">
+                <a:solidFill>
+                  <a:schemeClr val="tx1"/>
+                </a:solidFill>
+                <a:latin typeface="+mn-lt"/>
+                <a:ea typeface="+mn-ea"/>
+                <a:cs typeface="+mn-cs"/>
+              </a:defRPr>
+            </a:lvl8pPr>
+            <a:lvl9pPr marL="3886200" indent="-228600" algn="l" defTabSz="914400" rtl="0" eaLnBrk="1" latinLnBrk="0" hangingPunct="1">
+              <a:lnSpc>
+                <a:spcPct val="90000"/>
+              </a:lnSpc>
+              <a:spcBef>
+                <a:spcPts val="500"/>
+              </a:spcBef>
+              <a:buFont typeface="Arial" panose="020B0604020202020204" pitchFamily="34" charset="0"/>
+              <a:buChar char="•"/>
+              <a:defRPr sz="1800" kern="1200">
+                <a:solidFill>
+                  <a:schemeClr val="tx1"/>
+                </a:solidFill>
+                <a:latin typeface="+mn-lt"/>
+                <a:ea typeface="+mn-ea"/>
+                <a:cs typeface="+mn-cs"/>
+              </a:defRPr>
+            </a:lvl9pPr>
+          </a:lstStyle>
+          <a:p>
+            <a:pPr marL="0" indent="0" algn="ctr">
+              <a:buFont typeface="Arial" panose="020B0604020202020204" pitchFamily="34" charset="0"/>
+              <a:buNone/>
+            </a:pPr>
+            <a:r>
+              <a:rPr lang="en-US" dirty="0"/>
+              <a:t>Environnement</a:t>
+            </a:r>
+          </a:p>
+          <a:p>
+            <a:pPr marL="0" indent="0">
+              <a:buFont typeface="Arial" panose="020B0604020202020204" pitchFamily="34" charset="0"/>
+              <a:buNone/>
+            </a:pPr>
+            <a:r>
+              <a:rPr lang="en-US" sz="1400" b="0" dirty="0">
+                <a:solidFill>
+                  <a:schemeClr val="tx2"/>
+                </a:solidFill>
+                <a:ea typeface="+mn-lt"/>
+                <a:cs typeface="+mn-lt"/>
+              </a:rPr>
+              <a:t>Les Env. Dev, Int, Acc, Prd</a:t>
+            </a:r>
+          </a:p>
+          <a:p>
+            <a:pPr marL="0" indent="0">
+              <a:buFont typeface="Arial" panose="020B0604020202020204" pitchFamily="34" charset="0"/>
+              <a:buNone/>
+            </a:pPr>
+            <a:r>
+              <a:rPr lang="en-US" sz="1400" b="0" dirty="0">
+                <a:solidFill>
+                  <a:schemeClr val="tx2"/>
+                </a:solidFill>
+                <a:ea typeface="+mn-lt"/>
+                <a:cs typeface="+mn-lt"/>
+              </a:rPr>
+              <a:t>Identifier </a:t>
+            </a:r>
+            <a:r>
+              <a:rPr lang="en-US" sz="1400" b="0" dirty="0" err="1">
+                <a:solidFill>
+                  <a:schemeClr val="tx2"/>
+                </a:solidFill>
+                <a:ea typeface="+mn-lt"/>
+                <a:cs typeface="+mn-lt"/>
+              </a:rPr>
+              <a:t>l’Env</a:t>
+            </a:r>
+            <a:r>
+              <a:rPr lang="en-US" sz="1400" b="0" dirty="0">
+                <a:solidFill>
+                  <a:schemeClr val="tx2"/>
+                </a:solidFill>
+                <a:ea typeface="+mn-lt"/>
+                <a:cs typeface="+mn-lt"/>
+              </a:rPr>
+              <a:t> </a:t>
+            </a:r>
+            <a:r>
+              <a:rPr lang="en-US" sz="1400" b="0" dirty="0" err="1">
+                <a:solidFill>
+                  <a:schemeClr val="tx2"/>
+                </a:solidFill>
+                <a:ea typeface="+mn-lt"/>
+                <a:cs typeface="+mn-lt"/>
+              </a:rPr>
+              <a:t>d’execution</a:t>
+            </a:r>
+            <a:endParaRPr lang="en-US" sz="1400" b="0" dirty="0">
+              <a:solidFill>
+                <a:schemeClr val="tx2"/>
+              </a:solidFill>
+              <a:ea typeface="+mn-lt"/>
+              <a:cs typeface="+mn-lt"/>
+            </a:endParaRPr>
+          </a:p>
+          <a:p>
+            <a:pPr marL="0" indent="0">
+              <a:buFont typeface="Arial" panose="020B0604020202020204" pitchFamily="34" charset="0"/>
+              <a:buNone/>
+            </a:pPr>
+            <a:r>
+              <a:rPr lang="en-US" sz="1400" b="0" dirty="0" err="1">
+                <a:solidFill>
+                  <a:schemeClr val="tx2"/>
+                </a:solidFill>
+                <a:ea typeface="+mn-lt"/>
+                <a:cs typeface="+mn-lt"/>
+              </a:rPr>
+              <a:t>Activer</a:t>
+            </a:r>
+            <a:r>
+              <a:rPr lang="en-US" sz="1400" b="0" dirty="0">
+                <a:solidFill>
+                  <a:schemeClr val="tx2"/>
+                </a:solidFill>
+                <a:ea typeface="+mn-lt"/>
+                <a:cs typeface="+mn-lt"/>
+              </a:rPr>
+              <a:t> un </a:t>
+            </a:r>
+            <a:r>
+              <a:rPr lang="en-US" sz="1400" b="0" dirty="0" err="1">
+                <a:solidFill>
+                  <a:schemeClr val="tx2"/>
+                </a:solidFill>
+                <a:ea typeface="+mn-lt"/>
+                <a:cs typeface="+mn-lt"/>
+              </a:rPr>
+              <a:t>traitement</a:t>
+            </a:r>
+            <a:r>
+              <a:rPr lang="en-US" sz="1400" b="0" dirty="0">
+                <a:solidFill>
+                  <a:schemeClr val="tx2"/>
+                </a:solidFill>
+                <a:ea typeface="+mn-lt"/>
+                <a:cs typeface="+mn-lt"/>
+              </a:rPr>
+              <a:t> </a:t>
+            </a:r>
+            <a:r>
+              <a:rPr lang="en-US" sz="1400" b="0" dirty="0" err="1">
+                <a:solidFill>
+                  <a:schemeClr val="tx2"/>
+                </a:solidFill>
+                <a:ea typeface="+mn-lt"/>
+                <a:cs typeface="+mn-lt"/>
+              </a:rPr>
+              <a:t>spécifique</a:t>
+            </a:r>
+            <a:r>
+              <a:rPr lang="en-US" sz="1400" b="0" dirty="0">
+                <a:solidFill>
+                  <a:schemeClr val="tx2"/>
+                </a:solidFill>
+                <a:ea typeface="+mn-lt"/>
+                <a:cs typeface="+mn-lt"/>
+              </a:rPr>
+              <a:t> </a:t>
+            </a:r>
+            <a:r>
+              <a:rPr lang="en-US" sz="1400" b="0" dirty="0" err="1">
+                <a:solidFill>
+                  <a:schemeClr val="tx2"/>
+                </a:solidFill>
+                <a:ea typeface="+mn-lt"/>
+                <a:cs typeface="+mn-lt"/>
+              </a:rPr>
+              <a:t>selon</a:t>
+            </a:r>
+            <a:r>
+              <a:rPr lang="en-US" sz="1400" b="0" dirty="0">
+                <a:solidFill>
+                  <a:schemeClr val="tx2"/>
+                </a:solidFill>
+                <a:ea typeface="+mn-lt"/>
+                <a:cs typeface="+mn-lt"/>
+              </a:rPr>
+              <a:t> </a:t>
+            </a:r>
+            <a:r>
+              <a:rPr lang="en-US" sz="1400" b="0" dirty="0" err="1">
+                <a:solidFill>
+                  <a:schemeClr val="tx2"/>
+                </a:solidFill>
+                <a:ea typeface="+mn-lt"/>
+                <a:cs typeface="+mn-lt"/>
+              </a:rPr>
+              <a:t>l’env</a:t>
+            </a:r>
+            <a:endParaRPr lang="fr-FR" sz="1400" b="0" dirty="0">
+              <a:solidFill>
+                <a:schemeClr val="tx2"/>
+              </a:solidFill>
+              <a:ea typeface="+mn-lt"/>
+              <a:cs typeface="+mn-lt"/>
+            </a:endParaRPr>
+          </a:p>
+        </p:txBody>
+      </p:sp>
+      <p:sp>
+        <p:nvSpPr>
+          <p:cNvPr id="8" name="Text Placeholder 8">
+            <a:extLst>
+              <a:ext uri="{FF2B5EF4-FFF2-40B4-BE49-F238E27FC236}">
+                <a16:creationId xmlns:a16="http://schemas.microsoft.com/office/drawing/2014/main" id="{18433FD8-548A-1799-E7E9-FBAE9585647C}"/>
+              </a:ext>
+            </a:extLst>
+          </p:cNvPr>
+          <p:cNvSpPr txBox="1">
+            <a:spLocks/>
+          </p:cNvSpPr>
+          <p:nvPr/>
+        </p:nvSpPr>
+        <p:spPr>
+          <a:xfrm>
+            <a:off x="4552336" y="2876606"/>
+            <a:ext cx="3274143" cy="3101995"/>
+          </a:xfrm>
+          <a:prstGeom prst="roundRect">
+            <a:avLst>
+              <a:gd name="adj" fmla="val 8877"/>
+            </a:avLst>
+          </a:prstGeom>
+          <a:ln w="15875">
+            <a:solidFill>
+              <a:schemeClr val="accent1"/>
+            </a:solidFill>
+          </a:ln>
+        </p:spPr>
+        <p:txBody>
+          <a:bodyPr vert="horz" lIns="0" tIns="0" rIns="0" bIns="0" rtlCol="0">
+            <a:noAutofit/>
+          </a:bodyPr>
+          <a:lstStyle>
+            <a:lvl1pPr marL="360000" indent="-360000" algn="l" defTabSz="914400" rtl="0" eaLnBrk="1" latinLnBrk="0" hangingPunct="1">
+              <a:lnSpc>
+                <a:spcPct val="90000"/>
+              </a:lnSpc>
+              <a:spcBef>
+                <a:spcPts val="1000"/>
+              </a:spcBef>
+              <a:buFont typeface="Arial" panose="020B0604020202020204" pitchFamily="34" charset="0"/>
+              <a:buChar char="•"/>
+              <a:defRPr sz="2000" b="1" kern="1200">
+                <a:solidFill>
+                  <a:schemeClr val="tx1"/>
+                </a:solidFill>
+                <a:latin typeface="+mn-lt"/>
+                <a:ea typeface="+mn-ea"/>
+                <a:cs typeface="+mn-cs"/>
+              </a:defRPr>
+            </a:lvl1pPr>
+            <a:lvl2pPr marL="648000" indent="-360000" algn="l" defTabSz="914400" rtl="0" eaLnBrk="1" latinLnBrk="0" hangingPunct="1">
+              <a:lnSpc>
+                <a:spcPct val="90000"/>
+              </a:lnSpc>
+              <a:spcBef>
+                <a:spcPts val="1200"/>
+              </a:spcBef>
+              <a:buFont typeface="Arial" panose="020B0604020202020204" pitchFamily="34" charset="0"/>
+              <a:buChar char="•"/>
+              <a:defRPr sz="1800" b="1" kern="1200">
+                <a:solidFill>
+                  <a:schemeClr val="tx2"/>
+                </a:solidFill>
+                <a:latin typeface="+mn-lt"/>
+                <a:ea typeface="+mn-ea"/>
+                <a:cs typeface="+mn-cs"/>
+              </a:defRPr>
+            </a:lvl2pPr>
+            <a:lvl3pPr marL="648000" indent="-360000" algn="l" defTabSz="914400" rtl="0" eaLnBrk="1" latinLnBrk="0" hangingPunct="1">
+              <a:lnSpc>
+                <a:spcPct val="90000"/>
+              </a:lnSpc>
+              <a:spcBef>
+                <a:spcPts val="1200"/>
+              </a:spcBef>
+              <a:buFont typeface="Arial" panose="020B0604020202020204" pitchFamily="34" charset="0"/>
+              <a:buChar char="•"/>
+              <a:defRPr lang="fr-FR" sz="1400" b="1" kern="1200" dirty="0">
+                <a:solidFill>
+                  <a:schemeClr val="bg1">
+                    <a:lumMod val="65000"/>
+                  </a:schemeClr>
+                </a:solidFill>
+                <a:latin typeface="+mn-lt"/>
+                <a:ea typeface="+mn-lt"/>
+                <a:cs typeface="+mn-lt"/>
+              </a:defRPr>
+            </a:lvl3pPr>
+            <a:lvl4pPr marL="720000" indent="-270000" algn="l" defTabSz="914400" rtl="0" eaLnBrk="1" latinLnBrk="0" hangingPunct="1">
+              <a:lnSpc>
+                <a:spcPct val="90000"/>
+              </a:lnSpc>
+              <a:spcBef>
+                <a:spcPts val="1000"/>
+              </a:spcBef>
+              <a:buFont typeface="Arial" panose="020B0604020202020204" pitchFamily="34" charset="0"/>
+              <a:buChar char="•"/>
+              <a:defRPr sz="1600" kern="1200">
+                <a:solidFill>
+                  <a:schemeClr val="tx2"/>
+                </a:solidFill>
+                <a:latin typeface="+mn-lt"/>
+                <a:ea typeface="+mn-ea"/>
+                <a:cs typeface="+mn-cs"/>
+              </a:defRPr>
+            </a:lvl4pPr>
+            <a:lvl5pPr marL="630000" indent="-270000" algn="l" defTabSz="914400" rtl="0" eaLnBrk="1" latinLnBrk="0" hangingPunct="1">
+              <a:lnSpc>
+                <a:spcPct val="90000"/>
+              </a:lnSpc>
+              <a:spcBef>
+                <a:spcPts val="1000"/>
+              </a:spcBef>
+              <a:buFont typeface="Arial" panose="020B0604020202020204" pitchFamily="34" charset="0"/>
+              <a:buChar char="•"/>
+              <a:defRPr sz="1600" kern="1200">
+                <a:solidFill>
+                  <a:schemeClr val="tx2"/>
+                </a:solidFill>
+                <a:latin typeface="+mn-lt"/>
+                <a:ea typeface="+mn-ea"/>
+                <a:cs typeface="+mn-cs"/>
+              </a:defRPr>
+            </a:lvl5pPr>
+            <a:lvl6pPr marL="2514600" indent="-228600" algn="l" defTabSz="914400" rtl="0" eaLnBrk="1" latinLnBrk="0" hangingPunct="1">
+              <a:lnSpc>
+                <a:spcPct val="90000"/>
+              </a:lnSpc>
+              <a:spcBef>
+                <a:spcPts val="500"/>
+              </a:spcBef>
+              <a:buFont typeface="Arial" panose="020B0604020202020204" pitchFamily="34" charset="0"/>
+              <a:buChar char="•"/>
+              <a:defRPr sz="1800" kern="1200">
+                <a:solidFill>
+                  <a:schemeClr val="tx1"/>
+                </a:solidFill>
+                <a:latin typeface="+mn-lt"/>
+                <a:ea typeface="+mn-ea"/>
+                <a:cs typeface="+mn-cs"/>
+              </a:defRPr>
+            </a:lvl6pPr>
+            <a:lvl7pPr marL="2971800" indent="-228600" algn="l" defTabSz="914400" rtl="0" eaLnBrk="1" latinLnBrk="0" hangingPunct="1">
+              <a:lnSpc>
+                <a:spcPct val="90000"/>
+              </a:lnSpc>
+              <a:spcBef>
+                <a:spcPts val="500"/>
+              </a:spcBef>
+              <a:buFont typeface="Arial" panose="020B0604020202020204" pitchFamily="34" charset="0"/>
+              <a:buChar char="•"/>
+              <a:defRPr sz="1800" kern="1200">
+                <a:solidFill>
+                  <a:schemeClr val="tx1"/>
+                </a:solidFill>
+                <a:latin typeface="+mn-lt"/>
+                <a:ea typeface="+mn-ea"/>
+                <a:cs typeface="+mn-cs"/>
+              </a:defRPr>
+            </a:lvl7pPr>
+            <a:lvl8pPr marL="3429000" indent="-228600" algn="l" defTabSz="914400" rtl="0" eaLnBrk="1" latinLnBrk="0" hangingPunct="1">
+              <a:lnSpc>
+                <a:spcPct val="90000"/>
+              </a:lnSpc>
+              <a:spcBef>
+                <a:spcPts val="500"/>
+              </a:spcBef>
+              <a:buFont typeface="Arial" panose="020B0604020202020204" pitchFamily="34" charset="0"/>
+              <a:buChar char="•"/>
+              <a:defRPr sz="1800" kern="1200">
+                <a:solidFill>
+                  <a:schemeClr val="tx1"/>
+                </a:solidFill>
+                <a:latin typeface="+mn-lt"/>
+                <a:ea typeface="+mn-ea"/>
+                <a:cs typeface="+mn-cs"/>
+              </a:defRPr>
+            </a:lvl8pPr>
+            <a:lvl9pPr marL="3886200" indent="-228600" algn="l" defTabSz="914400" rtl="0" eaLnBrk="1" latinLnBrk="0" hangingPunct="1">
+              <a:lnSpc>
+                <a:spcPct val="90000"/>
+              </a:lnSpc>
+              <a:spcBef>
+                <a:spcPts val="500"/>
+              </a:spcBef>
+              <a:buFont typeface="Arial" panose="020B0604020202020204" pitchFamily="34" charset="0"/>
+              <a:buChar char="•"/>
+              <a:defRPr sz="1800" kern="1200">
+                <a:solidFill>
+                  <a:schemeClr val="tx1"/>
+                </a:solidFill>
+                <a:latin typeface="+mn-lt"/>
+                <a:ea typeface="+mn-ea"/>
+                <a:cs typeface="+mn-cs"/>
+              </a:defRPr>
+            </a:lvl9pPr>
+          </a:lstStyle>
+          <a:p>
+            <a:pPr marL="0" indent="0" algn="ctr">
+              <a:buFont typeface="Arial" panose="020B0604020202020204" pitchFamily="34" charset="0"/>
+              <a:buNone/>
+            </a:pPr>
+            <a:r>
+              <a:rPr lang="en-US" dirty="0"/>
+              <a:t>Logging</a:t>
+            </a:r>
+          </a:p>
+          <a:p>
+            <a:pPr marL="0" indent="0">
+              <a:buFont typeface="Arial" panose="020B0604020202020204" pitchFamily="34" charset="0"/>
+              <a:buNone/>
+            </a:pPr>
+            <a:r>
+              <a:rPr lang="en-US" sz="1400" b="0" dirty="0" err="1">
+                <a:solidFill>
+                  <a:schemeClr val="tx2"/>
+                </a:solidFill>
+                <a:ea typeface="+mn-lt"/>
+                <a:cs typeface="+mn-lt"/>
+              </a:rPr>
+              <a:t>Ecrire</a:t>
+            </a:r>
+            <a:r>
+              <a:rPr lang="en-US" sz="1400" b="0" dirty="0">
+                <a:solidFill>
+                  <a:schemeClr val="tx2"/>
+                </a:solidFill>
+                <a:ea typeface="+mn-lt"/>
+                <a:cs typeface="+mn-lt"/>
+              </a:rPr>
+              <a:t> </a:t>
+            </a:r>
+            <a:r>
+              <a:rPr lang="en-US" sz="1400" b="0" dirty="0" err="1">
+                <a:solidFill>
+                  <a:schemeClr val="tx2"/>
+                </a:solidFill>
+                <a:ea typeface="+mn-lt"/>
+                <a:cs typeface="+mn-lt"/>
+              </a:rPr>
+              <a:t>l’execution</a:t>
+            </a:r>
+            <a:r>
+              <a:rPr lang="en-US" sz="1400" b="0" dirty="0">
+                <a:solidFill>
+                  <a:schemeClr val="tx2"/>
+                </a:solidFill>
+                <a:ea typeface="+mn-lt"/>
+                <a:cs typeface="+mn-lt"/>
+              </a:rPr>
+              <a:t> du code </a:t>
+            </a:r>
+            <a:r>
+              <a:rPr lang="en-US" sz="1400" b="0" dirty="0" err="1">
+                <a:solidFill>
+                  <a:schemeClr val="tx2"/>
+                </a:solidFill>
+                <a:ea typeface="+mn-lt"/>
+                <a:cs typeface="+mn-lt"/>
+              </a:rPr>
+              <a:t>permettant</a:t>
+            </a:r>
+            <a:r>
+              <a:rPr lang="en-US" sz="1400" b="0" dirty="0">
+                <a:solidFill>
+                  <a:schemeClr val="tx2"/>
+                </a:solidFill>
+                <a:ea typeface="+mn-lt"/>
+                <a:cs typeface="+mn-lt"/>
+              </a:rPr>
+              <a:t> </a:t>
+            </a:r>
+            <a:r>
+              <a:rPr lang="en-US" sz="1400" b="0" dirty="0" err="1">
+                <a:solidFill>
+                  <a:schemeClr val="tx2"/>
+                </a:solidFill>
+                <a:ea typeface="+mn-lt"/>
+                <a:cs typeface="+mn-lt"/>
+              </a:rPr>
+              <a:t>une</a:t>
+            </a:r>
+            <a:r>
+              <a:rPr lang="en-US" sz="1400" b="0" dirty="0">
+                <a:solidFill>
+                  <a:schemeClr val="tx2"/>
+                </a:solidFill>
+                <a:ea typeface="+mn-lt"/>
+                <a:cs typeface="+mn-lt"/>
+              </a:rPr>
+              <a:t> </a:t>
+            </a:r>
+            <a:r>
+              <a:rPr lang="en-US" sz="1400" b="0" dirty="0" err="1">
+                <a:solidFill>
+                  <a:schemeClr val="tx2"/>
+                </a:solidFill>
+                <a:ea typeface="+mn-lt"/>
+                <a:cs typeface="+mn-lt"/>
+              </a:rPr>
+              <a:t>alalyse</a:t>
+            </a:r>
+            <a:r>
+              <a:rPr lang="en-US" sz="1400" b="0" dirty="0">
+                <a:solidFill>
+                  <a:schemeClr val="tx2"/>
+                </a:solidFill>
+                <a:ea typeface="+mn-lt"/>
+                <a:cs typeface="+mn-lt"/>
+              </a:rPr>
+              <a:t> </a:t>
+            </a:r>
+            <a:r>
+              <a:rPr lang="en-US" sz="1400" b="0" dirty="0" err="1">
+                <a:solidFill>
+                  <a:schemeClr val="tx2"/>
+                </a:solidFill>
+                <a:ea typeface="+mn-lt"/>
+                <a:cs typeface="+mn-lt"/>
+              </a:rPr>
+              <a:t>en</a:t>
+            </a:r>
+            <a:r>
+              <a:rPr lang="en-US" sz="1400" b="0" dirty="0">
+                <a:solidFill>
+                  <a:schemeClr val="tx2"/>
+                </a:solidFill>
+                <a:ea typeface="+mn-lt"/>
+                <a:cs typeface="+mn-lt"/>
+              </a:rPr>
+              <a:t> </a:t>
+            </a:r>
+            <a:r>
+              <a:rPr lang="en-US" sz="1400" b="0" dirty="0" err="1">
+                <a:solidFill>
+                  <a:schemeClr val="tx2"/>
+                </a:solidFill>
+                <a:ea typeface="+mn-lt"/>
+                <a:cs typeface="+mn-lt"/>
+              </a:rPr>
+              <a:t>cas</a:t>
+            </a:r>
+            <a:r>
+              <a:rPr lang="en-US" sz="1400" b="0" dirty="0">
+                <a:solidFill>
+                  <a:schemeClr val="tx2"/>
+                </a:solidFill>
+                <a:ea typeface="+mn-lt"/>
+                <a:cs typeface="+mn-lt"/>
+              </a:rPr>
+              <a:t> de </a:t>
+            </a:r>
+            <a:r>
+              <a:rPr lang="en-US" sz="1400" b="0" dirty="0" err="1">
+                <a:solidFill>
+                  <a:schemeClr val="tx2"/>
+                </a:solidFill>
+                <a:ea typeface="+mn-lt"/>
+                <a:cs typeface="+mn-lt"/>
+              </a:rPr>
+              <a:t>dysfonctionnement</a:t>
+            </a:r>
+            <a:endParaRPr lang="en-US" sz="1400" b="0" dirty="0">
+              <a:solidFill>
+                <a:schemeClr val="tx2"/>
+              </a:solidFill>
+              <a:ea typeface="+mn-lt"/>
+              <a:cs typeface="+mn-lt"/>
+            </a:endParaRPr>
+          </a:p>
+          <a:p>
+            <a:pPr marL="0" indent="0">
+              <a:buFont typeface="Arial" panose="020B0604020202020204" pitchFamily="34" charset="0"/>
+              <a:buNone/>
+            </a:pPr>
+            <a:r>
+              <a:rPr lang="en-US" sz="1400" b="0" dirty="0" err="1">
+                <a:solidFill>
+                  <a:schemeClr val="tx2"/>
+                </a:solidFill>
+                <a:ea typeface="+mn-lt"/>
+                <a:cs typeface="+mn-lt"/>
+              </a:rPr>
+              <a:t>Gérer</a:t>
+            </a:r>
+            <a:r>
+              <a:rPr lang="en-US" sz="1400" b="0" dirty="0">
+                <a:solidFill>
+                  <a:schemeClr val="tx2"/>
+                </a:solidFill>
+                <a:ea typeface="+mn-lt"/>
+                <a:cs typeface="+mn-lt"/>
+              </a:rPr>
+              <a:t> des </a:t>
+            </a:r>
+            <a:r>
+              <a:rPr lang="en-US" sz="1400" b="0" dirty="0" err="1">
+                <a:solidFill>
+                  <a:schemeClr val="tx2"/>
+                </a:solidFill>
+                <a:ea typeface="+mn-lt"/>
+                <a:cs typeface="+mn-lt"/>
+              </a:rPr>
+              <a:t>niveaux</a:t>
+            </a:r>
+            <a:r>
+              <a:rPr lang="en-US" sz="1400" b="0" dirty="0">
+                <a:solidFill>
+                  <a:schemeClr val="tx2"/>
+                </a:solidFill>
+                <a:ea typeface="+mn-lt"/>
+                <a:cs typeface="+mn-lt"/>
+              </a:rPr>
+              <a:t> de log</a:t>
+            </a:r>
+            <a:r>
+              <a:rPr lang="fr-FR" sz="1400" b="0" dirty="0">
+                <a:solidFill>
+                  <a:schemeClr val="tx2"/>
+                </a:solidFill>
+                <a:ea typeface="+mn-lt"/>
+                <a:cs typeface="+mn-lt"/>
+              </a:rPr>
+              <a:t>, plusieurs supports d’écriture (</a:t>
+            </a:r>
+            <a:r>
+              <a:rPr lang="fr-FR" sz="1400" b="0" dirty="0" err="1">
+                <a:solidFill>
+                  <a:schemeClr val="tx2"/>
+                </a:solidFill>
+                <a:ea typeface="+mn-lt"/>
+                <a:cs typeface="+mn-lt"/>
+              </a:rPr>
+              <a:t>Kibana</a:t>
+            </a:r>
+            <a:r>
+              <a:rPr lang="fr-FR" sz="1400" b="0" dirty="0">
+                <a:solidFill>
+                  <a:schemeClr val="tx2"/>
+                </a:solidFill>
+                <a:ea typeface="+mn-lt"/>
+                <a:cs typeface="+mn-lt"/>
+              </a:rPr>
+              <a:t>, File, Console)</a:t>
+            </a:r>
+            <a:endParaRPr lang="en-US" sz="1400" b="0" dirty="0">
+              <a:solidFill>
+                <a:schemeClr val="tx2"/>
+              </a:solidFill>
+              <a:ea typeface="+mn-lt"/>
+              <a:cs typeface="+mn-lt"/>
+            </a:endParaRPr>
+          </a:p>
+        </p:txBody>
+      </p:sp>
+      <p:sp>
+        <p:nvSpPr>
+          <p:cNvPr id="10" name="Text Placeholder 8">
+            <a:extLst>
+              <a:ext uri="{FF2B5EF4-FFF2-40B4-BE49-F238E27FC236}">
+                <a16:creationId xmlns:a16="http://schemas.microsoft.com/office/drawing/2014/main" id="{EAFD2BC4-3D21-EE08-C10D-A69D377131AA}"/>
+              </a:ext>
+            </a:extLst>
+          </p:cNvPr>
+          <p:cNvSpPr txBox="1">
+            <a:spLocks/>
+          </p:cNvSpPr>
+          <p:nvPr/>
+        </p:nvSpPr>
+        <p:spPr>
+          <a:xfrm>
+            <a:off x="838200" y="4473678"/>
+            <a:ext cx="3527324" cy="1504923"/>
+          </a:xfrm>
+          <a:prstGeom prst="roundRect">
+            <a:avLst>
+              <a:gd name="adj" fmla="val 13315"/>
+            </a:avLst>
+          </a:prstGeom>
+          <a:ln w="15875">
+            <a:solidFill>
+              <a:schemeClr val="accent1"/>
+            </a:solidFill>
+          </a:ln>
+        </p:spPr>
+        <p:txBody>
+          <a:bodyPr vert="horz" lIns="0" tIns="0" rIns="0" bIns="0" rtlCol="0">
+            <a:noAutofit/>
+          </a:bodyPr>
+          <a:lstStyle>
+            <a:lvl1pPr marL="360000" indent="-360000" algn="l" defTabSz="914400" rtl="0" eaLnBrk="1" latinLnBrk="0" hangingPunct="1">
+              <a:lnSpc>
+                <a:spcPct val="90000"/>
+              </a:lnSpc>
+              <a:spcBef>
+                <a:spcPts val="1000"/>
+              </a:spcBef>
+              <a:buFont typeface="Arial" panose="020B0604020202020204" pitchFamily="34" charset="0"/>
+              <a:buChar char="•"/>
+              <a:defRPr sz="2000" b="1" kern="1200">
+                <a:solidFill>
+                  <a:schemeClr val="tx1"/>
+                </a:solidFill>
+                <a:latin typeface="+mn-lt"/>
+                <a:ea typeface="+mn-ea"/>
+                <a:cs typeface="+mn-cs"/>
+              </a:defRPr>
+            </a:lvl1pPr>
+            <a:lvl2pPr marL="648000" indent="-360000" algn="l" defTabSz="914400" rtl="0" eaLnBrk="1" latinLnBrk="0" hangingPunct="1">
+              <a:lnSpc>
+                <a:spcPct val="90000"/>
+              </a:lnSpc>
+              <a:spcBef>
+                <a:spcPts val="1200"/>
+              </a:spcBef>
+              <a:buFont typeface="Arial" panose="020B0604020202020204" pitchFamily="34" charset="0"/>
+              <a:buChar char="•"/>
+              <a:defRPr sz="1800" b="1" kern="1200">
+                <a:solidFill>
+                  <a:schemeClr val="tx2"/>
+                </a:solidFill>
+                <a:latin typeface="+mn-lt"/>
+                <a:ea typeface="+mn-ea"/>
+                <a:cs typeface="+mn-cs"/>
+              </a:defRPr>
+            </a:lvl2pPr>
+            <a:lvl3pPr marL="648000" indent="-360000" algn="l" defTabSz="914400" rtl="0" eaLnBrk="1" latinLnBrk="0" hangingPunct="1">
+              <a:lnSpc>
+                <a:spcPct val="90000"/>
+              </a:lnSpc>
+              <a:spcBef>
+                <a:spcPts val="1200"/>
+              </a:spcBef>
+              <a:buFont typeface="Arial" panose="020B0604020202020204" pitchFamily="34" charset="0"/>
+              <a:buChar char="•"/>
+              <a:defRPr lang="fr-FR" sz="1400" b="1" kern="1200" dirty="0">
+                <a:solidFill>
+                  <a:schemeClr val="bg1">
+                    <a:lumMod val="65000"/>
+                  </a:schemeClr>
+                </a:solidFill>
+                <a:latin typeface="+mn-lt"/>
+                <a:ea typeface="+mn-lt"/>
+                <a:cs typeface="+mn-lt"/>
+              </a:defRPr>
+            </a:lvl3pPr>
+            <a:lvl4pPr marL="720000" indent="-270000" algn="l" defTabSz="914400" rtl="0" eaLnBrk="1" latinLnBrk="0" hangingPunct="1">
+              <a:lnSpc>
+                <a:spcPct val="90000"/>
+              </a:lnSpc>
+              <a:spcBef>
+                <a:spcPts val="1000"/>
+              </a:spcBef>
+              <a:buFont typeface="Arial" panose="020B0604020202020204" pitchFamily="34" charset="0"/>
+              <a:buChar char="•"/>
+              <a:defRPr sz="1600" kern="1200">
+                <a:solidFill>
+                  <a:schemeClr val="tx2"/>
+                </a:solidFill>
+                <a:latin typeface="+mn-lt"/>
+                <a:ea typeface="+mn-ea"/>
+                <a:cs typeface="+mn-cs"/>
+              </a:defRPr>
+            </a:lvl4pPr>
+            <a:lvl5pPr marL="630000" indent="-270000" algn="l" defTabSz="914400" rtl="0" eaLnBrk="1" latinLnBrk="0" hangingPunct="1">
+              <a:lnSpc>
+                <a:spcPct val="90000"/>
+              </a:lnSpc>
+              <a:spcBef>
+                <a:spcPts val="1000"/>
+              </a:spcBef>
+              <a:buFont typeface="Arial" panose="020B0604020202020204" pitchFamily="34" charset="0"/>
+              <a:buChar char="•"/>
+              <a:defRPr sz="1600" kern="1200">
+                <a:solidFill>
+                  <a:schemeClr val="tx2"/>
+                </a:solidFill>
+                <a:latin typeface="+mn-lt"/>
+                <a:ea typeface="+mn-ea"/>
+                <a:cs typeface="+mn-cs"/>
+              </a:defRPr>
+            </a:lvl5pPr>
+            <a:lvl6pPr marL="2514600" indent="-228600" algn="l" defTabSz="914400" rtl="0" eaLnBrk="1" latinLnBrk="0" hangingPunct="1">
+              <a:lnSpc>
+                <a:spcPct val="90000"/>
+              </a:lnSpc>
+              <a:spcBef>
+                <a:spcPts val="500"/>
+              </a:spcBef>
+              <a:buFont typeface="Arial" panose="020B0604020202020204" pitchFamily="34" charset="0"/>
+              <a:buChar char="•"/>
+              <a:defRPr sz="1800" kern="1200">
+                <a:solidFill>
+                  <a:schemeClr val="tx1"/>
+                </a:solidFill>
+                <a:latin typeface="+mn-lt"/>
+                <a:ea typeface="+mn-ea"/>
+                <a:cs typeface="+mn-cs"/>
+              </a:defRPr>
+            </a:lvl6pPr>
+            <a:lvl7pPr marL="2971800" indent="-228600" algn="l" defTabSz="914400" rtl="0" eaLnBrk="1" latinLnBrk="0" hangingPunct="1">
+              <a:lnSpc>
+                <a:spcPct val="90000"/>
+              </a:lnSpc>
+              <a:spcBef>
+                <a:spcPts val="500"/>
+              </a:spcBef>
+              <a:buFont typeface="Arial" panose="020B0604020202020204" pitchFamily="34" charset="0"/>
+              <a:buChar char="•"/>
+              <a:defRPr sz="1800" kern="1200">
+                <a:solidFill>
+                  <a:schemeClr val="tx1"/>
+                </a:solidFill>
+                <a:latin typeface="+mn-lt"/>
+                <a:ea typeface="+mn-ea"/>
+                <a:cs typeface="+mn-cs"/>
+              </a:defRPr>
+            </a:lvl7pPr>
+            <a:lvl8pPr marL="3429000" indent="-228600" algn="l" defTabSz="914400" rtl="0" eaLnBrk="1" latinLnBrk="0" hangingPunct="1">
+              <a:lnSpc>
+                <a:spcPct val="90000"/>
+              </a:lnSpc>
+              <a:spcBef>
+                <a:spcPts val="500"/>
+              </a:spcBef>
+              <a:buFont typeface="Arial" panose="020B0604020202020204" pitchFamily="34" charset="0"/>
+              <a:buChar char="•"/>
+              <a:defRPr sz="1800" kern="1200">
+                <a:solidFill>
+                  <a:schemeClr val="tx1"/>
+                </a:solidFill>
+                <a:latin typeface="+mn-lt"/>
+                <a:ea typeface="+mn-ea"/>
+                <a:cs typeface="+mn-cs"/>
+              </a:defRPr>
+            </a:lvl8pPr>
+            <a:lvl9pPr marL="3886200" indent="-228600" algn="l" defTabSz="914400" rtl="0" eaLnBrk="1" latinLnBrk="0" hangingPunct="1">
+              <a:lnSpc>
+                <a:spcPct val="90000"/>
+              </a:lnSpc>
+              <a:spcBef>
+                <a:spcPts val="500"/>
+              </a:spcBef>
+              <a:buFont typeface="Arial" panose="020B0604020202020204" pitchFamily="34" charset="0"/>
+              <a:buChar char="•"/>
+              <a:defRPr sz="1800" kern="1200">
+                <a:solidFill>
+                  <a:schemeClr val="tx1"/>
+                </a:solidFill>
+                <a:latin typeface="+mn-lt"/>
+                <a:ea typeface="+mn-ea"/>
+                <a:cs typeface="+mn-cs"/>
+              </a:defRPr>
+            </a:lvl9pPr>
+          </a:lstStyle>
+          <a:p>
+            <a:pPr marL="0" indent="0" algn="ctr">
+              <a:buFont typeface="Arial" panose="020B0604020202020204" pitchFamily="34" charset="0"/>
+              <a:buNone/>
+            </a:pPr>
+            <a:r>
+              <a:rPr lang="en-US" dirty="0"/>
+              <a:t>ErrorHandling.</a:t>
+            </a:r>
+          </a:p>
+          <a:p>
+            <a:pPr marL="0" indent="0">
+              <a:buFont typeface="Arial" panose="020B0604020202020204" pitchFamily="34" charset="0"/>
+              <a:buNone/>
+            </a:pPr>
+            <a:r>
+              <a:rPr lang="en-US" sz="1400" b="0" dirty="0">
+                <a:solidFill>
+                  <a:schemeClr val="tx2"/>
+                </a:solidFill>
+                <a:ea typeface="+mn-lt"/>
+                <a:cs typeface="+mn-lt"/>
+              </a:rPr>
+              <a:t>Que fait le program </a:t>
+            </a:r>
+            <a:r>
+              <a:rPr lang="en-US" sz="1400" b="0" dirty="0" err="1">
+                <a:solidFill>
+                  <a:schemeClr val="tx2"/>
+                </a:solidFill>
+                <a:ea typeface="+mn-lt"/>
+                <a:cs typeface="+mn-lt"/>
+              </a:rPr>
+              <a:t>lorsqu’il</a:t>
+            </a:r>
+            <a:r>
+              <a:rPr lang="en-US" sz="1400" b="0" dirty="0">
+                <a:solidFill>
+                  <a:schemeClr val="tx2"/>
+                </a:solidFill>
+                <a:ea typeface="+mn-lt"/>
+                <a:cs typeface="+mn-lt"/>
+              </a:rPr>
+              <a:t> rencontre un </a:t>
+            </a:r>
+            <a:r>
+              <a:rPr lang="en-US" sz="1400" b="0" dirty="0" err="1">
+                <a:solidFill>
+                  <a:schemeClr val="tx2"/>
+                </a:solidFill>
+                <a:ea typeface="+mn-lt"/>
+                <a:cs typeface="+mn-lt"/>
+              </a:rPr>
+              <a:t>erreur</a:t>
+            </a:r>
+            <a:r>
+              <a:rPr lang="en-US" sz="1400" b="0" dirty="0">
+                <a:solidFill>
+                  <a:schemeClr val="tx2"/>
+                </a:solidFill>
+                <a:ea typeface="+mn-lt"/>
+                <a:cs typeface="+mn-lt"/>
+              </a:rPr>
+              <a:t> ?</a:t>
+            </a:r>
+          </a:p>
+          <a:p>
+            <a:pPr marL="0" indent="0">
+              <a:buFont typeface="Arial" panose="020B0604020202020204" pitchFamily="34" charset="0"/>
+              <a:buNone/>
+            </a:pPr>
+            <a:r>
+              <a:rPr lang="en-US" sz="1400" b="0" dirty="0" err="1">
+                <a:solidFill>
+                  <a:schemeClr val="tx2"/>
+                </a:solidFill>
+                <a:ea typeface="+mn-lt"/>
+                <a:cs typeface="+mn-lt"/>
+              </a:rPr>
+              <a:t>Quel</a:t>
+            </a:r>
+            <a:r>
+              <a:rPr lang="en-US" sz="1400" b="0" dirty="0">
+                <a:solidFill>
+                  <a:schemeClr val="tx2"/>
+                </a:solidFill>
+                <a:ea typeface="+mn-lt"/>
+                <a:cs typeface="+mn-lt"/>
+              </a:rPr>
+              <a:t> type </a:t>
+            </a:r>
+            <a:r>
+              <a:rPr lang="en-US" sz="1400" b="0" dirty="0" err="1">
+                <a:solidFill>
+                  <a:schemeClr val="tx2"/>
+                </a:solidFill>
+                <a:ea typeface="+mn-lt"/>
+                <a:cs typeface="+mn-lt"/>
+              </a:rPr>
+              <a:t>d’erreur</a:t>
+            </a:r>
+            <a:r>
+              <a:rPr lang="en-US" sz="1400" b="0" dirty="0">
+                <a:solidFill>
+                  <a:schemeClr val="tx2"/>
+                </a:solidFill>
+                <a:ea typeface="+mn-lt"/>
+                <a:cs typeface="+mn-lt"/>
+              </a:rPr>
+              <a:t> (</a:t>
+            </a:r>
+            <a:r>
+              <a:rPr lang="en-US" sz="1400" b="0" dirty="0" err="1">
+                <a:solidFill>
+                  <a:schemeClr val="tx2"/>
+                </a:solidFill>
+                <a:ea typeface="+mn-lt"/>
+                <a:cs typeface="+mn-lt"/>
+              </a:rPr>
+              <a:t>Metier</a:t>
+            </a:r>
+            <a:r>
+              <a:rPr lang="en-US" sz="1400" b="0" dirty="0">
+                <a:solidFill>
+                  <a:schemeClr val="tx2"/>
+                </a:solidFill>
+                <a:ea typeface="+mn-lt"/>
+                <a:cs typeface="+mn-lt"/>
+              </a:rPr>
+              <a:t> / Technique), quell format </a:t>
+            </a:r>
+            <a:r>
+              <a:rPr lang="en-US" sz="1400" b="0" dirty="0" err="1">
+                <a:solidFill>
+                  <a:schemeClr val="tx2"/>
+                </a:solidFill>
+                <a:ea typeface="+mn-lt"/>
+                <a:cs typeface="+mn-lt"/>
+              </a:rPr>
+              <a:t>d’émission</a:t>
+            </a:r>
+            <a:r>
+              <a:rPr lang="en-US" sz="1400" b="0" dirty="0">
+                <a:solidFill>
+                  <a:schemeClr val="tx2"/>
+                </a:solidFill>
+                <a:ea typeface="+mn-lt"/>
+                <a:cs typeface="+mn-lt"/>
+              </a:rPr>
+              <a:t> (Exception, Http Error)</a:t>
+            </a:r>
+          </a:p>
+        </p:txBody>
+      </p:sp>
+      <p:sp>
+        <p:nvSpPr>
+          <p:cNvPr id="11" name="Text Placeholder 8">
+            <a:extLst>
+              <a:ext uri="{FF2B5EF4-FFF2-40B4-BE49-F238E27FC236}">
+                <a16:creationId xmlns:a16="http://schemas.microsoft.com/office/drawing/2014/main" id="{84EFE48E-9585-259B-851B-60DCCA8F6F10}"/>
+              </a:ext>
+            </a:extLst>
+          </p:cNvPr>
+          <p:cNvSpPr txBox="1">
+            <a:spLocks/>
+          </p:cNvSpPr>
+          <p:nvPr/>
+        </p:nvSpPr>
+        <p:spPr>
+          <a:xfrm>
+            <a:off x="8061226" y="4038462"/>
+            <a:ext cx="3219547" cy="1940139"/>
+          </a:xfrm>
+          <a:prstGeom prst="roundRect">
+            <a:avLst>
+              <a:gd name="adj" fmla="val 13315"/>
+            </a:avLst>
+          </a:prstGeom>
+          <a:ln w="15875">
+            <a:solidFill>
+              <a:schemeClr val="accent1"/>
+            </a:solidFill>
+          </a:ln>
+        </p:spPr>
+        <p:txBody>
+          <a:bodyPr vert="horz" lIns="0" tIns="0" rIns="0" bIns="0" rtlCol="0">
+            <a:noAutofit/>
+          </a:bodyPr>
+          <a:lstStyle>
+            <a:lvl1pPr marL="360000" indent="-360000" algn="l" defTabSz="914400" rtl="0" eaLnBrk="1" latinLnBrk="0" hangingPunct="1">
+              <a:lnSpc>
+                <a:spcPct val="90000"/>
+              </a:lnSpc>
+              <a:spcBef>
+                <a:spcPts val="1000"/>
+              </a:spcBef>
+              <a:buFont typeface="Arial" panose="020B0604020202020204" pitchFamily="34" charset="0"/>
+              <a:buChar char="•"/>
+              <a:defRPr sz="2000" b="1" kern="1200">
+                <a:solidFill>
+                  <a:schemeClr val="tx1"/>
+                </a:solidFill>
+                <a:latin typeface="+mn-lt"/>
+                <a:ea typeface="+mn-ea"/>
+                <a:cs typeface="+mn-cs"/>
+              </a:defRPr>
+            </a:lvl1pPr>
+            <a:lvl2pPr marL="648000" indent="-360000" algn="l" defTabSz="914400" rtl="0" eaLnBrk="1" latinLnBrk="0" hangingPunct="1">
+              <a:lnSpc>
+                <a:spcPct val="90000"/>
+              </a:lnSpc>
+              <a:spcBef>
+                <a:spcPts val="1200"/>
+              </a:spcBef>
+              <a:buFont typeface="Arial" panose="020B0604020202020204" pitchFamily="34" charset="0"/>
+              <a:buChar char="•"/>
+              <a:defRPr sz="1800" b="1" kern="1200">
+                <a:solidFill>
+                  <a:schemeClr val="tx2"/>
+                </a:solidFill>
+                <a:latin typeface="+mn-lt"/>
+                <a:ea typeface="+mn-ea"/>
+                <a:cs typeface="+mn-cs"/>
+              </a:defRPr>
+            </a:lvl2pPr>
+            <a:lvl3pPr marL="648000" indent="-360000" algn="l" defTabSz="914400" rtl="0" eaLnBrk="1" latinLnBrk="0" hangingPunct="1">
+              <a:lnSpc>
+                <a:spcPct val="90000"/>
+              </a:lnSpc>
+              <a:spcBef>
+                <a:spcPts val="1200"/>
+              </a:spcBef>
+              <a:buFont typeface="Arial" panose="020B0604020202020204" pitchFamily="34" charset="0"/>
+              <a:buChar char="•"/>
+              <a:defRPr lang="fr-FR" sz="1400" b="1" kern="1200" dirty="0">
+                <a:solidFill>
+                  <a:schemeClr val="bg1">
+                    <a:lumMod val="65000"/>
+                  </a:schemeClr>
+                </a:solidFill>
+                <a:latin typeface="+mn-lt"/>
+                <a:ea typeface="+mn-lt"/>
+                <a:cs typeface="+mn-lt"/>
+              </a:defRPr>
+            </a:lvl3pPr>
+            <a:lvl4pPr marL="720000" indent="-270000" algn="l" defTabSz="914400" rtl="0" eaLnBrk="1" latinLnBrk="0" hangingPunct="1">
+              <a:lnSpc>
+                <a:spcPct val="90000"/>
+              </a:lnSpc>
+              <a:spcBef>
+                <a:spcPts val="1000"/>
+              </a:spcBef>
+              <a:buFont typeface="Arial" panose="020B0604020202020204" pitchFamily="34" charset="0"/>
+              <a:buChar char="•"/>
+              <a:defRPr sz="1600" kern="1200">
+                <a:solidFill>
+                  <a:schemeClr val="tx2"/>
+                </a:solidFill>
+                <a:latin typeface="+mn-lt"/>
+                <a:ea typeface="+mn-ea"/>
+                <a:cs typeface="+mn-cs"/>
+              </a:defRPr>
+            </a:lvl4pPr>
+            <a:lvl5pPr marL="630000" indent="-270000" algn="l" defTabSz="914400" rtl="0" eaLnBrk="1" latinLnBrk="0" hangingPunct="1">
+              <a:lnSpc>
+                <a:spcPct val="90000"/>
+              </a:lnSpc>
+              <a:spcBef>
+                <a:spcPts val="1000"/>
+              </a:spcBef>
+              <a:buFont typeface="Arial" panose="020B0604020202020204" pitchFamily="34" charset="0"/>
+              <a:buChar char="•"/>
+              <a:defRPr sz="1600" kern="1200">
+                <a:solidFill>
+                  <a:schemeClr val="tx2"/>
+                </a:solidFill>
+                <a:latin typeface="+mn-lt"/>
+                <a:ea typeface="+mn-ea"/>
+                <a:cs typeface="+mn-cs"/>
+              </a:defRPr>
+            </a:lvl5pPr>
+            <a:lvl6pPr marL="2514600" indent="-228600" algn="l" defTabSz="914400" rtl="0" eaLnBrk="1" latinLnBrk="0" hangingPunct="1">
+              <a:lnSpc>
+                <a:spcPct val="90000"/>
+              </a:lnSpc>
+              <a:spcBef>
+                <a:spcPts val="500"/>
+              </a:spcBef>
+              <a:buFont typeface="Arial" panose="020B0604020202020204" pitchFamily="34" charset="0"/>
+              <a:buChar char="•"/>
+              <a:defRPr sz="1800" kern="1200">
+                <a:solidFill>
+                  <a:schemeClr val="tx1"/>
+                </a:solidFill>
+                <a:latin typeface="+mn-lt"/>
+                <a:ea typeface="+mn-ea"/>
+                <a:cs typeface="+mn-cs"/>
+              </a:defRPr>
+            </a:lvl6pPr>
+            <a:lvl7pPr marL="2971800" indent="-228600" algn="l" defTabSz="914400" rtl="0" eaLnBrk="1" latinLnBrk="0" hangingPunct="1">
+              <a:lnSpc>
+                <a:spcPct val="90000"/>
+              </a:lnSpc>
+              <a:spcBef>
+                <a:spcPts val="500"/>
+              </a:spcBef>
+              <a:buFont typeface="Arial" panose="020B0604020202020204" pitchFamily="34" charset="0"/>
+              <a:buChar char="•"/>
+              <a:defRPr sz="1800" kern="1200">
+                <a:solidFill>
+                  <a:schemeClr val="tx1"/>
+                </a:solidFill>
+                <a:latin typeface="+mn-lt"/>
+                <a:ea typeface="+mn-ea"/>
+                <a:cs typeface="+mn-cs"/>
+              </a:defRPr>
+            </a:lvl7pPr>
+            <a:lvl8pPr marL="3429000" indent="-228600" algn="l" defTabSz="914400" rtl="0" eaLnBrk="1" latinLnBrk="0" hangingPunct="1">
+              <a:lnSpc>
+                <a:spcPct val="90000"/>
+              </a:lnSpc>
+              <a:spcBef>
+                <a:spcPts val="500"/>
+              </a:spcBef>
+              <a:buFont typeface="Arial" panose="020B0604020202020204" pitchFamily="34" charset="0"/>
+              <a:buChar char="•"/>
+              <a:defRPr sz="1800" kern="1200">
+                <a:solidFill>
+                  <a:schemeClr val="tx1"/>
+                </a:solidFill>
+                <a:latin typeface="+mn-lt"/>
+                <a:ea typeface="+mn-ea"/>
+                <a:cs typeface="+mn-cs"/>
+              </a:defRPr>
+            </a:lvl8pPr>
+            <a:lvl9pPr marL="3886200" indent="-228600" algn="l" defTabSz="914400" rtl="0" eaLnBrk="1" latinLnBrk="0" hangingPunct="1">
+              <a:lnSpc>
+                <a:spcPct val="90000"/>
+              </a:lnSpc>
+              <a:spcBef>
+                <a:spcPts val="500"/>
+              </a:spcBef>
+              <a:buFont typeface="Arial" panose="020B0604020202020204" pitchFamily="34" charset="0"/>
+              <a:buChar char="•"/>
+              <a:defRPr sz="1800" kern="1200">
+                <a:solidFill>
+                  <a:schemeClr val="tx1"/>
+                </a:solidFill>
+                <a:latin typeface="+mn-lt"/>
+                <a:ea typeface="+mn-ea"/>
+                <a:cs typeface="+mn-cs"/>
+              </a:defRPr>
+            </a:lvl9pPr>
+          </a:lstStyle>
+          <a:p>
+            <a:pPr marL="0" indent="0" algn="ctr">
+              <a:buFont typeface="Arial" panose="020B0604020202020204" pitchFamily="34" charset="0"/>
+              <a:buNone/>
+            </a:pPr>
+            <a:r>
+              <a:rPr lang="en-US" dirty="0" err="1"/>
+              <a:t>DataModeling</a:t>
+            </a:r>
+            <a:endParaRPr lang="en-US" dirty="0"/>
+          </a:p>
+          <a:p>
+            <a:pPr marL="0" indent="0">
+              <a:buFont typeface="Arial" panose="020B0604020202020204" pitchFamily="34" charset="0"/>
+              <a:buNone/>
+            </a:pPr>
+            <a:r>
+              <a:rPr lang="en-US" sz="1400" b="0" dirty="0">
+                <a:solidFill>
+                  <a:schemeClr val="tx2"/>
+                </a:solidFill>
+                <a:ea typeface="+mn-lt"/>
+                <a:cs typeface="+mn-lt"/>
+              </a:rPr>
+              <a:t>Entity. </a:t>
+            </a:r>
+            <a:r>
+              <a:rPr lang="en-US" sz="1400" b="0" dirty="0" err="1">
+                <a:solidFill>
+                  <a:schemeClr val="tx2"/>
+                </a:solidFill>
+                <a:ea typeface="+mn-lt"/>
+                <a:cs typeface="+mn-lt"/>
+              </a:rPr>
+              <a:t>Objet</a:t>
+            </a:r>
+            <a:r>
+              <a:rPr lang="en-US" sz="1400" b="0" dirty="0">
+                <a:solidFill>
+                  <a:schemeClr val="tx2"/>
+                </a:solidFill>
+                <a:ea typeface="+mn-lt"/>
+                <a:cs typeface="+mn-lt"/>
+              </a:rPr>
+              <a:t> dans </a:t>
+            </a:r>
+            <a:r>
+              <a:rPr lang="en-US" sz="1400" b="0" dirty="0" err="1">
+                <a:solidFill>
+                  <a:schemeClr val="tx2"/>
+                </a:solidFill>
+                <a:ea typeface="+mn-lt"/>
+                <a:cs typeface="+mn-lt"/>
+              </a:rPr>
+              <a:t>une</a:t>
+            </a:r>
+            <a:r>
+              <a:rPr lang="en-US" sz="1400" b="0" dirty="0">
+                <a:solidFill>
+                  <a:schemeClr val="tx2"/>
+                </a:solidFill>
+                <a:ea typeface="+mn-lt"/>
+                <a:cs typeface="+mn-lt"/>
+              </a:rPr>
+              <a:t> base </a:t>
+            </a:r>
+            <a:r>
+              <a:rPr lang="en-US" sz="1400" b="0" dirty="0" err="1">
+                <a:solidFill>
+                  <a:schemeClr val="tx2"/>
+                </a:solidFill>
+                <a:ea typeface="+mn-lt"/>
+                <a:cs typeface="+mn-lt"/>
+              </a:rPr>
+              <a:t>donnée</a:t>
+            </a:r>
+            <a:endParaRPr lang="en-US" sz="1400" b="0" dirty="0">
+              <a:solidFill>
+                <a:schemeClr val="tx2"/>
+              </a:solidFill>
+              <a:ea typeface="+mn-lt"/>
+              <a:cs typeface="+mn-lt"/>
+            </a:endParaRPr>
+          </a:p>
+          <a:p>
+            <a:pPr marL="0" indent="0">
+              <a:buFont typeface="Arial" panose="020B0604020202020204" pitchFamily="34" charset="0"/>
+              <a:buNone/>
+            </a:pPr>
+            <a:r>
+              <a:rPr lang="en-US" sz="1400" b="0" dirty="0" err="1">
+                <a:solidFill>
+                  <a:schemeClr val="tx2"/>
+                </a:solidFill>
+                <a:ea typeface="+mn-lt"/>
+                <a:cs typeface="+mn-lt"/>
+              </a:rPr>
+              <a:t>Dto</a:t>
+            </a:r>
+            <a:r>
+              <a:rPr lang="en-US" sz="1400" b="0" dirty="0">
+                <a:solidFill>
+                  <a:schemeClr val="tx2"/>
+                </a:solidFill>
+                <a:ea typeface="+mn-lt"/>
+                <a:cs typeface="+mn-lt"/>
+              </a:rPr>
+              <a:t>. </a:t>
+            </a:r>
+            <a:r>
+              <a:rPr lang="en-US" sz="1400" b="0" dirty="0" err="1">
+                <a:solidFill>
+                  <a:schemeClr val="tx2"/>
+                </a:solidFill>
+                <a:ea typeface="+mn-lt"/>
+                <a:cs typeface="+mn-lt"/>
+              </a:rPr>
+              <a:t>Objet</a:t>
+            </a:r>
+            <a:r>
+              <a:rPr lang="en-US" sz="1400" b="0" dirty="0">
+                <a:solidFill>
+                  <a:schemeClr val="tx2"/>
+                </a:solidFill>
+                <a:ea typeface="+mn-lt"/>
+                <a:cs typeface="+mn-lt"/>
+              </a:rPr>
+              <a:t> de </a:t>
+            </a:r>
+            <a:r>
+              <a:rPr lang="en-US" sz="1400" b="0" dirty="0" err="1">
+                <a:solidFill>
+                  <a:schemeClr val="tx2"/>
+                </a:solidFill>
+                <a:ea typeface="+mn-lt"/>
+                <a:cs typeface="+mn-lt"/>
+              </a:rPr>
+              <a:t>transfert</a:t>
+            </a:r>
+            <a:r>
+              <a:rPr lang="en-US" sz="1400" b="0" dirty="0">
+                <a:solidFill>
+                  <a:schemeClr val="tx2"/>
+                </a:solidFill>
+                <a:ea typeface="+mn-lt"/>
+                <a:cs typeface="+mn-lt"/>
+              </a:rPr>
+              <a:t> inter </a:t>
+            </a:r>
+            <a:r>
+              <a:rPr lang="en-US" sz="1400" b="0" dirty="0" err="1">
+                <a:solidFill>
+                  <a:schemeClr val="tx2"/>
+                </a:solidFill>
+                <a:ea typeface="+mn-lt"/>
+                <a:cs typeface="+mn-lt"/>
+              </a:rPr>
+              <a:t>système</a:t>
+            </a:r>
+            <a:endParaRPr lang="en-US" sz="1400" b="0" dirty="0">
+              <a:solidFill>
+                <a:schemeClr val="tx2"/>
+              </a:solidFill>
+              <a:ea typeface="+mn-lt"/>
+              <a:cs typeface="+mn-lt"/>
+            </a:endParaRPr>
+          </a:p>
+          <a:p>
+            <a:pPr marL="0" indent="0">
+              <a:buFont typeface="Arial" panose="020B0604020202020204" pitchFamily="34" charset="0"/>
+              <a:buNone/>
+            </a:pPr>
+            <a:r>
+              <a:rPr lang="en-US" sz="1400" b="0" dirty="0" err="1">
+                <a:solidFill>
+                  <a:schemeClr val="tx2"/>
+                </a:solidFill>
+                <a:ea typeface="+mn-lt"/>
+                <a:cs typeface="+mn-lt"/>
+              </a:rPr>
+              <a:t>Préférer</a:t>
+            </a:r>
+            <a:r>
+              <a:rPr lang="en-US" sz="1400" b="0" dirty="0">
+                <a:solidFill>
+                  <a:schemeClr val="tx2"/>
+                </a:solidFill>
+                <a:ea typeface="+mn-lt"/>
+                <a:cs typeface="+mn-lt"/>
+              </a:rPr>
+              <a:t> la composition à </a:t>
+            </a:r>
+            <a:r>
+              <a:rPr lang="en-US" sz="1400" b="0" dirty="0" err="1">
+                <a:solidFill>
+                  <a:schemeClr val="tx2"/>
+                </a:solidFill>
+                <a:ea typeface="+mn-lt"/>
+                <a:cs typeface="+mn-lt"/>
+              </a:rPr>
+              <a:t>l’heritage</a:t>
+            </a:r>
+            <a:endParaRPr lang="en-US" sz="1400" b="0" dirty="0">
+              <a:solidFill>
+                <a:schemeClr val="tx2"/>
+              </a:solidFill>
+              <a:ea typeface="+mn-lt"/>
+              <a:cs typeface="+mn-lt"/>
+            </a:endParaRPr>
+          </a:p>
+          <a:p>
+            <a:pPr marL="0" indent="0">
+              <a:buFont typeface="Arial" panose="020B0604020202020204" pitchFamily="34" charset="0"/>
+              <a:buNone/>
+            </a:pPr>
+            <a:r>
+              <a:rPr lang="fr-FR" sz="1200" b="0" dirty="0"/>
+              <a:t>Identifiant d’un objet : un Id, type 'string’ Vs « </a:t>
+            </a:r>
+            <a:r>
+              <a:rPr lang="fr-FR" sz="1200" b="0" dirty="0" err="1"/>
+              <a:t>Guid</a:t>
+            </a:r>
+            <a:r>
+              <a:rPr lang="fr-FR" sz="1200" b="0" dirty="0"/>
+              <a:t> » Vs « </a:t>
+            </a:r>
+            <a:r>
+              <a:rPr lang="fr-FR" sz="1200" b="0" dirty="0" err="1"/>
+              <a:t>Number</a:t>
+            </a:r>
+            <a:r>
+              <a:rPr lang="fr-FR" sz="1200" b="0" dirty="0"/>
+              <a:t> » ?</a:t>
+            </a:r>
+            <a:br>
+              <a:rPr lang="en-US" sz="1200" dirty="0"/>
+            </a:br>
+            <a:endParaRPr lang="en-US" sz="1200" dirty="0"/>
+          </a:p>
+          <a:p>
+            <a:pPr marL="0" indent="0">
+              <a:buFont typeface="Arial" panose="020B0604020202020204" pitchFamily="34" charset="0"/>
+              <a:buNone/>
+            </a:pPr>
+            <a:endParaRPr lang="en-US" sz="1400" b="0" dirty="0">
+              <a:solidFill>
+                <a:schemeClr val="tx2"/>
+              </a:solidFill>
+              <a:ea typeface="+mn-lt"/>
+              <a:cs typeface="+mn-lt"/>
+            </a:endParaRPr>
+          </a:p>
+        </p:txBody>
+      </p:sp>
+      <p:sp>
+        <p:nvSpPr>
+          <p:cNvPr id="15" name="Text Placeholder 14">
+            <a:extLst>
+              <a:ext uri="{FF2B5EF4-FFF2-40B4-BE49-F238E27FC236}">
+                <a16:creationId xmlns:a16="http://schemas.microsoft.com/office/drawing/2014/main" id="{3E57FA8B-662D-8680-8708-D0A275A0DD09}"/>
+              </a:ext>
+            </a:extLst>
+          </p:cNvPr>
+          <p:cNvSpPr>
+            <a:spLocks noGrp="1"/>
+          </p:cNvSpPr>
+          <p:nvPr>
+            <p:ph type="body" sz="quarter" idx="20"/>
+          </p:nvPr>
+        </p:nvSpPr>
+        <p:spPr>
+          <a:xfrm>
+            <a:off x="8061227" y="1089499"/>
+            <a:ext cx="3219547" cy="1638642"/>
+          </a:xfrm>
+        </p:spPr>
+        <p:txBody>
+          <a:bodyPr/>
+          <a:lstStyle/>
+          <a:p>
+            <a:pPr marL="0" indent="0" algn="ctr">
+              <a:buNone/>
+            </a:pPr>
+            <a:r>
+              <a:rPr lang="en-US" dirty="0"/>
+              <a:t>Validation</a:t>
+            </a:r>
+          </a:p>
+        </p:txBody>
+      </p:sp>
+      <p:sp>
+        <p:nvSpPr>
+          <p:cNvPr id="16" name="Text Placeholder 8">
+            <a:extLst>
+              <a:ext uri="{FF2B5EF4-FFF2-40B4-BE49-F238E27FC236}">
+                <a16:creationId xmlns:a16="http://schemas.microsoft.com/office/drawing/2014/main" id="{485A2950-1AE5-0212-6E63-66B7604EE028}"/>
+              </a:ext>
+            </a:extLst>
+          </p:cNvPr>
+          <p:cNvSpPr txBox="1">
+            <a:spLocks/>
+          </p:cNvSpPr>
+          <p:nvPr/>
+        </p:nvSpPr>
+        <p:spPr>
+          <a:xfrm>
+            <a:off x="8061227" y="2833700"/>
+            <a:ext cx="3219547" cy="1099203"/>
+          </a:xfrm>
+          <a:prstGeom prst="roundRect">
+            <a:avLst>
+              <a:gd name="adj" fmla="val 13315"/>
+            </a:avLst>
+          </a:prstGeom>
+          <a:ln w="15875">
+            <a:solidFill>
+              <a:schemeClr val="accent1"/>
+            </a:solidFill>
+          </a:ln>
+        </p:spPr>
+        <p:txBody>
+          <a:bodyPr vert="horz" lIns="0" tIns="0" rIns="0" bIns="0" rtlCol="0">
+            <a:noAutofit/>
+          </a:bodyPr>
+          <a:lstStyle>
+            <a:lvl1pPr marL="360000" indent="-360000" algn="l" defTabSz="914400" rtl="0" eaLnBrk="1" latinLnBrk="0" hangingPunct="1">
+              <a:lnSpc>
+                <a:spcPct val="90000"/>
+              </a:lnSpc>
+              <a:spcBef>
+                <a:spcPts val="1000"/>
+              </a:spcBef>
+              <a:buFont typeface="Arial" panose="020B0604020202020204" pitchFamily="34" charset="0"/>
+              <a:buChar char="•"/>
+              <a:defRPr sz="2000" b="1" kern="1200">
+                <a:solidFill>
+                  <a:schemeClr val="tx1"/>
+                </a:solidFill>
+                <a:latin typeface="+mn-lt"/>
+                <a:ea typeface="+mn-ea"/>
+                <a:cs typeface="+mn-cs"/>
+              </a:defRPr>
+            </a:lvl1pPr>
+            <a:lvl2pPr marL="648000" indent="-360000" algn="l" defTabSz="914400" rtl="0" eaLnBrk="1" latinLnBrk="0" hangingPunct="1">
+              <a:lnSpc>
+                <a:spcPct val="90000"/>
+              </a:lnSpc>
+              <a:spcBef>
+                <a:spcPts val="1200"/>
+              </a:spcBef>
+              <a:buFont typeface="Arial" panose="020B0604020202020204" pitchFamily="34" charset="0"/>
+              <a:buChar char="•"/>
+              <a:defRPr sz="1800" b="1" kern="1200">
+                <a:solidFill>
+                  <a:schemeClr val="tx2"/>
+                </a:solidFill>
+                <a:latin typeface="+mn-lt"/>
+                <a:ea typeface="+mn-ea"/>
+                <a:cs typeface="+mn-cs"/>
+              </a:defRPr>
+            </a:lvl2pPr>
+            <a:lvl3pPr marL="648000" indent="-360000" algn="l" defTabSz="914400" rtl="0" eaLnBrk="1" latinLnBrk="0" hangingPunct="1">
+              <a:lnSpc>
+                <a:spcPct val="90000"/>
+              </a:lnSpc>
+              <a:spcBef>
+                <a:spcPts val="1200"/>
+              </a:spcBef>
+              <a:buFont typeface="Arial" panose="020B0604020202020204" pitchFamily="34" charset="0"/>
+              <a:buChar char="•"/>
+              <a:defRPr lang="fr-FR" sz="1400" b="1" kern="1200" dirty="0">
+                <a:solidFill>
+                  <a:schemeClr val="bg1">
+                    <a:lumMod val="65000"/>
+                  </a:schemeClr>
+                </a:solidFill>
+                <a:latin typeface="+mn-lt"/>
+                <a:ea typeface="+mn-lt"/>
+                <a:cs typeface="+mn-lt"/>
+              </a:defRPr>
+            </a:lvl3pPr>
+            <a:lvl4pPr marL="720000" indent="-270000" algn="l" defTabSz="914400" rtl="0" eaLnBrk="1" latinLnBrk="0" hangingPunct="1">
+              <a:lnSpc>
+                <a:spcPct val="90000"/>
+              </a:lnSpc>
+              <a:spcBef>
+                <a:spcPts val="1000"/>
+              </a:spcBef>
+              <a:buFont typeface="Arial" panose="020B0604020202020204" pitchFamily="34" charset="0"/>
+              <a:buChar char="•"/>
+              <a:defRPr sz="1600" kern="1200">
+                <a:solidFill>
+                  <a:schemeClr val="tx2"/>
+                </a:solidFill>
+                <a:latin typeface="+mn-lt"/>
+                <a:ea typeface="+mn-ea"/>
+                <a:cs typeface="+mn-cs"/>
+              </a:defRPr>
+            </a:lvl4pPr>
+            <a:lvl5pPr marL="630000" indent="-270000" algn="l" defTabSz="914400" rtl="0" eaLnBrk="1" latinLnBrk="0" hangingPunct="1">
+              <a:lnSpc>
+                <a:spcPct val="90000"/>
+              </a:lnSpc>
+              <a:spcBef>
+                <a:spcPts val="1000"/>
+              </a:spcBef>
+              <a:buFont typeface="Arial" panose="020B0604020202020204" pitchFamily="34" charset="0"/>
+              <a:buChar char="•"/>
+              <a:defRPr sz="1600" kern="1200">
+                <a:solidFill>
+                  <a:schemeClr val="tx2"/>
+                </a:solidFill>
+                <a:latin typeface="+mn-lt"/>
+                <a:ea typeface="+mn-ea"/>
+                <a:cs typeface="+mn-cs"/>
+              </a:defRPr>
+            </a:lvl5pPr>
+            <a:lvl6pPr marL="2514600" indent="-228600" algn="l" defTabSz="914400" rtl="0" eaLnBrk="1" latinLnBrk="0" hangingPunct="1">
+              <a:lnSpc>
+                <a:spcPct val="90000"/>
+              </a:lnSpc>
+              <a:spcBef>
+                <a:spcPts val="500"/>
+              </a:spcBef>
+              <a:buFont typeface="Arial" panose="020B0604020202020204" pitchFamily="34" charset="0"/>
+              <a:buChar char="•"/>
+              <a:defRPr sz="1800" kern="1200">
+                <a:solidFill>
+                  <a:schemeClr val="tx1"/>
+                </a:solidFill>
+                <a:latin typeface="+mn-lt"/>
+                <a:ea typeface="+mn-ea"/>
+                <a:cs typeface="+mn-cs"/>
+              </a:defRPr>
+            </a:lvl6pPr>
+            <a:lvl7pPr marL="2971800" indent="-228600" algn="l" defTabSz="914400" rtl="0" eaLnBrk="1" latinLnBrk="0" hangingPunct="1">
+              <a:lnSpc>
+                <a:spcPct val="90000"/>
+              </a:lnSpc>
+              <a:spcBef>
+                <a:spcPts val="500"/>
+              </a:spcBef>
+              <a:buFont typeface="Arial" panose="020B0604020202020204" pitchFamily="34" charset="0"/>
+              <a:buChar char="•"/>
+              <a:defRPr sz="1800" kern="1200">
+                <a:solidFill>
+                  <a:schemeClr val="tx1"/>
+                </a:solidFill>
+                <a:latin typeface="+mn-lt"/>
+                <a:ea typeface="+mn-ea"/>
+                <a:cs typeface="+mn-cs"/>
+              </a:defRPr>
+            </a:lvl7pPr>
+            <a:lvl8pPr marL="3429000" indent="-228600" algn="l" defTabSz="914400" rtl="0" eaLnBrk="1" latinLnBrk="0" hangingPunct="1">
+              <a:lnSpc>
+                <a:spcPct val="90000"/>
+              </a:lnSpc>
+              <a:spcBef>
+                <a:spcPts val="500"/>
+              </a:spcBef>
+              <a:buFont typeface="Arial" panose="020B0604020202020204" pitchFamily="34" charset="0"/>
+              <a:buChar char="•"/>
+              <a:defRPr sz="1800" kern="1200">
+                <a:solidFill>
+                  <a:schemeClr val="tx1"/>
+                </a:solidFill>
+                <a:latin typeface="+mn-lt"/>
+                <a:ea typeface="+mn-ea"/>
+                <a:cs typeface="+mn-cs"/>
+              </a:defRPr>
+            </a:lvl8pPr>
+            <a:lvl9pPr marL="3886200" indent="-228600" algn="l" defTabSz="914400" rtl="0" eaLnBrk="1" latinLnBrk="0" hangingPunct="1">
+              <a:lnSpc>
+                <a:spcPct val="90000"/>
+              </a:lnSpc>
+              <a:spcBef>
+                <a:spcPts val="500"/>
+              </a:spcBef>
+              <a:buFont typeface="Arial" panose="020B0604020202020204" pitchFamily="34" charset="0"/>
+              <a:buChar char="•"/>
+              <a:defRPr sz="1800" kern="1200">
+                <a:solidFill>
+                  <a:schemeClr val="tx1"/>
+                </a:solidFill>
+                <a:latin typeface="+mn-lt"/>
+                <a:ea typeface="+mn-ea"/>
+                <a:cs typeface="+mn-cs"/>
+              </a:defRPr>
+            </a:lvl9pPr>
+          </a:lstStyle>
+          <a:p>
+            <a:pPr marL="0" indent="0" algn="ctr">
+              <a:buFont typeface="Arial" panose="020B0604020202020204" pitchFamily="34" charset="0"/>
+              <a:buNone/>
+            </a:pPr>
+            <a:r>
+              <a:rPr lang="en-US" dirty="0"/>
+              <a:t>Configuration</a:t>
+            </a:r>
+          </a:p>
+          <a:p>
+            <a:pPr marL="0" indent="0">
+              <a:buFont typeface="Arial" panose="020B0604020202020204" pitchFamily="34" charset="0"/>
+              <a:buNone/>
+            </a:pPr>
+            <a:r>
+              <a:rPr lang="en-US" sz="1400" b="0" dirty="0">
+                <a:solidFill>
+                  <a:schemeClr val="tx2"/>
+                </a:solidFill>
+                <a:ea typeface="+mn-lt"/>
+                <a:cs typeface="+mn-lt"/>
+              </a:rPr>
+              <a:t>Todo</a:t>
+            </a:r>
+            <a:endParaRPr lang="en-US" sz="1200" dirty="0"/>
+          </a:p>
+          <a:p>
+            <a:pPr marL="0" indent="0">
+              <a:buFont typeface="Arial" panose="020B0604020202020204" pitchFamily="34" charset="0"/>
+              <a:buNone/>
+            </a:pPr>
+            <a:endParaRPr lang="en-US" sz="1400" b="0" dirty="0">
+              <a:solidFill>
+                <a:schemeClr val="tx2"/>
+              </a:solidFill>
+              <a:ea typeface="+mn-lt"/>
+              <a:cs typeface="+mn-lt"/>
+            </a:endParaRPr>
+          </a:p>
+        </p:txBody>
+      </p:sp>
+    </p:spTree>
+    <p:extLst>
+      <p:ext uri="{BB962C8B-B14F-4D97-AF65-F5344CB8AC3E}">
+        <p14:creationId xmlns:p14="http://schemas.microsoft.com/office/powerpoint/2010/main" val="3826812545"/>
+      </p:ext>
+    </p:extLst>
+  </p:cSld>
+  <p:clrMapOvr>
+    <a:masterClrMapping/>
+  </p:clrMapOvr>
+</p:sld>
+</file>
+
+<file path=ppt/slides/slide11.xml><?xml version="1.0" encoding="utf-8"?>
+<p:sld xmlns:a="http://schemas.openxmlformats.org/drawingml/2006/main" xmlns:r="http://schemas.openxmlformats.org/officeDocument/2006/relationships" xmlns:p="http://schemas.openxmlformats.org/presentationml/2006/main">
+  <p:cSld>
+    <p:spTree>
+      <p:nvGrpSpPr>
+        <p:cNvPr id="1" name=""/>
+        <p:cNvGrpSpPr/>
+        <p:nvPr/>
+      </p:nvGrpSpPr>
+      <p:grpSpPr>
+        <a:xfrm>
+          <a:off x="0" y="0"/>
+          <a:ext cx="0" cy="0"/>
+          <a:chOff x="0" y="0"/>
+          <a:chExt cx="0" cy="0"/>
+        </a:xfrm>
+      </p:grpSpPr>
+      <p:sp>
+        <p:nvSpPr>
+          <p:cNvPr id="6" name="Espace réservé du numéro de diapositive 5">
+            <a:extLst>
+              <a:ext uri="{FF2B5EF4-FFF2-40B4-BE49-F238E27FC236}">
+                <a16:creationId xmlns:a16="http://schemas.microsoft.com/office/drawing/2014/main" id="{4576F49A-6A7E-470D-82F5-6D36342DDF17}"/>
+              </a:ext>
+            </a:extLst>
+          </p:cNvPr>
+          <p:cNvSpPr>
+            <a:spLocks noGrp="1"/>
+          </p:cNvSpPr>
+          <p:nvPr>
+            <p:ph type="sldNum" sz="quarter" idx="10"/>
+          </p:nvPr>
+        </p:nvSpPr>
+        <p:spPr/>
+        <p:txBody>
+          <a:bodyPr/>
+          <a:lstStyle/>
+          <a:p>
+            <a:fld id="{E14D0CC5-784E-4B7E-B9F4-EE71C08DA69C}" type="slidenum">
+              <a:rPr lang="fr-FR" smtClean="0"/>
+              <a:t>11</a:t>
+            </a:fld>
+            <a:endParaRPr lang="fr-FR" dirty="0"/>
+          </a:p>
+        </p:txBody>
+      </p:sp>
+      <p:sp>
+        <p:nvSpPr>
           <p:cNvPr id="15" name="Text Placeholder 14">
             <a:extLst>
               <a:ext uri="{FF2B5EF4-FFF2-40B4-BE49-F238E27FC236}">
@@ -22904,7 +25095,7 @@
 </p:sld>
 </file>
 
-<file path=ppt/slides/slide11.xml><?xml version="1.0" encoding="utf-8"?>
+<file path=ppt/slides/slide12.xml><?xml version="1.0" encoding="utf-8"?>
 <p:sld xmlns:a="http://schemas.openxmlformats.org/drawingml/2006/main" xmlns:r="http://schemas.openxmlformats.org/officeDocument/2006/relationships" xmlns:p="http://schemas.openxmlformats.org/presentationml/2006/main">
   <p:cSld>
     <p:spTree>
@@ -23451,7 +25642,7 @@
         </p:nvSpPr>
         <p:spPr>
           <a:xfrm>
-            <a:off x="2458947" y="2458998"/>
+            <a:off x="2458948" y="2492104"/>
             <a:ext cx="4069028" cy="396054"/>
           </a:xfrm>
           <a:prstGeom prst="roundRect">
@@ -23815,7 +26006,7 @@
           <a:p>
             <a:r>
               <a:rPr lang="fr-FR" dirty="0"/>
-              <a:t>Software Architecture</a:t>
+              <a:t>Type</a:t>
             </a:r>
             <a:endParaRPr lang="en-US" dirty="0"/>
           </a:p>
@@ -24601,7 +26792,7 @@
                   </a:schemeClr>
                 </a:solidFill>
               </a:rPr>
-              <a:t>Angular</a:t>
+              <a:t>Ang</a:t>
             </a:r>
           </a:p>
         </p:txBody>
@@ -26196,11 +28387,6 @@
   <p:clrMapOvr>
     <a:masterClrMapping/>
   </p:clrMapOvr>
-  <p:extLst>
-    <p:ext uri="{6950BFC3-D8DA-4A85-94F7-54DA5524770B}">
-      <p188:commentRel xmlns:p188="http://schemas.microsoft.com/office/powerpoint/2018/8/main" r:id="rId3"/>
-    </p:ext>
-  </p:extLst>
 </p:sld>
 </file>
 
@@ -26536,7 +28722,15 @@
           <a:p>
             <a:r>
               <a:rPr lang="fr-FR" sz="3200" dirty="0"/>
-              <a:t>MVC</a:t>
+              <a:t>MVC (</a:t>
+            </a:r>
+            <a:r>
+              <a:rPr lang="fr-FR" sz="3200" dirty="0" err="1"/>
+              <a:t>Detailed</a:t>
+            </a:r>
+            <a:r>
+              <a:rPr lang="fr-FR" sz="3200" dirty="0"/>
+              <a:t>)</a:t>
             </a:r>
             <a:endParaRPr lang="en-US" sz="3200" dirty="0"/>
           </a:p>
@@ -27227,20 +29421,12 @@
           <a:p>
             <a:pPr algn="ctr"/>
             <a:r>
-              <a:rPr lang="fr-FR" sz="1400" b="1" err="1">
+              <a:rPr lang="fr-FR" sz="1400" b="1" dirty="0">
                 <a:solidFill>
                   <a:schemeClr val="bg1"/>
                 </a:solidFill>
               </a:rPr>
-              <a:t>FCXxx.</a:t>
-            </a:r>
-            <a:r>
-              <a:rPr lang="fr-FR" sz="1400" b="1">
-                <a:solidFill>
-                  <a:schemeClr val="bg1"/>
-                </a:solidFill>
-              </a:rPr>
-              <a:t>cs</a:t>
+              <a:t>FCXxx.cs</a:t>
             </a:r>
           </a:p>
         </p:txBody>
@@ -27318,8 +29504,8 @@
         </p:nvSpPr>
         <p:spPr>
           <a:xfrm>
-            <a:off x="7223410" y="1699781"/>
-            <a:ext cx="1444992" cy="471561"/>
+            <a:off x="7223409" y="1699781"/>
+            <a:ext cx="1785609" cy="471561"/>
           </a:xfrm>
           <a:prstGeom prst="roundRect">
             <a:avLst>
@@ -27353,18 +29539,13 @@
           <a:p>
             <a:pPr algn="ctr"/>
             <a:r>
-              <a:rPr lang="fr-FR" sz="1400" b="1" dirty="0" err="1">
+              <a:rPr lang="fr-FR" sz="1400" b="1" dirty="0">
                 <a:solidFill>
                   <a:schemeClr val="bg1"/>
                 </a:solidFill>
               </a:rPr>
               <a:t>XxxService.cs</a:t>
             </a:r>
-            <a:endParaRPr lang="fr-FR" sz="1400" b="1" dirty="0">
-              <a:solidFill>
-                <a:schemeClr val="bg1"/>
-              </a:solidFill>
-            </a:endParaRPr>
           </a:p>
         </p:txBody>
       </p:sp>
@@ -27449,8 +29630,8 @@
         </p:nvSpPr>
         <p:spPr>
           <a:xfrm>
-            <a:off x="7117878" y="3996247"/>
-            <a:ext cx="1668226" cy="376537"/>
+            <a:off x="7117877" y="3996247"/>
+            <a:ext cx="1980511" cy="376537"/>
           </a:xfrm>
           <a:prstGeom prst="roundRect">
             <a:avLst>
@@ -27484,21 +29665,18 @@
           <a:p>
             <a:pPr algn="ctr"/>
             <a:r>
-              <a:rPr lang="fr-FR" sz="1400" b="1" err="1">
+              <a:rPr lang="fr-FR" sz="1400" b="1" dirty="0" err="1">
                 <a:solidFill>
                   <a:schemeClr val="bg1"/>
                 </a:solidFill>
               </a:rPr>
-              <a:t>DCXxx.</a:t>
+              <a:t>DCXxx.cs</a:t>
             </a:r>
-            <a:r>
-              <a:rPr lang="fr-FR" sz="1400" b="1">
-                <a:solidFill>
-                  <a:schemeClr val="bg1"/>
-                </a:solidFill>
-              </a:rPr>
-              <a:t>cs</a:t>
-            </a:r>
+            <a:endParaRPr lang="fr-FR" sz="1400" b="1" dirty="0">
+              <a:solidFill>
+                <a:schemeClr val="bg1"/>
+              </a:solidFill>
+            </a:endParaRPr>
           </a:p>
         </p:txBody>
       </p:sp>
@@ -28496,8 +30674,8 @@
         </p:nvSpPr>
         <p:spPr>
           <a:xfrm>
-            <a:off x="8298874" y="3502226"/>
-            <a:ext cx="1111914" cy="410603"/>
+            <a:off x="8298873" y="3508552"/>
+            <a:ext cx="1320106" cy="408142"/>
           </a:xfrm>
           <a:prstGeom prst="roundRect">
             <a:avLst>
@@ -28531,21 +30709,18 @@
           <a:p>
             <a:pPr algn="ctr"/>
             <a:r>
-              <a:rPr lang="fr-FR" sz="1400" b="1" err="1">
+              <a:rPr lang="fr-FR" sz="1400" b="1" dirty="0" err="1">
                 <a:solidFill>
                   <a:schemeClr val="bg1"/>
                 </a:solidFill>
               </a:rPr>
-              <a:t>BCYyy.</a:t>
+              <a:t>BCYyy.cs</a:t>
             </a:r>
-            <a:r>
-              <a:rPr lang="fr-FR" sz="1400" b="1">
-                <a:solidFill>
-                  <a:schemeClr val="bg1"/>
-                </a:solidFill>
-              </a:rPr>
-              <a:t>cs</a:t>
-            </a:r>
+            <a:endParaRPr lang="fr-FR" sz="1400" b="1" dirty="0">
+              <a:solidFill>
+                <a:schemeClr val="bg1"/>
+              </a:solidFill>
+            </a:endParaRPr>
           </a:p>
         </p:txBody>
       </p:sp>
@@ -28563,8 +30738,8 @@
         </p:nvSpPr>
         <p:spPr>
           <a:xfrm>
-            <a:off x="7491165" y="2188665"/>
-            <a:ext cx="219207" cy="471562"/>
+            <a:off x="7491165" y="2121371"/>
+            <a:ext cx="224349" cy="902530"/>
           </a:xfrm>
           <a:prstGeom prst="downArrow">
             <a:avLst>
@@ -29502,8 +31677,8 @@
         </p:nvSpPr>
         <p:spPr>
           <a:xfrm>
-            <a:off x="8857690" y="1699781"/>
-            <a:ext cx="1444992" cy="471561"/>
+            <a:off x="9130848" y="1699781"/>
+            <a:ext cx="1885494" cy="471561"/>
           </a:xfrm>
           <a:prstGeom prst="roundRect">
             <a:avLst>
@@ -29566,7 +31741,7 @@
         </p:nvSpPr>
         <p:spPr>
           <a:xfrm>
-            <a:off x="9252987" y="2166761"/>
+            <a:off x="10115963" y="2186354"/>
             <a:ext cx="219207" cy="851636"/>
           </a:xfrm>
           <a:prstGeom prst="downArrow">
@@ -29618,8 +31793,8 @@
         </p:nvSpPr>
         <p:spPr>
           <a:xfrm>
-            <a:off x="9510444" y="3511756"/>
-            <a:ext cx="1111914" cy="410603"/>
+            <a:off x="9695678" y="3511756"/>
+            <a:ext cx="1320664" cy="410603"/>
           </a:xfrm>
           <a:prstGeom prst="roundRect">
             <a:avLst>
@@ -29682,8 +31857,8 @@
         </p:nvSpPr>
         <p:spPr>
           <a:xfrm>
-            <a:off x="8858930" y="4016378"/>
-            <a:ext cx="1668226" cy="376537"/>
+            <a:off x="9220218" y="3990214"/>
+            <a:ext cx="1796124" cy="376537"/>
           </a:xfrm>
           <a:prstGeom prst="roundRect">
             <a:avLst>
@@ -29717,21 +31892,174 @@
           <a:p>
             <a:pPr algn="ctr"/>
             <a:r>
-              <a:rPr lang="fr-FR" sz="1400" b="1" err="1">
+              <a:rPr lang="fr-FR" sz="1400" b="1" dirty="0" err="1">
                 <a:solidFill>
                   <a:schemeClr val="bg1"/>
                 </a:solidFill>
               </a:rPr>
-              <a:t>DCXxx.</a:t>
+              <a:t>DCXxx.cs</a:t>
             </a:r>
-            <a:r>
-              <a:rPr lang="fr-FR" sz="1400" b="1">
-                <a:solidFill>
-                  <a:schemeClr val="bg1"/>
-                </a:solidFill>
-              </a:rPr>
-              <a:t>cs</a:t>
-            </a:r>
+            <a:endParaRPr lang="fr-FR" sz="1400" b="1" dirty="0">
+              <a:solidFill>
+                <a:schemeClr val="bg1"/>
+              </a:solidFill>
+            </a:endParaRPr>
+          </a:p>
+        </p:txBody>
+      </p:sp>
+      <p:sp>
+        <p:nvSpPr>
+          <p:cNvPr id="2" name="Flèche : bas 79">
+            <a:extLst>
+              <a:ext uri="{FF2B5EF4-FFF2-40B4-BE49-F238E27FC236}">
+                <a16:creationId xmlns:a16="http://schemas.microsoft.com/office/drawing/2014/main" id="{5F461801-9A4D-75F3-B460-B0AFDC304509}"/>
+              </a:ext>
+            </a:extLst>
+          </p:cNvPr>
+          <p:cNvSpPr/>
+          <p:nvPr/>
+        </p:nvSpPr>
+        <p:spPr>
+          <a:xfrm>
+            <a:off x="7103648" y="3219540"/>
+            <a:ext cx="173205" cy="404657"/>
+          </a:xfrm>
+          <a:prstGeom prst="downArrow">
+            <a:avLst>
+              <a:gd name="adj1" fmla="val 55226"/>
+              <a:gd name="adj2" fmla="val 46821"/>
+            </a:avLst>
+          </a:prstGeom>
+          <a:solidFill>
+            <a:srgbClr val="92D050"/>
+          </a:solidFill>
+        </p:spPr>
+        <p:style>
+          <a:lnRef idx="2">
+            <a:schemeClr val="accent1">
+              <a:shade val="50000"/>
+            </a:schemeClr>
+          </a:lnRef>
+          <a:fillRef idx="1">
+            <a:schemeClr val="accent1"/>
+          </a:fillRef>
+          <a:effectRef idx="0">
+            <a:schemeClr val="accent1"/>
+          </a:effectRef>
+          <a:fontRef idx="minor">
+            <a:schemeClr val="lt1"/>
+          </a:fontRef>
+        </p:style>
+        <p:txBody>
+          <a:bodyPr rtlCol="0" anchor="ctr"/>
+          <a:lstStyle/>
+          <a:p>
+            <a:pPr algn="ctr"/>
+            <a:endParaRPr lang="fr-FR"/>
+          </a:p>
+        </p:txBody>
+      </p:sp>
+      <p:sp>
+        <p:nvSpPr>
+          <p:cNvPr id="9" name="Flèche : bas 79">
+            <a:extLst>
+              <a:ext uri="{FF2B5EF4-FFF2-40B4-BE49-F238E27FC236}">
+                <a16:creationId xmlns:a16="http://schemas.microsoft.com/office/drawing/2014/main" id="{30DDF15E-13BF-B845-28DF-CDEB14EE1AE3}"/>
+              </a:ext>
+            </a:extLst>
+          </p:cNvPr>
+          <p:cNvSpPr/>
+          <p:nvPr/>
+        </p:nvSpPr>
+        <p:spPr>
+          <a:xfrm>
+            <a:off x="8347442" y="3254421"/>
+            <a:ext cx="173205" cy="404657"/>
+          </a:xfrm>
+          <a:prstGeom prst="downArrow">
+            <a:avLst>
+              <a:gd name="adj1" fmla="val 55226"/>
+              <a:gd name="adj2" fmla="val 46821"/>
+            </a:avLst>
+          </a:prstGeom>
+          <a:solidFill>
+            <a:srgbClr val="92D050"/>
+          </a:solidFill>
+        </p:spPr>
+        <p:style>
+          <a:lnRef idx="2">
+            <a:schemeClr val="accent1">
+              <a:shade val="50000"/>
+            </a:schemeClr>
+          </a:lnRef>
+          <a:fillRef idx="1">
+            <a:schemeClr val="accent1"/>
+          </a:fillRef>
+          <a:effectRef idx="0">
+            <a:schemeClr val="accent1"/>
+          </a:effectRef>
+          <a:fontRef idx="minor">
+            <a:schemeClr val="lt1"/>
+          </a:fontRef>
+        </p:style>
+        <p:txBody>
+          <a:bodyPr rtlCol="0" anchor="ctr"/>
+          <a:lstStyle/>
+          <a:p>
+            <a:pPr algn="ctr"/>
+            <a:endParaRPr lang="fr-FR"/>
+          </a:p>
+        </p:txBody>
+      </p:sp>
+      <p:sp>
+        <p:nvSpPr>
+          <p:cNvPr id="10" name="Flèche : bas 79">
+            <a:extLst>
+              <a:ext uri="{FF2B5EF4-FFF2-40B4-BE49-F238E27FC236}">
+                <a16:creationId xmlns:a16="http://schemas.microsoft.com/office/drawing/2014/main" id="{CCE1F381-428B-CE89-215E-6554A614090A}"/>
+              </a:ext>
+            </a:extLst>
+          </p:cNvPr>
+          <p:cNvSpPr/>
+          <p:nvPr/>
+        </p:nvSpPr>
+        <p:spPr>
+          <a:xfrm>
+            <a:off x="7117039" y="3803888"/>
+            <a:ext cx="173205" cy="404657"/>
+          </a:xfrm>
+          <a:prstGeom prst="downArrow">
+            <a:avLst>
+              <a:gd name="adj1" fmla="val 55226"/>
+              <a:gd name="adj2" fmla="val 46821"/>
+            </a:avLst>
+          </a:prstGeom>
+          <a:solidFill>
+            <a:srgbClr val="92D050"/>
+          </a:solidFill>
+        </p:spPr>
+        <p:style>
+          <a:lnRef idx="2">
+            <a:schemeClr val="accent1">
+              <a:shade val="50000"/>
+            </a:schemeClr>
+          </a:lnRef>
+          <a:fillRef idx="1">
+            <a:schemeClr val="accent1"/>
+          </a:fillRef>
+          <a:effectRef idx="0">
+            <a:schemeClr val="accent1"/>
+          </a:effectRef>
+          <a:fontRef idx="minor">
+            <a:schemeClr val="lt1"/>
+          </a:fontRef>
+        </p:style>
+        <p:txBody>
+          <a:bodyPr rtlCol="0" anchor="ctr"/>
+          <a:lstStyle/>
+          <a:p>
+            <a:pPr algn="ctr"/>
+            <a:endParaRPr lang="fr-FR"/>
           </a:p>
         </p:txBody>
       </p:sp>
@@ -31124,6 +33452,1625 @@
   <p:cSld>
     <p:spTree>
       <p:nvGrpSpPr>
+        <p:cNvPr id="1" name="">
+          <a:extLst>
+            <a:ext uri="{FF2B5EF4-FFF2-40B4-BE49-F238E27FC236}">
+              <a16:creationId xmlns:a16="http://schemas.microsoft.com/office/drawing/2014/main" id="{FC467108-6332-A43C-67BB-FE17C55B357F}"/>
+            </a:ext>
+          </a:extLst>
+        </p:cNvPr>
+        <p:cNvGrpSpPr/>
+        <p:nvPr/>
+      </p:nvGrpSpPr>
+      <p:grpSpPr>
+        <a:xfrm>
+          <a:off x="0" y="0"/>
+          <a:ext cx="0" cy="0"/>
+          <a:chOff x="0" y="0"/>
+          <a:chExt cx="0" cy="0"/>
+        </a:xfrm>
+      </p:grpSpPr>
+      <p:sp>
+        <p:nvSpPr>
+          <p:cNvPr id="6" name="Espace réservé du numéro de diapositive 5">
+            <a:extLst>
+              <a:ext uri="{FF2B5EF4-FFF2-40B4-BE49-F238E27FC236}">
+                <a16:creationId xmlns:a16="http://schemas.microsoft.com/office/drawing/2014/main" id="{79D436C3-3FCB-4095-7ED0-119C10B5C165}"/>
+              </a:ext>
+            </a:extLst>
+          </p:cNvPr>
+          <p:cNvSpPr>
+            <a:spLocks noGrp="1"/>
+          </p:cNvSpPr>
+          <p:nvPr>
+            <p:ph type="sldNum" sz="quarter" idx="10"/>
+          </p:nvPr>
+        </p:nvSpPr>
+        <p:spPr/>
+        <p:txBody>
+          <a:bodyPr/>
+          <a:lstStyle/>
+          <a:p>
+            <a:fld id="{E14D0CC5-784E-4B7E-B9F4-EE71C08DA69C}" type="slidenum">
+              <a:rPr lang="fr-FR" smtClean="0"/>
+              <a:t>7</a:t>
+            </a:fld>
+            <a:endParaRPr lang="fr-FR" dirty="0"/>
+          </a:p>
+        </p:txBody>
+      </p:sp>
+      <p:sp>
+        <p:nvSpPr>
+          <p:cNvPr id="15" name="Text Placeholder 14">
+            <a:extLst>
+              <a:ext uri="{FF2B5EF4-FFF2-40B4-BE49-F238E27FC236}">
+                <a16:creationId xmlns:a16="http://schemas.microsoft.com/office/drawing/2014/main" id="{B001B635-EDCD-F2B0-AF76-6F57CD8B71E9}"/>
+              </a:ext>
+            </a:extLst>
+          </p:cNvPr>
+          <p:cNvSpPr>
+            <a:spLocks noGrp="1"/>
+          </p:cNvSpPr>
+          <p:nvPr>
+            <p:ph type="body" sz="quarter" idx="19"/>
+          </p:nvPr>
+        </p:nvSpPr>
+        <p:spPr>
+          <a:xfrm>
+            <a:off x="838200" y="1089498"/>
+            <a:ext cx="5411989" cy="4889103"/>
+          </a:xfrm>
+        </p:spPr>
+        <p:txBody>
+          <a:bodyPr/>
+          <a:lstStyle/>
+          <a:p>
+            <a:pPr marL="0" indent="0" algn="ctr">
+              <a:buNone/>
+            </a:pPr>
+            <a:r>
+              <a:rPr lang="en-US" dirty="0"/>
+              <a:t>REST</a:t>
+            </a:r>
+          </a:p>
+        </p:txBody>
+      </p:sp>
+      <p:sp>
+        <p:nvSpPr>
+          <p:cNvPr id="7" name="Espace réservé du texte 6">
+            <a:extLst>
+              <a:ext uri="{FF2B5EF4-FFF2-40B4-BE49-F238E27FC236}">
+                <a16:creationId xmlns:a16="http://schemas.microsoft.com/office/drawing/2014/main" id="{11F2C881-EA88-0BB3-E3D4-DBD284FB4D4B}"/>
+              </a:ext>
+            </a:extLst>
+          </p:cNvPr>
+          <p:cNvSpPr>
+            <a:spLocks noGrp="1"/>
+          </p:cNvSpPr>
+          <p:nvPr>
+            <p:ph type="body" sz="quarter" idx="16"/>
+          </p:nvPr>
+        </p:nvSpPr>
+        <p:spPr/>
+        <p:txBody>
+          <a:bodyPr/>
+          <a:lstStyle/>
+          <a:p>
+            <a:r>
+              <a:rPr lang="fr-FR" dirty="0">
+                <a:latin typeface="Arial"/>
+                <a:cs typeface="Arial"/>
+              </a:rPr>
+              <a:t>Architecture</a:t>
+            </a:r>
+            <a:endParaRPr lang="fr-FR" dirty="0"/>
+          </a:p>
+        </p:txBody>
+      </p:sp>
+      <p:sp>
+        <p:nvSpPr>
+          <p:cNvPr id="16" name="Text Placeholder 15">
+            <a:extLst>
+              <a:ext uri="{FF2B5EF4-FFF2-40B4-BE49-F238E27FC236}">
+                <a16:creationId xmlns:a16="http://schemas.microsoft.com/office/drawing/2014/main" id="{26EFF5C1-47C0-B05F-2482-F401F095B474}"/>
+              </a:ext>
+            </a:extLst>
+          </p:cNvPr>
+          <p:cNvSpPr>
+            <a:spLocks noGrp="1"/>
+          </p:cNvSpPr>
+          <p:nvPr>
+            <p:ph type="body" sz="quarter" idx="20"/>
+          </p:nvPr>
+        </p:nvSpPr>
+        <p:spPr>
+          <a:xfrm>
+            <a:off x="6404141" y="1089498"/>
+            <a:ext cx="4876633" cy="4889103"/>
+          </a:xfrm>
+        </p:spPr>
+        <p:txBody>
+          <a:bodyPr/>
+          <a:lstStyle/>
+          <a:p>
+            <a:pPr marL="0" indent="0" algn="ctr">
+              <a:buFont typeface="Arial" panose="020B0604020202020204" pitchFamily="34" charset="0"/>
+              <a:buNone/>
+            </a:pPr>
+            <a:r>
+              <a:rPr lang="en-US" dirty="0"/>
+              <a:t>SOAP</a:t>
+            </a:r>
+            <a:endParaRPr lang="fr-FR" dirty="0">
+              <a:solidFill>
+                <a:schemeClr val="tx2"/>
+              </a:solidFill>
+              <a:ea typeface="+mn-lt"/>
+              <a:cs typeface="+mn-lt"/>
+            </a:endParaRPr>
+          </a:p>
+          <a:p>
+            <a:pPr marL="216000" indent="-144000">
+              <a:spcBef>
+                <a:spcPts val="300"/>
+              </a:spcBef>
+            </a:pPr>
+            <a:endParaRPr lang="fr-FR" b="0" dirty="0">
+              <a:solidFill>
+                <a:schemeClr val="tx2"/>
+              </a:solidFill>
+              <a:ea typeface="+mn-lt"/>
+              <a:cs typeface="+mn-lt"/>
+            </a:endParaRPr>
+          </a:p>
+          <a:p>
+            <a:pPr marL="216000" indent="-144000">
+              <a:spcBef>
+                <a:spcPts val="300"/>
+              </a:spcBef>
+            </a:pPr>
+            <a:r>
+              <a:rPr lang="fr-FR" dirty="0">
+                <a:solidFill>
+                  <a:schemeClr val="tx2"/>
+                </a:solidFill>
+                <a:ea typeface="+mn-lt"/>
+                <a:cs typeface="+mn-lt"/>
+              </a:rPr>
+              <a:t>Expose a </a:t>
+            </a:r>
+            <a:r>
+              <a:rPr lang="fr-FR" dirty="0" err="1">
+                <a:solidFill>
+                  <a:schemeClr val="tx2"/>
+                </a:solidFill>
+                <a:ea typeface="+mn-lt"/>
+                <a:cs typeface="+mn-lt"/>
+              </a:rPr>
+              <a:t>Contract</a:t>
+            </a:r>
+            <a:r>
+              <a:rPr lang="fr-FR" dirty="0">
+                <a:solidFill>
+                  <a:schemeClr val="tx2"/>
+                </a:solidFill>
+                <a:ea typeface="+mn-lt"/>
+                <a:cs typeface="+mn-lt"/>
+              </a:rPr>
+              <a:t> : WSDL</a:t>
+            </a:r>
+          </a:p>
+          <a:p>
+            <a:pPr marL="504000" lvl="1" indent="-144000">
+              <a:spcBef>
+                <a:spcPts val="300"/>
+              </a:spcBef>
+            </a:pPr>
+            <a:r>
+              <a:rPr lang="fr-FR" dirty="0">
+                <a:ea typeface="+mn-lt"/>
+                <a:cs typeface="+mn-lt"/>
+              </a:rPr>
+              <a:t>Opération, Input, Output</a:t>
+            </a:r>
+            <a:endParaRPr lang="fr-FR" dirty="0">
+              <a:solidFill>
+                <a:schemeClr val="tx2"/>
+              </a:solidFill>
+              <a:ea typeface="+mn-lt"/>
+              <a:cs typeface="+mn-lt"/>
+            </a:endParaRPr>
+          </a:p>
+          <a:p>
+            <a:pPr marL="216000" indent="-144000">
+              <a:spcBef>
+                <a:spcPts val="300"/>
+              </a:spcBef>
+            </a:pPr>
+            <a:r>
+              <a:rPr lang="fr-FR" dirty="0" err="1">
+                <a:solidFill>
+                  <a:schemeClr val="tx2"/>
+                </a:solidFill>
+                <a:ea typeface="+mn-lt"/>
+                <a:cs typeface="+mn-lt"/>
+              </a:rPr>
+              <a:t>Built-In</a:t>
+            </a:r>
+            <a:r>
+              <a:rPr lang="fr-FR" dirty="0">
+                <a:solidFill>
+                  <a:schemeClr val="tx2"/>
+                </a:solidFill>
+                <a:ea typeface="+mn-lt"/>
+                <a:cs typeface="+mn-lt"/>
+              </a:rPr>
+              <a:t> </a:t>
+            </a:r>
+            <a:r>
+              <a:rPr lang="fr-FR" dirty="0" err="1">
+                <a:solidFill>
+                  <a:schemeClr val="tx2"/>
+                </a:solidFill>
+                <a:ea typeface="+mn-lt"/>
+                <a:cs typeface="+mn-lt"/>
+              </a:rPr>
+              <a:t>Error</a:t>
+            </a:r>
+            <a:r>
+              <a:rPr lang="fr-FR" dirty="0">
+                <a:solidFill>
+                  <a:schemeClr val="tx2"/>
+                </a:solidFill>
+                <a:ea typeface="+mn-lt"/>
+                <a:cs typeface="+mn-lt"/>
+              </a:rPr>
+              <a:t> Handling </a:t>
+            </a:r>
+            <a:r>
+              <a:rPr lang="fr-FR" b="0" dirty="0">
+                <a:solidFill>
+                  <a:schemeClr val="tx2"/>
+                </a:solidFill>
+                <a:ea typeface="+mn-lt"/>
+                <a:cs typeface="+mn-lt"/>
+              </a:rPr>
+              <a:t>(</a:t>
+            </a:r>
+            <a:r>
+              <a:rPr lang="fr-FR" b="0" dirty="0" err="1">
+                <a:solidFill>
+                  <a:schemeClr val="tx2"/>
+                </a:solidFill>
+                <a:ea typeface="+mn-lt"/>
+                <a:cs typeface="+mn-lt"/>
+              </a:rPr>
+              <a:t>faults</a:t>
+            </a:r>
+            <a:r>
+              <a:rPr lang="fr-FR" b="0" dirty="0">
+                <a:solidFill>
+                  <a:schemeClr val="tx2"/>
+                </a:solidFill>
+                <a:ea typeface="+mn-lt"/>
+                <a:cs typeface="+mn-lt"/>
+              </a:rPr>
+              <a:t>)</a:t>
+            </a:r>
+          </a:p>
+          <a:p>
+            <a:endParaRPr lang="en-US" dirty="0"/>
+          </a:p>
+        </p:txBody>
+      </p:sp>
+      <p:sp>
+        <p:nvSpPr>
+          <p:cNvPr id="2" name="Titre 1">
+            <a:extLst>
+              <a:ext uri="{FF2B5EF4-FFF2-40B4-BE49-F238E27FC236}">
+                <a16:creationId xmlns:a16="http://schemas.microsoft.com/office/drawing/2014/main" id="{6C47B638-1396-12D7-2249-D2625AC732C8}"/>
+              </a:ext>
+            </a:extLst>
+          </p:cNvPr>
+          <p:cNvSpPr>
+            <a:spLocks noGrp="1"/>
+          </p:cNvSpPr>
+          <p:nvPr>
+            <p:ph type="title"/>
+          </p:nvPr>
+        </p:nvSpPr>
+        <p:spPr/>
+        <p:txBody>
+          <a:bodyPr/>
+          <a:lstStyle/>
+          <a:p>
+            <a:r>
+              <a:rPr lang="fr-FR" dirty="0"/>
+              <a:t>SOAP vs. REST</a:t>
+            </a:r>
+            <a:endParaRPr lang="fr-LU" dirty="0"/>
+          </a:p>
+        </p:txBody>
+      </p:sp>
+      <p:sp>
+        <p:nvSpPr>
+          <p:cNvPr id="14" name="Espace réservé du pied de page 5">
+            <a:extLst>
+              <a:ext uri="{FF2B5EF4-FFF2-40B4-BE49-F238E27FC236}">
+                <a16:creationId xmlns:a16="http://schemas.microsoft.com/office/drawing/2014/main" id="{4745FBC7-CD3A-91D5-601F-63035AB7D297}"/>
+              </a:ext>
+            </a:extLst>
+          </p:cNvPr>
+          <p:cNvSpPr>
+            <a:spLocks noGrp="1"/>
+          </p:cNvSpPr>
+          <p:nvPr>
+            <p:ph type="ftr" sz="quarter" idx="3"/>
+          </p:nvPr>
+        </p:nvSpPr>
+        <p:spPr>
+          <a:prstGeom prst="roundRect">
+            <a:avLst>
+              <a:gd name="adj" fmla="val 33687"/>
+            </a:avLst>
+          </a:prstGeom>
+          <a:ln w="19050">
+            <a:solidFill>
+              <a:schemeClr val="tx1"/>
+            </a:solidFill>
+          </a:ln>
+        </p:spPr>
+        <p:txBody>
+          <a:bodyPr vert="horz" lIns="91440" tIns="45720" rIns="91440" bIns="45720" rtlCol="0" anchor="ctr"/>
+          <a:lstStyle>
+            <a:lvl1pPr algn="ctr">
+              <a:defRPr lang="fr-FR" sz="1400" b="0" kern="1200" dirty="0" err="1">
+                <a:solidFill>
+                  <a:schemeClr val="tx2"/>
+                </a:solidFill>
+                <a:latin typeface="+mn-lt"/>
+                <a:ea typeface="+mn-ea"/>
+                <a:cs typeface="+mn-cs"/>
+              </a:defRPr>
+            </a:lvl1pPr>
+          </a:lstStyle>
+          <a:p>
+            <a:r>
+              <a:rPr lang="fr-LU" dirty="0"/>
+              <a:t>Unlocked By | K</a:t>
+            </a:r>
+            <a:endParaRPr lang="fr-FR" dirty="0"/>
+          </a:p>
+        </p:txBody>
+      </p:sp>
+      <p:sp>
+        <p:nvSpPr>
+          <p:cNvPr id="18" name="Espace réservé du texte 7">
+            <a:extLst>
+              <a:ext uri="{FF2B5EF4-FFF2-40B4-BE49-F238E27FC236}">
+                <a16:creationId xmlns:a16="http://schemas.microsoft.com/office/drawing/2014/main" id="{AE578017-88CB-D884-64FE-260828BCC9E1}"/>
+              </a:ext>
+            </a:extLst>
+          </p:cNvPr>
+          <p:cNvSpPr txBox="1">
+            <a:spLocks/>
+          </p:cNvSpPr>
+          <p:nvPr/>
+        </p:nvSpPr>
+        <p:spPr>
+          <a:xfrm>
+            <a:off x="924863" y="1508756"/>
+            <a:ext cx="2934475" cy="1761991"/>
+          </a:xfrm>
+          <a:prstGeom prst="roundRect">
+            <a:avLst>
+              <a:gd name="adj" fmla="val 8125"/>
+            </a:avLst>
+          </a:prstGeom>
+          <a:ln w="15875">
+            <a:solidFill>
+              <a:schemeClr val="accent1"/>
+            </a:solidFill>
+          </a:ln>
+        </p:spPr>
+        <p:txBody>
+          <a:bodyPr vert="horz" lIns="0" tIns="0" rIns="0" bIns="0" rtlCol="0" anchor="t">
+            <a:noAutofit/>
+          </a:bodyPr>
+          <a:lstStyle>
+            <a:lvl1pPr marL="360000" indent="-360000" algn="l" defTabSz="914400" rtl="0" eaLnBrk="1" latinLnBrk="0" hangingPunct="1">
+              <a:lnSpc>
+                <a:spcPct val="90000"/>
+              </a:lnSpc>
+              <a:spcBef>
+                <a:spcPts val="1000"/>
+              </a:spcBef>
+              <a:buFont typeface="Arial" panose="020B0604020202020204" pitchFamily="34" charset="0"/>
+              <a:buChar char="•"/>
+              <a:defRPr sz="2000" b="1" kern="1200">
+                <a:solidFill>
+                  <a:schemeClr val="tx1"/>
+                </a:solidFill>
+                <a:latin typeface="+mn-lt"/>
+                <a:ea typeface="+mn-ea"/>
+                <a:cs typeface="+mn-cs"/>
+              </a:defRPr>
+            </a:lvl1pPr>
+            <a:lvl2pPr marL="648000" indent="-360000" algn="l" defTabSz="914400" rtl="0" eaLnBrk="1" latinLnBrk="0" hangingPunct="1">
+              <a:lnSpc>
+                <a:spcPct val="90000"/>
+              </a:lnSpc>
+              <a:spcBef>
+                <a:spcPts val="1200"/>
+              </a:spcBef>
+              <a:buFont typeface="Arial" panose="020B0604020202020204" pitchFamily="34" charset="0"/>
+              <a:buChar char="•"/>
+              <a:defRPr sz="1800" b="1" kern="1200">
+                <a:solidFill>
+                  <a:schemeClr val="tx2"/>
+                </a:solidFill>
+                <a:latin typeface="+mn-lt"/>
+                <a:ea typeface="+mn-ea"/>
+                <a:cs typeface="+mn-cs"/>
+              </a:defRPr>
+            </a:lvl2pPr>
+            <a:lvl3pPr marL="648000" indent="-360000" algn="l" defTabSz="914400" rtl="0" eaLnBrk="1" latinLnBrk="0" hangingPunct="1">
+              <a:lnSpc>
+                <a:spcPct val="90000"/>
+              </a:lnSpc>
+              <a:spcBef>
+                <a:spcPts val="1200"/>
+              </a:spcBef>
+              <a:buFont typeface="Arial" panose="020B0604020202020204" pitchFamily="34" charset="0"/>
+              <a:buChar char="•"/>
+              <a:defRPr sz="1800" b="1" kern="1200">
+                <a:solidFill>
+                  <a:schemeClr val="bg1">
+                    <a:lumMod val="65000"/>
+                  </a:schemeClr>
+                </a:solidFill>
+                <a:latin typeface="+mn-lt"/>
+                <a:ea typeface="+mn-ea"/>
+                <a:cs typeface="+mn-cs"/>
+              </a:defRPr>
+            </a:lvl3pPr>
+            <a:lvl4pPr marL="720000" indent="-270000" algn="l" defTabSz="914400" rtl="0" eaLnBrk="1" latinLnBrk="0" hangingPunct="1">
+              <a:lnSpc>
+                <a:spcPct val="90000"/>
+              </a:lnSpc>
+              <a:spcBef>
+                <a:spcPts val="1000"/>
+              </a:spcBef>
+              <a:buFont typeface="Arial" panose="020B0604020202020204" pitchFamily="34" charset="0"/>
+              <a:buChar char="•"/>
+              <a:defRPr sz="1600" kern="1200">
+                <a:solidFill>
+                  <a:schemeClr val="tx2"/>
+                </a:solidFill>
+                <a:latin typeface="+mn-lt"/>
+                <a:ea typeface="+mn-ea"/>
+                <a:cs typeface="+mn-cs"/>
+              </a:defRPr>
+            </a:lvl4pPr>
+            <a:lvl5pPr marL="630000" indent="-270000" algn="l" defTabSz="914400" rtl="0" eaLnBrk="1" latinLnBrk="0" hangingPunct="1">
+              <a:lnSpc>
+                <a:spcPct val="90000"/>
+              </a:lnSpc>
+              <a:spcBef>
+                <a:spcPts val="1000"/>
+              </a:spcBef>
+              <a:buFont typeface="Arial" panose="020B0604020202020204" pitchFamily="34" charset="0"/>
+              <a:buChar char="•"/>
+              <a:defRPr sz="1600" kern="1200">
+                <a:solidFill>
+                  <a:schemeClr val="tx2"/>
+                </a:solidFill>
+                <a:latin typeface="+mn-lt"/>
+                <a:ea typeface="+mn-ea"/>
+                <a:cs typeface="+mn-cs"/>
+              </a:defRPr>
+            </a:lvl5pPr>
+            <a:lvl6pPr marL="2514600" indent="-228600" algn="l" defTabSz="914400" rtl="0" eaLnBrk="1" latinLnBrk="0" hangingPunct="1">
+              <a:lnSpc>
+                <a:spcPct val="90000"/>
+              </a:lnSpc>
+              <a:spcBef>
+                <a:spcPts val="500"/>
+              </a:spcBef>
+              <a:buFont typeface="Arial" panose="020B0604020202020204" pitchFamily="34" charset="0"/>
+              <a:buChar char="•"/>
+              <a:defRPr sz="1800" kern="1200">
+                <a:solidFill>
+                  <a:schemeClr val="tx1"/>
+                </a:solidFill>
+                <a:latin typeface="+mn-lt"/>
+                <a:ea typeface="+mn-ea"/>
+                <a:cs typeface="+mn-cs"/>
+              </a:defRPr>
+            </a:lvl6pPr>
+            <a:lvl7pPr marL="2971800" indent="-228600" algn="l" defTabSz="914400" rtl="0" eaLnBrk="1" latinLnBrk="0" hangingPunct="1">
+              <a:lnSpc>
+                <a:spcPct val="90000"/>
+              </a:lnSpc>
+              <a:spcBef>
+                <a:spcPts val="500"/>
+              </a:spcBef>
+              <a:buFont typeface="Arial" panose="020B0604020202020204" pitchFamily="34" charset="0"/>
+              <a:buChar char="•"/>
+              <a:defRPr sz="1800" kern="1200">
+                <a:solidFill>
+                  <a:schemeClr val="tx1"/>
+                </a:solidFill>
+                <a:latin typeface="+mn-lt"/>
+                <a:ea typeface="+mn-ea"/>
+                <a:cs typeface="+mn-cs"/>
+              </a:defRPr>
+            </a:lvl7pPr>
+            <a:lvl8pPr marL="3429000" indent="-228600" algn="l" defTabSz="914400" rtl="0" eaLnBrk="1" latinLnBrk="0" hangingPunct="1">
+              <a:lnSpc>
+                <a:spcPct val="90000"/>
+              </a:lnSpc>
+              <a:spcBef>
+                <a:spcPts val="500"/>
+              </a:spcBef>
+              <a:buFont typeface="Arial" panose="020B0604020202020204" pitchFamily="34" charset="0"/>
+              <a:buChar char="•"/>
+              <a:defRPr sz="1800" kern="1200">
+                <a:solidFill>
+                  <a:schemeClr val="tx1"/>
+                </a:solidFill>
+                <a:latin typeface="+mn-lt"/>
+                <a:ea typeface="+mn-ea"/>
+                <a:cs typeface="+mn-cs"/>
+              </a:defRPr>
+            </a:lvl8pPr>
+            <a:lvl9pPr marL="3886200" indent="-228600" algn="l" defTabSz="914400" rtl="0" eaLnBrk="1" latinLnBrk="0" hangingPunct="1">
+              <a:lnSpc>
+                <a:spcPct val="90000"/>
+              </a:lnSpc>
+              <a:spcBef>
+                <a:spcPts val="500"/>
+              </a:spcBef>
+              <a:buFont typeface="Arial" panose="020B0604020202020204" pitchFamily="34" charset="0"/>
+              <a:buChar char="•"/>
+              <a:defRPr sz="1800" kern="1200">
+                <a:solidFill>
+                  <a:schemeClr val="tx1"/>
+                </a:solidFill>
+                <a:latin typeface="+mn-lt"/>
+                <a:ea typeface="+mn-ea"/>
+                <a:cs typeface="+mn-cs"/>
+              </a:defRPr>
+            </a:lvl9pPr>
+          </a:lstStyle>
+          <a:p>
+            <a:pPr marL="0" indent="0" algn="ctr">
+              <a:spcBef>
+                <a:spcPts val="600"/>
+              </a:spcBef>
+              <a:buFont typeface="Arial" panose="020B0604020202020204" pitchFamily="34" charset="0"/>
+              <a:buNone/>
+            </a:pPr>
+            <a:r>
+              <a:rPr lang="en-US" sz="1800" noProof="0" dirty="0"/>
+              <a:t>Definition</a:t>
+            </a:r>
+          </a:p>
+          <a:p>
+            <a:pPr marL="287655" indent="-215900">
+              <a:spcBef>
+                <a:spcPts val="600"/>
+              </a:spcBef>
+            </a:pPr>
+            <a:r>
+              <a:rPr lang="en-US" sz="1400" b="0" noProof="0" dirty="0">
+                <a:solidFill>
+                  <a:schemeClr val="tx2"/>
+                </a:solidFill>
+                <a:ea typeface="+mn-lt"/>
+                <a:cs typeface="+mn-lt"/>
+              </a:rPr>
+              <a:t>REpresentional State Transfer</a:t>
+            </a:r>
+          </a:p>
+          <a:p>
+            <a:pPr marL="287655" indent="-215900">
+              <a:spcBef>
+                <a:spcPts val="600"/>
+              </a:spcBef>
+            </a:pPr>
+            <a:r>
+              <a:rPr lang="en-US" sz="1400" b="0" noProof="0" dirty="0">
+                <a:solidFill>
+                  <a:schemeClr val="tx2"/>
+                </a:solidFill>
+                <a:ea typeface="+mn-lt"/>
+                <a:cs typeface="+mn-lt"/>
+              </a:rPr>
+              <a:t>It’s an « Architecture Style »</a:t>
+            </a:r>
+          </a:p>
+          <a:p>
+            <a:pPr marL="287655" indent="-215900">
+              <a:spcBef>
+                <a:spcPts val="600"/>
+              </a:spcBef>
+            </a:pPr>
+            <a:r>
+              <a:rPr lang="en-US" sz="1400" noProof="0" dirty="0">
+                <a:solidFill>
+                  <a:schemeClr val="tx2"/>
+                </a:solidFill>
+                <a:ea typeface="+mn-lt"/>
+                <a:cs typeface="+mn-lt"/>
+              </a:rPr>
+              <a:t>Format.</a:t>
+            </a:r>
+            <a:r>
+              <a:rPr lang="en-US" sz="1400" b="0" noProof="0" dirty="0">
+                <a:solidFill>
+                  <a:schemeClr val="tx2"/>
+                </a:solidFill>
+                <a:ea typeface="+mn-lt"/>
+                <a:cs typeface="+mn-lt"/>
+              </a:rPr>
+              <a:t> JSON, XML, HTML…</a:t>
+            </a:r>
+          </a:p>
+          <a:p>
+            <a:pPr marL="287655" indent="-215900">
+              <a:spcBef>
+                <a:spcPts val="600"/>
+              </a:spcBef>
+            </a:pPr>
+            <a:r>
+              <a:rPr lang="en-US" sz="1400" noProof="0" dirty="0">
+                <a:solidFill>
+                  <a:schemeClr val="tx2"/>
+                </a:solidFill>
+                <a:ea typeface="+mn-lt"/>
+                <a:cs typeface="+mn-lt"/>
+              </a:rPr>
+              <a:t>Transport.</a:t>
+            </a:r>
+            <a:r>
+              <a:rPr lang="en-US" sz="1400" b="0" noProof="0" dirty="0">
+                <a:solidFill>
+                  <a:schemeClr val="tx2"/>
+                </a:solidFill>
+                <a:ea typeface="+mn-lt"/>
+                <a:cs typeface="+mn-lt"/>
+              </a:rPr>
+              <a:t> HTTP (Primarily)</a:t>
+            </a:r>
+          </a:p>
+          <a:p>
+            <a:pPr marL="287655" indent="-215900">
+              <a:spcBef>
+                <a:spcPts val="600"/>
+              </a:spcBef>
+            </a:pPr>
+            <a:r>
+              <a:rPr lang="en-US" sz="1400" noProof="0" dirty="0">
+                <a:solidFill>
+                  <a:schemeClr val="tx2"/>
+                </a:solidFill>
+                <a:ea typeface="+mn-lt"/>
+                <a:cs typeface="+mn-lt"/>
+              </a:rPr>
+              <a:t>State.</a:t>
+            </a:r>
+            <a:r>
+              <a:rPr lang="en-US" sz="1400" b="0" noProof="0" dirty="0">
+                <a:solidFill>
+                  <a:schemeClr val="tx2"/>
+                </a:solidFill>
+                <a:ea typeface="+mn-lt"/>
+                <a:cs typeface="+mn-lt"/>
+              </a:rPr>
+              <a:t> Stateless</a:t>
+            </a:r>
+          </a:p>
+          <a:p>
+            <a:pPr marL="0" indent="0" algn="ctr">
+              <a:spcBef>
+                <a:spcPts val="600"/>
+              </a:spcBef>
+              <a:buFont typeface="Arial" panose="020B0604020202020204" pitchFamily="34" charset="0"/>
+              <a:buNone/>
+            </a:pPr>
+            <a:endParaRPr lang="en-US" sz="1800" b="0" noProof="0" dirty="0">
+              <a:solidFill>
+                <a:schemeClr val="tx2"/>
+              </a:solidFill>
+              <a:ea typeface="+mn-lt"/>
+              <a:cs typeface="+mn-lt"/>
+            </a:endParaRPr>
+          </a:p>
+        </p:txBody>
+      </p:sp>
+      <p:sp>
+        <p:nvSpPr>
+          <p:cNvPr id="3" name="Espace réservé du texte 7">
+            <a:extLst>
+              <a:ext uri="{FF2B5EF4-FFF2-40B4-BE49-F238E27FC236}">
+                <a16:creationId xmlns:a16="http://schemas.microsoft.com/office/drawing/2014/main" id="{AA385AC7-0E8B-48EA-E7BC-30DA59E14EDD}"/>
+              </a:ext>
+            </a:extLst>
+          </p:cNvPr>
+          <p:cNvSpPr txBox="1">
+            <a:spLocks/>
+          </p:cNvSpPr>
+          <p:nvPr/>
+        </p:nvSpPr>
+        <p:spPr>
+          <a:xfrm>
+            <a:off x="4013290" y="1508756"/>
+            <a:ext cx="2236899" cy="1484205"/>
+          </a:xfrm>
+          <a:prstGeom prst="roundRect">
+            <a:avLst>
+              <a:gd name="adj" fmla="val 12271"/>
+            </a:avLst>
+          </a:prstGeom>
+          <a:ln w="15875">
+            <a:solidFill>
+              <a:schemeClr val="accent1"/>
+            </a:solidFill>
+          </a:ln>
+        </p:spPr>
+        <p:txBody>
+          <a:bodyPr vert="horz" lIns="0" tIns="0" rIns="0" bIns="0" rtlCol="0" anchor="t">
+            <a:noAutofit/>
+          </a:bodyPr>
+          <a:lstStyle>
+            <a:lvl1pPr marL="360000" indent="-360000" algn="l" defTabSz="914400" rtl="0" eaLnBrk="1" latinLnBrk="0" hangingPunct="1">
+              <a:lnSpc>
+                <a:spcPct val="90000"/>
+              </a:lnSpc>
+              <a:spcBef>
+                <a:spcPts val="1000"/>
+              </a:spcBef>
+              <a:buFont typeface="Arial" panose="020B0604020202020204" pitchFamily="34" charset="0"/>
+              <a:buChar char="•"/>
+              <a:defRPr sz="2000" b="1" kern="1200">
+                <a:solidFill>
+                  <a:schemeClr val="tx1"/>
+                </a:solidFill>
+                <a:latin typeface="+mn-lt"/>
+                <a:ea typeface="+mn-ea"/>
+                <a:cs typeface="+mn-cs"/>
+              </a:defRPr>
+            </a:lvl1pPr>
+            <a:lvl2pPr marL="648000" indent="-360000" algn="l" defTabSz="914400" rtl="0" eaLnBrk="1" latinLnBrk="0" hangingPunct="1">
+              <a:lnSpc>
+                <a:spcPct val="90000"/>
+              </a:lnSpc>
+              <a:spcBef>
+                <a:spcPts val="1200"/>
+              </a:spcBef>
+              <a:buFont typeface="Arial" panose="020B0604020202020204" pitchFamily="34" charset="0"/>
+              <a:buChar char="•"/>
+              <a:defRPr sz="1800" b="1" kern="1200">
+                <a:solidFill>
+                  <a:schemeClr val="tx2"/>
+                </a:solidFill>
+                <a:latin typeface="+mn-lt"/>
+                <a:ea typeface="+mn-ea"/>
+                <a:cs typeface="+mn-cs"/>
+              </a:defRPr>
+            </a:lvl2pPr>
+            <a:lvl3pPr marL="648000" indent="-360000" algn="l" defTabSz="914400" rtl="0" eaLnBrk="1" latinLnBrk="0" hangingPunct="1">
+              <a:lnSpc>
+                <a:spcPct val="90000"/>
+              </a:lnSpc>
+              <a:spcBef>
+                <a:spcPts val="1200"/>
+              </a:spcBef>
+              <a:buFont typeface="Arial" panose="020B0604020202020204" pitchFamily="34" charset="0"/>
+              <a:buChar char="•"/>
+              <a:defRPr sz="1800" b="1" kern="1200">
+                <a:solidFill>
+                  <a:schemeClr val="bg1">
+                    <a:lumMod val="65000"/>
+                  </a:schemeClr>
+                </a:solidFill>
+                <a:latin typeface="+mn-lt"/>
+                <a:ea typeface="+mn-ea"/>
+                <a:cs typeface="+mn-cs"/>
+              </a:defRPr>
+            </a:lvl3pPr>
+            <a:lvl4pPr marL="720000" indent="-270000" algn="l" defTabSz="914400" rtl="0" eaLnBrk="1" latinLnBrk="0" hangingPunct="1">
+              <a:lnSpc>
+                <a:spcPct val="90000"/>
+              </a:lnSpc>
+              <a:spcBef>
+                <a:spcPts val="1000"/>
+              </a:spcBef>
+              <a:buFont typeface="Arial" panose="020B0604020202020204" pitchFamily="34" charset="0"/>
+              <a:buChar char="•"/>
+              <a:defRPr sz="1600" kern="1200">
+                <a:solidFill>
+                  <a:schemeClr val="tx2"/>
+                </a:solidFill>
+                <a:latin typeface="+mn-lt"/>
+                <a:ea typeface="+mn-ea"/>
+                <a:cs typeface="+mn-cs"/>
+              </a:defRPr>
+            </a:lvl4pPr>
+            <a:lvl5pPr marL="630000" indent="-270000" algn="l" defTabSz="914400" rtl="0" eaLnBrk="1" latinLnBrk="0" hangingPunct="1">
+              <a:lnSpc>
+                <a:spcPct val="90000"/>
+              </a:lnSpc>
+              <a:spcBef>
+                <a:spcPts val="1000"/>
+              </a:spcBef>
+              <a:buFont typeface="Arial" panose="020B0604020202020204" pitchFamily="34" charset="0"/>
+              <a:buChar char="•"/>
+              <a:defRPr sz="1600" kern="1200">
+                <a:solidFill>
+                  <a:schemeClr val="tx2"/>
+                </a:solidFill>
+                <a:latin typeface="+mn-lt"/>
+                <a:ea typeface="+mn-ea"/>
+                <a:cs typeface="+mn-cs"/>
+              </a:defRPr>
+            </a:lvl5pPr>
+            <a:lvl6pPr marL="2514600" indent="-228600" algn="l" defTabSz="914400" rtl="0" eaLnBrk="1" latinLnBrk="0" hangingPunct="1">
+              <a:lnSpc>
+                <a:spcPct val="90000"/>
+              </a:lnSpc>
+              <a:spcBef>
+                <a:spcPts val="500"/>
+              </a:spcBef>
+              <a:buFont typeface="Arial" panose="020B0604020202020204" pitchFamily="34" charset="0"/>
+              <a:buChar char="•"/>
+              <a:defRPr sz="1800" kern="1200">
+                <a:solidFill>
+                  <a:schemeClr val="tx1"/>
+                </a:solidFill>
+                <a:latin typeface="+mn-lt"/>
+                <a:ea typeface="+mn-ea"/>
+                <a:cs typeface="+mn-cs"/>
+              </a:defRPr>
+            </a:lvl6pPr>
+            <a:lvl7pPr marL="2971800" indent="-228600" algn="l" defTabSz="914400" rtl="0" eaLnBrk="1" latinLnBrk="0" hangingPunct="1">
+              <a:lnSpc>
+                <a:spcPct val="90000"/>
+              </a:lnSpc>
+              <a:spcBef>
+                <a:spcPts val="500"/>
+              </a:spcBef>
+              <a:buFont typeface="Arial" panose="020B0604020202020204" pitchFamily="34" charset="0"/>
+              <a:buChar char="•"/>
+              <a:defRPr sz="1800" kern="1200">
+                <a:solidFill>
+                  <a:schemeClr val="tx1"/>
+                </a:solidFill>
+                <a:latin typeface="+mn-lt"/>
+                <a:ea typeface="+mn-ea"/>
+                <a:cs typeface="+mn-cs"/>
+              </a:defRPr>
+            </a:lvl7pPr>
+            <a:lvl8pPr marL="3429000" indent="-228600" algn="l" defTabSz="914400" rtl="0" eaLnBrk="1" latinLnBrk="0" hangingPunct="1">
+              <a:lnSpc>
+                <a:spcPct val="90000"/>
+              </a:lnSpc>
+              <a:spcBef>
+                <a:spcPts val="500"/>
+              </a:spcBef>
+              <a:buFont typeface="Arial" panose="020B0604020202020204" pitchFamily="34" charset="0"/>
+              <a:buChar char="•"/>
+              <a:defRPr sz="1800" kern="1200">
+                <a:solidFill>
+                  <a:schemeClr val="tx1"/>
+                </a:solidFill>
+                <a:latin typeface="+mn-lt"/>
+                <a:ea typeface="+mn-ea"/>
+                <a:cs typeface="+mn-cs"/>
+              </a:defRPr>
+            </a:lvl8pPr>
+            <a:lvl9pPr marL="3886200" indent="-228600" algn="l" defTabSz="914400" rtl="0" eaLnBrk="1" latinLnBrk="0" hangingPunct="1">
+              <a:lnSpc>
+                <a:spcPct val="90000"/>
+              </a:lnSpc>
+              <a:spcBef>
+                <a:spcPts val="500"/>
+              </a:spcBef>
+              <a:buFont typeface="Arial" panose="020B0604020202020204" pitchFamily="34" charset="0"/>
+              <a:buChar char="•"/>
+              <a:defRPr sz="1800" kern="1200">
+                <a:solidFill>
+                  <a:schemeClr val="tx1"/>
+                </a:solidFill>
+                <a:latin typeface="+mn-lt"/>
+                <a:ea typeface="+mn-ea"/>
+                <a:cs typeface="+mn-cs"/>
+              </a:defRPr>
+            </a:lvl9pPr>
+          </a:lstStyle>
+          <a:p>
+            <a:pPr marL="0" indent="0" algn="ctr">
+              <a:spcBef>
+                <a:spcPts val="600"/>
+              </a:spcBef>
+              <a:buFont typeface="Arial" panose="020B0604020202020204" pitchFamily="34" charset="0"/>
+              <a:buNone/>
+            </a:pPr>
+            <a:r>
+              <a:rPr lang="en-US" sz="1800" noProof="0" dirty="0"/>
+              <a:t>Implementation</a:t>
+            </a:r>
+          </a:p>
+          <a:p>
+            <a:pPr marL="287655" lvl="1" indent="-215900">
+              <a:spcBef>
+                <a:spcPts val="600"/>
+              </a:spcBef>
+            </a:pPr>
+            <a:r>
+              <a:rPr lang="en-US" sz="1400" b="0" noProof="0" dirty="0">
+                <a:ea typeface="+mn-lt"/>
+                <a:cs typeface="+mn-lt"/>
+              </a:rPr>
+              <a:t>Web Service RESTFul</a:t>
+            </a:r>
+          </a:p>
+          <a:p>
+            <a:pPr marL="287655" lvl="1" indent="-215900">
+              <a:spcBef>
+                <a:spcPts val="600"/>
+              </a:spcBef>
+            </a:pPr>
+            <a:r>
+              <a:rPr lang="en-US" sz="1400" b="0" noProof="0" dirty="0">
+                <a:ea typeface="+mn-lt"/>
+                <a:cs typeface="+mn-lt"/>
+              </a:rPr>
+              <a:t>API REST </a:t>
+            </a:r>
+          </a:p>
+          <a:p>
+            <a:pPr marL="287655" lvl="1" indent="-215900">
+              <a:spcBef>
+                <a:spcPts val="600"/>
+              </a:spcBef>
+            </a:pPr>
+            <a:r>
+              <a:rPr lang="en-US" sz="1400" b="0" noProof="0" dirty="0">
+                <a:ea typeface="+mn-lt"/>
+                <a:cs typeface="+mn-lt"/>
+              </a:rPr>
+              <a:t>= API Restful </a:t>
+            </a:r>
+          </a:p>
+          <a:p>
+            <a:pPr marL="287655" lvl="1" indent="-215900">
+              <a:spcBef>
+                <a:spcPts val="600"/>
+              </a:spcBef>
+            </a:pPr>
+            <a:r>
+              <a:rPr lang="en-US" sz="1400" b="0" noProof="0" dirty="0">
+                <a:ea typeface="+mn-lt"/>
+                <a:cs typeface="+mn-lt"/>
+              </a:rPr>
+              <a:t>= API Web</a:t>
+            </a:r>
+          </a:p>
+        </p:txBody>
+      </p:sp>
+      <p:sp>
+        <p:nvSpPr>
+          <p:cNvPr id="4" name="Espace réservé du texte 7">
+            <a:extLst>
+              <a:ext uri="{FF2B5EF4-FFF2-40B4-BE49-F238E27FC236}">
+                <a16:creationId xmlns:a16="http://schemas.microsoft.com/office/drawing/2014/main" id="{328315A1-8DED-9D88-6FEF-8E96A96688EE}"/>
+              </a:ext>
+            </a:extLst>
+          </p:cNvPr>
+          <p:cNvSpPr txBox="1">
+            <a:spLocks/>
+          </p:cNvSpPr>
+          <p:nvPr/>
+        </p:nvSpPr>
+        <p:spPr>
+          <a:xfrm>
+            <a:off x="929604" y="3380734"/>
+            <a:ext cx="3175461" cy="2387768"/>
+          </a:xfrm>
+          <a:prstGeom prst="roundRect">
+            <a:avLst>
+              <a:gd name="adj" fmla="val 10481"/>
+            </a:avLst>
+          </a:prstGeom>
+          <a:ln w="15875">
+            <a:solidFill>
+              <a:schemeClr val="accent1"/>
+            </a:solidFill>
+          </a:ln>
+        </p:spPr>
+        <p:txBody>
+          <a:bodyPr vert="horz" lIns="0" tIns="0" rIns="0" bIns="0" rtlCol="0" anchor="t">
+            <a:noAutofit/>
+          </a:bodyPr>
+          <a:lstStyle>
+            <a:lvl1pPr marL="360000" indent="-360000" algn="l" defTabSz="914400" rtl="0" eaLnBrk="1" latinLnBrk="0" hangingPunct="1">
+              <a:lnSpc>
+                <a:spcPct val="90000"/>
+              </a:lnSpc>
+              <a:spcBef>
+                <a:spcPts val="1000"/>
+              </a:spcBef>
+              <a:buFont typeface="Arial" panose="020B0604020202020204" pitchFamily="34" charset="0"/>
+              <a:buChar char="•"/>
+              <a:defRPr sz="2000" b="1" kern="1200">
+                <a:solidFill>
+                  <a:schemeClr val="tx1"/>
+                </a:solidFill>
+                <a:latin typeface="+mn-lt"/>
+                <a:ea typeface="+mn-ea"/>
+                <a:cs typeface="+mn-cs"/>
+              </a:defRPr>
+            </a:lvl1pPr>
+            <a:lvl2pPr marL="648000" indent="-360000" algn="l" defTabSz="914400" rtl="0" eaLnBrk="1" latinLnBrk="0" hangingPunct="1">
+              <a:lnSpc>
+                <a:spcPct val="90000"/>
+              </a:lnSpc>
+              <a:spcBef>
+                <a:spcPts val="1200"/>
+              </a:spcBef>
+              <a:buFont typeface="Arial" panose="020B0604020202020204" pitchFamily="34" charset="0"/>
+              <a:buChar char="•"/>
+              <a:defRPr sz="1800" b="1" kern="1200">
+                <a:solidFill>
+                  <a:schemeClr val="tx2"/>
+                </a:solidFill>
+                <a:latin typeface="+mn-lt"/>
+                <a:ea typeface="+mn-ea"/>
+                <a:cs typeface="+mn-cs"/>
+              </a:defRPr>
+            </a:lvl2pPr>
+            <a:lvl3pPr marL="648000" indent="-360000" algn="l" defTabSz="914400" rtl="0" eaLnBrk="1" latinLnBrk="0" hangingPunct="1">
+              <a:lnSpc>
+                <a:spcPct val="90000"/>
+              </a:lnSpc>
+              <a:spcBef>
+                <a:spcPts val="1200"/>
+              </a:spcBef>
+              <a:buFont typeface="Arial" panose="020B0604020202020204" pitchFamily="34" charset="0"/>
+              <a:buChar char="•"/>
+              <a:defRPr sz="1800" b="1" kern="1200">
+                <a:solidFill>
+                  <a:schemeClr val="bg1">
+                    <a:lumMod val="65000"/>
+                  </a:schemeClr>
+                </a:solidFill>
+                <a:latin typeface="+mn-lt"/>
+                <a:ea typeface="+mn-ea"/>
+                <a:cs typeface="+mn-cs"/>
+              </a:defRPr>
+            </a:lvl3pPr>
+            <a:lvl4pPr marL="720000" indent="-270000" algn="l" defTabSz="914400" rtl="0" eaLnBrk="1" latinLnBrk="0" hangingPunct="1">
+              <a:lnSpc>
+                <a:spcPct val="90000"/>
+              </a:lnSpc>
+              <a:spcBef>
+                <a:spcPts val="1000"/>
+              </a:spcBef>
+              <a:buFont typeface="Arial" panose="020B0604020202020204" pitchFamily="34" charset="0"/>
+              <a:buChar char="•"/>
+              <a:defRPr sz="1600" kern="1200">
+                <a:solidFill>
+                  <a:schemeClr val="tx2"/>
+                </a:solidFill>
+                <a:latin typeface="+mn-lt"/>
+                <a:ea typeface="+mn-ea"/>
+                <a:cs typeface="+mn-cs"/>
+              </a:defRPr>
+            </a:lvl4pPr>
+            <a:lvl5pPr marL="630000" indent="-270000" algn="l" defTabSz="914400" rtl="0" eaLnBrk="1" latinLnBrk="0" hangingPunct="1">
+              <a:lnSpc>
+                <a:spcPct val="90000"/>
+              </a:lnSpc>
+              <a:spcBef>
+                <a:spcPts val="1000"/>
+              </a:spcBef>
+              <a:buFont typeface="Arial" panose="020B0604020202020204" pitchFamily="34" charset="0"/>
+              <a:buChar char="•"/>
+              <a:defRPr sz="1600" kern="1200">
+                <a:solidFill>
+                  <a:schemeClr val="tx2"/>
+                </a:solidFill>
+                <a:latin typeface="+mn-lt"/>
+                <a:ea typeface="+mn-ea"/>
+                <a:cs typeface="+mn-cs"/>
+              </a:defRPr>
+            </a:lvl5pPr>
+            <a:lvl6pPr marL="2514600" indent="-228600" algn="l" defTabSz="914400" rtl="0" eaLnBrk="1" latinLnBrk="0" hangingPunct="1">
+              <a:lnSpc>
+                <a:spcPct val="90000"/>
+              </a:lnSpc>
+              <a:spcBef>
+                <a:spcPts val="500"/>
+              </a:spcBef>
+              <a:buFont typeface="Arial" panose="020B0604020202020204" pitchFamily="34" charset="0"/>
+              <a:buChar char="•"/>
+              <a:defRPr sz="1800" kern="1200">
+                <a:solidFill>
+                  <a:schemeClr val="tx1"/>
+                </a:solidFill>
+                <a:latin typeface="+mn-lt"/>
+                <a:ea typeface="+mn-ea"/>
+                <a:cs typeface="+mn-cs"/>
+              </a:defRPr>
+            </a:lvl6pPr>
+            <a:lvl7pPr marL="2971800" indent="-228600" algn="l" defTabSz="914400" rtl="0" eaLnBrk="1" latinLnBrk="0" hangingPunct="1">
+              <a:lnSpc>
+                <a:spcPct val="90000"/>
+              </a:lnSpc>
+              <a:spcBef>
+                <a:spcPts val="500"/>
+              </a:spcBef>
+              <a:buFont typeface="Arial" panose="020B0604020202020204" pitchFamily="34" charset="0"/>
+              <a:buChar char="•"/>
+              <a:defRPr sz="1800" kern="1200">
+                <a:solidFill>
+                  <a:schemeClr val="tx1"/>
+                </a:solidFill>
+                <a:latin typeface="+mn-lt"/>
+                <a:ea typeface="+mn-ea"/>
+                <a:cs typeface="+mn-cs"/>
+              </a:defRPr>
+            </a:lvl7pPr>
+            <a:lvl8pPr marL="3429000" indent="-228600" algn="l" defTabSz="914400" rtl="0" eaLnBrk="1" latinLnBrk="0" hangingPunct="1">
+              <a:lnSpc>
+                <a:spcPct val="90000"/>
+              </a:lnSpc>
+              <a:spcBef>
+                <a:spcPts val="500"/>
+              </a:spcBef>
+              <a:buFont typeface="Arial" panose="020B0604020202020204" pitchFamily="34" charset="0"/>
+              <a:buChar char="•"/>
+              <a:defRPr sz="1800" kern="1200">
+                <a:solidFill>
+                  <a:schemeClr val="tx1"/>
+                </a:solidFill>
+                <a:latin typeface="+mn-lt"/>
+                <a:ea typeface="+mn-ea"/>
+                <a:cs typeface="+mn-cs"/>
+              </a:defRPr>
+            </a:lvl8pPr>
+            <a:lvl9pPr marL="3886200" indent="-228600" algn="l" defTabSz="914400" rtl="0" eaLnBrk="1" latinLnBrk="0" hangingPunct="1">
+              <a:lnSpc>
+                <a:spcPct val="90000"/>
+              </a:lnSpc>
+              <a:spcBef>
+                <a:spcPts val="500"/>
+              </a:spcBef>
+              <a:buFont typeface="Arial" panose="020B0604020202020204" pitchFamily="34" charset="0"/>
+              <a:buChar char="•"/>
+              <a:defRPr sz="1800" kern="1200">
+                <a:solidFill>
+                  <a:schemeClr val="tx1"/>
+                </a:solidFill>
+                <a:latin typeface="+mn-lt"/>
+                <a:ea typeface="+mn-ea"/>
+                <a:cs typeface="+mn-cs"/>
+              </a:defRPr>
+            </a:lvl9pPr>
+          </a:lstStyle>
+          <a:p>
+            <a:pPr marL="0" indent="0" algn="ctr">
+              <a:spcBef>
+                <a:spcPts val="600"/>
+              </a:spcBef>
+              <a:buFont typeface="Arial" panose="020B0604020202020204" pitchFamily="34" charset="0"/>
+              <a:buNone/>
+            </a:pPr>
+            <a:r>
+              <a:rPr lang="fr-FR" sz="1800" dirty="0"/>
+              <a:t>Principles</a:t>
+            </a:r>
+          </a:p>
+          <a:p>
+            <a:pPr marL="287655" lvl="1" indent="-215900">
+              <a:spcBef>
+                <a:spcPts val="600"/>
+              </a:spcBef>
+            </a:pPr>
+            <a:r>
+              <a:rPr lang="fr-FR" sz="1400" b="0" dirty="0">
+                <a:ea typeface="+mn-lt"/>
+                <a:cs typeface="+mn-lt"/>
+              </a:rPr>
+              <a:t>Uniform Interface</a:t>
+            </a:r>
+          </a:p>
+          <a:p>
+            <a:pPr marL="287655" lvl="1" indent="-215900">
+              <a:spcBef>
+                <a:spcPts val="600"/>
+              </a:spcBef>
+            </a:pPr>
+            <a:r>
+              <a:rPr lang="fr-FR" sz="1400" b="0" dirty="0" err="1">
+                <a:ea typeface="+mn-lt"/>
+                <a:cs typeface="+mn-lt"/>
+              </a:rPr>
+              <a:t>Statelessness</a:t>
+            </a:r>
+            <a:endParaRPr lang="fr-FR" sz="1400" b="0" dirty="0">
+              <a:ea typeface="+mn-lt"/>
+              <a:cs typeface="+mn-lt"/>
+            </a:endParaRPr>
+          </a:p>
+        </p:txBody>
+      </p:sp>
+      <p:sp>
+        <p:nvSpPr>
+          <p:cNvPr id="5" name="Espace réservé du texte 7">
+            <a:extLst>
+              <a:ext uri="{FF2B5EF4-FFF2-40B4-BE49-F238E27FC236}">
+                <a16:creationId xmlns:a16="http://schemas.microsoft.com/office/drawing/2014/main" id="{393174DE-7163-7A8F-299E-2D7C6A2C7A73}"/>
+              </a:ext>
+            </a:extLst>
+          </p:cNvPr>
+          <p:cNvSpPr txBox="1">
+            <a:spLocks/>
+          </p:cNvSpPr>
+          <p:nvPr/>
+        </p:nvSpPr>
+        <p:spPr>
+          <a:xfrm>
+            <a:off x="6758568" y="3693622"/>
+            <a:ext cx="4174903" cy="2074880"/>
+          </a:xfrm>
+          <a:prstGeom prst="roundRect">
+            <a:avLst>
+              <a:gd name="adj" fmla="val 8125"/>
+            </a:avLst>
+          </a:prstGeom>
+          <a:ln w="15875">
+            <a:solidFill>
+              <a:schemeClr val="accent1"/>
+            </a:solidFill>
+          </a:ln>
+        </p:spPr>
+        <p:txBody>
+          <a:bodyPr vert="horz" lIns="0" tIns="0" rIns="0" bIns="0" rtlCol="0" anchor="t">
+            <a:noAutofit/>
+          </a:bodyPr>
+          <a:lstStyle>
+            <a:lvl1pPr marL="360000" indent="-360000" algn="l" defTabSz="914400" rtl="0" eaLnBrk="1" latinLnBrk="0" hangingPunct="1">
+              <a:lnSpc>
+                <a:spcPct val="90000"/>
+              </a:lnSpc>
+              <a:spcBef>
+                <a:spcPts val="1000"/>
+              </a:spcBef>
+              <a:buFont typeface="Arial" panose="020B0604020202020204" pitchFamily="34" charset="0"/>
+              <a:buChar char="•"/>
+              <a:defRPr sz="2000" b="1" kern="1200">
+                <a:solidFill>
+                  <a:schemeClr val="tx1"/>
+                </a:solidFill>
+                <a:latin typeface="+mn-lt"/>
+                <a:ea typeface="+mn-ea"/>
+                <a:cs typeface="+mn-cs"/>
+              </a:defRPr>
+            </a:lvl1pPr>
+            <a:lvl2pPr marL="648000" indent="-360000" algn="l" defTabSz="914400" rtl="0" eaLnBrk="1" latinLnBrk="0" hangingPunct="1">
+              <a:lnSpc>
+                <a:spcPct val="90000"/>
+              </a:lnSpc>
+              <a:spcBef>
+                <a:spcPts val="1200"/>
+              </a:spcBef>
+              <a:buFont typeface="Arial" panose="020B0604020202020204" pitchFamily="34" charset="0"/>
+              <a:buChar char="•"/>
+              <a:defRPr sz="1800" b="1" kern="1200">
+                <a:solidFill>
+                  <a:schemeClr val="tx2"/>
+                </a:solidFill>
+                <a:latin typeface="+mn-lt"/>
+                <a:ea typeface="+mn-ea"/>
+                <a:cs typeface="+mn-cs"/>
+              </a:defRPr>
+            </a:lvl2pPr>
+            <a:lvl3pPr marL="648000" indent="-360000" algn="l" defTabSz="914400" rtl="0" eaLnBrk="1" latinLnBrk="0" hangingPunct="1">
+              <a:lnSpc>
+                <a:spcPct val="90000"/>
+              </a:lnSpc>
+              <a:spcBef>
+                <a:spcPts val="1200"/>
+              </a:spcBef>
+              <a:buFont typeface="Arial" panose="020B0604020202020204" pitchFamily="34" charset="0"/>
+              <a:buChar char="•"/>
+              <a:defRPr sz="1800" b="1" kern="1200">
+                <a:solidFill>
+                  <a:schemeClr val="bg1">
+                    <a:lumMod val="65000"/>
+                  </a:schemeClr>
+                </a:solidFill>
+                <a:latin typeface="+mn-lt"/>
+                <a:ea typeface="+mn-ea"/>
+                <a:cs typeface="+mn-cs"/>
+              </a:defRPr>
+            </a:lvl3pPr>
+            <a:lvl4pPr marL="720000" indent="-270000" algn="l" defTabSz="914400" rtl="0" eaLnBrk="1" latinLnBrk="0" hangingPunct="1">
+              <a:lnSpc>
+                <a:spcPct val="90000"/>
+              </a:lnSpc>
+              <a:spcBef>
+                <a:spcPts val="1000"/>
+              </a:spcBef>
+              <a:buFont typeface="Arial" panose="020B0604020202020204" pitchFamily="34" charset="0"/>
+              <a:buChar char="•"/>
+              <a:defRPr sz="1600" kern="1200">
+                <a:solidFill>
+                  <a:schemeClr val="tx2"/>
+                </a:solidFill>
+                <a:latin typeface="+mn-lt"/>
+                <a:ea typeface="+mn-ea"/>
+                <a:cs typeface="+mn-cs"/>
+              </a:defRPr>
+            </a:lvl4pPr>
+            <a:lvl5pPr marL="630000" indent="-270000" algn="l" defTabSz="914400" rtl="0" eaLnBrk="1" latinLnBrk="0" hangingPunct="1">
+              <a:lnSpc>
+                <a:spcPct val="90000"/>
+              </a:lnSpc>
+              <a:spcBef>
+                <a:spcPts val="1000"/>
+              </a:spcBef>
+              <a:buFont typeface="Arial" panose="020B0604020202020204" pitchFamily="34" charset="0"/>
+              <a:buChar char="•"/>
+              <a:defRPr sz="1600" kern="1200">
+                <a:solidFill>
+                  <a:schemeClr val="tx2"/>
+                </a:solidFill>
+                <a:latin typeface="+mn-lt"/>
+                <a:ea typeface="+mn-ea"/>
+                <a:cs typeface="+mn-cs"/>
+              </a:defRPr>
+            </a:lvl5pPr>
+            <a:lvl6pPr marL="2514600" indent="-228600" algn="l" defTabSz="914400" rtl="0" eaLnBrk="1" latinLnBrk="0" hangingPunct="1">
+              <a:lnSpc>
+                <a:spcPct val="90000"/>
+              </a:lnSpc>
+              <a:spcBef>
+                <a:spcPts val="500"/>
+              </a:spcBef>
+              <a:buFont typeface="Arial" panose="020B0604020202020204" pitchFamily="34" charset="0"/>
+              <a:buChar char="•"/>
+              <a:defRPr sz="1800" kern="1200">
+                <a:solidFill>
+                  <a:schemeClr val="tx1"/>
+                </a:solidFill>
+                <a:latin typeface="+mn-lt"/>
+                <a:ea typeface="+mn-ea"/>
+                <a:cs typeface="+mn-cs"/>
+              </a:defRPr>
+            </a:lvl6pPr>
+            <a:lvl7pPr marL="2971800" indent="-228600" algn="l" defTabSz="914400" rtl="0" eaLnBrk="1" latinLnBrk="0" hangingPunct="1">
+              <a:lnSpc>
+                <a:spcPct val="90000"/>
+              </a:lnSpc>
+              <a:spcBef>
+                <a:spcPts val="500"/>
+              </a:spcBef>
+              <a:buFont typeface="Arial" panose="020B0604020202020204" pitchFamily="34" charset="0"/>
+              <a:buChar char="•"/>
+              <a:defRPr sz="1800" kern="1200">
+                <a:solidFill>
+                  <a:schemeClr val="tx1"/>
+                </a:solidFill>
+                <a:latin typeface="+mn-lt"/>
+                <a:ea typeface="+mn-ea"/>
+                <a:cs typeface="+mn-cs"/>
+              </a:defRPr>
+            </a:lvl7pPr>
+            <a:lvl8pPr marL="3429000" indent="-228600" algn="l" defTabSz="914400" rtl="0" eaLnBrk="1" latinLnBrk="0" hangingPunct="1">
+              <a:lnSpc>
+                <a:spcPct val="90000"/>
+              </a:lnSpc>
+              <a:spcBef>
+                <a:spcPts val="500"/>
+              </a:spcBef>
+              <a:buFont typeface="Arial" panose="020B0604020202020204" pitchFamily="34" charset="0"/>
+              <a:buChar char="•"/>
+              <a:defRPr sz="1800" kern="1200">
+                <a:solidFill>
+                  <a:schemeClr val="tx1"/>
+                </a:solidFill>
+                <a:latin typeface="+mn-lt"/>
+                <a:ea typeface="+mn-ea"/>
+                <a:cs typeface="+mn-cs"/>
+              </a:defRPr>
+            </a:lvl8pPr>
+            <a:lvl9pPr marL="3886200" indent="-228600" algn="l" defTabSz="914400" rtl="0" eaLnBrk="1" latinLnBrk="0" hangingPunct="1">
+              <a:lnSpc>
+                <a:spcPct val="90000"/>
+              </a:lnSpc>
+              <a:spcBef>
+                <a:spcPts val="500"/>
+              </a:spcBef>
+              <a:buFont typeface="Arial" panose="020B0604020202020204" pitchFamily="34" charset="0"/>
+              <a:buChar char="•"/>
+              <a:defRPr sz="1800" kern="1200">
+                <a:solidFill>
+                  <a:schemeClr val="tx1"/>
+                </a:solidFill>
+                <a:latin typeface="+mn-lt"/>
+                <a:ea typeface="+mn-ea"/>
+                <a:cs typeface="+mn-cs"/>
+              </a:defRPr>
+            </a:lvl9pPr>
+          </a:lstStyle>
+          <a:p>
+            <a:pPr marL="0" indent="0" algn="ctr">
+              <a:spcBef>
+                <a:spcPts val="600"/>
+              </a:spcBef>
+              <a:buFont typeface="Arial" panose="020B0604020202020204" pitchFamily="34" charset="0"/>
+              <a:buNone/>
+            </a:pPr>
+            <a:r>
+              <a:rPr lang="en-US" sz="1800" noProof="0" dirty="0"/>
+              <a:t>Definition</a:t>
+            </a:r>
+          </a:p>
+          <a:p>
+            <a:pPr marL="287655" indent="-215900">
+              <a:spcBef>
+                <a:spcPts val="600"/>
+              </a:spcBef>
+            </a:pPr>
+            <a:r>
+              <a:rPr lang="en-US" sz="1400" b="0" noProof="0" dirty="0">
+                <a:solidFill>
+                  <a:schemeClr val="tx2"/>
+                </a:solidFill>
+                <a:ea typeface="+mn-lt"/>
+                <a:cs typeface="+mn-lt"/>
+              </a:rPr>
+              <a:t>REpresentional State Transfer</a:t>
+            </a:r>
+          </a:p>
+          <a:p>
+            <a:pPr marL="287655" indent="-215900">
+              <a:spcBef>
+                <a:spcPts val="600"/>
+              </a:spcBef>
+            </a:pPr>
+            <a:r>
+              <a:rPr lang="en-US" sz="1400" b="0" noProof="0" dirty="0">
+                <a:solidFill>
+                  <a:schemeClr val="tx2"/>
+                </a:solidFill>
+                <a:ea typeface="+mn-lt"/>
+                <a:cs typeface="+mn-lt"/>
+              </a:rPr>
+              <a:t>It’s an « Protocol »</a:t>
+            </a:r>
+          </a:p>
+          <a:p>
+            <a:pPr marL="287655" indent="-215900">
+              <a:spcBef>
+                <a:spcPts val="600"/>
+              </a:spcBef>
+            </a:pPr>
+            <a:r>
+              <a:rPr lang="en-US" sz="1400" noProof="0" dirty="0">
+                <a:solidFill>
+                  <a:schemeClr val="tx2"/>
+                </a:solidFill>
+                <a:ea typeface="+mn-lt"/>
+                <a:cs typeface="+mn-lt"/>
+              </a:rPr>
+              <a:t>Format.</a:t>
+            </a:r>
+            <a:r>
+              <a:rPr lang="en-US" sz="1400" b="0" noProof="0" dirty="0">
+                <a:solidFill>
+                  <a:schemeClr val="tx2"/>
+                </a:solidFill>
+                <a:ea typeface="+mn-lt"/>
+                <a:cs typeface="+mn-lt"/>
+              </a:rPr>
+              <a:t> XML (Highly structured, more verbose)</a:t>
+            </a:r>
+          </a:p>
+          <a:p>
+            <a:pPr marL="287655" indent="-215900">
+              <a:spcBef>
+                <a:spcPts val="600"/>
+              </a:spcBef>
+            </a:pPr>
+            <a:r>
+              <a:rPr lang="en-US" sz="1400" noProof="0" dirty="0">
+                <a:solidFill>
+                  <a:schemeClr val="tx2"/>
+                </a:solidFill>
+                <a:ea typeface="+mn-lt"/>
+                <a:cs typeface="+mn-lt"/>
+              </a:rPr>
+              <a:t>Transport.</a:t>
+            </a:r>
+            <a:r>
+              <a:rPr lang="en-US" sz="1400" b="0" noProof="0" dirty="0">
+                <a:solidFill>
+                  <a:schemeClr val="tx2"/>
+                </a:solidFill>
+                <a:ea typeface="+mn-lt"/>
+                <a:cs typeface="+mn-lt"/>
+              </a:rPr>
+              <a:t> Agnostic (HTTP, SMTP, FTP…)</a:t>
+            </a:r>
+          </a:p>
+          <a:p>
+            <a:pPr marL="287655" indent="-215900">
+              <a:spcBef>
+                <a:spcPts val="600"/>
+              </a:spcBef>
+            </a:pPr>
+            <a:r>
+              <a:rPr lang="en-US" sz="1400" noProof="0" dirty="0">
+                <a:solidFill>
+                  <a:schemeClr val="tx2"/>
+                </a:solidFill>
+                <a:ea typeface="+mn-lt"/>
+                <a:cs typeface="+mn-lt"/>
+              </a:rPr>
+              <a:t>State.</a:t>
+            </a:r>
+            <a:r>
+              <a:rPr lang="en-US" sz="1400" b="0" noProof="0" dirty="0">
+                <a:solidFill>
+                  <a:schemeClr val="tx2"/>
+                </a:solidFill>
+                <a:ea typeface="+mn-lt"/>
+                <a:cs typeface="+mn-lt"/>
+              </a:rPr>
+              <a:t> Can be stateful</a:t>
+            </a:r>
+          </a:p>
+          <a:p>
+            <a:pPr marL="0" indent="0" algn="ctr">
+              <a:spcBef>
+                <a:spcPts val="600"/>
+              </a:spcBef>
+              <a:buFont typeface="Arial" panose="020B0604020202020204" pitchFamily="34" charset="0"/>
+              <a:buNone/>
+            </a:pPr>
+            <a:endParaRPr lang="en-US" sz="1800" b="0" noProof="0" dirty="0">
+              <a:solidFill>
+                <a:schemeClr val="tx2"/>
+              </a:solidFill>
+              <a:ea typeface="+mn-lt"/>
+              <a:cs typeface="+mn-lt"/>
+            </a:endParaRPr>
+          </a:p>
+        </p:txBody>
+      </p:sp>
+    </p:spTree>
+    <p:extLst>
+      <p:ext uri="{BB962C8B-B14F-4D97-AF65-F5344CB8AC3E}">
+        <p14:creationId xmlns:p14="http://schemas.microsoft.com/office/powerpoint/2010/main" val="3357752974"/>
+      </p:ext>
+    </p:extLst>
+  </p:cSld>
+  <p:clrMapOvr>
+    <a:masterClrMapping/>
+  </p:clrMapOvr>
+</p:sld>
+</file>
+
+<file path=ppt/slides/slide8.xml><?xml version="1.0" encoding="utf-8"?>
+<p:sld xmlns:a="http://schemas.openxmlformats.org/drawingml/2006/main" xmlns:r="http://schemas.openxmlformats.org/officeDocument/2006/relationships" xmlns:p="http://schemas.openxmlformats.org/presentationml/2006/main">
+  <p:cSld>
+    <p:spTree>
+      <p:nvGrpSpPr>
         <p:cNvPr id="1" name=""/>
         <p:cNvGrpSpPr/>
         <p:nvPr/>
@@ -31213,7 +35160,7 @@
 </p:sld>
 </file>
 
-<file path=ppt/slides/slide8.xml><?xml version="1.0" encoding="utf-8"?>
+<file path=ppt/slides/slide9.xml><?xml version="1.0" encoding="utf-8"?>
 <p:sld xmlns:a="http://schemas.openxmlformats.org/drawingml/2006/main" xmlns:r="http://schemas.openxmlformats.org/officeDocument/2006/relationships" xmlns:p="http://schemas.openxmlformats.org/presentationml/2006/main">
   <p:cSld>
     <p:spTree>
@@ -31304,7 +35251,7 @@
           <a:p>
             <a:fld id="{E14D0CC5-784E-4B7E-B9F4-EE71C08DA69C}" type="slidenum">
               <a:rPr lang="fr-FR" smtClean="0"/>
-              <a:t>8</a:t>
+              <a:t>9</a:t>
             </a:fld>
             <a:endParaRPr lang="fr-FR" dirty="0"/>
           </a:p>
@@ -31623,8 +35570,8 @@
         </p:nvSpPr>
         <p:spPr>
           <a:xfrm>
-            <a:off x="1501792" y="1450324"/>
-            <a:ext cx="1231773" cy="368748"/>
+            <a:off x="1284537" y="1450324"/>
+            <a:ext cx="1675173" cy="368748"/>
           </a:xfrm>
           <a:prstGeom prst="roundRect">
             <a:avLst>
@@ -31660,13 +35607,18 @@
           <a:p>
             <a:pPr algn="ctr"/>
             <a:r>
-              <a:rPr lang="fr-FR" sz="1600" b="1" dirty="0">
+              <a:rPr lang="en-US" sz="1600" b="1" noProof="0" dirty="0">
                 <a:solidFill>
                   <a:schemeClr val="tx1"/>
                 </a:solidFill>
               </a:rPr>
-              <a:t>Ui</a:t>
+              <a:t>Presentation</a:t>
             </a:r>
+            <a:endParaRPr lang="fr-FR" sz="1600" b="1" dirty="0">
+              <a:solidFill>
+                <a:schemeClr val="tx1"/>
+              </a:solidFill>
+            </a:endParaRPr>
           </a:p>
         </p:txBody>
       </p:sp>
@@ -31809,9 +35761,9 @@
           <p:nvPr/>
         </p:nvCxnSpPr>
         <p:spPr>
-          <a:xfrm rot="16200000" flipH="1">
-            <a:off x="2023168" y="1913582"/>
-            <a:ext cx="193467" cy="4445"/>
+          <a:xfrm rot="5400000">
+            <a:off x="2025391" y="1915805"/>
+            <a:ext cx="193467" cy="12700"/>
           </a:xfrm>
           <a:prstGeom prst="bentConnector3">
             <a:avLst>
@@ -31900,8 +35852,8 @@
         </p:nvSpPr>
         <p:spPr>
           <a:xfrm>
-            <a:off x="1327352" y="2697951"/>
-            <a:ext cx="1588508" cy="368748"/>
+            <a:off x="1284536" y="2697951"/>
+            <a:ext cx="1675174" cy="368748"/>
           </a:xfrm>
           <a:prstGeom prst="roundRect">
             <a:avLst>
@@ -31965,8 +35917,8 @@
         </p:nvCxnSpPr>
         <p:spPr>
           <a:xfrm rot="5400000">
-            <a:off x="1963534" y="2539360"/>
-            <a:ext cx="316663" cy="518"/>
+            <a:off x="1963793" y="2539619"/>
+            <a:ext cx="316663" cy="1"/>
           </a:xfrm>
           <a:prstGeom prst="bentConnector3">
             <a:avLst>
@@ -33133,8 +37085,8 @@
         </p:nvCxnSpPr>
         <p:spPr>
           <a:xfrm rot="5400000">
-            <a:off x="2000828" y="3183551"/>
-            <a:ext cx="237630" cy="3926"/>
+            <a:off x="2001087" y="3183293"/>
+            <a:ext cx="237630" cy="4443"/>
           </a:xfrm>
           <a:prstGeom prst="bentConnector3">
             <a:avLst>
@@ -33483,2231 +37435,6 @@
     <p:extLst>
       <p:ext uri="{BB962C8B-B14F-4D97-AF65-F5344CB8AC3E}">
         <p14:creationId xmlns:p14="http://schemas.microsoft.com/office/powerpoint/2010/main" val="390847122"/>
-      </p:ext>
-    </p:extLst>
-  </p:cSld>
-  <p:clrMapOvr>
-    <a:masterClrMapping/>
-  </p:clrMapOvr>
-</p:sld>
-</file>
-
-<file path=ppt/slides/slide9.xml><?xml version="1.0" encoding="utf-8"?>
-<p:sld xmlns:a="http://schemas.openxmlformats.org/drawingml/2006/main" xmlns:r="http://schemas.openxmlformats.org/officeDocument/2006/relationships" xmlns:p="http://schemas.openxmlformats.org/presentationml/2006/main">
-  <p:cSld>
-    <p:spTree>
-      <p:nvGrpSpPr>
-        <p:cNvPr id="1" name=""/>
-        <p:cNvGrpSpPr/>
-        <p:nvPr/>
-      </p:nvGrpSpPr>
-      <p:grpSpPr>
-        <a:xfrm>
-          <a:off x="0" y="0"/>
-          <a:ext cx="0" cy="0"/>
-          <a:chOff x="0" y="0"/>
-          <a:chExt cx="0" cy="0"/>
-        </a:xfrm>
-      </p:grpSpPr>
-      <p:sp>
-        <p:nvSpPr>
-          <p:cNvPr id="6" name="Espace réservé du numéro de diapositive 5">
-            <a:extLst>
-              <a:ext uri="{FF2B5EF4-FFF2-40B4-BE49-F238E27FC236}">
-                <a16:creationId xmlns:a16="http://schemas.microsoft.com/office/drawing/2014/main" id="{4576F49A-6A7E-470D-82F5-6D36342DDF17}"/>
-              </a:ext>
-            </a:extLst>
-          </p:cNvPr>
-          <p:cNvSpPr>
-            <a:spLocks noGrp="1"/>
-          </p:cNvSpPr>
-          <p:nvPr>
-            <p:ph type="sldNum" sz="quarter" idx="10"/>
-          </p:nvPr>
-        </p:nvSpPr>
-        <p:spPr/>
-        <p:txBody>
-          <a:bodyPr/>
-          <a:lstStyle/>
-          <a:p>
-            <a:fld id="{E14D0CC5-784E-4B7E-B9F4-EE71C08DA69C}" type="slidenum">
-              <a:rPr lang="fr-FR" smtClean="0"/>
-              <a:t>9</a:t>
-            </a:fld>
-            <a:endParaRPr lang="fr-FR" dirty="0"/>
-          </a:p>
-        </p:txBody>
-      </p:sp>
-      <p:sp>
-        <p:nvSpPr>
-          <p:cNvPr id="9" name="Text Placeholder 8">
-            <a:extLst>
-              <a:ext uri="{FF2B5EF4-FFF2-40B4-BE49-F238E27FC236}">
-                <a16:creationId xmlns:a16="http://schemas.microsoft.com/office/drawing/2014/main" id="{297AE6FE-5EE5-CA1C-4DD0-B67C6A19747A}"/>
-              </a:ext>
-            </a:extLst>
-          </p:cNvPr>
-          <p:cNvSpPr>
-            <a:spLocks noGrp="1"/>
-          </p:cNvSpPr>
-          <p:nvPr>
-            <p:ph type="body" sz="quarter" idx="19"/>
-          </p:nvPr>
-        </p:nvSpPr>
-        <p:spPr>
-          <a:xfrm>
-            <a:off x="838200" y="1089499"/>
-            <a:ext cx="7047271" cy="1638642"/>
-          </a:xfrm>
-          <a:prstGeom prst="roundRect">
-            <a:avLst>
-              <a:gd name="adj" fmla="val 11863"/>
-            </a:avLst>
-          </a:prstGeom>
-        </p:spPr>
-        <p:txBody>
-          <a:bodyPr/>
-          <a:lstStyle/>
-          <a:p>
-            <a:pPr marL="72000" indent="0" algn="ctr">
-              <a:spcBef>
-                <a:spcPts val="300"/>
-              </a:spcBef>
-              <a:buNone/>
-            </a:pPr>
-            <a:r>
-              <a:rPr lang="fr-FR" dirty="0"/>
-              <a:t>Stratégie de synchro </a:t>
-            </a:r>
-            <a:r>
-              <a:rPr lang="fr-FR" dirty="0" err="1"/>
-              <a:t>App-Api</a:t>
-            </a:r>
-            <a:endParaRPr lang="fr-FR" dirty="0"/>
-          </a:p>
-          <a:p>
-            <a:pPr marL="360000" lvl="1" indent="0">
-              <a:spcBef>
-                <a:spcPts val="300"/>
-              </a:spcBef>
-              <a:buNone/>
-            </a:pPr>
-            <a:r>
-              <a:rPr lang="fr-FR" dirty="0">
-                <a:ea typeface="+mn-lt"/>
-                <a:cs typeface="+mn-lt"/>
-              </a:rPr>
-              <a:t>Optimiste. </a:t>
-            </a:r>
-            <a:r>
-              <a:rPr lang="fr-FR" b="0" dirty="0">
-                <a:ea typeface="+mn-lt"/>
-                <a:cs typeface="+mn-lt"/>
-              </a:rPr>
-              <a:t>Maj Ui avant rep Api</a:t>
-            </a:r>
-          </a:p>
-          <a:p>
-            <a:pPr marL="504000" lvl="1" indent="-144000">
-              <a:spcBef>
-                <a:spcPts val="300"/>
-              </a:spcBef>
-            </a:pPr>
-            <a:r>
-              <a:rPr lang="fr-FR" dirty="0">
-                <a:solidFill>
-                  <a:schemeClr val="tx2"/>
-                </a:solidFill>
-                <a:ea typeface="+mn-lt"/>
-                <a:cs typeface="+mn-lt"/>
-              </a:rPr>
-              <a:t>+ Sur. </a:t>
-            </a:r>
-            <a:r>
-              <a:rPr lang="fr-FR" b="0" dirty="0">
-                <a:ea typeface="+mn-lt"/>
-                <a:cs typeface="+mn-lt"/>
-              </a:rPr>
-              <a:t>Maj Ui quand Api a répondu</a:t>
-            </a:r>
-          </a:p>
-          <a:p>
-            <a:pPr marL="504000" lvl="1" indent="-144000">
-              <a:spcBef>
-                <a:spcPts val="300"/>
-              </a:spcBef>
-            </a:pPr>
-            <a:r>
-              <a:rPr lang="fr-FR" b="0" dirty="0">
-                <a:solidFill>
-                  <a:schemeClr val="tx2"/>
-                </a:solidFill>
-                <a:ea typeface="+mn-lt"/>
-                <a:cs typeface="+mn-lt"/>
-              </a:rPr>
-              <a:t>Choisir selon la sensibilité de l’info (coordonnée fusée vs nom user)</a:t>
-            </a:r>
-            <a:endParaRPr lang="en-US" b="0" dirty="0">
-              <a:solidFill>
-                <a:schemeClr val="tx2"/>
-              </a:solidFill>
-              <a:ea typeface="+mn-lt"/>
-              <a:cs typeface="+mn-lt"/>
-            </a:endParaRPr>
-          </a:p>
-          <a:p>
-            <a:pPr marL="0" indent="0">
-              <a:buNone/>
-            </a:pPr>
-            <a:endParaRPr lang="en-US" dirty="0"/>
-          </a:p>
-        </p:txBody>
-      </p:sp>
-      <p:sp>
-        <p:nvSpPr>
-          <p:cNvPr id="7" name="Espace réservé du texte 6">
-            <a:extLst>
-              <a:ext uri="{FF2B5EF4-FFF2-40B4-BE49-F238E27FC236}">
-                <a16:creationId xmlns:a16="http://schemas.microsoft.com/office/drawing/2014/main" id="{BC9C685F-33E7-44F5-9E08-33C92172C97D}"/>
-              </a:ext>
-            </a:extLst>
-          </p:cNvPr>
-          <p:cNvSpPr>
-            <a:spLocks noGrp="1"/>
-          </p:cNvSpPr>
-          <p:nvPr>
-            <p:ph type="body" sz="quarter" idx="16"/>
-          </p:nvPr>
-        </p:nvSpPr>
-        <p:spPr/>
-        <p:txBody>
-          <a:bodyPr/>
-          <a:lstStyle/>
-          <a:p>
-            <a:r>
-              <a:rPr lang="fr-FR" dirty="0">
-                <a:latin typeface="Arial"/>
-                <a:cs typeface="Arial"/>
-              </a:rPr>
-              <a:t>Components</a:t>
-            </a:r>
-            <a:endParaRPr lang="fr-FR" dirty="0"/>
-          </a:p>
-        </p:txBody>
-      </p:sp>
-      <p:sp>
-        <p:nvSpPr>
-          <p:cNvPr id="2" name="Titre 1">
-            <a:extLst>
-              <a:ext uri="{FF2B5EF4-FFF2-40B4-BE49-F238E27FC236}">
-                <a16:creationId xmlns:a16="http://schemas.microsoft.com/office/drawing/2014/main" id="{81B4020D-2DE6-4B6C-822C-676A9E68ECFA}"/>
-              </a:ext>
-            </a:extLst>
-          </p:cNvPr>
-          <p:cNvSpPr>
-            <a:spLocks noGrp="1"/>
-          </p:cNvSpPr>
-          <p:nvPr>
-            <p:ph type="title"/>
-          </p:nvPr>
-        </p:nvSpPr>
-        <p:spPr/>
-        <p:txBody>
-          <a:bodyPr/>
-          <a:lstStyle/>
-          <a:p>
-            <a:r>
-              <a:rPr lang="fr-FR" dirty="0"/>
-              <a:t>App &amp; Api | Commun</a:t>
-            </a:r>
-            <a:endParaRPr lang="fr-LU" dirty="0"/>
-          </a:p>
-        </p:txBody>
-      </p:sp>
-      <p:sp>
-        <p:nvSpPr>
-          <p:cNvPr id="14" name="Espace réservé du pied de page 5">
-            <a:extLst>
-              <a:ext uri="{FF2B5EF4-FFF2-40B4-BE49-F238E27FC236}">
-                <a16:creationId xmlns:a16="http://schemas.microsoft.com/office/drawing/2014/main" id="{70578D5F-6465-4780-BC67-4A5616A81F4F}"/>
-              </a:ext>
-            </a:extLst>
-          </p:cNvPr>
-          <p:cNvSpPr>
-            <a:spLocks noGrp="1"/>
-          </p:cNvSpPr>
-          <p:nvPr>
-            <p:ph type="ftr" sz="quarter" idx="3"/>
-          </p:nvPr>
-        </p:nvSpPr>
-        <p:spPr>
-          <a:prstGeom prst="roundRect">
-            <a:avLst>
-              <a:gd name="adj" fmla="val 33687"/>
-            </a:avLst>
-          </a:prstGeom>
-          <a:ln w="19050">
-            <a:solidFill>
-              <a:schemeClr val="tx1"/>
-            </a:solidFill>
-          </a:ln>
-        </p:spPr>
-        <p:txBody>
-          <a:bodyPr vert="horz" lIns="91440" tIns="45720" rIns="91440" bIns="45720" rtlCol="0" anchor="ctr"/>
-          <a:lstStyle>
-            <a:lvl1pPr algn="ctr">
-              <a:defRPr lang="fr-FR" sz="1400" b="0" kern="1200" dirty="0" err="1">
-                <a:solidFill>
-                  <a:schemeClr val="tx2"/>
-                </a:solidFill>
-                <a:latin typeface="+mn-lt"/>
-                <a:ea typeface="+mn-ea"/>
-                <a:cs typeface="+mn-cs"/>
-              </a:defRPr>
-            </a:lvl1pPr>
-          </a:lstStyle>
-          <a:p>
-            <a:r>
-              <a:rPr lang="fr-LU" dirty="0"/>
-              <a:t>Unlocked By | K</a:t>
-            </a:r>
-            <a:endParaRPr lang="fr-FR" dirty="0"/>
-          </a:p>
-        </p:txBody>
-      </p:sp>
-      <p:sp>
-        <p:nvSpPr>
-          <p:cNvPr id="4" name="Text Placeholder 8">
-            <a:extLst>
-              <a:ext uri="{FF2B5EF4-FFF2-40B4-BE49-F238E27FC236}">
-                <a16:creationId xmlns:a16="http://schemas.microsoft.com/office/drawing/2014/main" id="{9E7F5667-2B5E-8238-34C4-F2DF22D4244A}"/>
-              </a:ext>
-            </a:extLst>
-          </p:cNvPr>
-          <p:cNvSpPr txBox="1">
-            <a:spLocks/>
-          </p:cNvSpPr>
-          <p:nvPr/>
-        </p:nvSpPr>
-        <p:spPr>
-          <a:xfrm>
-            <a:off x="838199" y="2877290"/>
-            <a:ext cx="3527324" cy="1441767"/>
-          </a:xfrm>
-          <a:prstGeom prst="roundRect">
-            <a:avLst>
-              <a:gd name="adj" fmla="val 12529"/>
-            </a:avLst>
-          </a:prstGeom>
-          <a:ln w="15875">
-            <a:solidFill>
-              <a:schemeClr val="accent1"/>
-            </a:solidFill>
-          </a:ln>
-        </p:spPr>
-        <p:txBody>
-          <a:bodyPr vert="horz" lIns="0" tIns="0" rIns="0" bIns="0" rtlCol="0">
-            <a:noAutofit/>
-          </a:bodyPr>
-          <a:lstStyle>
-            <a:lvl1pPr marL="360000" indent="-360000" algn="l" defTabSz="914400" rtl="0" eaLnBrk="1" latinLnBrk="0" hangingPunct="1">
-              <a:lnSpc>
-                <a:spcPct val="90000"/>
-              </a:lnSpc>
-              <a:spcBef>
-                <a:spcPts val="1000"/>
-              </a:spcBef>
-              <a:buFont typeface="Arial" panose="020B0604020202020204" pitchFamily="34" charset="0"/>
-              <a:buChar char="•"/>
-              <a:defRPr sz="2000" b="1" kern="1200">
-                <a:solidFill>
-                  <a:schemeClr val="tx1"/>
-                </a:solidFill>
-                <a:latin typeface="+mn-lt"/>
-                <a:ea typeface="+mn-ea"/>
-                <a:cs typeface="+mn-cs"/>
-              </a:defRPr>
-            </a:lvl1pPr>
-            <a:lvl2pPr marL="648000" indent="-360000" algn="l" defTabSz="914400" rtl="0" eaLnBrk="1" latinLnBrk="0" hangingPunct="1">
-              <a:lnSpc>
-                <a:spcPct val="90000"/>
-              </a:lnSpc>
-              <a:spcBef>
-                <a:spcPts val="1200"/>
-              </a:spcBef>
-              <a:buFont typeface="Arial" panose="020B0604020202020204" pitchFamily="34" charset="0"/>
-              <a:buChar char="•"/>
-              <a:defRPr sz="1800" b="1" kern="1200">
-                <a:solidFill>
-                  <a:schemeClr val="tx2"/>
-                </a:solidFill>
-                <a:latin typeface="+mn-lt"/>
-                <a:ea typeface="+mn-ea"/>
-                <a:cs typeface="+mn-cs"/>
-              </a:defRPr>
-            </a:lvl2pPr>
-            <a:lvl3pPr marL="648000" indent="-360000" algn="l" defTabSz="914400" rtl="0" eaLnBrk="1" latinLnBrk="0" hangingPunct="1">
-              <a:lnSpc>
-                <a:spcPct val="90000"/>
-              </a:lnSpc>
-              <a:spcBef>
-                <a:spcPts val="1200"/>
-              </a:spcBef>
-              <a:buFont typeface="Arial" panose="020B0604020202020204" pitchFamily="34" charset="0"/>
-              <a:buChar char="•"/>
-              <a:defRPr lang="fr-FR" sz="1400" b="1" kern="1200" dirty="0">
-                <a:solidFill>
-                  <a:schemeClr val="bg1">
-                    <a:lumMod val="65000"/>
-                  </a:schemeClr>
-                </a:solidFill>
-                <a:latin typeface="+mn-lt"/>
-                <a:ea typeface="+mn-lt"/>
-                <a:cs typeface="+mn-lt"/>
-              </a:defRPr>
-            </a:lvl3pPr>
-            <a:lvl4pPr marL="720000" indent="-270000" algn="l" defTabSz="914400" rtl="0" eaLnBrk="1" latinLnBrk="0" hangingPunct="1">
-              <a:lnSpc>
-                <a:spcPct val="90000"/>
-              </a:lnSpc>
-              <a:spcBef>
-                <a:spcPts val="1000"/>
-              </a:spcBef>
-              <a:buFont typeface="Arial" panose="020B0604020202020204" pitchFamily="34" charset="0"/>
-              <a:buChar char="•"/>
-              <a:defRPr sz="1600" kern="1200">
-                <a:solidFill>
-                  <a:schemeClr val="tx2"/>
-                </a:solidFill>
-                <a:latin typeface="+mn-lt"/>
-                <a:ea typeface="+mn-ea"/>
-                <a:cs typeface="+mn-cs"/>
-              </a:defRPr>
-            </a:lvl4pPr>
-            <a:lvl5pPr marL="630000" indent="-270000" algn="l" defTabSz="914400" rtl="0" eaLnBrk="1" latinLnBrk="0" hangingPunct="1">
-              <a:lnSpc>
-                <a:spcPct val="90000"/>
-              </a:lnSpc>
-              <a:spcBef>
-                <a:spcPts val="1000"/>
-              </a:spcBef>
-              <a:buFont typeface="Arial" panose="020B0604020202020204" pitchFamily="34" charset="0"/>
-              <a:buChar char="•"/>
-              <a:defRPr sz="1600" kern="1200">
-                <a:solidFill>
-                  <a:schemeClr val="tx2"/>
-                </a:solidFill>
-                <a:latin typeface="+mn-lt"/>
-                <a:ea typeface="+mn-ea"/>
-                <a:cs typeface="+mn-cs"/>
-              </a:defRPr>
-            </a:lvl5pPr>
-            <a:lvl6pPr marL="2514600" indent="-228600" algn="l" defTabSz="914400" rtl="0" eaLnBrk="1" latinLnBrk="0" hangingPunct="1">
-              <a:lnSpc>
-                <a:spcPct val="90000"/>
-              </a:lnSpc>
-              <a:spcBef>
-                <a:spcPts val="500"/>
-              </a:spcBef>
-              <a:buFont typeface="Arial" panose="020B0604020202020204" pitchFamily="34" charset="0"/>
-              <a:buChar char="•"/>
-              <a:defRPr sz="1800" kern="1200">
-                <a:solidFill>
-                  <a:schemeClr val="tx1"/>
-                </a:solidFill>
-                <a:latin typeface="+mn-lt"/>
-                <a:ea typeface="+mn-ea"/>
-                <a:cs typeface="+mn-cs"/>
-              </a:defRPr>
-            </a:lvl6pPr>
-            <a:lvl7pPr marL="2971800" indent="-228600" algn="l" defTabSz="914400" rtl="0" eaLnBrk="1" latinLnBrk="0" hangingPunct="1">
-              <a:lnSpc>
-                <a:spcPct val="90000"/>
-              </a:lnSpc>
-              <a:spcBef>
-                <a:spcPts val="500"/>
-              </a:spcBef>
-              <a:buFont typeface="Arial" panose="020B0604020202020204" pitchFamily="34" charset="0"/>
-              <a:buChar char="•"/>
-              <a:defRPr sz="1800" kern="1200">
-                <a:solidFill>
-                  <a:schemeClr val="tx1"/>
-                </a:solidFill>
-                <a:latin typeface="+mn-lt"/>
-                <a:ea typeface="+mn-ea"/>
-                <a:cs typeface="+mn-cs"/>
-              </a:defRPr>
-            </a:lvl7pPr>
-            <a:lvl8pPr marL="3429000" indent="-228600" algn="l" defTabSz="914400" rtl="0" eaLnBrk="1" latinLnBrk="0" hangingPunct="1">
-              <a:lnSpc>
-                <a:spcPct val="90000"/>
-              </a:lnSpc>
-              <a:spcBef>
-                <a:spcPts val="500"/>
-              </a:spcBef>
-              <a:buFont typeface="Arial" panose="020B0604020202020204" pitchFamily="34" charset="0"/>
-              <a:buChar char="•"/>
-              <a:defRPr sz="1800" kern="1200">
-                <a:solidFill>
-                  <a:schemeClr val="tx1"/>
-                </a:solidFill>
-                <a:latin typeface="+mn-lt"/>
-                <a:ea typeface="+mn-ea"/>
-                <a:cs typeface="+mn-cs"/>
-              </a:defRPr>
-            </a:lvl8pPr>
-            <a:lvl9pPr marL="3886200" indent="-228600" algn="l" defTabSz="914400" rtl="0" eaLnBrk="1" latinLnBrk="0" hangingPunct="1">
-              <a:lnSpc>
-                <a:spcPct val="90000"/>
-              </a:lnSpc>
-              <a:spcBef>
-                <a:spcPts val="500"/>
-              </a:spcBef>
-              <a:buFont typeface="Arial" panose="020B0604020202020204" pitchFamily="34" charset="0"/>
-              <a:buChar char="•"/>
-              <a:defRPr sz="1800" kern="1200">
-                <a:solidFill>
-                  <a:schemeClr val="tx1"/>
-                </a:solidFill>
-                <a:latin typeface="+mn-lt"/>
-                <a:ea typeface="+mn-ea"/>
-                <a:cs typeface="+mn-cs"/>
-              </a:defRPr>
-            </a:lvl9pPr>
-          </a:lstStyle>
-          <a:p>
-            <a:pPr marL="0" indent="0" algn="ctr">
-              <a:buFont typeface="Arial" panose="020B0604020202020204" pitchFamily="34" charset="0"/>
-              <a:buNone/>
-            </a:pPr>
-            <a:r>
-              <a:rPr lang="en-US" dirty="0"/>
-              <a:t>Environnement</a:t>
-            </a:r>
-          </a:p>
-          <a:p>
-            <a:pPr marL="0" indent="0">
-              <a:buFont typeface="Arial" panose="020B0604020202020204" pitchFamily="34" charset="0"/>
-              <a:buNone/>
-            </a:pPr>
-            <a:r>
-              <a:rPr lang="en-US" sz="1400" b="0" dirty="0">
-                <a:solidFill>
-                  <a:schemeClr val="tx2"/>
-                </a:solidFill>
-                <a:ea typeface="+mn-lt"/>
-                <a:cs typeface="+mn-lt"/>
-              </a:rPr>
-              <a:t>Les Env. Dev, Int, Acc, Prd</a:t>
-            </a:r>
-          </a:p>
-          <a:p>
-            <a:pPr marL="0" indent="0">
-              <a:buFont typeface="Arial" panose="020B0604020202020204" pitchFamily="34" charset="0"/>
-              <a:buNone/>
-            </a:pPr>
-            <a:r>
-              <a:rPr lang="en-US" sz="1400" b="0" dirty="0">
-                <a:solidFill>
-                  <a:schemeClr val="tx2"/>
-                </a:solidFill>
-                <a:ea typeface="+mn-lt"/>
-                <a:cs typeface="+mn-lt"/>
-              </a:rPr>
-              <a:t>Identifier </a:t>
-            </a:r>
-            <a:r>
-              <a:rPr lang="en-US" sz="1400" b="0" dirty="0" err="1">
-                <a:solidFill>
-                  <a:schemeClr val="tx2"/>
-                </a:solidFill>
-                <a:ea typeface="+mn-lt"/>
-                <a:cs typeface="+mn-lt"/>
-              </a:rPr>
-              <a:t>l’Env</a:t>
-            </a:r>
-            <a:r>
-              <a:rPr lang="en-US" sz="1400" b="0" dirty="0">
-                <a:solidFill>
-                  <a:schemeClr val="tx2"/>
-                </a:solidFill>
-                <a:ea typeface="+mn-lt"/>
-                <a:cs typeface="+mn-lt"/>
-              </a:rPr>
-              <a:t> </a:t>
-            </a:r>
-            <a:r>
-              <a:rPr lang="en-US" sz="1400" b="0" dirty="0" err="1">
-                <a:solidFill>
-                  <a:schemeClr val="tx2"/>
-                </a:solidFill>
-                <a:ea typeface="+mn-lt"/>
-                <a:cs typeface="+mn-lt"/>
-              </a:rPr>
-              <a:t>d’execution</a:t>
-            </a:r>
-            <a:endParaRPr lang="en-US" sz="1400" b="0" dirty="0">
-              <a:solidFill>
-                <a:schemeClr val="tx2"/>
-              </a:solidFill>
-              <a:ea typeface="+mn-lt"/>
-              <a:cs typeface="+mn-lt"/>
-            </a:endParaRPr>
-          </a:p>
-          <a:p>
-            <a:pPr marL="0" indent="0">
-              <a:buFont typeface="Arial" panose="020B0604020202020204" pitchFamily="34" charset="0"/>
-              <a:buNone/>
-            </a:pPr>
-            <a:r>
-              <a:rPr lang="en-US" sz="1400" b="0" dirty="0" err="1">
-                <a:solidFill>
-                  <a:schemeClr val="tx2"/>
-                </a:solidFill>
-                <a:ea typeface="+mn-lt"/>
-                <a:cs typeface="+mn-lt"/>
-              </a:rPr>
-              <a:t>Activer</a:t>
-            </a:r>
-            <a:r>
-              <a:rPr lang="en-US" sz="1400" b="0" dirty="0">
-                <a:solidFill>
-                  <a:schemeClr val="tx2"/>
-                </a:solidFill>
-                <a:ea typeface="+mn-lt"/>
-                <a:cs typeface="+mn-lt"/>
-              </a:rPr>
-              <a:t> un </a:t>
-            </a:r>
-            <a:r>
-              <a:rPr lang="en-US" sz="1400" b="0" dirty="0" err="1">
-                <a:solidFill>
-                  <a:schemeClr val="tx2"/>
-                </a:solidFill>
-                <a:ea typeface="+mn-lt"/>
-                <a:cs typeface="+mn-lt"/>
-              </a:rPr>
-              <a:t>traitement</a:t>
-            </a:r>
-            <a:r>
-              <a:rPr lang="en-US" sz="1400" b="0" dirty="0">
-                <a:solidFill>
-                  <a:schemeClr val="tx2"/>
-                </a:solidFill>
-                <a:ea typeface="+mn-lt"/>
-                <a:cs typeface="+mn-lt"/>
-              </a:rPr>
-              <a:t> </a:t>
-            </a:r>
-            <a:r>
-              <a:rPr lang="en-US" sz="1400" b="0" dirty="0" err="1">
-                <a:solidFill>
-                  <a:schemeClr val="tx2"/>
-                </a:solidFill>
-                <a:ea typeface="+mn-lt"/>
-                <a:cs typeface="+mn-lt"/>
-              </a:rPr>
-              <a:t>spécifique</a:t>
-            </a:r>
-            <a:r>
-              <a:rPr lang="en-US" sz="1400" b="0" dirty="0">
-                <a:solidFill>
-                  <a:schemeClr val="tx2"/>
-                </a:solidFill>
-                <a:ea typeface="+mn-lt"/>
-                <a:cs typeface="+mn-lt"/>
-              </a:rPr>
-              <a:t> </a:t>
-            </a:r>
-            <a:r>
-              <a:rPr lang="en-US" sz="1400" b="0" dirty="0" err="1">
-                <a:solidFill>
-                  <a:schemeClr val="tx2"/>
-                </a:solidFill>
-                <a:ea typeface="+mn-lt"/>
-                <a:cs typeface="+mn-lt"/>
-              </a:rPr>
-              <a:t>selon</a:t>
-            </a:r>
-            <a:r>
-              <a:rPr lang="en-US" sz="1400" b="0" dirty="0">
-                <a:solidFill>
-                  <a:schemeClr val="tx2"/>
-                </a:solidFill>
-                <a:ea typeface="+mn-lt"/>
-                <a:cs typeface="+mn-lt"/>
-              </a:rPr>
-              <a:t> </a:t>
-            </a:r>
-            <a:r>
-              <a:rPr lang="en-US" sz="1400" b="0" dirty="0" err="1">
-                <a:solidFill>
-                  <a:schemeClr val="tx2"/>
-                </a:solidFill>
-                <a:ea typeface="+mn-lt"/>
-                <a:cs typeface="+mn-lt"/>
-              </a:rPr>
-              <a:t>l’env</a:t>
-            </a:r>
-            <a:endParaRPr lang="fr-FR" sz="1400" b="0" dirty="0">
-              <a:solidFill>
-                <a:schemeClr val="tx2"/>
-              </a:solidFill>
-              <a:ea typeface="+mn-lt"/>
-              <a:cs typeface="+mn-lt"/>
-            </a:endParaRPr>
-          </a:p>
-        </p:txBody>
-      </p:sp>
-      <p:sp>
-        <p:nvSpPr>
-          <p:cNvPr id="8" name="Text Placeholder 8">
-            <a:extLst>
-              <a:ext uri="{FF2B5EF4-FFF2-40B4-BE49-F238E27FC236}">
-                <a16:creationId xmlns:a16="http://schemas.microsoft.com/office/drawing/2014/main" id="{18433FD8-548A-1799-E7E9-FBAE9585647C}"/>
-              </a:ext>
-            </a:extLst>
-          </p:cNvPr>
-          <p:cNvSpPr txBox="1">
-            <a:spLocks/>
-          </p:cNvSpPr>
-          <p:nvPr/>
-        </p:nvSpPr>
-        <p:spPr>
-          <a:xfrm>
-            <a:off x="4552336" y="2876606"/>
-            <a:ext cx="3274143" cy="1441767"/>
-          </a:xfrm>
-          <a:prstGeom prst="roundRect">
-            <a:avLst>
-              <a:gd name="adj" fmla="val 13315"/>
-            </a:avLst>
-          </a:prstGeom>
-          <a:ln w="15875">
-            <a:solidFill>
-              <a:schemeClr val="accent1"/>
-            </a:solidFill>
-          </a:ln>
-        </p:spPr>
-        <p:txBody>
-          <a:bodyPr vert="horz" lIns="0" tIns="0" rIns="0" bIns="0" rtlCol="0">
-            <a:noAutofit/>
-          </a:bodyPr>
-          <a:lstStyle>
-            <a:lvl1pPr marL="360000" indent="-360000" algn="l" defTabSz="914400" rtl="0" eaLnBrk="1" latinLnBrk="0" hangingPunct="1">
-              <a:lnSpc>
-                <a:spcPct val="90000"/>
-              </a:lnSpc>
-              <a:spcBef>
-                <a:spcPts val="1000"/>
-              </a:spcBef>
-              <a:buFont typeface="Arial" panose="020B0604020202020204" pitchFamily="34" charset="0"/>
-              <a:buChar char="•"/>
-              <a:defRPr sz="2000" b="1" kern="1200">
-                <a:solidFill>
-                  <a:schemeClr val="tx1"/>
-                </a:solidFill>
-                <a:latin typeface="+mn-lt"/>
-                <a:ea typeface="+mn-ea"/>
-                <a:cs typeface="+mn-cs"/>
-              </a:defRPr>
-            </a:lvl1pPr>
-            <a:lvl2pPr marL="648000" indent="-360000" algn="l" defTabSz="914400" rtl="0" eaLnBrk="1" latinLnBrk="0" hangingPunct="1">
-              <a:lnSpc>
-                <a:spcPct val="90000"/>
-              </a:lnSpc>
-              <a:spcBef>
-                <a:spcPts val="1200"/>
-              </a:spcBef>
-              <a:buFont typeface="Arial" panose="020B0604020202020204" pitchFamily="34" charset="0"/>
-              <a:buChar char="•"/>
-              <a:defRPr sz="1800" b="1" kern="1200">
-                <a:solidFill>
-                  <a:schemeClr val="tx2"/>
-                </a:solidFill>
-                <a:latin typeface="+mn-lt"/>
-                <a:ea typeface="+mn-ea"/>
-                <a:cs typeface="+mn-cs"/>
-              </a:defRPr>
-            </a:lvl2pPr>
-            <a:lvl3pPr marL="648000" indent="-360000" algn="l" defTabSz="914400" rtl="0" eaLnBrk="1" latinLnBrk="0" hangingPunct="1">
-              <a:lnSpc>
-                <a:spcPct val="90000"/>
-              </a:lnSpc>
-              <a:spcBef>
-                <a:spcPts val="1200"/>
-              </a:spcBef>
-              <a:buFont typeface="Arial" panose="020B0604020202020204" pitchFamily="34" charset="0"/>
-              <a:buChar char="•"/>
-              <a:defRPr lang="fr-FR" sz="1400" b="1" kern="1200" dirty="0">
-                <a:solidFill>
-                  <a:schemeClr val="bg1">
-                    <a:lumMod val="65000"/>
-                  </a:schemeClr>
-                </a:solidFill>
-                <a:latin typeface="+mn-lt"/>
-                <a:ea typeface="+mn-lt"/>
-                <a:cs typeface="+mn-lt"/>
-              </a:defRPr>
-            </a:lvl3pPr>
-            <a:lvl4pPr marL="720000" indent="-270000" algn="l" defTabSz="914400" rtl="0" eaLnBrk="1" latinLnBrk="0" hangingPunct="1">
-              <a:lnSpc>
-                <a:spcPct val="90000"/>
-              </a:lnSpc>
-              <a:spcBef>
-                <a:spcPts val="1000"/>
-              </a:spcBef>
-              <a:buFont typeface="Arial" panose="020B0604020202020204" pitchFamily="34" charset="0"/>
-              <a:buChar char="•"/>
-              <a:defRPr sz="1600" kern="1200">
-                <a:solidFill>
-                  <a:schemeClr val="tx2"/>
-                </a:solidFill>
-                <a:latin typeface="+mn-lt"/>
-                <a:ea typeface="+mn-ea"/>
-                <a:cs typeface="+mn-cs"/>
-              </a:defRPr>
-            </a:lvl4pPr>
-            <a:lvl5pPr marL="630000" indent="-270000" algn="l" defTabSz="914400" rtl="0" eaLnBrk="1" latinLnBrk="0" hangingPunct="1">
-              <a:lnSpc>
-                <a:spcPct val="90000"/>
-              </a:lnSpc>
-              <a:spcBef>
-                <a:spcPts val="1000"/>
-              </a:spcBef>
-              <a:buFont typeface="Arial" panose="020B0604020202020204" pitchFamily="34" charset="0"/>
-              <a:buChar char="•"/>
-              <a:defRPr sz="1600" kern="1200">
-                <a:solidFill>
-                  <a:schemeClr val="tx2"/>
-                </a:solidFill>
-                <a:latin typeface="+mn-lt"/>
-                <a:ea typeface="+mn-ea"/>
-                <a:cs typeface="+mn-cs"/>
-              </a:defRPr>
-            </a:lvl5pPr>
-            <a:lvl6pPr marL="2514600" indent="-228600" algn="l" defTabSz="914400" rtl="0" eaLnBrk="1" latinLnBrk="0" hangingPunct="1">
-              <a:lnSpc>
-                <a:spcPct val="90000"/>
-              </a:lnSpc>
-              <a:spcBef>
-                <a:spcPts val="500"/>
-              </a:spcBef>
-              <a:buFont typeface="Arial" panose="020B0604020202020204" pitchFamily="34" charset="0"/>
-              <a:buChar char="•"/>
-              <a:defRPr sz="1800" kern="1200">
-                <a:solidFill>
-                  <a:schemeClr val="tx1"/>
-                </a:solidFill>
-                <a:latin typeface="+mn-lt"/>
-                <a:ea typeface="+mn-ea"/>
-                <a:cs typeface="+mn-cs"/>
-              </a:defRPr>
-            </a:lvl6pPr>
-            <a:lvl7pPr marL="2971800" indent="-228600" algn="l" defTabSz="914400" rtl="0" eaLnBrk="1" latinLnBrk="0" hangingPunct="1">
-              <a:lnSpc>
-                <a:spcPct val="90000"/>
-              </a:lnSpc>
-              <a:spcBef>
-                <a:spcPts val="500"/>
-              </a:spcBef>
-              <a:buFont typeface="Arial" panose="020B0604020202020204" pitchFamily="34" charset="0"/>
-              <a:buChar char="•"/>
-              <a:defRPr sz="1800" kern="1200">
-                <a:solidFill>
-                  <a:schemeClr val="tx1"/>
-                </a:solidFill>
-                <a:latin typeface="+mn-lt"/>
-                <a:ea typeface="+mn-ea"/>
-                <a:cs typeface="+mn-cs"/>
-              </a:defRPr>
-            </a:lvl7pPr>
-            <a:lvl8pPr marL="3429000" indent="-228600" algn="l" defTabSz="914400" rtl="0" eaLnBrk="1" latinLnBrk="0" hangingPunct="1">
-              <a:lnSpc>
-                <a:spcPct val="90000"/>
-              </a:lnSpc>
-              <a:spcBef>
-                <a:spcPts val="500"/>
-              </a:spcBef>
-              <a:buFont typeface="Arial" panose="020B0604020202020204" pitchFamily="34" charset="0"/>
-              <a:buChar char="•"/>
-              <a:defRPr sz="1800" kern="1200">
-                <a:solidFill>
-                  <a:schemeClr val="tx1"/>
-                </a:solidFill>
-                <a:latin typeface="+mn-lt"/>
-                <a:ea typeface="+mn-ea"/>
-                <a:cs typeface="+mn-cs"/>
-              </a:defRPr>
-            </a:lvl8pPr>
-            <a:lvl9pPr marL="3886200" indent="-228600" algn="l" defTabSz="914400" rtl="0" eaLnBrk="1" latinLnBrk="0" hangingPunct="1">
-              <a:lnSpc>
-                <a:spcPct val="90000"/>
-              </a:lnSpc>
-              <a:spcBef>
-                <a:spcPts val="500"/>
-              </a:spcBef>
-              <a:buFont typeface="Arial" panose="020B0604020202020204" pitchFamily="34" charset="0"/>
-              <a:buChar char="•"/>
-              <a:defRPr sz="1800" kern="1200">
-                <a:solidFill>
-                  <a:schemeClr val="tx1"/>
-                </a:solidFill>
-                <a:latin typeface="+mn-lt"/>
-                <a:ea typeface="+mn-ea"/>
-                <a:cs typeface="+mn-cs"/>
-              </a:defRPr>
-            </a:lvl9pPr>
-          </a:lstStyle>
-          <a:p>
-            <a:pPr marL="0" indent="0" algn="ctr">
-              <a:buFont typeface="Arial" panose="020B0604020202020204" pitchFamily="34" charset="0"/>
-              <a:buNone/>
-            </a:pPr>
-            <a:r>
-              <a:rPr lang="en-US" dirty="0"/>
-              <a:t>Logging</a:t>
-            </a:r>
-          </a:p>
-          <a:p>
-            <a:pPr marL="0" indent="0">
-              <a:buFont typeface="Arial" panose="020B0604020202020204" pitchFamily="34" charset="0"/>
-              <a:buNone/>
-            </a:pPr>
-            <a:r>
-              <a:rPr lang="en-US" sz="1400" b="0" dirty="0" err="1">
-                <a:solidFill>
-                  <a:schemeClr val="tx2"/>
-                </a:solidFill>
-                <a:ea typeface="+mn-lt"/>
-                <a:cs typeface="+mn-lt"/>
-              </a:rPr>
-              <a:t>Ecrire</a:t>
-            </a:r>
-            <a:r>
-              <a:rPr lang="en-US" sz="1400" b="0" dirty="0">
-                <a:solidFill>
-                  <a:schemeClr val="tx2"/>
-                </a:solidFill>
-                <a:ea typeface="+mn-lt"/>
-                <a:cs typeface="+mn-lt"/>
-              </a:rPr>
-              <a:t> </a:t>
-            </a:r>
-            <a:r>
-              <a:rPr lang="en-US" sz="1400" b="0" dirty="0" err="1">
-                <a:solidFill>
-                  <a:schemeClr val="tx2"/>
-                </a:solidFill>
-                <a:ea typeface="+mn-lt"/>
-                <a:cs typeface="+mn-lt"/>
-              </a:rPr>
-              <a:t>l’execution</a:t>
-            </a:r>
-            <a:r>
-              <a:rPr lang="en-US" sz="1400" b="0" dirty="0">
-                <a:solidFill>
-                  <a:schemeClr val="tx2"/>
-                </a:solidFill>
-                <a:ea typeface="+mn-lt"/>
-                <a:cs typeface="+mn-lt"/>
-              </a:rPr>
-              <a:t> du code </a:t>
-            </a:r>
-            <a:r>
-              <a:rPr lang="en-US" sz="1400" b="0" dirty="0" err="1">
-                <a:solidFill>
-                  <a:schemeClr val="tx2"/>
-                </a:solidFill>
-                <a:ea typeface="+mn-lt"/>
-                <a:cs typeface="+mn-lt"/>
-              </a:rPr>
-              <a:t>permettant</a:t>
-            </a:r>
-            <a:r>
-              <a:rPr lang="en-US" sz="1400" b="0" dirty="0">
-                <a:solidFill>
-                  <a:schemeClr val="tx2"/>
-                </a:solidFill>
-                <a:ea typeface="+mn-lt"/>
-                <a:cs typeface="+mn-lt"/>
-              </a:rPr>
-              <a:t> </a:t>
-            </a:r>
-            <a:r>
-              <a:rPr lang="en-US" sz="1400" b="0" dirty="0" err="1">
-                <a:solidFill>
-                  <a:schemeClr val="tx2"/>
-                </a:solidFill>
-                <a:ea typeface="+mn-lt"/>
-                <a:cs typeface="+mn-lt"/>
-              </a:rPr>
-              <a:t>une</a:t>
-            </a:r>
-            <a:r>
-              <a:rPr lang="en-US" sz="1400" b="0" dirty="0">
-                <a:solidFill>
-                  <a:schemeClr val="tx2"/>
-                </a:solidFill>
-                <a:ea typeface="+mn-lt"/>
-                <a:cs typeface="+mn-lt"/>
-              </a:rPr>
-              <a:t> </a:t>
-            </a:r>
-            <a:r>
-              <a:rPr lang="en-US" sz="1400" b="0" dirty="0" err="1">
-                <a:solidFill>
-                  <a:schemeClr val="tx2"/>
-                </a:solidFill>
-                <a:ea typeface="+mn-lt"/>
-                <a:cs typeface="+mn-lt"/>
-              </a:rPr>
-              <a:t>alalyse</a:t>
-            </a:r>
-            <a:r>
-              <a:rPr lang="en-US" sz="1400" b="0" dirty="0">
-                <a:solidFill>
-                  <a:schemeClr val="tx2"/>
-                </a:solidFill>
-                <a:ea typeface="+mn-lt"/>
-                <a:cs typeface="+mn-lt"/>
-              </a:rPr>
-              <a:t> </a:t>
-            </a:r>
-            <a:r>
-              <a:rPr lang="en-US" sz="1400" b="0" dirty="0" err="1">
-                <a:solidFill>
-                  <a:schemeClr val="tx2"/>
-                </a:solidFill>
-                <a:ea typeface="+mn-lt"/>
-                <a:cs typeface="+mn-lt"/>
-              </a:rPr>
-              <a:t>en</a:t>
-            </a:r>
-            <a:r>
-              <a:rPr lang="en-US" sz="1400" b="0" dirty="0">
-                <a:solidFill>
-                  <a:schemeClr val="tx2"/>
-                </a:solidFill>
-                <a:ea typeface="+mn-lt"/>
-                <a:cs typeface="+mn-lt"/>
-              </a:rPr>
-              <a:t> </a:t>
-            </a:r>
-            <a:r>
-              <a:rPr lang="en-US" sz="1400" b="0" dirty="0" err="1">
-                <a:solidFill>
-                  <a:schemeClr val="tx2"/>
-                </a:solidFill>
-                <a:ea typeface="+mn-lt"/>
-                <a:cs typeface="+mn-lt"/>
-              </a:rPr>
-              <a:t>cas</a:t>
-            </a:r>
-            <a:r>
-              <a:rPr lang="en-US" sz="1400" b="0" dirty="0">
-                <a:solidFill>
-                  <a:schemeClr val="tx2"/>
-                </a:solidFill>
-                <a:ea typeface="+mn-lt"/>
-                <a:cs typeface="+mn-lt"/>
-              </a:rPr>
-              <a:t> de </a:t>
-            </a:r>
-            <a:r>
-              <a:rPr lang="en-US" sz="1400" b="0" dirty="0" err="1">
-                <a:solidFill>
-                  <a:schemeClr val="tx2"/>
-                </a:solidFill>
-                <a:ea typeface="+mn-lt"/>
-                <a:cs typeface="+mn-lt"/>
-              </a:rPr>
-              <a:t>dysfonctionnement</a:t>
-            </a:r>
-            <a:endParaRPr lang="en-US" sz="1400" b="0" dirty="0">
-              <a:solidFill>
-                <a:schemeClr val="tx2"/>
-              </a:solidFill>
-              <a:ea typeface="+mn-lt"/>
-              <a:cs typeface="+mn-lt"/>
-            </a:endParaRPr>
-          </a:p>
-          <a:p>
-            <a:pPr marL="0" indent="0">
-              <a:buFont typeface="Arial" panose="020B0604020202020204" pitchFamily="34" charset="0"/>
-              <a:buNone/>
-            </a:pPr>
-            <a:r>
-              <a:rPr lang="en-US" sz="1400" b="0" dirty="0" err="1">
-                <a:solidFill>
-                  <a:schemeClr val="tx2"/>
-                </a:solidFill>
-                <a:ea typeface="+mn-lt"/>
-                <a:cs typeface="+mn-lt"/>
-              </a:rPr>
-              <a:t>Gérer</a:t>
-            </a:r>
-            <a:r>
-              <a:rPr lang="en-US" sz="1400" b="0" dirty="0">
-                <a:solidFill>
-                  <a:schemeClr val="tx2"/>
-                </a:solidFill>
-                <a:ea typeface="+mn-lt"/>
-                <a:cs typeface="+mn-lt"/>
-              </a:rPr>
-              <a:t> des </a:t>
-            </a:r>
-            <a:r>
-              <a:rPr lang="en-US" sz="1400" b="0" dirty="0" err="1">
-                <a:solidFill>
-                  <a:schemeClr val="tx2"/>
-                </a:solidFill>
-                <a:ea typeface="+mn-lt"/>
-                <a:cs typeface="+mn-lt"/>
-              </a:rPr>
-              <a:t>niveaux</a:t>
-            </a:r>
-            <a:r>
-              <a:rPr lang="en-US" sz="1400" b="0" dirty="0">
-                <a:solidFill>
-                  <a:schemeClr val="tx2"/>
-                </a:solidFill>
-                <a:ea typeface="+mn-lt"/>
-                <a:cs typeface="+mn-lt"/>
-              </a:rPr>
-              <a:t> de log</a:t>
-            </a:r>
-            <a:r>
-              <a:rPr lang="fr-FR" sz="1400" b="0" dirty="0">
-                <a:solidFill>
-                  <a:schemeClr val="tx2"/>
-                </a:solidFill>
-                <a:ea typeface="+mn-lt"/>
-                <a:cs typeface="+mn-lt"/>
-              </a:rPr>
-              <a:t>, plusieurs supports d’écriture (</a:t>
-            </a:r>
-            <a:r>
-              <a:rPr lang="fr-FR" sz="1400" b="0" dirty="0" err="1">
-                <a:solidFill>
-                  <a:schemeClr val="tx2"/>
-                </a:solidFill>
-                <a:ea typeface="+mn-lt"/>
-                <a:cs typeface="+mn-lt"/>
-              </a:rPr>
-              <a:t>Kibana</a:t>
-            </a:r>
-            <a:r>
-              <a:rPr lang="fr-FR" sz="1400" b="0" dirty="0">
-                <a:solidFill>
-                  <a:schemeClr val="tx2"/>
-                </a:solidFill>
-                <a:ea typeface="+mn-lt"/>
-                <a:cs typeface="+mn-lt"/>
-              </a:rPr>
-              <a:t>, File, Console)</a:t>
-            </a:r>
-            <a:endParaRPr lang="en-US" sz="1400" b="0" dirty="0">
-              <a:solidFill>
-                <a:schemeClr val="tx2"/>
-              </a:solidFill>
-              <a:ea typeface="+mn-lt"/>
-              <a:cs typeface="+mn-lt"/>
-            </a:endParaRPr>
-          </a:p>
-        </p:txBody>
-      </p:sp>
-      <p:sp>
-        <p:nvSpPr>
-          <p:cNvPr id="10" name="Text Placeholder 8">
-            <a:extLst>
-              <a:ext uri="{FF2B5EF4-FFF2-40B4-BE49-F238E27FC236}">
-                <a16:creationId xmlns:a16="http://schemas.microsoft.com/office/drawing/2014/main" id="{EAFD2BC4-3D21-EE08-C10D-A69D377131AA}"/>
-              </a:ext>
-            </a:extLst>
-          </p:cNvPr>
-          <p:cNvSpPr txBox="1">
-            <a:spLocks/>
-          </p:cNvSpPr>
-          <p:nvPr/>
-        </p:nvSpPr>
-        <p:spPr>
-          <a:xfrm>
-            <a:off x="838200" y="4473678"/>
-            <a:ext cx="3527324" cy="1504923"/>
-          </a:xfrm>
-          <a:prstGeom prst="roundRect">
-            <a:avLst>
-              <a:gd name="adj" fmla="val 13315"/>
-            </a:avLst>
-          </a:prstGeom>
-          <a:ln w="15875">
-            <a:solidFill>
-              <a:schemeClr val="accent1"/>
-            </a:solidFill>
-          </a:ln>
-        </p:spPr>
-        <p:txBody>
-          <a:bodyPr vert="horz" lIns="0" tIns="0" rIns="0" bIns="0" rtlCol="0">
-            <a:noAutofit/>
-          </a:bodyPr>
-          <a:lstStyle>
-            <a:lvl1pPr marL="360000" indent="-360000" algn="l" defTabSz="914400" rtl="0" eaLnBrk="1" latinLnBrk="0" hangingPunct="1">
-              <a:lnSpc>
-                <a:spcPct val="90000"/>
-              </a:lnSpc>
-              <a:spcBef>
-                <a:spcPts val="1000"/>
-              </a:spcBef>
-              <a:buFont typeface="Arial" panose="020B0604020202020204" pitchFamily="34" charset="0"/>
-              <a:buChar char="•"/>
-              <a:defRPr sz="2000" b="1" kern="1200">
-                <a:solidFill>
-                  <a:schemeClr val="tx1"/>
-                </a:solidFill>
-                <a:latin typeface="+mn-lt"/>
-                <a:ea typeface="+mn-ea"/>
-                <a:cs typeface="+mn-cs"/>
-              </a:defRPr>
-            </a:lvl1pPr>
-            <a:lvl2pPr marL="648000" indent="-360000" algn="l" defTabSz="914400" rtl="0" eaLnBrk="1" latinLnBrk="0" hangingPunct="1">
-              <a:lnSpc>
-                <a:spcPct val="90000"/>
-              </a:lnSpc>
-              <a:spcBef>
-                <a:spcPts val="1200"/>
-              </a:spcBef>
-              <a:buFont typeface="Arial" panose="020B0604020202020204" pitchFamily="34" charset="0"/>
-              <a:buChar char="•"/>
-              <a:defRPr sz="1800" b="1" kern="1200">
-                <a:solidFill>
-                  <a:schemeClr val="tx2"/>
-                </a:solidFill>
-                <a:latin typeface="+mn-lt"/>
-                <a:ea typeface="+mn-ea"/>
-                <a:cs typeface="+mn-cs"/>
-              </a:defRPr>
-            </a:lvl2pPr>
-            <a:lvl3pPr marL="648000" indent="-360000" algn="l" defTabSz="914400" rtl="0" eaLnBrk="1" latinLnBrk="0" hangingPunct="1">
-              <a:lnSpc>
-                <a:spcPct val="90000"/>
-              </a:lnSpc>
-              <a:spcBef>
-                <a:spcPts val="1200"/>
-              </a:spcBef>
-              <a:buFont typeface="Arial" panose="020B0604020202020204" pitchFamily="34" charset="0"/>
-              <a:buChar char="•"/>
-              <a:defRPr lang="fr-FR" sz="1400" b="1" kern="1200" dirty="0">
-                <a:solidFill>
-                  <a:schemeClr val="bg1">
-                    <a:lumMod val="65000"/>
-                  </a:schemeClr>
-                </a:solidFill>
-                <a:latin typeface="+mn-lt"/>
-                <a:ea typeface="+mn-lt"/>
-                <a:cs typeface="+mn-lt"/>
-              </a:defRPr>
-            </a:lvl3pPr>
-            <a:lvl4pPr marL="720000" indent="-270000" algn="l" defTabSz="914400" rtl="0" eaLnBrk="1" latinLnBrk="0" hangingPunct="1">
-              <a:lnSpc>
-                <a:spcPct val="90000"/>
-              </a:lnSpc>
-              <a:spcBef>
-                <a:spcPts val="1000"/>
-              </a:spcBef>
-              <a:buFont typeface="Arial" panose="020B0604020202020204" pitchFamily="34" charset="0"/>
-              <a:buChar char="•"/>
-              <a:defRPr sz="1600" kern="1200">
-                <a:solidFill>
-                  <a:schemeClr val="tx2"/>
-                </a:solidFill>
-                <a:latin typeface="+mn-lt"/>
-                <a:ea typeface="+mn-ea"/>
-                <a:cs typeface="+mn-cs"/>
-              </a:defRPr>
-            </a:lvl4pPr>
-            <a:lvl5pPr marL="630000" indent="-270000" algn="l" defTabSz="914400" rtl="0" eaLnBrk="1" latinLnBrk="0" hangingPunct="1">
-              <a:lnSpc>
-                <a:spcPct val="90000"/>
-              </a:lnSpc>
-              <a:spcBef>
-                <a:spcPts val="1000"/>
-              </a:spcBef>
-              <a:buFont typeface="Arial" panose="020B0604020202020204" pitchFamily="34" charset="0"/>
-              <a:buChar char="•"/>
-              <a:defRPr sz="1600" kern="1200">
-                <a:solidFill>
-                  <a:schemeClr val="tx2"/>
-                </a:solidFill>
-                <a:latin typeface="+mn-lt"/>
-                <a:ea typeface="+mn-ea"/>
-                <a:cs typeface="+mn-cs"/>
-              </a:defRPr>
-            </a:lvl5pPr>
-            <a:lvl6pPr marL="2514600" indent="-228600" algn="l" defTabSz="914400" rtl="0" eaLnBrk="1" latinLnBrk="0" hangingPunct="1">
-              <a:lnSpc>
-                <a:spcPct val="90000"/>
-              </a:lnSpc>
-              <a:spcBef>
-                <a:spcPts val="500"/>
-              </a:spcBef>
-              <a:buFont typeface="Arial" panose="020B0604020202020204" pitchFamily="34" charset="0"/>
-              <a:buChar char="•"/>
-              <a:defRPr sz="1800" kern="1200">
-                <a:solidFill>
-                  <a:schemeClr val="tx1"/>
-                </a:solidFill>
-                <a:latin typeface="+mn-lt"/>
-                <a:ea typeface="+mn-ea"/>
-                <a:cs typeface="+mn-cs"/>
-              </a:defRPr>
-            </a:lvl6pPr>
-            <a:lvl7pPr marL="2971800" indent="-228600" algn="l" defTabSz="914400" rtl="0" eaLnBrk="1" latinLnBrk="0" hangingPunct="1">
-              <a:lnSpc>
-                <a:spcPct val="90000"/>
-              </a:lnSpc>
-              <a:spcBef>
-                <a:spcPts val="500"/>
-              </a:spcBef>
-              <a:buFont typeface="Arial" panose="020B0604020202020204" pitchFamily="34" charset="0"/>
-              <a:buChar char="•"/>
-              <a:defRPr sz="1800" kern="1200">
-                <a:solidFill>
-                  <a:schemeClr val="tx1"/>
-                </a:solidFill>
-                <a:latin typeface="+mn-lt"/>
-                <a:ea typeface="+mn-ea"/>
-                <a:cs typeface="+mn-cs"/>
-              </a:defRPr>
-            </a:lvl7pPr>
-            <a:lvl8pPr marL="3429000" indent="-228600" algn="l" defTabSz="914400" rtl="0" eaLnBrk="1" latinLnBrk="0" hangingPunct="1">
-              <a:lnSpc>
-                <a:spcPct val="90000"/>
-              </a:lnSpc>
-              <a:spcBef>
-                <a:spcPts val="500"/>
-              </a:spcBef>
-              <a:buFont typeface="Arial" panose="020B0604020202020204" pitchFamily="34" charset="0"/>
-              <a:buChar char="•"/>
-              <a:defRPr sz="1800" kern="1200">
-                <a:solidFill>
-                  <a:schemeClr val="tx1"/>
-                </a:solidFill>
-                <a:latin typeface="+mn-lt"/>
-                <a:ea typeface="+mn-ea"/>
-                <a:cs typeface="+mn-cs"/>
-              </a:defRPr>
-            </a:lvl8pPr>
-            <a:lvl9pPr marL="3886200" indent="-228600" algn="l" defTabSz="914400" rtl="0" eaLnBrk="1" latinLnBrk="0" hangingPunct="1">
-              <a:lnSpc>
-                <a:spcPct val="90000"/>
-              </a:lnSpc>
-              <a:spcBef>
-                <a:spcPts val="500"/>
-              </a:spcBef>
-              <a:buFont typeface="Arial" panose="020B0604020202020204" pitchFamily="34" charset="0"/>
-              <a:buChar char="•"/>
-              <a:defRPr sz="1800" kern="1200">
-                <a:solidFill>
-                  <a:schemeClr val="tx1"/>
-                </a:solidFill>
-                <a:latin typeface="+mn-lt"/>
-                <a:ea typeface="+mn-ea"/>
-                <a:cs typeface="+mn-cs"/>
-              </a:defRPr>
-            </a:lvl9pPr>
-          </a:lstStyle>
-          <a:p>
-            <a:pPr marL="0" indent="0" algn="ctr">
-              <a:buFont typeface="Arial" panose="020B0604020202020204" pitchFamily="34" charset="0"/>
-              <a:buNone/>
-            </a:pPr>
-            <a:r>
-              <a:rPr lang="en-US" dirty="0"/>
-              <a:t>ErrorHandling.</a:t>
-            </a:r>
-          </a:p>
-          <a:p>
-            <a:pPr marL="0" indent="0">
-              <a:buFont typeface="Arial" panose="020B0604020202020204" pitchFamily="34" charset="0"/>
-              <a:buNone/>
-            </a:pPr>
-            <a:r>
-              <a:rPr lang="en-US" sz="1400" b="0" dirty="0">
-                <a:solidFill>
-                  <a:schemeClr val="tx2"/>
-                </a:solidFill>
-                <a:ea typeface="+mn-lt"/>
-                <a:cs typeface="+mn-lt"/>
-              </a:rPr>
-              <a:t>Que fait le program </a:t>
-            </a:r>
-            <a:r>
-              <a:rPr lang="en-US" sz="1400" b="0" dirty="0" err="1">
-                <a:solidFill>
-                  <a:schemeClr val="tx2"/>
-                </a:solidFill>
-                <a:ea typeface="+mn-lt"/>
-                <a:cs typeface="+mn-lt"/>
-              </a:rPr>
-              <a:t>lorsqu’il</a:t>
-            </a:r>
-            <a:r>
-              <a:rPr lang="en-US" sz="1400" b="0" dirty="0">
-                <a:solidFill>
-                  <a:schemeClr val="tx2"/>
-                </a:solidFill>
-                <a:ea typeface="+mn-lt"/>
-                <a:cs typeface="+mn-lt"/>
-              </a:rPr>
-              <a:t> rencontre un </a:t>
-            </a:r>
-            <a:r>
-              <a:rPr lang="en-US" sz="1400" b="0" dirty="0" err="1">
-                <a:solidFill>
-                  <a:schemeClr val="tx2"/>
-                </a:solidFill>
-                <a:ea typeface="+mn-lt"/>
-                <a:cs typeface="+mn-lt"/>
-              </a:rPr>
-              <a:t>erreur</a:t>
-            </a:r>
-            <a:r>
-              <a:rPr lang="en-US" sz="1400" b="0" dirty="0">
-                <a:solidFill>
-                  <a:schemeClr val="tx2"/>
-                </a:solidFill>
-                <a:ea typeface="+mn-lt"/>
-                <a:cs typeface="+mn-lt"/>
-              </a:rPr>
-              <a:t> ?</a:t>
-            </a:r>
-          </a:p>
-          <a:p>
-            <a:pPr marL="0" indent="0">
-              <a:buFont typeface="Arial" panose="020B0604020202020204" pitchFamily="34" charset="0"/>
-              <a:buNone/>
-            </a:pPr>
-            <a:r>
-              <a:rPr lang="en-US" sz="1400" b="0" dirty="0" err="1">
-                <a:solidFill>
-                  <a:schemeClr val="tx2"/>
-                </a:solidFill>
-                <a:ea typeface="+mn-lt"/>
-                <a:cs typeface="+mn-lt"/>
-              </a:rPr>
-              <a:t>Quel</a:t>
-            </a:r>
-            <a:r>
-              <a:rPr lang="en-US" sz="1400" b="0" dirty="0">
-                <a:solidFill>
-                  <a:schemeClr val="tx2"/>
-                </a:solidFill>
-                <a:ea typeface="+mn-lt"/>
-                <a:cs typeface="+mn-lt"/>
-              </a:rPr>
-              <a:t> type </a:t>
-            </a:r>
-            <a:r>
-              <a:rPr lang="en-US" sz="1400" b="0" dirty="0" err="1">
-                <a:solidFill>
-                  <a:schemeClr val="tx2"/>
-                </a:solidFill>
-                <a:ea typeface="+mn-lt"/>
-                <a:cs typeface="+mn-lt"/>
-              </a:rPr>
-              <a:t>d’erreur</a:t>
-            </a:r>
-            <a:r>
-              <a:rPr lang="en-US" sz="1400" b="0" dirty="0">
-                <a:solidFill>
-                  <a:schemeClr val="tx2"/>
-                </a:solidFill>
-                <a:ea typeface="+mn-lt"/>
-                <a:cs typeface="+mn-lt"/>
-              </a:rPr>
-              <a:t> (</a:t>
-            </a:r>
-            <a:r>
-              <a:rPr lang="en-US" sz="1400" b="0" dirty="0" err="1">
-                <a:solidFill>
-                  <a:schemeClr val="tx2"/>
-                </a:solidFill>
-                <a:ea typeface="+mn-lt"/>
-                <a:cs typeface="+mn-lt"/>
-              </a:rPr>
-              <a:t>Metier</a:t>
-            </a:r>
-            <a:r>
-              <a:rPr lang="en-US" sz="1400" b="0" dirty="0">
-                <a:solidFill>
-                  <a:schemeClr val="tx2"/>
-                </a:solidFill>
-                <a:ea typeface="+mn-lt"/>
-                <a:cs typeface="+mn-lt"/>
-              </a:rPr>
-              <a:t> / Technique), quell format </a:t>
-            </a:r>
-            <a:r>
-              <a:rPr lang="en-US" sz="1400" b="0" dirty="0" err="1">
-                <a:solidFill>
-                  <a:schemeClr val="tx2"/>
-                </a:solidFill>
-                <a:ea typeface="+mn-lt"/>
-                <a:cs typeface="+mn-lt"/>
-              </a:rPr>
-              <a:t>d’émission</a:t>
-            </a:r>
-            <a:r>
-              <a:rPr lang="en-US" sz="1400" b="0" dirty="0">
-                <a:solidFill>
-                  <a:schemeClr val="tx2"/>
-                </a:solidFill>
-                <a:ea typeface="+mn-lt"/>
-                <a:cs typeface="+mn-lt"/>
-              </a:rPr>
-              <a:t> (Exception, Http Error)</a:t>
-            </a:r>
-          </a:p>
-        </p:txBody>
-      </p:sp>
-      <p:sp>
-        <p:nvSpPr>
-          <p:cNvPr id="11" name="Text Placeholder 8">
-            <a:extLst>
-              <a:ext uri="{FF2B5EF4-FFF2-40B4-BE49-F238E27FC236}">
-                <a16:creationId xmlns:a16="http://schemas.microsoft.com/office/drawing/2014/main" id="{84EFE48E-9585-259B-851B-60DCCA8F6F10}"/>
-              </a:ext>
-            </a:extLst>
-          </p:cNvPr>
-          <p:cNvSpPr txBox="1">
-            <a:spLocks/>
-          </p:cNvSpPr>
-          <p:nvPr/>
-        </p:nvSpPr>
-        <p:spPr>
-          <a:xfrm>
-            <a:off x="4552337" y="4473678"/>
-            <a:ext cx="3446444" cy="1504923"/>
-          </a:xfrm>
-          <a:prstGeom prst="roundRect">
-            <a:avLst>
-              <a:gd name="adj" fmla="val 13315"/>
-            </a:avLst>
-          </a:prstGeom>
-          <a:ln w="15875">
-            <a:solidFill>
-              <a:schemeClr val="accent1"/>
-            </a:solidFill>
-          </a:ln>
-        </p:spPr>
-        <p:txBody>
-          <a:bodyPr vert="horz" lIns="0" tIns="0" rIns="0" bIns="0" rtlCol="0">
-            <a:noAutofit/>
-          </a:bodyPr>
-          <a:lstStyle>
-            <a:lvl1pPr marL="360000" indent="-360000" algn="l" defTabSz="914400" rtl="0" eaLnBrk="1" latinLnBrk="0" hangingPunct="1">
-              <a:lnSpc>
-                <a:spcPct val="90000"/>
-              </a:lnSpc>
-              <a:spcBef>
-                <a:spcPts val="1000"/>
-              </a:spcBef>
-              <a:buFont typeface="Arial" panose="020B0604020202020204" pitchFamily="34" charset="0"/>
-              <a:buChar char="•"/>
-              <a:defRPr sz="2000" b="1" kern="1200">
-                <a:solidFill>
-                  <a:schemeClr val="tx1"/>
-                </a:solidFill>
-                <a:latin typeface="+mn-lt"/>
-                <a:ea typeface="+mn-ea"/>
-                <a:cs typeface="+mn-cs"/>
-              </a:defRPr>
-            </a:lvl1pPr>
-            <a:lvl2pPr marL="648000" indent="-360000" algn="l" defTabSz="914400" rtl="0" eaLnBrk="1" latinLnBrk="0" hangingPunct="1">
-              <a:lnSpc>
-                <a:spcPct val="90000"/>
-              </a:lnSpc>
-              <a:spcBef>
-                <a:spcPts val="1200"/>
-              </a:spcBef>
-              <a:buFont typeface="Arial" panose="020B0604020202020204" pitchFamily="34" charset="0"/>
-              <a:buChar char="•"/>
-              <a:defRPr sz="1800" b="1" kern="1200">
-                <a:solidFill>
-                  <a:schemeClr val="tx2"/>
-                </a:solidFill>
-                <a:latin typeface="+mn-lt"/>
-                <a:ea typeface="+mn-ea"/>
-                <a:cs typeface="+mn-cs"/>
-              </a:defRPr>
-            </a:lvl2pPr>
-            <a:lvl3pPr marL="648000" indent="-360000" algn="l" defTabSz="914400" rtl="0" eaLnBrk="1" latinLnBrk="0" hangingPunct="1">
-              <a:lnSpc>
-                <a:spcPct val="90000"/>
-              </a:lnSpc>
-              <a:spcBef>
-                <a:spcPts val="1200"/>
-              </a:spcBef>
-              <a:buFont typeface="Arial" panose="020B0604020202020204" pitchFamily="34" charset="0"/>
-              <a:buChar char="•"/>
-              <a:defRPr lang="fr-FR" sz="1400" b="1" kern="1200" dirty="0">
-                <a:solidFill>
-                  <a:schemeClr val="bg1">
-                    <a:lumMod val="65000"/>
-                  </a:schemeClr>
-                </a:solidFill>
-                <a:latin typeface="+mn-lt"/>
-                <a:ea typeface="+mn-lt"/>
-                <a:cs typeface="+mn-lt"/>
-              </a:defRPr>
-            </a:lvl3pPr>
-            <a:lvl4pPr marL="720000" indent="-270000" algn="l" defTabSz="914400" rtl="0" eaLnBrk="1" latinLnBrk="0" hangingPunct="1">
-              <a:lnSpc>
-                <a:spcPct val="90000"/>
-              </a:lnSpc>
-              <a:spcBef>
-                <a:spcPts val="1000"/>
-              </a:spcBef>
-              <a:buFont typeface="Arial" panose="020B0604020202020204" pitchFamily="34" charset="0"/>
-              <a:buChar char="•"/>
-              <a:defRPr sz="1600" kern="1200">
-                <a:solidFill>
-                  <a:schemeClr val="tx2"/>
-                </a:solidFill>
-                <a:latin typeface="+mn-lt"/>
-                <a:ea typeface="+mn-ea"/>
-                <a:cs typeface="+mn-cs"/>
-              </a:defRPr>
-            </a:lvl4pPr>
-            <a:lvl5pPr marL="630000" indent="-270000" algn="l" defTabSz="914400" rtl="0" eaLnBrk="1" latinLnBrk="0" hangingPunct="1">
-              <a:lnSpc>
-                <a:spcPct val="90000"/>
-              </a:lnSpc>
-              <a:spcBef>
-                <a:spcPts val="1000"/>
-              </a:spcBef>
-              <a:buFont typeface="Arial" panose="020B0604020202020204" pitchFamily="34" charset="0"/>
-              <a:buChar char="•"/>
-              <a:defRPr sz="1600" kern="1200">
-                <a:solidFill>
-                  <a:schemeClr val="tx2"/>
-                </a:solidFill>
-                <a:latin typeface="+mn-lt"/>
-                <a:ea typeface="+mn-ea"/>
-                <a:cs typeface="+mn-cs"/>
-              </a:defRPr>
-            </a:lvl5pPr>
-            <a:lvl6pPr marL="2514600" indent="-228600" algn="l" defTabSz="914400" rtl="0" eaLnBrk="1" latinLnBrk="0" hangingPunct="1">
-              <a:lnSpc>
-                <a:spcPct val="90000"/>
-              </a:lnSpc>
-              <a:spcBef>
-                <a:spcPts val="500"/>
-              </a:spcBef>
-              <a:buFont typeface="Arial" panose="020B0604020202020204" pitchFamily="34" charset="0"/>
-              <a:buChar char="•"/>
-              <a:defRPr sz="1800" kern="1200">
-                <a:solidFill>
-                  <a:schemeClr val="tx1"/>
-                </a:solidFill>
-                <a:latin typeface="+mn-lt"/>
-                <a:ea typeface="+mn-ea"/>
-                <a:cs typeface="+mn-cs"/>
-              </a:defRPr>
-            </a:lvl6pPr>
-            <a:lvl7pPr marL="2971800" indent="-228600" algn="l" defTabSz="914400" rtl="0" eaLnBrk="1" latinLnBrk="0" hangingPunct="1">
-              <a:lnSpc>
-                <a:spcPct val="90000"/>
-              </a:lnSpc>
-              <a:spcBef>
-                <a:spcPts val="500"/>
-              </a:spcBef>
-              <a:buFont typeface="Arial" panose="020B0604020202020204" pitchFamily="34" charset="0"/>
-              <a:buChar char="•"/>
-              <a:defRPr sz="1800" kern="1200">
-                <a:solidFill>
-                  <a:schemeClr val="tx1"/>
-                </a:solidFill>
-                <a:latin typeface="+mn-lt"/>
-                <a:ea typeface="+mn-ea"/>
-                <a:cs typeface="+mn-cs"/>
-              </a:defRPr>
-            </a:lvl7pPr>
-            <a:lvl8pPr marL="3429000" indent="-228600" algn="l" defTabSz="914400" rtl="0" eaLnBrk="1" latinLnBrk="0" hangingPunct="1">
-              <a:lnSpc>
-                <a:spcPct val="90000"/>
-              </a:lnSpc>
-              <a:spcBef>
-                <a:spcPts val="500"/>
-              </a:spcBef>
-              <a:buFont typeface="Arial" panose="020B0604020202020204" pitchFamily="34" charset="0"/>
-              <a:buChar char="•"/>
-              <a:defRPr sz="1800" kern="1200">
-                <a:solidFill>
-                  <a:schemeClr val="tx1"/>
-                </a:solidFill>
-                <a:latin typeface="+mn-lt"/>
-                <a:ea typeface="+mn-ea"/>
-                <a:cs typeface="+mn-cs"/>
-              </a:defRPr>
-            </a:lvl8pPr>
-            <a:lvl9pPr marL="3886200" indent="-228600" algn="l" defTabSz="914400" rtl="0" eaLnBrk="1" latinLnBrk="0" hangingPunct="1">
-              <a:lnSpc>
-                <a:spcPct val="90000"/>
-              </a:lnSpc>
-              <a:spcBef>
-                <a:spcPts val="500"/>
-              </a:spcBef>
-              <a:buFont typeface="Arial" panose="020B0604020202020204" pitchFamily="34" charset="0"/>
-              <a:buChar char="•"/>
-              <a:defRPr sz="1800" kern="1200">
-                <a:solidFill>
-                  <a:schemeClr val="tx1"/>
-                </a:solidFill>
-                <a:latin typeface="+mn-lt"/>
-                <a:ea typeface="+mn-ea"/>
-                <a:cs typeface="+mn-cs"/>
-              </a:defRPr>
-            </a:lvl9pPr>
-          </a:lstStyle>
-          <a:p>
-            <a:pPr marL="0" indent="0" algn="ctr">
-              <a:buFont typeface="Arial" panose="020B0604020202020204" pitchFamily="34" charset="0"/>
-              <a:buNone/>
-            </a:pPr>
-            <a:r>
-              <a:rPr lang="en-US" dirty="0" err="1"/>
-              <a:t>DataModeling</a:t>
-            </a:r>
-            <a:endParaRPr lang="en-US" dirty="0"/>
-          </a:p>
-          <a:p>
-            <a:pPr marL="0" indent="0">
-              <a:buFont typeface="Arial" panose="020B0604020202020204" pitchFamily="34" charset="0"/>
-              <a:buNone/>
-            </a:pPr>
-            <a:r>
-              <a:rPr lang="en-US" sz="1400" b="0" dirty="0">
-                <a:solidFill>
-                  <a:schemeClr val="tx2"/>
-                </a:solidFill>
-                <a:ea typeface="+mn-lt"/>
-                <a:cs typeface="+mn-lt"/>
-              </a:rPr>
-              <a:t>Entity. </a:t>
-            </a:r>
-            <a:r>
-              <a:rPr lang="en-US" sz="1400" b="0" dirty="0" err="1">
-                <a:solidFill>
-                  <a:schemeClr val="tx2"/>
-                </a:solidFill>
-                <a:ea typeface="+mn-lt"/>
-                <a:cs typeface="+mn-lt"/>
-              </a:rPr>
-              <a:t>Objet</a:t>
-            </a:r>
-            <a:r>
-              <a:rPr lang="en-US" sz="1400" b="0" dirty="0">
-                <a:solidFill>
-                  <a:schemeClr val="tx2"/>
-                </a:solidFill>
-                <a:ea typeface="+mn-lt"/>
-                <a:cs typeface="+mn-lt"/>
-              </a:rPr>
-              <a:t> dans </a:t>
-            </a:r>
-            <a:r>
-              <a:rPr lang="en-US" sz="1400" b="0" dirty="0" err="1">
-                <a:solidFill>
-                  <a:schemeClr val="tx2"/>
-                </a:solidFill>
-                <a:ea typeface="+mn-lt"/>
-                <a:cs typeface="+mn-lt"/>
-              </a:rPr>
-              <a:t>une</a:t>
-            </a:r>
-            <a:r>
-              <a:rPr lang="en-US" sz="1400" b="0" dirty="0">
-                <a:solidFill>
-                  <a:schemeClr val="tx2"/>
-                </a:solidFill>
-                <a:ea typeface="+mn-lt"/>
-                <a:cs typeface="+mn-lt"/>
-              </a:rPr>
-              <a:t> base </a:t>
-            </a:r>
-            <a:r>
-              <a:rPr lang="en-US" sz="1400" b="0" dirty="0" err="1">
-                <a:solidFill>
-                  <a:schemeClr val="tx2"/>
-                </a:solidFill>
-                <a:ea typeface="+mn-lt"/>
-                <a:cs typeface="+mn-lt"/>
-              </a:rPr>
-              <a:t>donnée</a:t>
-            </a:r>
-            <a:endParaRPr lang="en-US" sz="1400" b="0" dirty="0">
-              <a:solidFill>
-                <a:schemeClr val="tx2"/>
-              </a:solidFill>
-              <a:ea typeface="+mn-lt"/>
-              <a:cs typeface="+mn-lt"/>
-            </a:endParaRPr>
-          </a:p>
-          <a:p>
-            <a:pPr marL="0" indent="0">
-              <a:buFont typeface="Arial" panose="020B0604020202020204" pitchFamily="34" charset="0"/>
-              <a:buNone/>
-            </a:pPr>
-            <a:r>
-              <a:rPr lang="en-US" sz="1400" b="0" dirty="0" err="1">
-                <a:solidFill>
-                  <a:schemeClr val="tx2"/>
-                </a:solidFill>
-                <a:ea typeface="+mn-lt"/>
-                <a:cs typeface="+mn-lt"/>
-              </a:rPr>
-              <a:t>Dto</a:t>
-            </a:r>
-            <a:r>
-              <a:rPr lang="en-US" sz="1400" b="0" dirty="0">
-                <a:solidFill>
-                  <a:schemeClr val="tx2"/>
-                </a:solidFill>
-                <a:ea typeface="+mn-lt"/>
-                <a:cs typeface="+mn-lt"/>
-              </a:rPr>
-              <a:t>. </a:t>
-            </a:r>
-            <a:r>
-              <a:rPr lang="en-US" sz="1400" b="0" dirty="0" err="1">
-                <a:solidFill>
-                  <a:schemeClr val="tx2"/>
-                </a:solidFill>
-                <a:ea typeface="+mn-lt"/>
-                <a:cs typeface="+mn-lt"/>
-              </a:rPr>
-              <a:t>Objet</a:t>
-            </a:r>
-            <a:r>
-              <a:rPr lang="en-US" sz="1400" b="0" dirty="0">
-                <a:solidFill>
-                  <a:schemeClr val="tx2"/>
-                </a:solidFill>
-                <a:ea typeface="+mn-lt"/>
-                <a:cs typeface="+mn-lt"/>
-              </a:rPr>
-              <a:t> de </a:t>
-            </a:r>
-            <a:r>
-              <a:rPr lang="en-US" sz="1400" b="0" dirty="0" err="1">
-                <a:solidFill>
-                  <a:schemeClr val="tx2"/>
-                </a:solidFill>
-                <a:ea typeface="+mn-lt"/>
-                <a:cs typeface="+mn-lt"/>
-              </a:rPr>
-              <a:t>transfert</a:t>
-            </a:r>
-            <a:r>
-              <a:rPr lang="en-US" sz="1400" b="0" dirty="0">
-                <a:solidFill>
-                  <a:schemeClr val="tx2"/>
-                </a:solidFill>
-                <a:ea typeface="+mn-lt"/>
-                <a:cs typeface="+mn-lt"/>
-              </a:rPr>
-              <a:t> inter </a:t>
-            </a:r>
-            <a:r>
-              <a:rPr lang="en-US" sz="1400" b="0" dirty="0" err="1">
-                <a:solidFill>
-                  <a:schemeClr val="tx2"/>
-                </a:solidFill>
-                <a:ea typeface="+mn-lt"/>
-                <a:cs typeface="+mn-lt"/>
-              </a:rPr>
-              <a:t>système</a:t>
-            </a:r>
-            <a:endParaRPr lang="en-US" sz="1400" b="0" dirty="0">
-              <a:solidFill>
-                <a:schemeClr val="tx2"/>
-              </a:solidFill>
-              <a:ea typeface="+mn-lt"/>
-              <a:cs typeface="+mn-lt"/>
-            </a:endParaRPr>
-          </a:p>
-          <a:p>
-            <a:pPr marL="0" indent="0">
-              <a:buFont typeface="Arial" panose="020B0604020202020204" pitchFamily="34" charset="0"/>
-              <a:buNone/>
-            </a:pPr>
-            <a:r>
-              <a:rPr lang="en-US" sz="1400" b="0" dirty="0" err="1">
-                <a:solidFill>
-                  <a:schemeClr val="tx2"/>
-                </a:solidFill>
-                <a:ea typeface="+mn-lt"/>
-                <a:cs typeface="+mn-lt"/>
-              </a:rPr>
-              <a:t>Préférer</a:t>
-            </a:r>
-            <a:r>
-              <a:rPr lang="en-US" sz="1400" b="0" dirty="0">
-                <a:solidFill>
-                  <a:schemeClr val="tx2"/>
-                </a:solidFill>
-                <a:ea typeface="+mn-lt"/>
-                <a:cs typeface="+mn-lt"/>
-              </a:rPr>
-              <a:t> la composition à </a:t>
-            </a:r>
-            <a:r>
-              <a:rPr lang="en-US" sz="1400" b="0" dirty="0" err="1">
-                <a:solidFill>
-                  <a:schemeClr val="tx2"/>
-                </a:solidFill>
-                <a:ea typeface="+mn-lt"/>
-                <a:cs typeface="+mn-lt"/>
-              </a:rPr>
-              <a:t>l’heritage</a:t>
-            </a:r>
-            <a:endParaRPr lang="en-US" sz="1400" b="0" dirty="0">
-              <a:solidFill>
-                <a:schemeClr val="tx2"/>
-              </a:solidFill>
-              <a:ea typeface="+mn-lt"/>
-              <a:cs typeface="+mn-lt"/>
-            </a:endParaRPr>
-          </a:p>
-          <a:p>
-            <a:pPr marL="0" indent="0">
-              <a:buFont typeface="Arial" panose="020B0604020202020204" pitchFamily="34" charset="0"/>
-              <a:buNone/>
-            </a:pPr>
-            <a:r>
-              <a:rPr lang="fr-FR" sz="1200" b="0" dirty="0"/>
-              <a:t>Identifiant d’un objet : un Id, type 'string’ Vs « </a:t>
-            </a:r>
-            <a:r>
-              <a:rPr lang="fr-FR" sz="1200" b="0" dirty="0" err="1"/>
-              <a:t>Guid</a:t>
-            </a:r>
-            <a:r>
-              <a:rPr lang="fr-FR" sz="1200" b="0" dirty="0"/>
-              <a:t> » Vs « </a:t>
-            </a:r>
-            <a:r>
-              <a:rPr lang="fr-FR" sz="1200" b="0" dirty="0" err="1"/>
-              <a:t>Number</a:t>
-            </a:r>
-            <a:r>
-              <a:rPr lang="fr-FR" sz="1200" b="0" dirty="0"/>
-              <a:t> » ?</a:t>
-            </a:r>
-            <a:br>
-              <a:rPr lang="en-US" sz="1200" dirty="0"/>
-            </a:br>
-            <a:endParaRPr lang="en-US" sz="1200" dirty="0"/>
-          </a:p>
-          <a:p>
-            <a:pPr marL="0" indent="0">
-              <a:buFont typeface="Arial" panose="020B0604020202020204" pitchFamily="34" charset="0"/>
-              <a:buNone/>
-            </a:pPr>
-            <a:endParaRPr lang="en-US" sz="1400" b="0" dirty="0">
-              <a:solidFill>
-                <a:schemeClr val="tx2"/>
-              </a:solidFill>
-              <a:ea typeface="+mn-lt"/>
-              <a:cs typeface="+mn-lt"/>
-            </a:endParaRPr>
-          </a:p>
-        </p:txBody>
-      </p:sp>
-      <p:sp>
-        <p:nvSpPr>
-          <p:cNvPr id="15" name="Text Placeholder 14">
-            <a:extLst>
-              <a:ext uri="{FF2B5EF4-FFF2-40B4-BE49-F238E27FC236}">
-                <a16:creationId xmlns:a16="http://schemas.microsoft.com/office/drawing/2014/main" id="{3E57FA8B-662D-8680-8708-D0A275A0DD09}"/>
-              </a:ext>
-            </a:extLst>
-          </p:cNvPr>
-          <p:cNvSpPr>
-            <a:spLocks noGrp="1"/>
-          </p:cNvSpPr>
-          <p:nvPr>
-            <p:ph type="body" sz="quarter" idx="20"/>
-          </p:nvPr>
-        </p:nvSpPr>
-        <p:spPr>
-          <a:xfrm>
-            <a:off x="8061227" y="1089499"/>
-            <a:ext cx="3219547" cy="1638642"/>
-          </a:xfrm>
-        </p:spPr>
-        <p:txBody>
-          <a:bodyPr/>
-          <a:lstStyle/>
-          <a:p>
-            <a:pPr marL="0" indent="0" algn="ctr">
-              <a:buNone/>
-            </a:pPr>
-            <a:r>
-              <a:rPr lang="en-US" dirty="0"/>
-              <a:t>Validation</a:t>
-            </a:r>
-          </a:p>
-        </p:txBody>
-      </p:sp>
-      <p:sp>
-        <p:nvSpPr>
-          <p:cNvPr id="16" name="Text Placeholder 8">
-            <a:extLst>
-              <a:ext uri="{FF2B5EF4-FFF2-40B4-BE49-F238E27FC236}">
-                <a16:creationId xmlns:a16="http://schemas.microsoft.com/office/drawing/2014/main" id="{485A2950-1AE5-0212-6E63-66B7604EE028}"/>
-              </a:ext>
-            </a:extLst>
-          </p:cNvPr>
-          <p:cNvSpPr txBox="1">
-            <a:spLocks/>
-          </p:cNvSpPr>
-          <p:nvPr/>
-        </p:nvSpPr>
-        <p:spPr>
-          <a:xfrm>
-            <a:off x="8061227" y="2833700"/>
-            <a:ext cx="3219547" cy="1504923"/>
-          </a:xfrm>
-          <a:prstGeom prst="roundRect">
-            <a:avLst>
-              <a:gd name="adj" fmla="val 13315"/>
-            </a:avLst>
-          </a:prstGeom>
-          <a:ln w="15875">
-            <a:solidFill>
-              <a:schemeClr val="accent1"/>
-            </a:solidFill>
-          </a:ln>
-        </p:spPr>
-        <p:txBody>
-          <a:bodyPr vert="horz" lIns="0" tIns="0" rIns="0" bIns="0" rtlCol="0">
-            <a:noAutofit/>
-          </a:bodyPr>
-          <a:lstStyle>
-            <a:lvl1pPr marL="360000" indent="-360000" algn="l" defTabSz="914400" rtl="0" eaLnBrk="1" latinLnBrk="0" hangingPunct="1">
-              <a:lnSpc>
-                <a:spcPct val="90000"/>
-              </a:lnSpc>
-              <a:spcBef>
-                <a:spcPts val="1000"/>
-              </a:spcBef>
-              <a:buFont typeface="Arial" panose="020B0604020202020204" pitchFamily="34" charset="0"/>
-              <a:buChar char="•"/>
-              <a:defRPr sz="2000" b="1" kern="1200">
-                <a:solidFill>
-                  <a:schemeClr val="tx1"/>
-                </a:solidFill>
-                <a:latin typeface="+mn-lt"/>
-                <a:ea typeface="+mn-ea"/>
-                <a:cs typeface="+mn-cs"/>
-              </a:defRPr>
-            </a:lvl1pPr>
-            <a:lvl2pPr marL="648000" indent="-360000" algn="l" defTabSz="914400" rtl="0" eaLnBrk="1" latinLnBrk="0" hangingPunct="1">
-              <a:lnSpc>
-                <a:spcPct val="90000"/>
-              </a:lnSpc>
-              <a:spcBef>
-                <a:spcPts val="1200"/>
-              </a:spcBef>
-              <a:buFont typeface="Arial" panose="020B0604020202020204" pitchFamily="34" charset="0"/>
-              <a:buChar char="•"/>
-              <a:defRPr sz="1800" b="1" kern="1200">
-                <a:solidFill>
-                  <a:schemeClr val="tx2"/>
-                </a:solidFill>
-                <a:latin typeface="+mn-lt"/>
-                <a:ea typeface="+mn-ea"/>
-                <a:cs typeface="+mn-cs"/>
-              </a:defRPr>
-            </a:lvl2pPr>
-            <a:lvl3pPr marL="648000" indent="-360000" algn="l" defTabSz="914400" rtl="0" eaLnBrk="1" latinLnBrk="0" hangingPunct="1">
-              <a:lnSpc>
-                <a:spcPct val="90000"/>
-              </a:lnSpc>
-              <a:spcBef>
-                <a:spcPts val="1200"/>
-              </a:spcBef>
-              <a:buFont typeface="Arial" panose="020B0604020202020204" pitchFamily="34" charset="0"/>
-              <a:buChar char="•"/>
-              <a:defRPr lang="fr-FR" sz="1400" b="1" kern="1200" dirty="0">
-                <a:solidFill>
-                  <a:schemeClr val="bg1">
-                    <a:lumMod val="65000"/>
-                  </a:schemeClr>
-                </a:solidFill>
-                <a:latin typeface="+mn-lt"/>
-                <a:ea typeface="+mn-lt"/>
-                <a:cs typeface="+mn-lt"/>
-              </a:defRPr>
-            </a:lvl3pPr>
-            <a:lvl4pPr marL="720000" indent="-270000" algn="l" defTabSz="914400" rtl="0" eaLnBrk="1" latinLnBrk="0" hangingPunct="1">
-              <a:lnSpc>
-                <a:spcPct val="90000"/>
-              </a:lnSpc>
-              <a:spcBef>
-                <a:spcPts val="1000"/>
-              </a:spcBef>
-              <a:buFont typeface="Arial" panose="020B0604020202020204" pitchFamily="34" charset="0"/>
-              <a:buChar char="•"/>
-              <a:defRPr sz="1600" kern="1200">
-                <a:solidFill>
-                  <a:schemeClr val="tx2"/>
-                </a:solidFill>
-                <a:latin typeface="+mn-lt"/>
-                <a:ea typeface="+mn-ea"/>
-                <a:cs typeface="+mn-cs"/>
-              </a:defRPr>
-            </a:lvl4pPr>
-            <a:lvl5pPr marL="630000" indent="-270000" algn="l" defTabSz="914400" rtl="0" eaLnBrk="1" latinLnBrk="0" hangingPunct="1">
-              <a:lnSpc>
-                <a:spcPct val="90000"/>
-              </a:lnSpc>
-              <a:spcBef>
-                <a:spcPts val="1000"/>
-              </a:spcBef>
-              <a:buFont typeface="Arial" panose="020B0604020202020204" pitchFamily="34" charset="0"/>
-              <a:buChar char="•"/>
-              <a:defRPr sz="1600" kern="1200">
-                <a:solidFill>
-                  <a:schemeClr val="tx2"/>
-                </a:solidFill>
-                <a:latin typeface="+mn-lt"/>
-                <a:ea typeface="+mn-ea"/>
-                <a:cs typeface="+mn-cs"/>
-              </a:defRPr>
-            </a:lvl5pPr>
-            <a:lvl6pPr marL="2514600" indent="-228600" algn="l" defTabSz="914400" rtl="0" eaLnBrk="1" latinLnBrk="0" hangingPunct="1">
-              <a:lnSpc>
-                <a:spcPct val="90000"/>
-              </a:lnSpc>
-              <a:spcBef>
-                <a:spcPts val="500"/>
-              </a:spcBef>
-              <a:buFont typeface="Arial" panose="020B0604020202020204" pitchFamily="34" charset="0"/>
-              <a:buChar char="•"/>
-              <a:defRPr sz="1800" kern="1200">
-                <a:solidFill>
-                  <a:schemeClr val="tx1"/>
-                </a:solidFill>
-                <a:latin typeface="+mn-lt"/>
-                <a:ea typeface="+mn-ea"/>
-                <a:cs typeface="+mn-cs"/>
-              </a:defRPr>
-            </a:lvl6pPr>
-            <a:lvl7pPr marL="2971800" indent="-228600" algn="l" defTabSz="914400" rtl="0" eaLnBrk="1" latinLnBrk="0" hangingPunct="1">
-              <a:lnSpc>
-                <a:spcPct val="90000"/>
-              </a:lnSpc>
-              <a:spcBef>
-                <a:spcPts val="500"/>
-              </a:spcBef>
-              <a:buFont typeface="Arial" panose="020B0604020202020204" pitchFamily="34" charset="0"/>
-              <a:buChar char="•"/>
-              <a:defRPr sz="1800" kern="1200">
-                <a:solidFill>
-                  <a:schemeClr val="tx1"/>
-                </a:solidFill>
-                <a:latin typeface="+mn-lt"/>
-                <a:ea typeface="+mn-ea"/>
-                <a:cs typeface="+mn-cs"/>
-              </a:defRPr>
-            </a:lvl7pPr>
-            <a:lvl8pPr marL="3429000" indent="-228600" algn="l" defTabSz="914400" rtl="0" eaLnBrk="1" latinLnBrk="0" hangingPunct="1">
-              <a:lnSpc>
-                <a:spcPct val="90000"/>
-              </a:lnSpc>
-              <a:spcBef>
-                <a:spcPts val="500"/>
-              </a:spcBef>
-              <a:buFont typeface="Arial" panose="020B0604020202020204" pitchFamily="34" charset="0"/>
-              <a:buChar char="•"/>
-              <a:defRPr sz="1800" kern="1200">
-                <a:solidFill>
-                  <a:schemeClr val="tx1"/>
-                </a:solidFill>
-                <a:latin typeface="+mn-lt"/>
-                <a:ea typeface="+mn-ea"/>
-                <a:cs typeface="+mn-cs"/>
-              </a:defRPr>
-            </a:lvl8pPr>
-            <a:lvl9pPr marL="3886200" indent="-228600" algn="l" defTabSz="914400" rtl="0" eaLnBrk="1" latinLnBrk="0" hangingPunct="1">
-              <a:lnSpc>
-                <a:spcPct val="90000"/>
-              </a:lnSpc>
-              <a:spcBef>
-                <a:spcPts val="500"/>
-              </a:spcBef>
-              <a:buFont typeface="Arial" panose="020B0604020202020204" pitchFamily="34" charset="0"/>
-              <a:buChar char="•"/>
-              <a:defRPr sz="1800" kern="1200">
-                <a:solidFill>
-                  <a:schemeClr val="tx1"/>
-                </a:solidFill>
-                <a:latin typeface="+mn-lt"/>
-                <a:ea typeface="+mn-ea"/>
-                <a:cs typeface="+mn-cs"/>
-              </a:defRPr>
-            </a:lvl9pPr>
-          </a:lstStyle>
-          <a:p>
-            <a:pPr marL="0" indent="0" algn="ctr">
-              <a:buFont typeface="Arial" panose="020B0604020202020204" pitchFamily="34" charset="0"/>
-              <a:buNone/>
-            </a:pPr>
-            <a:r>
-              <a:rPr lang="en-US" dirty="0"/>
-              <a:t>Configuration</a:t>
-            </a:r>
-          </a:p>
-          <a:p>
-            <a:pPr marL="0" indent="0">
-              <a:buFont typeface="Arial" panose="020B0604020202020204" pitchFamily="34" charset="0"/>
-              <a:buNone/>
-            </a:pPr>
-            <a:r>
-              <a:rPr lang="en-US" sz="1400" b="0" dirty="0">
-                <a:solidFill>
-                  <a:schemeClr val="tx2"/>
-                </a:solidFill>
-                <a:ea typeface="+mn-lt"/>
-                <a:cs typeface="+mn-lt"/>
-              </a:rPr>
-              <a:t>Todo</a:t>
-            </a:r>
-            <a:endParaRPr lang="en-US" sz="1200" dirty="0"/>
-          </a:p>
-          <a:p>
-            <a:pPr marL="0" indent="0">
-              <a:buFont typeface="Arial" panose="020B0604020202020204" pitchFamily="34" charset="0"/>
-              <a:buNone/>
-            </a:pPr>
-            <a:endParaRPr lang="en-US" sz="1400" b="0" dirty="0">
-              <a:solidFill>
-                <a:schemeClr val="tx2"/>
-              </a:solidFill>
-              <a:ea typeface="+mn-lt"/>
-              <a:cs typeface="+mn-lt"/>
-            </a:endParaRPr>
-          </a:p>
-        </p:txBody>
-      </p:sp>
-    </p:spTree>
-    <p:extLst>
-      <p:ext uri="{BB962C8B-B14F-4D97-AF65-F5344CB8AC3E}">
-        <p14:creationId xmlns:p14="http://schemas.microsoft.com/office/powerpoint/2010/main" val="3826812545"/>
       </p:ext>
     </p:extLst>
   </p:cSld>

--- a/_Ref/_Architecture.pptx
+++ b/_Ref/_Architecture.pptx
@@ -29007,8 +29007,8 @@
         </p:nvSpPr>
         <p:spPr>
           <a:xfrm>
-            <a:off x="838199" y="3782291"/>
-            <a:ext cx="5037915" cy="2196310"/>
+            <a:off x="838199" y="3162283"/>
+            <a:ext cx="5037915" cy="2816318"/>
           </a:xfrm>
           <a:prstGeom prst="roundRect">
             <a:avLst>
@@ -29437,25 +29437,8 @@
                 <a:ea typeface="+mn-lt"/>
                 <a:cs typeface="+mn-lt"/>
               </a:rPr>
-              <a:t>), Singleton </a:t>
-            </a:r>
-            <a:r>
-              <a:rPr lang="en-GB" sz="1600" b="0">
-                <a:solidFill>
-                  <a:schemeClr val="tx2"/>
-                </a:solidFill>
-                <a:ea typeface="+mn-lt"/>
-                <a:cs typeface="+mn-lt"/>
-              </a:rPr>
-              <a:t>(1/exe)</a:t>
-            </a:r>
-            <a:endParaRPr lang="en-GB" sz="1600" b="0" dirty="0">
-              <a:solidFill>
-                <a:schemeClr val="tx2"/>
-              </a:solidFill>
-              <a:ea typeface="+mn-lt"/>
-              <a:cs typeface="+mn-lt"/>
-            </a:endParaRPr>
+              <a:t>), Singleton (1/exe)</a:t>
+            </a:r>
           </a:p>
           <a:p>
             <a:pPr marL="216000" indent="-144000">
@@ -37626,23 +37609,9 @@
               <a:buNone/>
             </a:pPr>
             <a:r>
-              <a:rPr lang="en-US" dirty="0"/>
+              <a:rPr lang="en-US"/>
               <a:t>SOAP</a:t>
             </a:r>
-            <a:endParaRPr lang="fr-FR" dirty="0">
-              <a:solidFill>
-                <a:schemeClr val="tx2"/>
-              </a:solidFill>
-              <a:ea typeface="+mn-lt"/>
-              <a:cs typeface="+mn-lt"/>
-            </a:endParaRPr>
-          </a:p>
-          <a:p>
-            <a:pPr marL="216000" indent="-144000">
-              <a:spcBef>
-                <a:spcPts val="300"/>
-              </a:spcBef>
-            </a:pPr>
             <a:endParaRPr lang="fr-FR" b="0" dirty="0">
               <a:solidFill>
                 <a:schemeClr val="tx2"/>
@@ -37652,13 +37621,13 @@
             </a:endParaRPr>
           </a:p>
           <a:p>
-            <a:pPr marL="216000" indent="-144000">
+            <a:pPr marL="287655" indent="-215900">
               <a:spcBef>
-                <a:spcPts val="300"/>
+                <a:spcPts val="600"/>
               </a:spcBef>
             </a:pPr>
             <a:r>
-              <a:rPr lang="fr-FR" dirty="0">
+              <a:rPr lang="fr-FR" sz="1400" b="0" dirty="0">
                 <a:solidFill>
                   <a:schemeClr val="tx2"/>
                 </a:solidFill>
@@ -37668,7 +37637,7 @@
               <a:t>Expose a </a:t>
             </a:r>
             <a:r>
-              <a:rPr lang="fr-FR" dirty="0" err="1">
+              <a:rPr lang="fr-FR" sz="1400" b="0" dirty="0" err="1">
                 <a:solidFill>
                   <a:schemeClr val="tx2"/>
                 </a:solidFill>
@@ -37678,7 +37647,7 @@
               <a:t>Contract</a:t>
             </a:r>
             <a:r>
-              <a:rPr lang="fr-FR" dirty="0">
+              <a:rPr lang="fr-FR" sz="1400" b="0" dirty="0">
                 <a:solidFill>
                   <a:schemeClr val="tx2"/>
                 </a:solidFill>
@@ -37689,54 +37658,37 @@
             </a:r>
           </a:p>
           <a:p>
-            <a:pPr marL="504000" lvl="1" indent="-144000">
+            <a:pPr marL="287655" lvl="1" indent="-215900">
               <a:spcBef>
-                <a:spcPts val="300"/>
+                <a:spcPts val="600"/>
               </a:spcBef>
             </a:pPr>
             <a:r>
-              <a:rPr lang="fr-FR" dirty="0">
+              <a:rPr lang="fr-FR" sz="1400" b="0" dirty="0">
                 <a:ea typeface="+mn-lt"/>
                 <a:cs typeface="+mn-lt"/>
               </a:rPr>
               <a:t>Opération, Input, Output</a:t>
             </a:r>
-            <a:endParaRPr lang="fr-FR" dirty="0">
-              <a:solidFill>
-                <a:schemeClr val="tx2"/>
-              </a:solidFill>
-              <a:ea typeface="+mn-lt"/>
-              <a:cs typeface="+mn-lt"/>
-            </a:endParaRPr>
           </a:p>
           <a:p>
-            <a:pPr marL="216000" indent="-144000">
+            <a:pPr marL="287655" indent="-215900">
               <a:spcBef>
-                <a:spcPts val="300"/>
+                <a:spcPts val="600"/>
               </a:spcBef>
             </a:pPr>
             <a:r>
-              <a:rPr lang="fr-FR" dirty="0" err="1">
+              <a:rPr lang="fr-FR" sz="1400" b="0" dirty="0">
                 <a:solidFill>
                   <a:schemeClr val="tx2"/>
                 </a:solidFill>
                 <a:ea typeface="+mn-lt"/>
                 <a:cs typeface="+mn-lt"/>
               </a:rPr>
-              <a:t>Built-In</a:t>
-            </a:r>
-            <a:r>
-              <a:rPr lang="fr-FR" dirty="0">
-                <a:solidFill>
-                  <a:schemeClr val="tx2"/>
-                </a:solidFill>
-                <a:ea typeface="+mn-lt"/>
-                <a:cs typeface="+mn-lt"/>
-              </a:rPr>
-              <a:t> </a:t>
-            </a:r>
-            <a:r>
-              <a:rPr lang="fr-FR" dirty="0" err="1">
+              <a:t>Built-In </a:t>
+            </a:r>
+            <a:r>
+              <a:rPr lang="fr-FR" sz="1400" b="0" dirty="0" err="1">
                 <a:solidFill>
                   <a:schemeClr val="tx2"/>
                 </a:solidFill>
@@ -37746,27 +37698,17 @@
               <a:t>Error</a:t>
             </a:r>
             <a:r>
-              <a:rPr lang="fr-FR" dirty="0">
+              <a:rPr lang="fr-FR" sz="1400" b="0" dirty="0">
                 <a:solidFill>
                   <a:schemeClr val="tx2"/>
                 </a:solidFill>
                 <a:ea typeface="+mn-lt"/>
                 <a:cs typeface="+mn-lt"/>
               </a:rPr>
-              <a:t> Handling </a:t>
-            </a:r>
-            <a:r>
-              <a:rPr lang="fr-FR" b="0" dirty="0">
-                <a:solidFill>
-                  <a:schemeClr val="tx2"/>
-                </a:solidFill>
-                <a:ea typeface="+mn-lt"/>
-                <a:cs typeface="+mn-lt"/>
-              </a:rPr>
-              <a:t>(</a:t>
-            </a:r>
-            <a:r>
-              <a:rPr lang="fr-FR" b="0" dirty="0" err="1">
+              <a:t> Handling (</a:t>
+            </a:r>
+            <a:r>
+              <a:rPr lang="fr-FR" sz="1400" b="0" dirty="0" err="1">
                 <a:solidFill>
                   <a:schemeClr val="tx2"/>
                 </a:solidFill>
@@ -37776,7 +37718,7 @@
               <a:t>faults</a:t>
             </a:r>
             <a:r>
-              <a:rPr lang="fr-FR" b="0" dirty="0">
+              <a:rPr lang="fr-FR" sz="1400" b="0" dirty="0">
                 <a:solidFill>
                   <a:schemeClr val="tx2"/>
                 </a:solidFill>

--- a/_Ref/_Architecture.pptx
+++ b/_Ref/_Architecture.pptx
@@ -27809,7 +27809,7 @@
         <p:spPr>
           <a:xfrm>
             <a:off x="838201" y="1089498"/>
-            <a:ext cx="5037913" cy="1919709"/>
+            <a:ext cx="2514599" cy="1919709"/>
           </a:xfrm>
           <a:prstGeom prst="roundRect">
             <a:avLst>
@@ -29475,6 +29475,251 @@
                 <a:cs typeface="+mn-lt"/>
               </a:rPr>
               <a:t> change (High/Low)</a:t>
+            </a:r>
+          </a:p>
+        </p:txBody>
+      </p:sp>
+      <p:sp>
+        <p:nvSpPr>
+          <p:cNvPr id="13" name="Text Placeholder 14">
+            <a:extLst>
+              <a:ext uri="{FF2B5EF4-FFF2-40B4-BE49-F238E27FC236}">
+                <a16:creationId xmlns:a16="http://schemas.microsoft.com/office/drawing/2014/main" id="{EDDAB1E2-DF80-5DD2-9884-A27D68FB59D0}"/>
+              </a:ext>
+            </a:extLst>
+          </p:cNvPr>
+          <p:cNvSpPr txBox="1">
+            <a:spLocks/>
+          </p:cNvSpPr>
+          <p:nvPr/>
+        </p:nvSpPr>
+        <p:spPr>
+          <a:xfrm>
+            <a:off x="3499661" y="1089497"/>
+            <a:ext cx="2376453" cy="1919709"/>
+          </a:xfrm>
+          <a:prstGeom prst="roundRect">
+            <a:avLst>
+              <a:gd name="adj" fmla="val 10346"/>
+            </a:avLst>
+          </a:prstGeom>
+          <a:ln w="15875">
+            <a:solidFill>
+              <a:schemeClr val="accent1"/>
+            </a:solidFill>
+          </a:ln>
+        </p:spPr>
+        <p:txBody>
+          <a:bodyPr vert="horz" lIns="0" tIns="0" rIns="0" bIns="0" rtlCol="0" anchor="ctr">
+            <a:noAutofit/>
+          </a:bodyPr>
+          <a:lstStyle>
+            <a:lvl1pPr marL="360000" indent="-360000" algn="l" defTabSz="914400" rtl="0" eaLnBrk="1" latinLnBrk="0" hangingPunct="1">
+              <a:lnSpc>
+                <a:spcPct val="90000"/>
+              </a:lnSpc>
+              <a:spcBef>
+                <a:spcPts val="1000"/>
+              </a:spcBef>
+              <a:buFont typeface="Arial" panose="020B0604020202020204" pitchFamily="34" charset="0"/>
+              <a:buChar char="•"/>
+              <a:defRPr sz="2000" b="1" kern="1200">
+                <a:solidFill>
+                  <a:schemeClr val="tx1"/>
+                </a:solidFill>
+                <a:latin typeface="+mn-lt"/>
+                <a:ea typeface="+mn-ea"/>
+                <a:cs typeface="+mn-cs"/>
+              </a:defRPr>
+            </a:lvl1pPr>
+            <a:lvl2pPr marL="648000" indent="-360000" algn="l" defTabSz="914400" rtl="0" eaLnBrk="1" latinLnBrk="0" hangingPunct="1">
+              <a:lnSpc>
+                <a:spcPct val="90000"/>
+              </a:lnSpc>
+              <a:spcBef>
+                <a:spcPts val="1200"/>
+              </a:spcBef>
+              <a:buFont typeface="Arial" panose="020B0604020202020204" pitchFamily="34" charset="0"/>
+              <a:buChar char="•"/>
+              <a:defRPr sz="1800" b="1" kern="1200">
+                <a:solidFill>
+                  <a:schemeClr val="tx2"/>
+                </a:solidFill>
+                <a:latin typeface="+mn-lt"/>
+                <a:ea typeface="+mn-ea"/>
+                <a:cs typeface="+mn-cs"/>
+              </a:defRPr>
+            </a:lvl2pPr>
+            <a:lvl3pPr marL="648000" indent="-360000" algn="l" defTabSz="914400" rtl="0" eaLnBrk="1" latinLnBrk="0" hangingPunct="1">
+              <a:lnSpc>
+                <a:spcPct val="90000"/>
+              </a:lnSpc>
+              <a:spcBef>
+                <a:spcPts val="1200"/>
+              </a:spcBef>
+              <a:buFont typeface="Arial" panose="020B0604020202020204" pitchFamily="34" charset="0"/>
+              <a:buChar char="•"/>
+              <a:defRPr lang="fr-FR" sz="1400" b="1" kern="1200" dirty="0">
+                <a:solidFill>
+                  <a:schemeClr val="bg1">
+                    <a:lumMod val="65000"/>
+                  </a:schemeClr>
+                </a:solidFill>
+                <a:latin typeface="+mn-lt"/>
+                <a:ea typeface="+mn-lt"/>
+                <a:cs typeface="+mn-lt"/>
+              </a:defRPr>
+            </a:lvl3pPr>
+            <a:lvl4pPr marL="720000" indent="-270000" algn="l" defTabSz="914400" rtl="0" eaLnBrk="1" latinLnBrk="0" hangingPunct="1">
+              <a:lnSpc>
+                <a:spcPct val="90000"/>
+              </a:lnSpc>
+              <a:spcBef>
+                <a:spcPts val="1000"/>
+              </a:spcBef>
+              <a:buFont typeface="Arial" panose="020B0604020202020204" pitchFamily="34" charset="0"/>
+              <a:buChar char="•"/>
+              <a:defRPr sz="1600" kern="1200">
+                <a:solidFill>
+                  <a:schemeClr val="tx2"/>
+                </a:solidFill>
+                <a:latin typeface="+mn-lt"/>
+                <a:ea typeface="+mn-ea"/>
+                <a:cs typeface="+mn-cs"/>
+              </a:defRPr>
+            </a:lvl4pPr>
+            <a:lvl5pPr marL="630000" indent="-270000" algn="l" defTabSz="914400" rtl="0" eaLnBrk="1" latinLnBrk="0" hangingPunct="1">
+              <a:lnSpc>
+                <a:spcPct val="90000"/>
+              </a:lnSpc>
+              <a:spcBef>
+                <a:spcPts val="1000"/>
+              </a:spcBef>
+              <a:buFont typeface="Arial" panose="020B0604020202020204" pitchFamily="34" charset="0"/>
+              <a:buChar char="•"/>
+              <a:defRPr sz="1600" kern="1200">
+                <a:solidFill>
+                  <a:schemeClr val="tx2"/>
+                </a:solidFill>
+                <a:latin typeface="+mn-lt"/>
+                <a:ea typeface="+mn-ea"/>
+                <a:cs typeface="+mn-cs"/>
+              </a:defRPr>
+            </a:lvl5pPr>
+            <a:lvl6pPr marL="2514600" indent="-228600" algn="l" defTabSz="914400" rtl="0" eaLnBrk="1" latinLnBrk="0" hangingPunct="1">
+              <a:lnSpc>
+                <a:spcPct val="90000"/>
+              </a:lnSpc>
+              <a:spcBef>
+                <a:spcPts val="500"/>
+              </a:spcBef>
+              <a:buFont typeface="Arial" panose="020B0604020202020204" pitchFamily="34" charset="0"/>
+              <a:buChar char="•"/>
+              <a:defRPr sz="1800" kern="1200">
+                <a:solidFill>
+                  <a:schemeClr val="tx1"/>
+                </a:solidFill>
+                <a:latin typeface="+mn-lt"/>
+                <a:ea typeface="+mn-ea"/>
+                <a:cs typeface="+mn-cs"/>
+              </a:defRPr>
+            </a:lvl6pPr>
+            <a:lvl7pPr marL="2971800" indent="-228600" algn="l" defTabSz="914400" rtl="0" eaLnBrk="1" latinLnBrk="0" hangingPunct="1">
+              <a:lnSpc>
+                <a:spcPct val="90000"/>
+              </a:lnSpc>
+              <a:spcBef>
+                <a:spcPts val="500"/>
+              </a:spcBef>
+              <a:buFont typeface="Arial" panose="020B0604020202020204" pitchFamily="34" charset="0"/>
+              <a:buChar char="•"/>
+              <a:defRPr sz="1800" kern="1200">
+                <a:solidFill>
+                  <a:schemeClr val="tx1"/>
+                </a:solidFill>
+                <a:latin typeface="+mn-lt"/>
+                <a:ea typeface="+mn-ea"/>
+                <a:cs typeface="+mn-cs"/>
+              </a:defRPr>
+            </a:lvl7pPr>
+            <a:lvl8pPr marL="3429000" indent="-228600" algn="l" defTabSz="914400" rtl="0" eaLnBrk="1" latinLnBrk="0" hangingPunct="1">
+              <a:lnSpc>
+                <a:spcPct val="90000"/>
+              </a:lnSpc>
+              <a:spcBef>
+                <a:spcPts val="500"/>
+              </a:spcBef>
+              <a:buFont typeface="Arial" panose="020B0604020202020204" pitchFamily="34" charset="0"/>
+              <a:buChar char="•"/>
+              <a:defRPr sz="1800" kern="1200">
+                <a:solidFill>
+                  <a:schemeClr val="tx1"/>
+                </a:solidFill>
+                <a:latin typeface="+mn-lt"/>
+                <a:ea typeface="+mn-ea"/>
+                <a:cs typeface="+mn-cs"/>
+              </a:defRPr>
+            </a:lvl8pPr>
+            <a:lvl9pPr marL="3886200" indent="-228600" algn="l" defTabSz="914400" rtl="0" eaLnBrk="1" latinLnBrk="0" hangingPunct="1">
+              <a:lnSpc>
+                <a:spcPct val="90000"/>
+              </a:lnSpc>
+              <a:spcBef>
+                <a:spcPts val="500"/>
+              </a:spcBef>
+              <a:buFont typeface="Arial" panose="020B0604020202020204" pitchFamily="34" charset="0"/>
+              <a:buChar char="•"/>
+              <a:defRPr sz="1800" kern="1200">
+                <a:solidFill>
+                  <a:schemeClr val="tx1"/>
+                </a:solidFill>
+                <a:latin typeface="+mn-lt"/>
+                <a:ea typeface="+mn-ea"/>
+                <a:cs typeface="+mn-cs"/>
+              </a:defRPr>
+            </a:lvl9pPr>
+          </a:lstStyle>
+          <a:p>
+            <a:pPr marL="0" indent="0" algn="ctr">
+              <a:buFont typeface="Arial" panose="020B0604020202020204" pitchFamily="34" charset="0"/>
+              <a:buNone/>
+            </a:pPr>
+            <a:r>
+              <a:rPr lang="en-US" sz="1800" dirty="0">
+                <a:hlinkClick r:id="rId4"/>
+              </a:rPr>
+              <a:t>Inversion </a:t>
+            </a:r>
+          </a:p>
+          <a:p>
+            <a:pPr marL="0" indent="0" algn="ctr">
+              <a:buFont typeface="Arial" panose="020B0604020202020204" pitchFamily="34" charset="0"/>
+              <a:buNone/>
+            </a:pPr>
+            <a:r>
+              <a:rPr lang="en-US" sz="1800" dirty="0">
+                <a:hlinkClick r:id="rId4"/>
+              </a:rPr>
+              <a:t>Of Control</a:t>
+            </a:r>
+            <a:endParaRPr lang="en-US" sz="1800" dirty="0"/>
+          </a:p>
+          <a:p>
+            <a:pPr marL="71755" indent="0" algn="ctr">
+              <a:spcBef>
+                <a:spcPts val="600"/>
+              </a:spcBef>
+              <a:buNone/>
+            </a:pPr>
+            <a:r>
+              <a:rPr lang="en-US" sz="1600" b="0" dirty="0">
+                <a:solidFill>
+                  <a:schemeClr val="tx2"/>
+                </a:solidFill>
+                <a:ea typeface="+mn-lt"/>
+                <a:cs typeface="+mn-lt"/>
+              </a:rPr>
+              <a:t>Execution of the program  is managed by the framework, not the program</a:t>
             </a:r>
           </a:p>
         </p:txBody>
@@ -37609,7 +37854,7 @@
               <a:buNone/>
             </a:pPr>
             <a:r>
-              <a:rPr lang="en-US"/>
+              <a:rPr lang="en-US" dirty="0"/>
               <a:t>SOAP</a:t>
             </a:r>
             <a:endParaRPr lang="fr-FR" b="0" dirty="0">

--- a/_Ref/_Architecture.pptx
+++ b/_Ref/_Architecture.pptx
@@ -3245,6 +3245,353 @@
     </pc:docChg>
   </pc:docChgLst>
   <pc:docChgLst>
+    <pc:chgData name="Gellenoncourt, Kevin" userId="83ce2c6d-0bd4-4cd9-955e-dd3efc6a7d5a" providerId="ADAL" clId="{A3A60514-9E58-4D9E-99F4-2C9DAB55E9EE}"/>
+    <pc:docChg chg="undo custSel addSld modSld sldOrd modSection">
+      <pc:chgData name="Gellenoncourt, Kevin" userId="83ce2c6d-0bd4-4cd9-955e-dd3efc6a7d5a" providerId="ADAL" clId="{A3A60514-9E58-4D9E-99F4-2C9DAB55E9EE}" dt="2023-04-28T08:07:53.650" v="706"/>
+      <pc:docMkLst>
+        <pc:docMk/>
+      </pc:docMkLst>
+      <pc:sldChg chg="addSp modSp mod">
+        <pc:chgData name="Gellenoncourt, Kevin" userId="83ce2c6d-0bd4-4cd9-955e-dd3efc6a7d5a" providerId="ADAL" clId="{A3A60514-9E58-4D9E-99F4-2C9DAB55E9EE}" dt="2023-04-20T12:39:41.736" v="692" actId="20577"/>
+        <pc:sldMkLst>
+          <pc:docMk/>
+          <pc:sldMk cId="1278860628" sldId="1771"/>
+        </pc:sldMkLst>
+        <pc:spChg chg="add mod">
+          <ac:chgData name="Gellenoncourt, Kevin" userId="83ce2c6d-0bd4-4cd9-955e-dd3efc6a7d5a" providerId="ADAL" clId="{A3A60514-9E58-4D9E-99F4-2C9DAB55E9EE}" dt="2023-04-19T12:35:36.076" v="548" actId="14100"/>
+          <ac:spMkLst>
+            <pc:docMk/>
+            <pc:sldMk cId="1278860628" sldId="1771"/>
+            <ac:spMk id="3" creationId="{B48AAC35-A18D-069C-DDA7-2436D2499FB8}"/>
+          </ac:spMkLst>
+        </pc:spChg>
+        <pc:spChg chg="mod">
+          <ac:chgData name="Gellenoncourt, Kevin" userId="83ce2c6d-0bd4-4cd9-955e-dd3efc6a7d5a" providerId="ADAL" clId="{A3A60514-9E58-4D9E-99F4-2C9DAB55E9EE}" dt="2023-04-20T12:39:41.736" v="692" actId="20577"/>
+          <ac:spMkLst>
+            <pc:docMk/>
+            <pc:sldMk cId="1278860628" sldId="1771"/>
+            <ac:spMk id="18" creationId="{D29CFD93-4DA2-4C5E-8607-CE2A1EFFD801}"/>
+          </ac:spMkLst>
+        </pc:spChg>
+      </pc:sldChg>
+      <pc:sldChg chg="modSp mod">
+        <pc:chgData name="Gellenoncourt, Kevin" userId="83ce2c6d-0bd4-4cd9-955e-dd3efc6a7d5a" providerId="ADAL" clId="{A3A60514-9E58-4D9E-99F4-2C9DAB55E9EE}" dt="2023-04-17T09:48:13.323" v="194" actId="14100"/>
+        <pc:sldMkLst>
+          <pc:docMk/>
+          <pc:sldMk cId="1847149617" sldId="1823"/>
+        </pc:sldMkLst>
+        <pc:spChg chg="mod">
+          <ac:chgData name="Gellenoncourt, Kevin" userId="83ce2c6d-0bd4-4cd9-955e-dd3efc6a7d5a" providerId="ADAL" clId="{A3A60514-9E58-4D9E-99F4-2C9DAB55E9EE}" dt="2023-04-17T09:47:57.162" v="193" actId="14100"/>
+          <ac:spMkLst>
+            <pc:docMk/>
+            <pc:sldMk cId="1847149617" sldId="1823"/>
+            <ac:spMk id="11" creationId="{842C7B8B-D546-5F52-8614-36B5D5B7072A}"/>
+          </ac:spMkLst>
+        </pc:spChg>
+        <pc:spChg chg="mod">
+          <ac:chgData name="Gellenoncourt, Kevin" userId="83ce2c6d-0bd4-4cd9-955e-dd3efc6a7d5a" providerId="ADAL" clId="{A3A60514-9E58-4D9E-99F4-2C9DAB55E9EE}" dt="2023-04-14T15:16:51.501" v="75" actId="20577"/>
+          <ac:spMkLst>
+            <pc:docMk/>
+            <pc:sldMk cId="1847149617" sldId="1823"/>
+            <ac:spMk id="12" creationId="{B104700F-4F00-45C5-9952-8E84D40A9556}"/>
+          </ac:spMkLst>
+        </pc:spChg>
+        <pc:spChg chg="mod">
+          <ac:chgData name="Gellenoncourt, Kevin" userId="83ce2c6d-0bd4-4cd9-955e-dd3efc6a7d5a" providerId="ADAL" clId="{A3A60514-9E58-4D9E-99F4-2C9DAB55E9EE}" dt="2023-04-14T15:15:57.774" v="67" actId="14100"/>
+          <ac:spMkLst>
+            <pc:docMk/>
+            <pc:sldMk cId="1847149617" sldId="1823"/>
+            <ac:spMk id="14" creationId="{417EBD97-910E-B0D6-C155-F9B9D1A40E38}"/>
+          </ac:spMkLst>
+        </pc:spChg>
+        <pc:spChg chg="mod">
+          <ac:chgData name="Gellenoncourt, Kevin" userId="83ce2c6d-0bd4-4cd9-955e-dd3efc6a7d5a" providerId="ADAL" clId="{A3A60514-9E58-4D9E-99F4-2C9DAB55E9EE}" dt="2023-04-17T09:48:13.323" v="194" actId="14100"/>
+          <ac:spMkLst>
+            <pc:docMk/>
+            <pc:sldMk cId="1847149617" sldId="1823"/>
+            <ac:spMk id="27" creationId="{416BE16B-1E8C-48FA-B7AE-7624496931AD}"/>
+          </ac:spMkLst>
+        </pc:spChg>
+      </pc:sldChg>
+      <pc:sldChg chg="modSp mod">
+        <pc:chgData name="Gellenoncourt, Kevin" userId="83ce2c6d-0bd4-4cd9-955e-dd3efc6a7d5a" providerId="ADAL" clId="{A3A60514-9E58-4D9E-99F4-2C9DAB55E9EE}" dt="2023-04-14T15:15:37.539" v="65" actId="13926"/>
+        <pc:sldMkLst>
+          <pc:docMk/>
+          <pc:sldMk cId="2789654304" sldId="1826"/>
+        </pc:sldMkLst>
+        <pc:spChg chg="mod">
+          <ac:chgData name="Gellenoncourt, Kevin" userId="83ce2c6d-0bd4-4cd9-955e-dd3efc6a7d5a" providerId="ADAL" clId="{A3A60514-9E58-4D9E-99F4-2C9DAB55E9EE}" dt="2023-04-14T15:15:37.539" v="65" actId="13926"/>
+          <ac:spMkLst>
+            <pc:docMk/>
+            <pc:sldMk cId="2789654304" sldId="1826"/>
+            <ac:spMk id="10" creationId="{5BEE6695-E1F4-866A-0C79-858782B14051}"/>
+          </ac:spMkLst>
+        </pc:spChg>
+        <pc:spChg chg="mod">
+          <ac:chgData name="Gellenoncourt, Kevin" userId="83ce2c6d-0bd4-4cd9-955e-dd3efc6a7d5a" providerId="ADAL" clId="{A3A60514-9E58-4D9E-99F4-2C9DAB55E9EE}" dt="2023-04-14T15:15:15.353" v="63" actId="14100"/>
+          <ac:spMkLst>
+            <pc:docMk/>
+            <pc:sldMk cId="2789654304" sldId="1826"/>
+            <ac:spMk id="13" creationId="{C083206D-4CC2-5447-AAAA-BD90521B11AA}"/>
+          </ac:spMkLst>
+        </pc:spChg>
+        <pc:spChg chg="mod">
+          <ac:chgData name="Gellenoncourt, Kevin" userId="83ce2c6d-0bd4-4cd9-955e-dd3efc6a7d5a" providerId="ADAL" clId="{A3A60514-9E58-4D9E-99F4-2C9DAB55E9EE}" dt="2023-04-14T15:14:51.233" v="54" actId="1036"/>
+          <ac:spMkLst>
+            <pc:docMk/>
+            <pc:sldMk cId="2789654304" sldId="1826"/>
+            <ac:spMk id="14" creationId="{FAD498DE-6D7E-4853-FCE8-768C1D49C1F6}"/>
+          </ac:spMkLst>
+        </pc:spChg>
+        <pc:spChg chg="mod">
+          <ac:chgData name="Gellenoncourt, Kevin" userId="83ce2c6d-0bd4-4cd9-955e-dd3efc6a7d5a" providerId="ADAL" clId="{A3A60514-9E58-4D9E-99F4-2C9DAB55E9EE}" dt="2023-04-14T15:14:37.857" v="50" actId="20577"/>
+          <ac:spMkLst>
+            <pc:docMk/>
+            <pc:sldMk cId="2789654304" sldId="1826"/>
+            <ac:spMk id="19" creationId="{1F95986F-431B-E99B-9C26-4159CCAC4D58}"/>
+          </ac:spMkLst>
+        </pc:spChg>
+        <pc:spChg chg="mod">
+          <ac:chgData name="Gellenoncourt, Kevin" userId="83ce2c6d-0bd4-4cd9-955e-dd3efc6a7d5a" providerId="ADAL" clId="{A3A60514-9E58-4D9E-99F4-2C9DAB55E9EE}" dt="2023-04-14T15:15:27.401" v="64" actId="20577"/>
+          <ac:spMkLst>
+            <pc:docMk/>
+            <pc:sldMk cId="2789654304" sldId="1826"/>
+            <ac:spMk id="20" creationId="{B547579E-0297-7065-3C2B-B32E8777C39F}"/>
+          </ac:spMkLst>
+        </pc:spChg>
+      </pc:sldChg>
+      <pc:sldChg chg="delSp modSp mod modCm">
+        <pc:chgData name="Gellenoncourt, Kevin" userId="83ce2c6d-0bd4-4cd9-955e-dd3efc6a7d5a" providerId="ADAL" clId="{A3A60514-9E58-4D9E-99F4-2C9DAB55E9EE}" dt="2023-04-28T08:07:18.472" v="702" actId="20577"/>
+        <pc:sldMkLst>
+          <pc:docMk/>
+          <pc:sldMk cId="394559105" sldId="1828"/>
+        </pc:sldMkLst>
+        <pc:spChg chg="mod">
+          <ac:chgData name="Gellenoncourt, Kevin" userId="83ce2c6d-0bd4-4cd9-955e-dd3efc6a7d5a" providerId="ADAL" clId="{A3A60514-9E58-4D9E-99F4-2C9DAB55E9EE}" dt="2023-04-28T08:07:18.472" v="702" actId="20577"/>
+          <ac:spMkLst>
+            <pc:docMk/>
+            <pc:sldMk cId="394559105" sldId="1828"/>
+            <ac:spMk id="2" creationId="{81B4020D-2DE6-4B6C-822C-676A9E68ECFA}"/>
+          </ac:spMkLst>
+        </pc:spChg>
+        <pc:spChg chg="mod">
+          <ac:chgData name="Gellenoncourt, Kevin" userId="83ce2c6d-0bd4-4cd9-955e-dd3efc6a7d5a" providerId="ADAL" clId="{A3A60514-9E58-4D9E-99F4-2C9DAB55E9EE}" dt="2023-04-13T12:14:55.972" v="37" actId="14100"/>
+          <ac:spMkLst>
+            <pc:docMk/>
+            <pc:sldMk cId="394559105" sldId="1828"/>
+            <ac:spMk id="4" creationId="{A0E49883-BD02-0EF4-758D-0FF455BDA027}"/>
+          </ac:spMkLst>
+        </pc:spChg>
+        <pc:spChg chg="mod">
+          <ac:chgData name="Gellenoncourt, Kevin" userId="83ce2c6d-0bd4-4cd9-955e-dd3efc6a7d5a" providerId="ADAL" clId="{A3A60514-9E58-4D9E-99F4-2C9DAB55E9EE}" dt="2023-04-14T15:12:37.127" v="38" actId="20577"/>
+          <ac:spMkLst>
+            <pc:docMk/>
+            <pc:sldMk cId="394559105" sldId="1828"/>
+            <ac:spMk id="9" creationId="{77C3B844-E6D7-3624-1D88-491DC7FBE73F}"/>
+          </ac:spMkLst>
+        </pc:spChg>
+        <pc:spChg chg="mod">
+          <ac:chgData name="Gellenoncourt, Kevin" userId="83ce2c6d-0bd4-4cd9-955e-dd3efc6a7d5a" providerId="ADAL" clId="{A3A60514-9E58-4D9E-99F4-2C9DAB55E9EE}" dt="2023-04-13T12:14:45.162" v="21" actId="14100"/>
+          <ac:spMkLst>
+            <pc:docMk/>
+            <pc:sldMk cId="394559105" sldId="1828"/>
+            <ac:spMk id="11" creationId="{41A27570-4EE7-B3BA-F6CB-2BF7908DDCBF}"/>
+          </ac:spMkLst>
+        </pc:spChg>
+        <pc:spChg chg="mod">
+          <ac:chgData name="Gellenoncourt, Kevin" userId="83ce2c6d-0bd4-4cd9-955e-dd3efc6a7d5a" providerId="ADAL" clId="{A3A60514-9E58-4D9E-99F4-2C9DAB55E9EE}" dt="2023-04-13T12:14:51.807" v="35" actId="1035"/>
+          <ac:spMkLst>
+            <pc:docMk/>
+            <pc:sldMk cId="394559105" sldId="1828"/>
+            <ac:spMk id="15" creationId="{9D7E702D-19C2-2F3F-70B5-73F6CC7B90B0}"/>
+          </ac:spMkLst>
+        </pc:spChg>
+        <pc:spChg chg="mod">
+          <ac:chgData name="Gellenoncourt, Kevin" userId="83ce2c6d-0bd4-4cd9-955e-dd3efc6a7d5a" providerId="ADAL" clId="{A3A60514-9E58-4D9E-99F4-2C9DAB55E9EE}" dt="2023-04-13T12:14:53.671" v="36" actId="14100"/>
+          <ac:spMkLst>
+            <pc:docMk/>
+            <pc:sldMk cId="394559105" sldId="1828"/>
+            <ac:spMk id="16" creationId="{193E23CE-10D3-6AF3-8769-9A0DD9180317}"/>
+          </ac:spMkLst>
+        </pc:spChg>
+        <pc:spChg chg="mod">
+          <ac:chgData name="Gellenoncourt, Kevin" userId="83ce2c6d-0bd4-4cd9-955e-dd3efc6a7d5a" providerId="ADAL" clId="{A3A60514-9E58-4D9E-99F4-2C9DAB55E9EE}" dt="2023-04-17T09:49:12.005" v="238" actId="14100"/>
+          <ac:spMkLst>
+            <pc:docMk/>
+            <pc:sldMk cId="394559105" sldId="1828"/>
+            <ac:spMk id="23" creationId="{D45C1964-3199-AEA8-A302-B7CC89E83D1C}"/>
+          </ac:spMkLst>
+        </pc:spChg>
+        <pc:spChg chg="del mod">
+          <ac:chgData name="Gellenoncourt, Kevin" userId="83ce2c6d-0bd4-4cd9-955e-dd3efc6a7d5a" providerId="ADAL" clId="{A3A60514-9E58-4D9E-99F4-2C9DAB55E9EE}" dt="2023-04-17T09:49:08.618" v="237" actId="21"/>
+          <ac:spMkLst>
+            <pc:docMk/>
+            <pc:sldMk cId="394559105" sldId="1828"/>
+            <ac:spMk id="25" creationId="{1F44828C-2473-8027-6E16-DD3C9C323280}"/>
+          </ac:spMkLst>
+        </pc:spChg>
+      </pc:sldChg>
+      <pc:sldChg chg="addSp modSp mod ord">
+        <pc:chgData name="Gellenoncourt, Kevin" userId="83ce2c6d-0bd4-4cd9-955e-dd3efc6a7d5a" providerId="ADAL" clId="{A3A60514-9E58-4D9E-99F4-2C9DAB55E9EE}" dt="2023-04-28T08:07:29.764" v="704"/>
+        <pc:sldMkLst>
+          <pc:docMk/>
+          <pc:sldMk cId="1931217021" sldId="1830"/>
+        </pc:sldMkLst>
+        <pc:spChg chg="mod">
+          <ac:chgData name="Gellenoncourt, Kevin" userId="83ce2c6d-0bd4-4cd9-955e-dd3efc6a7d5a" providerId="ADAL" clId="{A3A60514-9E58-4D9E-99F4-2C9DAB55E9EE}" dt="2023-04-20T08:30:01.275" v="573" actId="20577"/>
+          <ac:spMkLst>
+            <pc:docMk/>
+            <pc:sldMk cId="1931217021" sldId="1830"/>
+            <ac:spMk id="3" creationId="{968DACCB-6332-4C26-39F2-2D374711D2B0}"/>
+          </ac:spMkLst>
+        </pc:spChg>
+        <pc:spChg chg="add mod">
+          <ac:chgData name="Gellenoncourt, Kevin" userId="83ce2c6d-0bd4-4cd9-955e-dd3efc6a7d5a" providerId="ADAL" clId="{A3A60514-9E58-4D9E-99F4-2C9DAB55E9EE}" dt="2023-04-20T08:30:58.508" v="610" actId="14100"/>
+          <ac:spMkLst>
+            <pc:docMk/>
+            <pc:sldMk cId="1931217021" sldId="1830"/>
+            <ac:spMk id="5" creationId="{70270940-53A9-A871-FF5F-3D0FED83C951}"/>
+          </ac:spMkLst>
+        </pc:spChg>
+      </pc:sldChg>
+      <pc:sldChg chg="addSp delSp modSp add mod ord delCm modCm">
+        <pc:chgData name="Gellenoncourt, Kevin" userId="83ce2c6d-0bd4-4cd9-955e-dd3efc6a7d5a" providerId="ADAL" clId="{A3A60514-9E58-4D9E-99F4-2C9DAB55E9EE}" dt="2023-04-28T08:07:53.650" v="706"/>
+        <pc:sldMkLst>
+          <pc:docMk/>
+          <pc:sldMk cId="3334357831" sldId="1831"/>
+        </pc:sldMkLst>
+        <pc:spChg chg="mod">
+          <ac:chgData name="Gellenoncourt, Kevin" userId="83ce2c6d-0bd4-4cd9-955e-dd3efc6a7d5a" providerId="ADAL" clId="{A3A60514-9E58-4D9E-99F4-2C9DAB55E9EE}" dt="2023-04-18T16:05:25.425" v="420" actId="20577"/>
+          <ac:spMkLst>
+            <pc:docMk/>
+            <pc:sldMk cId="3334357831" sldId="1831"/>
+            <ac:spMk id="3" creationId="{C3167168-4490-6A90-9CBD-B650CA1D9D85}"/>
+          </ac:spMkLst>
+        </pc:spChg>
+        <pc:spChg chg="mod">
+          <ac:chgData name="Gellenoncourt, Kevin" userId="83ce2c6d-0bd4-4cd9-955e-dd3efc6a7d5a" providerId="ADAL" clId="{A3A60514-9E58-4D9E-99F4-2C9DAB55E9EE}" dt="2023-04-17T09:48:50.093" v="236" actId="20577"/>
+          <ac:spMkLst>
+            <pc:docMk/>
+            <pc:sldMk cId="3334357831" sldId="1831"/>
+            <ac:spMk id="7" creationId="{F13AB203-EAC6-E49A-83BD-3061EAD28268}"/>
+          </ac:spMkLst>
+        </pc:spChg>
+        <pc:spChg chg="add mod">
+          <ac:chgData name="Gellenoncourt, Kevin" userId="83ce2c6d-0bd4-4cd9-955e-dd3efc6a7d5a" providerId="ADAL" clId="{A3A60514-9E58-4D9E-99F4-2C9DAB55E9EE}" dt="2023-04-18T16:04:37.975" v="395" actId="14100"/>
+          <ac:spMkLst>
+            <pc:docMk/>
+            <pc:sldMk cId="3334357831" sldId="1831"/>
+            <ac:spMk id="10" creationId="{2825B4BF-40B3-9FBF-C859-DA93D2777B60}"/>
+          </ac:spMkLst>
+        </pc:spChg>
+        <pc:spChg chg="mod">
+          <ac:chgData name="Gellenoncourt, Kevin" userId="83ce2c6d-0bd4-4cd9-955e-dd3efc6a7d5a" providerId="ADAL" clId="{A3A60514-9E58-4D9E-99F4-2C9DAB55E9EE}" dt="2023-04-18T16:05:36.979" v="436" actId="20577"/>
+          <ac:spMkLst>
+            <pc:docMk/>
+            <pc:sldMk cId="3334357831" sldId="1831"/>
+            <ac:spMk id="11" creationId="{842C7B8B-D546-5F52-8614-36B5D5B7072A}"/>
+          </ac:spMkLst>
+        </pc:spChg>
+        <pc:spChg chg="mod">
+          <ac:chgData name="Gellenoncourt, Kevin" userId="83ce2c6d-0bd4-4cd9-955e-dd3efc6a7d5a" providerId="ADAL" clId="{A3A60514-9E58-4D9E-99F4-2C9DAB55E9EE}" dt="2023-04-17T09:46:44.785" v="160" actId="14100"/>
+          <ac:spMkLst>
+            <pc:docMk/>
+            <pc:sldMk cId="3334357831" sldId="1831"/>
+            <ac:spMk id="12" creationId="{B104700F-4F00-45C5-9952-8E84D40A9556}"/>
+          </ac:spMkLst>
+        </pc:spChg>
+        <pc:spChg chg="add mod">
+          <ac:chgData name="Gellenoncourt, Kevin" userId="83ce2c6d-0bd4-4cd9-955e-dd3efc6a7d5a" providerId="ADAL" clId="{A3A60514-9E58-4D9E-99F4-2C9DAB55E9EE}" dt="2023-04-18T16:04:50.715" v="400" actId="14100"/>
+          <ac:spMkLst>
+            <pc:docMk/>
+            <pc:sldMk cId="3334357831" sldId="1831"/>
+            <ac:spMk id="13" creationId="{7BDA3FE1-028D-4F92-3CCF-B587021596BC}"/>
+          </ac:spMkLst>
+        </pc:spChg>
+        <pc:spChg chg="mod">
+          <ac:chgData name="Gellenoncourt, Kevin" userId="83ce2c6d-0bd4-4cd9-955e-dd3efc6a7d5a" providerId="ADAL" clId="{A3A60514-9E58-4D9E-99F4-2C9DAB55E9EE}" dt="2023-04-18T16:01:27.465" v="308" actId="20577"/>
+          <ac:spMkLst>
+            <pc:docMk/>
+            <pc:sldMk cId="3334357831" sldId="1831"/>
+            <ac:spMk id="14" creationId="{417EBD97-910E-B0D6-C155-F9B9D1A40E38}"/>
+          </ac:spMkLst>
+        </pc:spChg>
+        <pc:spChg chg="mod">
+          <ac:chgData name="Gellenoncourt, Kevin" userId="83ce2c6d-0bd4-4cd9-955e-dd3efc6a7d5a" providerId="ADAL" clId="{A3A60514-9E58-4D9E-99F4-2C9DAB55E9EE}" dt="2023-04-18T16:05:05.593" v="404" actId="20577"/>
+          <ac:spMkLst>
+            <pc:docMk/>
+            <pc:sldMk cId="3334357831" sldId="1831"/>
+            <ac:spMk id="15" creationId="{C7C48C59-B55F-8595-05E0-5A4B5D311AD4}"/>
+          </ac:spMkLst>
+        </pc:spChg>
+        <pc:spChg chg="add mod">
+          <ac:chgData name="Gellenoncourt, Kevin" userId="83ce2c6d-0bd4-4cd9-955e-dd3efc6a7d5a" providerId="ADAL" clId="{A3A60514-9E58-4D9E-99F4-2C9DAB55E9EE}" dt="2023-04-18T07:45:25.921" v="301" actId="3626"/>
+          <ac:spMkLst>
+            <pc:docMk/>
+            <pc:sldMk cId="3334357831" sldId="1831"/>
+            <ac:spMk id="16" creationId="{81C3B5F2-BA6E-CA36-C55C-CF4E663B99D6}"/>
+          </ac:spMkLst>
+        </pc:spChg>
+        <pc:spChg chg="add mod">
+          <ac:chgData name="Gellenoncourt, Kevin" userId="83ce2c6d-0bd4-4cd9-955e-dd3efc6a7d5a" providerId="ADAL" clId="{A3A60514-9E58-4D9E-99F4-2C9DAB55E9EE}" dt="2023-04-18T16:04:17.494" v="388" actId="1076"/>
+          <ac:spMkLst>
+            <pc:docMk/>
+            <pc:sldMk cId="3334357831" sldId="1831"/>
+            <ac:spMk id="17" creationId="{62072801-7EBE-BFDE-4B12-69A8A9B2A3BF}"/>
+          </ac:spMkLst>
+        </pc:spChg>
+        <pc:spChg chg="add mod">
+          <ac:chgData name="Gellenoncourt, Kevin" userId="83ce2c6d-0bd4-4cd9-955e-dd3efc6a7d5a" providerId="ADAL" clId="{A3A60514-9E58-4D9E-99F4-2C9DAB55E9EE}" dt="2023-04-18T16:04:31.819" v="394" actId="14100"/>
+          <ac:spMkLst>
+            <pc:docMk/>
+            <pc:sldMk cId="3334357831" sldId="1831"/>
+            <ac:spMk id="18" creationId="{12AF2180-CD55-EF16-53B3-15E6809EC565}"/>
+          </ac:spMkLst>
+        </pc:spChg>
+        <pc:spChg chg="del">
+          <ac:chgData name="Gellenoncourt, Kevin" userId="83ce2c6d-0bd4-4cd9-955e-dd3efc6a7d5a" providerId="ADAL" clId="{A3A60514-9E58-4D9E-99F4-2C9DAB55E9EE}" dt="2023-04-17T09:46:36.095" v="158" actId="478"/>
+          <ac:spMkLst>
+            <pc:docMk/>
+            <pc:sldMk cId="3334357831" sldId="1831"/>
+            <ac:spMk id="21" creationId="{7B90F373-D3ED-4A5A-81DD-11B4B5E645DB}"/>
+          </ac:spMkLst>
+        </pc:spChg>
+        <pc:spChg chg="mod">
+          <ac:chgData name="Gellenoncourt, Kevin" userId="83ce2c6d-0bd4-4cd9-955e-dd3efc6a7d5a" providerId="ADAL" clId="{A3A60514-9E58-4D9E-99F4-2C9DAB55E9EE}" dt="2023-04-18T16:02:45.718" v="344" actId="14100"/>
+          <ac:spMkLst>
+            <pc:docMk/>
+            <pc:sldMk cId="3334357831" sldId="1831"/>
+            <ac:spMk id="27" creationId="{416BE16B-1E8C-48FA-B7AE-7624496931AD}"/>
+          </ac:spMkLst>
+        </pc:spChg>
+      </pc:sldChg>
+    </pc:docChg>
+  </pc:docChgLst>
+  <pc:docChgLst>
+    <pc:chgData name="Gellenoncourt, Kevin" userId="S::kevin.gellenoncourt@baloise.lu::83ce2c6d-0bd4-4cd9-955e-dd3efc6a7d5a" providerId="AD" clId="Web-{D2663519-9D01-FDB8-251D-BAF415C6E9C5}"/>
+    <pc:docChg chg="modSld">
+      <pc:chgData name="Gellenoncourt, Kevin" userId="S::kevin.gellenoncourt@baloise.lu::83ce2c6d-0bd4-4cd9-955e-dd3efc6a7d5a" providerId="AD" clId="Web-{D2663519-9D01-FDB8-251D-BAF415C6E9C5}" dt="2022-12-08T15:22:13.238" v="139"/>
+      <pc:docMkLst>
+        <pc:docMk/>
+      </pc:docMkLst>
+      <pc:sldChg chg="modSp">
+        <pc:chgData name="Gellenoncourt, Kevin" userId="S::kevin.gellenoncourt@baloise.lu::83ce2c6d-0bd4-4cd9-955e-dd3efc6a7d5a" providerId="AD" clId="Web-{D2663519-9D01-FDB8-251D-BAF415C6E9C5}" dt="2022-12-08T15:22:13.238" v="139"/>
+        <pc:sldMkLst>
+          <pc:docMk/>
+          <pc:sldMk cId="2268762651" sldId="1802"/>
+        </pc:sldMkLst>
+        <pc:graphicFrameChg chg="mod modGraphic">
+          <ac:chgData name="Gellenoncourt, Kevin" userId="S::kevin.gellenoncourt@baloise.lu::83ce2c6d-0bd4-4cd9-955e-dd3efc6a7d5a" providerId="AD" clId="Web-{D2663519-9D01-FDB8-251D-BAF415C6E9C5}" dt="2022-12-08T15:22:13.238" v="139"/>
+          <ac:graphicFrameMkLst>
+            <pc:docMk/>
+            <pc:sldMk cId="2268762651" sldId="1802"/>
+            <ac:graphicFrameMk id="7" creationId="{E8DCD3DC-67BD-4479-85F9-70E2CF8D4037}"/>
+          </ac:graphicFrameMkLst>
+        </pc:graphicFrameChg>
+      </pc:sldChg>
+    </pc:docChg>
+  </pc:docChgLst>
+  <pc:docChgLst>
     <pc:chgData name="Gellenoncourt, Kevin" userId="83ce2c6d-0bd4-4cd9-955e-dd3efc6a7d5a" providerId="ADAL" clId="{C9839D59-2972-4323-A767-4B90EFEABC06}"/>
     <pc:docChg chg="undo redo custSel addSld delSld modSld sldOrd modMainMaster addSection delSection modSection">
       <pc:chgData name="Gellenoncourt, Kevin" userId="83ce2c6d-0bd4-4cd9-955e-dd3efc6a7d5a" providerId="ADAL" clId="{C9839D59-2972-4323-A767-4B90EFEABC06}" dt="2023-02-13T08:21:11.424" v="54716" actId="1076"/>
@@ -14141,353 +14488,6 @@
           </pc:spChg>
         </pc:sldLayoutChg>
       </pc:sldMasterChg>
-    </pc:docChg>
-  </pc:docChgLst>
-  <pc:docChgLst>
-    <pc:chgData name="Gellenoncourt, Kevin" userId="S::kevin.gellenoncourt@baloise.lu::83ce2c6d-0bd4-4cd9-955e-dd3efc6a7d5a" providerId="AD" clId="Web-{D2663519-9D01-FDB8-251D-BAF415C6E9C5}"/>
-    <pc:docChg chg="modSld">
-      <pc:chgData name="Gellenoncourt, Kevin" userId="S::kevin.gellenoncourt@baloise.lu::83ce2c6d-0bd4-4cd9-955e-dd3efc6a7d5a" providerId="AD" clId="Web-{D2663519-9D01-FDB8-251D-BAF415C6E9C5}" dt="2022-12-08T15:22:13.238" v="139"/>
-      <pc:docMkLst>
-        <pc:docMk/>
-      </pc:docMkLst>
-      <pc:sldChg chg="modSp">
-        <pc:chgData name="Gellenoncourt, Kevin" userId="S::kevin.gellenoncourt@baloise.lu::83ce2c6d-0bd4-4cd9-955e-dd3efc6a7d5a" providerId="AD" clId="Web-{D2663519-9D01-FDB8-251D-BAF415C6E9C5}" dt="2022-12-08T15:22:13.238" v="139"/>
-        <pc:sldMkLst>
-          <pc:docMk/>
-          <pc:sldMk cId="2268762651" sldId="1802"/>
-        </pc:sldMkLst>
-        <pc:graphicFrameChg chg="mod modGraphic">
-          <ac:chgData name="Gellenoncourt, Kevin" userId="S::kevin.gellenoncourt@baloise.lu::83ce2c6d-0bd4-4cd9-955e-dd3efc6a7d5a" providerId="AD" clId="Web-{D2663519-9D01-FDB8-251D-BAF415C6E9C5}" dt="2022-12-08T15:22:13.238" v="139"/>
-          <ac:graphicFrameMkLst>
-            <pc:docMk/>
-            <pc:sldMk cId="2268762651" sldId="1802"/>
-            <ac:graphicFrameMk id="7" creationId="{E8DCD3DC-67BD-4479-85F9-70E2CF8D4037}"/>
-          </ac:graphicFrameMkLst>
-        </pc:graphicFrameChg>
-      </pc:sldChg>
-    </pc:docChg>
-  </pc:docChgLst>
-  <pc:docChgLst>
-    <pc:chgData name="Gellenoncourt, Kevin" userId="83ce2c6d-0bd4-4cd9-955e-dd3efc6a7d5a" providerId="ADAL" clId="{A3A60514-9E58-4D9E-99F4-2C9DAB55E9EE}"/>
-    <pc:docChg chg="undo custSel addSld modSld sldOrd modSection">
-      <pc:chgData name="Gellenoncourt, Kevin" userId="83ce2c6d-0bd4-4cd9-955e-dd3efc6a7d5a" providerId="ADAL" clId="{A3A60514-9E58-4D9E-99F4-2C9DAB55E9EE}" dt="2023-04-28T08:07:53.650" v="706"/>
-      <pc:docMkLst>
-        <pc:docMk/>
-      </pc:docMkLst>
-      <pc:sldChg chg="addSp modSp mod">
-        <pc:chgData name="Gellenoncourt, Kevin" userId="83ce2c6d-0bd4-4cd9-955e-dd3efc6a7d5a" providerId="ADAL" clId="{A3A60514-9E58-4D9E-99F4-2C9DAB55E9EE}" dt="2023-04-20T12:39:41.736" v="692" actId="20577"/>
-        <pc:sldMkLst>
-          <pc:docMk/>
-          <pc:sldMk cId="1278860628" sldId="1771"/>
-        </pc:sldMkLst>
-        <pc:spChg chg="add mod">
-          <ac:chgData name="Gellenoncourt, Kevin" userId="83ce2c6d-0bd4-4cd9-955e-dd3efc6a7d5a" providerId="ADAL" clId="{A3A60514-9E58-4D9E-99F4-2C9DAB55E9EE}" dt="2023-04-19T12:35:36.076" v="548" actId="14100"/>
-          <ac:spMkLst>
-            <pc:docMk/>
-            <pc:sldMk cId="1278860628" sldId="1771"/>
-            <ac:spMk id="3" creationId="{B48AAC35-A18D-069C-DDA7-2436D2499FB8}"/>
-          </ac:spMkLst>
-        </pc:spChg>
-        <pc:spChg chg="mod">
-          <ac:chgData name="Gellenoncourt, Kevin" userId="83ce2c6d-0bd4-4cd9-955e-dd3efc6a7d5a" providerId="ADAL" clId="{A3A60514-9E58-4D9E-99F4-2C9DAB55E9EE}" dt="2023-04-20T12:39:41.736" v="692" actId="20577"/>
-          <ac:spMkLst>
-            <pc:docMk/>
-            <pc:sldMk cId="1278860628" sldId="1771"/>
-            <ac:spMk id="18" creationId="{D29CFD93-4DA2-4C5E-8607-CE2A1EFFD801}"/>
-          </ac:spMkLst>
-        </pc:spChg>
-      </pc:sldChg>
-      <pc:sldChg chg="modSp mod">
-        <pc:chgData name="Gellenoncourt, Kevin" userId="83ce2c6d-0bd4-4cd9-955e-dd3efc6a7d5a" providerId="ADAL" clId="{A3A60514-9E58-4D9E-99F4-2C9DAB55E9EE}" dt="2023-04-17T09:48:13.323" v="194" actId="14100"/>
-        <pc:sldMkLst>
-          <pc:docMk/>
-          <pc:sldMk cId="1847149617" sldId="1823"/>
-        </pc:sldMkLst>
-        <pc:spChg chg="mod">
-          <ac:chgData name="Gellenoncourt, Kevin" userId="83ce2c6d-0bd4-4cd9-955e-dd3efc6a7d5a" providerId="ADAL" clId="{A3A60514-9E58-4D9E-99F4-2C9DAB55E9EE}" dt="2023-04-17T09:47:57.162" v="193" actId="14100"/>
-          <ac:spMkLst>
-            <pc:docMk/>
-            <pc:sldMk cId="1847149617" sldId="1823"/>
-            <ac:spMk id="11" creationId="{842C7B8B-D546-5F52-8614-36B5D5B7072A}"/>
-          </ac:spMkLst>
-        </pc:spChg>
-        <pc:spChg chg="mod">
-          <ac:chgData name="Gellenoncourt, Kevin" userId="83ce2c6d-0bd4-4cd9-955e-dd3efc6a7d5a" providerId="ADAL" clId="{A3A60514-9E58-4D9E-99F4-2C9DAB55E9EE}" dt="2023-04-14T15:16:51.501" v="75" actId="20577"/>
-          <ac:spMkLst>
-            <pc:docMk/>
-            <pc:sldMk cId="1847149617" sldId="1823"/>
-            <ac:spMk id="12" creationId="{B104700F-4F00-45C5-9952-8E84D40A9556}"/>
-          </ac:spMkLst>
-        </pc:spChg>
-        <pc:spChg chg="mod">
-          <ac:chgData name="Gellenoncourt, Kevin" userId="83ce2c6d-0bd4-4cd9-955e-dd3efc6a7d5a" providerId="ADAL" clId="{A3A60514-9E58-4D9E-99F4-2C9DAB55E9EE}" dt="2023-04-14T15:15:57.774" v="67" actId="14100"/>
-          <ac:spMkLst>
-            <pc:docMk/>
-            <pc:sldMk cId="1847149617" sldId="1823"/>
-            <ac:spMk id="14" creationId="{417EBD97-910E-B0D6-C155-F9B9D1A40E38}"/>
-          </ac:spMkLst>
-        </pc:spChg>
-        <pc:spChg chg="mod">
-          <ac:chgData name="Gellenoncourt, Kevin" userId="83ce2c6d-0bd4-4cd9-955e-dd3efc6a7d5a" providerId="ADAL" clId="{A3A60514-9E58-4D9E-99F4-2C9DAB55E9EE}" dt="2023-04-17T09:48:13.323" v="194" actId="14100"/>
-          <ac:spMkLst>
-            <pc:docMk/>
-            <pc:sldMk cId="1847149617" sldId="1823"/>
-            <ac:spMk id="27" creationId="{416BE16B-1E8C-48FA-B7AE-7624496931AD}"/>
-          </ac:spMkLst>
-        </pc:spChg>
-      </pc:sldChg>
-      <pc:sldChg chg="modSp mod">
-        <pc:chgData name="Gellenoncourt, Kevin" userId="83ce2c6d-0bd4-4cd9-955e-dd3efc6a7d5a" providerId="ADAL" clId="{A3A60514-9E58-4D9E-99F4-2C9DAB55E9EE}" dt="2023-04-14T15:15:37.539" v="65" actId="13926"/>
-        <pc:sldMkLst>
-          <pc:docMk/>
-          <pc:sldMk cId="2789654304" sldId="1826"/>
-        </pc:sldMkLst>
-        <pc:spChg chg="mod">
-          <ac:chgData name="Gellenoncourt, Kevin" userId="83ce2c6d-0bd4-4cd9-955e-dd3efc6a7d5a" providerId="ADAL" clId="{A3A60514-9E58-4D9E-99F4-2C9DAB55E9EE}" dt="2023-04-14T15:15:37.539" v="65" actId="13926"/>
-          <ac:spMkLst>
-            <pc:docMk/>
-            <pc:sldMk cId="2789654304" sldId="1826"/>
-            <ac:spMk id="10" creationId="{5BEE6695-E1F4-866A-0C79-858782B14051}"/>
-          </ac:spMkLst>
-        </pc:spChg>
-        <pc:spChg chg="mod">
-          <ac:chgData name="Gellenoncourt, Kevin" userId="83ce2c6d-0bd4-4cd9-955e-dd3efc6a7d5a" providerId="ADAL" clId="{A3A60514-9E58-4D9E-99F4-2C9DAB55E9EE}" dt="2023-04-14T15:15:15.353" v="63" actId="14100"/>
-          <ac:spMkLst>
-            <pc:docMk/>
-            <pc:sldMk cId="2789654304" sldId="1826"/>
-            <ac:spMk id="13" creationId="{C083206D-4CC2-5447-AAAA-BD90521B11AA}"/>
-          </ac:spMkLst>
-        </pc:spChg>
-        <pc:spChg chg="mod">
-          <ac:chgData name="Gellenoncourt, Kevin" userId="83ce2c6d-0bd4-4cd9-955e-dd3efc6a7d5a" providerId="ADAL" clId="{A3A60514-9E58-4D9E-99F4-2C9DAB55E9EE}" dt="2023-04-14T15:14:51.233" v="54" actId="1036"/>
-          <ac:spMkLst>
-            <pc:docMk/>
-            <pc:sldMk cId="2789654304" sldId="1826"/>
-            <ac:spMk id="14" creationId="{FAD498DE-6D7E-4853-FCE8-768C1D49C1F6}"/>
-          </ac:spMkLst>
-        </pc:spChg>
-        <pc:spChg chg="mod">
-          <ac:chgData name="Gellenoncourt, Kevin" userId="83ce2c6d-0bd4-4cd9-955e-dd3efc6a7d5a" providerId="ADAL" clId="{A3A60514-9E58-4D9E-99F4-2C9DAB55E9EE}" dt="2023-04-14T15:14:37.857" v="50" actId="20577"/>
-          <ac:spMkLst>
-            <pc:docMk/>
-            <pc:sldMk cId="2789654304" sldId="1826"/>
-            <ac:spMk id="19" creationId="{1F95986F-431B-E99B-9C26-4159CCAC4D58}"/>
-          </ac:spMkLst>
-        </pc:spChg>
-        <pc:spChg chg="mod">
-          <ac:chgData name="Gellenoncourt, Kevin" userId="83ce2c6d-0bd4-4cd9-955e-dd3efc6a7d5a" providerId="ADAL" clId="{A3A60514-9E58-4D9E-99F4-2C9DAB55E9EE}" dt="2023-04-14T15:15:27.401" v="64" actId="20577"/>
-          <ac:spMkLst>
-            <pc:docMk/>
-            <pc:sldMk cId="2789654304" sldId="1826"/>
-            <ac:spMk id="20" creationId="{B547579E-0297-7065-3C2B-B32E8777C39F}"/>
-          </ac:spMkLst>
-        </pc:spChg>
-      </pc:sldChg>
-      <pc:sldChg chg="delSp modSp mod modCm">
-        <pc:chgData name="Gellenoncourt, Kevin" userId="83ce2c6d-0bd4-4cd9-955e-dd3efc6a7d5a" providerId="ADAL" clId="{A3A60514-9E58-4D9E-99F4-2C9DAB55E9EE}" dt="2023-04-28T08:07:18.472" v="702" actId="20577"/>
-        <pc:sldMkLst>
-          <pc:docMk/>
-          <pc:sldMk cId="394559105" sldId="1828"/>
-        </pc:sldMkLst>
-        <pc:spChg chg="mod">
-          <ac:chgData name="Gellenoncourt, Kevin" userId="83ce2c6d-0bd4-4cd9-955e-dd3efc6a7d5a" providerId="ADAL" clId="{A3A60514-9E58-4D9E-99F4-2C9DAB55E9EE}" dt="2023-04-28T08:07:18.472" v="702" actId="20577"/>
-          <ac:spMkLst>
-            <pc:docMk/>
-            <pc:sldMk cId="394559105" sldId="1828"/>
-            <ac:spMk id="2" creationId="{81B4020D-2DE6-4B6C-822C-676A9E68ECFA}"/>
-          </ac:spMkLst>
-        </pc:spChg>
-        <pc:spChg chg="mod">
-          <ac:chgData name="Gellenoncourt, Kevin" userId="83ce2c6d-0bd4-4cd9-955e-dd3efc6a7d5a" providerId="ADAL" clId="{A3A60514-9E58-4D9E-99F4-2C9DAB55E9EE}" dt="2023-04-13T12:14:55.972" v="37" actId="14100"/>
-          <ac:spMkLst>
-            <pc:docMk/>
-            <pc:sldMk cId="394559105" sldId="1828"/>
-            <ac:spMk id="4" creationId="{A0E49883-BD02-0EF4-758D-0FF455BDA027}"/>
-          </ac:spMkLst>
-        </pc:spChg>
-        <pc:spChg chg="mod">
-          <ac:chgData name="Gellenoncourt, Kevin" userId="83ce2c6d-0bd4-4cd9-955e-dd3efc6a7d5a" providerId="ADAL" clId="{A3A60514-9E58-4D9E-99F4-2C9DAB55E9EE}" dt="2023-04-14T15:12:37.127" v="38" actId="20577"/>
-          <ac:spMkLst>
-            <pc:docMk/>
-            <pc:sldMk cId="394559105" sldId="1828"/>
-            <ac:spMk id="9" creationId="{77C3B844-E6D7-3624-1D88-491DC7FBE73F}"/>
-          </ac:spMkLst>
-        </pc:spChg>
-        <pc:spChg chg="mod">
-          <ac:chgData name="Gellenoncourt, Kevin" userId="83ce2c6d-0bd4-4cd9-955e-dd3efc6a7d5a" providerId="ADAL" clId="{A3A60514-9E58-4D9E-99F4-2C9DAB55E9EE}" dt="2023-04-13T12:14:45.162" v="21" actId="14100"/>
-          <ac:spMkLst>
-            <pc:docMk/>
-            <pc:sldMk cId="394559105" sldId="1828"/>
-            <ac:spMk id="11" creationId="{41A27570-4EE7-B3BA-F6CB-2BF7908DDCBF}"/>
-          </ac:spMkLst>
-        </pc:spChg>
-        <pc:spChg chg="mod">
-          <ac:chgData name="Gellenoncourt, Kevin" userId="83ce2c6d-0bd4-4cd9-955e-dd3efc6a7d5a" providerId="ADAL" clId="{A3A60514-9E58-4D9E-99F4-2C9DAB55E9EE}" dt="2023-04-13T12:14:51.807" v="35" actId="1035"/>
-          <ac:spMkLst>
-            <pc:docMk/>
-            <pc:sldMk cId="394559105" sldId="1828"/>
-            <ac:spMk id="15" creationId="{9D7E702D-19C2-2F3F-70B5-73F6CC7B90B0}"/>
-          </ac:spMkLst>
-        </pc:spChg>
-        <pc:spChg chg="mod">
-          <ac:chgData name="Gellenoncourt, Kevin" userId="83ce2c6d-0bd4-4cd9-955e-dd3efc6a7d5a" providerId="ADAL" clId="{A3A60514-9E58-4D9E-99F4-2C9DAB55E9EE}" dt="2023-04-13T12:14:53.671" v="36" actId="14100"/>
-          <ac:spMkLst>
-            <pc:docMk/>
-            <pc:sldMk cId="394559105" sldId="1828"/>
-            <ac:spMk id="16" creationId="{193E23CE-10D3-6AF3-8769-9A0DD9180317}"/>
-          </ac:spMkLst>
-        </pc:spChg>
-        <pc:spChg chg="mod">
-          <ac:chgData name="Gellenoncourt, Kevin" userId="83ce2c6d-0bd4-4cd9-955e-dd3efc6a7d5a" providerId="ADAL" clId="{A3A60514-9E58-4D9E-99F4-2C9DAB55E9EE}" dt="2023-04-17T09:49:12.005" v="238" actId="14100"/>
-          <ac:spMkLst>
-            <pc:docMk/>
-            <pc:sldMk cId="394559105" sldId="1828"/>
-            <ac:spMk id="23" creationId="{D45C1964-3199-AEA8-A302-B7CC89E83D1C}"/>
-          </ac:spMkLst>
-        </pc:spChg>
-        <pc:spChg chg="del mod">
-          <ac:chgData name="Gellenoncourt, Kevin" userId="83ce2c6d-0bd4-4cd9-955e-dd3efc6a7d5a" providerId="ADAL" clId="{A3A60514-9E58-4D9E-99F4-2C9DAB55E9EE}" dt="2023-04-17T09:49:08.618" v="237" actId="21"/>
-          <ac:spMkLst>
-            <pc:docMk/>
-            <pc:sldMk cId="394559105" sldId="1828"/>
-            <ac:spMk id="25" creationId="{1F44828C-2473-8027-6E16-DD3C9C323280}"/>
-          </ac:spMkLst>
-        </pc:spChg>
-      </pc:sldChg>
-      <pc:sldChg chg="addSp modSp mod ord">
-        <pc:chgData name="Gellenoncourt, Kevin" userId="83ce2c6d-0bd4-4cd9-955e-dd3efc6a7d5a" providerId="ADAL" clId="{A3A60514-9E58-4D9E-99F4-2C9DAB55E9EE}" dt="2023-04-28T08:07:29.764" v="704"/>
-        <pc:sldMkLst>
-          <pc:docMk/>
-          <pc:sldMk cId="1931217021" sldId="1830"/>
-        </pc:sldMkLst>
-        <pc:spChg chg="mod">
-          <ac:chgData name="Gellenoncourt, Kevin" userId="83ce2c6d-0bd4-4cd9-955e-dd3efc6a7d5a" providerId="ADAL" clId="{A3A60514-9E58-4D9E-99F4-2C9DAB55E9EE}" dt="2023-04-20T08:30:01.275" v="573" actId="20577"/>
-          <ac:spMkLst>
-            <pc:docMk/>
-            <pc:sldMk cId="1931217021" sldId="1830"/>
-            <ac:spMk id="3" creationId="{968DACCB-6332-4C26-39F2-2D374711D2B0}"/>
-          </ac:spMkLst>
-        </pc:spChg>
-        <pc:spChg chg="add mod">
-          <ac:chgData name="Gellenoncourt, Kevin" userId="83ce2c6d-0bd4-4cd9-955e-dd3efc6a7d5a" providerId="ADAL" clId="{A3A60514-9E58-4D9E-99F4-2C9DAB55E9EE}" dt="2023-04-20T08:30:58.508" v="610" actId="14100"/>
-          <ac:spMkLst>
-            <pc:docMk/>
-            <pc:sldMk cId="1931217021" sldId="1830"/>
-            <ac:spMk id="5" creationId="{70270940-53A9-A871-FF5F-3D0FED83C951}"/>
-          </ac:spMkLst>
-        </pc:spChg>
-      </pc:sldChg>
-      <pc:sldChg chg="addSp delSp modSp add mod ord delCm modCm">
-        <pc:chgData name="Gellenoncourt, Kevin" userId="83ce2c6d-0bd4-4cd9-955e-dd3efc6a7d5a" providerId="ADAL" clId="{A3A60514-9E58-4D9E-99F4-2C9DAB55E9EE}" dt="2023-04-28T08:07:53.650" v="706"/>
-        <pc:sldMkLst>
-          <pc:docMk/>
-          <pc:sldMk cId="3334357831" sldId="1831"/>
-        </pc:sldMkLst>
-        <pc:spChg chg="mod">
-          <ac:chgData name="Gellenoncourt, Kevin" userId="83ce2c6d-0bd4-4cd9-955e-dd3efc6a7d5a" providerId="ADAL" clId="{A3A60514-9E58-4D9E-99F4-2C9DAB55E9EE}" dt="2023-04-18T16:05:25.425" v="420" actId="20577"/>
-          <ac:spMkLst>
-            <pc:docMk/>
-            <pc:sldMk cId="3334357831" sldId="1831"/>
-            <ac:spMk id="3" creationId="{C3167168-4490-6A90-9CBD-B650CA1D9D85}"/>
-          </ac:spMkLst>
-        </pc:spChg>
-        <pc:spChg chg="mod">
-          <ac:chgData name="Gellenoncourt, Kevin" userId="83ce2c6d-0bd4-4cd9-955e-dd3efc6a7d5a" providerId="ADAL" clId="{A3A60514-9E58-4D9E-99F4-2C9DAB55E9EE}" dt="2023-04-17T09:48:50.093" v="236" actId="20577"/>
-          <ac:spMkLst>
-            <pc:docMk/>
-            <pc:sldMk cId="3334357831" sldId="1831"/>
-            <ac:spMk id="7" creationId="{F13AB203-EAC6-E49A-83BD-3061EAD28268}"/>
-          </ac:spMkLst>
-        </pc:spChg>
-        <pc:spChg chg="add mod">
-          <ac:chgData name="Gellenoncourt, Kevin" userId="83ce2c6d-0bd4-4cd9-955e-dd3efc6a7d5a" providerId="ADAL" clId="{A3A60514-9E58-4D9E-99F4-2C9DAB55E9EE}" dt="2023-04-18T16:04:37.975" v="395" actId="14100"/>
-          <ac:spMkLst>
-            <pc:docMk/>
-            <pc:sldMk cId="3334357831" sldId="1831"/>
-            <ac:spMk id="10" creationId="{2825B4BF-40B3-9FBF-C859-DA93D2777B60}"/>
-          </ac:spMkLst>
-        </pc:spChg>
-        <pc:spChg chg="mod">
-          <ac:chgData name="Gellenoncourt, Kevin" userId="83ce2c6d-0bd4-4cd9-955e-dd3efc6a7d5a" providerId="ADAL" clId="{A3A60514-9E58-4D9E-99F4-2C9DAB55E9EE}" dt="2023-04-18T16:05:36.979" v="436" actId="20577"/>
-          <ac:spMkLst>
-            <pc:docMk/>
-            <pc:sldMk cId="3334357831" sldId="1831"/>
-            <ac:spMk id="11" creationId="{842C7B8B-D546-5F52-8614-36B5D5B7072A}"/>
-          </ac:spMkLst>
-        </pc:spChg>
-        <pc:spChg chg="mod">
-          <ac:chgData name="Gellenoncourt, Kevin" userId="83ce2c6d-0bd4-4cd9-955e-dd3efc6a7d5a" providerId="ADAL" clId="{A3A60514-9E58-4D9E-99F4-2C9DAB55E9EE}" dt="2023-04-17T09:46:44.785" v="160" actId="14100"/>
-          <ac:spMkLst>
-            <pc:docMk/>
-            <pc:sldMk cId="3334357831" sldId="1831"/>
-            <ac:spMk id="12" creationId="{B104700F-4F00-45C5-9952-8E84D40A9556}"/>
-          </ac:spMkLst>
-        </pc:spChg>
-        <pc:spChg chg="add mod">
-          <ac:chgData name="Gellenoncourt, Kevin" userId="83ce2c6d-0bd4-4cd9-955e-dd3efc6a7d5a" providerId="ADAL" clId="{A3A60514-9E58-4D9E-99F4-2C9DAB55E9EE}" dt="2023-04-18T16:04:50.715" v="400" actId="14100"/>
-          <ac:spMkLst>
-            <pc:docMk/>
-            <pc:sldMk cId="3334357831" sldId="1831"/>
-            <ac:spMk id="13" creationId="{7BDA3FE1-028D-4F92-3CCF-B587021596BC}"/>
-          </ac:spMkLst>
-        </pc:spChg>
-        <pc:spChg chg="mod">
-          <ac:chgData name="Gellenoncourt, Kevin" userId="83ce2c6d-0bd4-4cd9-955e-dd3efc6a7d5a" providerId="ADAL" clId="{A3A60514-9E58-4D9E-99F4-2C9DAB55E9EE}" dt="2023-04-18T16:01:27.465" v="308" actId="20577"/>
-          <ac:spMkLst>
-            <pc:docMk/>
-            <pc:sldMk cId="3334357831" sldId="1831"/>
-            <ac:spMk id="14" creationId="{417EBD97-910E-B0D6-C155-F9B9D1A40E38}"/>
-          </ac:spMkLst>
-        </pc:spChg>
-        <pc:spChg chg="mod">
-          <ac:chgData name="Gellenoncourt, Kevin" userId="83ce2c6d-0bd4-4cd9-955e-dd3efc6a7d5a" providerId="ADAL" clId="{A3A60514-9E58-4D9E-99F4-2C9DAB55E9EE}" dt="2023-04-18T16:05:05.593" v="404" actId="20577"/>
-          <ac:spMkLst>
-            <pc:docMk/>
-            <pc:sldMk cId="3334357831" sldId="1831"/>
-            <ac:spMk id="15" creationId="{C7C48C59-B55F-8595-05E0-5A4B5D311AD4}"/>
-          </ac:spMkLst>
-        </pc:spChg>
-        <pc:spChg chg="add mod">
-          <ac:chgData name="Gellenoncourt, Kevin" userId="83ce2c6d-0bd4-4cd9-955e-dd3efc6a7d5a" providerId="ADAL" clId="{A3A60514-9E58-4D9E-99F4-2C9DAB55E9EE}" dt="2023-04-18T07:45:25.921" v="301" actId="3626"/>
-          <ac:spMkLst>
-            <pc:docMk/>
-            <pc:sldMk cId="3334357831" sldId="1831"/>
-            <ac:spMk id="16" creationId="{81C3B5F2-BA6E-CA36-C55C-CF4E663B99D6}"/>
-          </ac:spMkLst>
-        </pc:spChg>
-        <pc:spChg chg="add mod">
-          <ac:chgData name="Gellenoncourt, Kevin" userId="83ce2c6d-0bd4-4cd9-955e-dd3efc6a7d5a" providerId="ADAL" clId="{A3A60514-9E58-4D9E-99F4-2C9DAB55E9EE}" dt="2023-04-18T16:04:17.494" v="388" actId="1076"/>
-          <ac:spMkLst>
-            <pc:docMk/>
-            <pc:sldMk cId="3334357831" sldId="1831"/>
-            <ac:spMk id="17" creationId="{62072801-7EBE-BFDE-4B12-69A8A9B2A3BF}"/>
-          </ac:spMkLst>
-        </pc:spChg>
-        <pc:spChg chg="add mod">
-          <ac:chgData name="Gellenoncourt, Kevin" userId="83ce2c6d-0bd4-4cd9-955e-dd3efc6a7d5a" providerId="ADAL" clId="{A3A60514-9E58-4D9E-99F4-2C9DAB55E9EE}" dt="2023-04-18T16:04:31.819" v="394" actId="14100"/>
-          <ac:spMkLst>
-            <pc:docMk/>
-            <pc:sldMk cId="3334357831" sldId="1831"/>
-            <ac:spMk id="18" creationId="{12AF2180-CD55-EF16-53B3-15E6809EC565}"/>
-          </ac:spMkLst>
-        </pc:spChg>
-        <pc:spChg chg="del">
-          <ac:chgData name="Gellenoncourt, Kevin" userId="83ce2c6d-0bd4-4cd9-955e-dd3efc6a7d5a" providerId="ADAL" clId="{A3A60514-9E58-4D9E-99F4-2C9DAB55E9EE}" dt="2023-04-17T09:46:36.095" v="158" actId="478"/>
-          <ac:spMkLst>
-            <pc:docMk/>
-            <pc:sldMk cId="3334357831" sldId="1831"/>
-            <ac:spMk id="21" creationId="{7B90F373-D3ED-4A5A-81DD-11B4B5E645DB}"/>
-          </ac:spMkLst>
-        </pc:spChg>
-        <pc:spChg chg="mod">
-          <ac:chgData name="Gellenoncourt, Kevin" userId="83ce2c6d-0bd4-4cd9-955e-dd3efc6a7d5a" providerId="ADAL" clId="{A3A60514-9E58-4D9E-99F4-2C9DAB55E9EE}" dt="2023-04-18T16:02:45.718" v="344" actId="14100"/>
-          <ac:spMkLst>
-            <pc:docMk/>
-            <pc:sldMk cId="3334357831" sldId="1831"/>
-            <ac:spMk id="27" creationId="{416BE16B-1E8C-48FA-B7AE-7624496931AD}"/>
-          </ac:spMkLst>
-        </pc:spChg>
-      </pc:sldChg>
     </pc:docChg>
   </pc:docChgLst>
   <pc:docChgLst>
@@ -17138,7 +17138,7 @@
           <a:p>
             <a:fld id="{F869B831-4E69-4D2A-AD19-BF4301D60DCB}" type="datetimeFigureOut">
               <a:rPr lang="fr-FR" smtClean="0"/>
-              <a:t>28/04/2025</a:t>
+              <a:t>29/04/2025</a:t>
             </a:fld>
             <a:endParaRPr lang="fr-FR"/>
           </a:p>
@@ -17315,7 +17315,7 @@
           <a:p>
             <a:fld id="{21CD3A5E-BD05-4410-88B3-BEFECD2D9F92}" type="datetimeFigureOut">
               <a:rPr lang="fr-FR" smtClean="0"/>
-              <a:t>28/04/2025</a:t>
+              <a:t>29/04/2025</a:t>
             </a:fld>
             <a:endParaRPr lang="fr-FR"/>
           </a:p>
@@ -29688,19 +29688,7 @@
               <a:rPr lang="en-US" sz="1800" dirty="0">
                 <a:hlinkClick r:id="rId4"/>
               </a:rPr>
-              <a:t>Inversion </a:t>
-            </a:r>
-          </a:p>
-          <a:p>
-            <a:pPr marL="0" indent="0" algn="ctr">
-              <a:buFont typeface="Arial" panose="020B0604020202020204" pitchFamily="34" charset="0"/>
-              <a:buNone/>
-            </a:pPr>
-            <a:r>
-              <a:rPr lang="en-US" sz="1800" dirty="0">
-                <a:hlinkClick r:id="rId4"/>
-              </a:rPr>
-              <a:t>Of Control</a:t>
+              <a:t>Inversion Control</a:t>
             </a:r>
             <a:endParaRPr lang="en-US" sz="1800" dirty="0"/>
           </a:p>
@@ -37785,9 +37773,12 @@
               <a:buNone/>
             </a:pPr>
             <a:r>
-              <a:rPr lang="en-US" dirty="0"/>
+              <a:rPr lang="en-US" dirty="0">
+                <a:hlinkClick r:id="rId2"/>
+              </a:rPr>
               <a:t>REST</a:t>
             </a:r>
+            <a:endParaRPr lang="en-US" dirty="0"/>
           </a:p>
         </p:txBody>
       </p:sp>
@@ -37889,7 +37880,7 @@
                 <a:ea typeface="+mn-lt"/>
                 <a:cs typeface="+mn-lt"/>
               </a:rPr>
-              <a:t>Contract</a:t>
+              <a:t>contract</a:t>
             </a:r>
             <a:r>
               <a:rPr lang="fr-FR" sz="1400" b="0" dirty="0">
@@ -38074,8 +38065,8 @@
         </p:nvSpPr>
         <p:spPr>
           <a:xfrm>
-            <a:off x="924863" y="1508756"/>
-            <a:ext cx="2934475" cy="1761991"/>
+            <a:off x="924863" y="1508757"/>
+            <a:ext cx="2934475" cy="1971148"/>
           </a:xfrm>
           <a:prstGeom prst="roundRect">
             <a:avLst>
@@ -38302,7 +38293,7 @@
                 <a:ea typeface="+mn-lt"/>
                 <a:cs typeface="+mn-lt"/>
               </a:rPr>
-              <a:t>It’s an « Architecture Style »</a:t>
+              <a:t>It’s « Architecture Style for API »</a:t>
             </a:r>
           </a:p>
           <a:p>
@@ -38319,7 +38310,7 @@
                 <a:ea typeface="+mn-lt"/>
                 <a:cs typeface="+mn-lt"/>
               </a:rPr>
-              <a:t>Format.</a:t>
+              <a:t>Obj. </a:t>
             </a:r>
             <a:r>
               <a:rPr lang="en-US" sz="1400" b="0" noProof="0" dirty="0">
@@ -38329,7 +38320,7 @@
                 <a:ea typeface="+mn-lt"/>
                 <a:cs typeface="+mn-lt"/>
               </a:rPr>
-              <a:t> JSON, XML, HTML…</a:t>
+              <a:t>Comm perf &amp; reliable</a:t>
             </a:r>
           </a:p>
           <a:p>
@@ -38346,7 +38337,7 @@
                 <a:ea typeface="+mn-lt"/>
                 <a:cs typeface="+mn-lt"/>
               </a:rPr>
-              <a:t>Transport.</a:t>
+              <a:t>Format.</a:t>
             </a:r>
             <a:r>
               <a:rPr lang="en-US" sz="1400" b="0" noProof="0" dirty="0">
@@ -38356,7 +38347,7 @@
                 <a:ea typeface="+mn-lt"/>
                 <a:cs typeface="+mn-lt"/>
               </a:rPr>
-              <a:t> HTTP (Primarily)</a:t>
+              <a:t> JSON, XML, HTML…</a:t>
             </a:r>
           </a:p>
           <a:p>
@@ -38373,6 +38364,33 @@
                 <a:ea typeface="+mn-lt"/>
                 <a:cs typeface="+mn-lt"/>
               </a:rPr>
+              <a:t>Transport.</a:t>
+            </a:r>
+            <a:r>
+              <a:rPr lang="en-US" sz="1400" b="0" noProof="0" dirty="0">
+                <a:solidFill>
+                  <a:schemeClr val="tx2"/>
+                </a:solidFill>
+                <a:ea typeface="+mn-lt"/>
+                <a:cs typeface="+mn-lt"/>
+              </a:rPr>
+              <a:t> HTTP (Primarily)</a:t>
+            </a:r>
+          </a:p>
+          <a:p>
+            <a:pPr marL="287655" indent="-215900">
+              <a:spcBef>
+                <a:spcPts val="600"/>
+              </a:spcBef>
+            </a:pPr>
+            <a:r>
+              <a:rPr lang="en-US" sz="1400" noProof="0" dirty="0">
+                <a:solidFill>
+                  <a:schemeClr val="tx2"/>
+                </a:solidFill>
+                <a:ea typeface="+mn-lt"/>
+                <a:cs typeface="+mn-lt"/>
+              </a:rPr>
               <a:t>State.</a:t>
             </a:r>
             <a:r>
@@ -38385,22 +38403,6 @@
               </a:rPr>
               <a:t> Stateless</a:t>
             </a:r>
-          </a:p>
-          <a:p>
-            <a:pPr marL="0" indent="0" algn="ctr">
-              <a:spcBef>
-                <a:spcPts val="600"/>
-              </a:spcBef>
-              <a:buFont typeface="Arial" panose="020B0604020202020204" pitchFamily="34" charset="0"/>
-              <a:buNone/>
-            </a:pPr>
-            <a:endParaRPr lang="en-US" sz="1800" b="0" noProof="0" dirty="0">
-              <a:solidFill>
-                <a:schemeClr val="tx2"/>
-              </a:solidFill>
-              <a:ea typeface="+mn-lt"/>
-              <a:cs typeface="+mn-lt"/>
-            </a:endParaRPr>
           </a:p>
         </p:txBody>
       </p:sp>
@@ -38420,12 +38422,12 @@
         </p:nvSpPr>
         <p:spPr>
           <a:xfrm>
-            <a:off x="4013290" y="1508756"/>
-            <a:ext cx="2236899" cy="1484205"/>
+            <a:off x="4013291" y="1508756"/>
+            <a:ext cx="2114102" cy="1967222"/>
           </a:xfrm>
           <a:prstGeom prst="roundRect">
             <a:avLst>
-              <a:gd name="adj" fmla="val 12271"/>
+              <a:gd name="adj" fmla="val 9313"/>
             </a:avLst>
           </a:prstGeom>
           <a:ln w="15875">
@@ -38628,7 +38630,7 @@
                 <a:ea typeface="+mn-lt"/>
                 <a:cs typeface="+mn-lt"/>
               </a:rPr>
-              <a:t>Web Service RESTFul</a:t>
+              <a:t>Web Serv RESTFul</a:t>
             </a:r>
           </a:p>
           <a:p>
@@ -38691,12 +38693,12 @@
         </p:nvSpPr>
         <p:spPr>
           <a:xfrm>
-            <a:off x="929604" y="3380734"/>
-            <a:ext cx="3175461" cy="2387768"/>
+            <a:off x="929604" y="3612428"/>
+            <a:ext cx="5197788" cy="1192328"/>
           </a:xfrm>
           <a:prstGeom prst="roundRect">
             <a:avLst>
-              <a:gd name="adj" fmla="val 10481"/>
+              <a:gd name="adj" fmla="val 16059"/>
             </a:avLst>
           </a:prstGeom>
           <a:ln w="15875">
@@ -38895,11 +38897,32 @@
               </a:spcBef>
             </a:pPr>
             <a:r>
+              <a:rPr lang="fr-FR" sz="1400" dirty="0">
+                <a:ea typeface="+mn-lt"/>
+                <a:cs typeface="+mn-lt"/>
+              </a:rPr>
+              <a:t>Uniform Interface.</a:t>
+            </a:r>
+            <a:r>
               <a:rPr lang="fr-FR" sz="1400" b="0" dirty="0">
                 <a:ea typeface="+mn-lt"/>
                 <a:cs typeface="+mn-lt"/>
               </a:rPr>
-              <a:t>Uniform Interface</a:t>
+              <a:t> Server </a:t>
+            </a:r>
+            <a:r>
+              <a:rPr lang="fr-FR" sz="1400" b="0" dirty="0" err="1">
+                <a:ea typeface="+mn-lt"/>
+                <a:cs typeface="+mn-lt"/>
+              </a:rPr>
+              <a:t>provide</a:t>
+            </a:r>
+            <a:r>
+              <a:rPr lang="fr-FR" sz="1400" b="0" dirty="0">
+                <a:ea typeface="+mn-lt"/>
+                <a:cs typeface="+mn-lt"/>
+              </a:rPr>
+              <a:t> data in a std format</a:t>
             </a:r>
           </a:p>
           <a:p>
@@ -38909,16 +38932,191 @@
               </a:spcBef>
             </a:pPr>
             <a:r>
+              <a:rPr lang="fr-FR" sz="1400" dirty="0" err="1">
+                <a:ea typeface="+mn-lt"/>
+                <a:cs typeface="+mn-lt"/>
+              </a:rPr>
+              <a:t>Statelessness</a:t>
+            </a:r>
+            <a:r>
+              <a:rPr lang="fr-FR" sz="1400" dirty="0">
+                <a:ea typeface="+mn-lt"/>
+                <a:cs typeface="+mn-lt"/>
+              </a:rPr>
+              <a:t>.</a:t>
+            </a:r>
+            <a:r>
+              <a:rPr lang="fr-FR" sz="1400" b="0" dirty="0">
+                <a:ea typeface="+mn-lt"/>
+                <a:cs typeface="+mn-lt"/>
+              </a:rPr>
+              <a:t> </a:t>
+            </a:r>
+            <a:r>
               <a:rPr lang="fr-FR" sz="1400" b="0" dirty="0" err="1">
                 <a:ea typeface="+mn-lt"/>
                 <a:cs typeface="+mn-lt"/>
               </a:rPr>
-              <a:t>Statelessness</a:t>
+              <a:t>Every</a:t>
+            </a:r>
+            <a:r>
+              <a:rPr lang="fr-FR" sz="1400" b="0" dirty="0">
+                <a:ea typeface="+mn-lt"/>
+                <a:cs typeface="+mn-lt"/>
+              </a:rPr>
+              <a:t> </a:t>
+            </a:r>
+            <a:r>
+              <a:rPr lang="fr-FR" sz="1400" b="0" dirty="0" err="1">
+                <a:ea typeface="+mn-lt"/>
+                <a:cs typeface="+mn-lt"/>
+              </a:rPr>
+              <a:t>req</a:t>
+            </a:r>
+            <a:r>
+              <a:rPr lang="fr-FR" sz="1400" b="0" dirty="0">
+                <a:ea typeface="+mn-lt"/>
+                <a:cs typeface="+mn-lt"/>
+              </a:rPr>
+              <a:t>° has no </a:t>
+            </a:r>
+            <a:r>
+              <a:rPr lang="fr-FR" sz="1400" b="0" dirty="0" err="1">
+                <a:ea typeface="+mn-lt"/>
+                <a:cs typeface="+mn-lt"/>
+              </a:rPr>
+              <a:t>dep</a:t>
+            </a:r>
+            <a:r>
+              <a:rPr lang="fr-FR" sz="1400" b="0" dirty="0">
+                <a:ea typeface="+mn-lt"/>
+                <a:cs typeface="+mn-lt"/>
+              </a:rPr>
+              <a:t> on </a:t>
+            </a:r>
+            <a:r>
+              <a:rPr lang="fr-FR" sz="1400" b="0" dirty="0" err="1">
+                <a:ea typeface="+mn-lt"/>
+                <a:cs typeface="+mn-lt"/>
+              </a:rPr>
+              <a:t>previous</a:t>
+            </a:r>
+            <a:r>
+              <a:rPr lang="fr-FR" sz="1400" b="0" dirty="0">
+                <a:ea typeface="+mn-lt"/>
+                <a:cs typeface="+mn-lt"/>
+              </a:rPr>
+              <a:t> </a:t>
+            </a:r>
+            <a:r>
+              <a:rPr lang="fr-FR" sz="1400" b="0" dirty="0" err="1">
+                <a:ea typeface="+mn-lt"/>
+                <a:cs typeface="+mn-lt"/>
+              </a:rPr>
+              <a:t>req</a:t>
             </a:r>
             <a:endParaRPr lang="fr-FR" sz="1400" b="0" dirty="0">
               <a:ea typeface="+mn-lt"/>
               <a:cs typeface="+mn-lt"/>
             </a:endParaRPr>
+          </a:p>
+          <a:p>
+            <a:pPr marL="287655" lvl="1" indent="-215900">
+              <a:spcBef>
+                <a:spcPts val="600"/>
+              </a:spcBef>
+            </a:pPr>
+            <a:r>
+              <a:rPr lang="fr-FR" sz="1400" dirty="0" err="1">
+                <a:ea typeface="+mn-lt"/>
+                <a:cs typeface="+mn-lt"/>
+              </a:rPr>
+              <a:t>Caching</a:t>
+            </a:r>
+            <a:r>
+              <a:rPr lang="fr-FR" sz="1400" dirty="0">
+                <a:ea typeface="+mn-lt"/>
+                <a:cs typeface="+mn-lt"/>
+              </a:rPr>
+              <a:t> </a:t>
+            </a:r>
+            <a:r>
+              <a:rPr lang="fr-FR" sz="1400" dirty="0" err="1">
+                <a:ea typeface="+mn-lt"/>
+                <a:cs typeface="+mn-lt"/>
+              </a:rPr>
+              <a:t>capacity</a:t>
+            </a:r>
+            <a:r>
+              <a:rPr lang="fr-FR" sz="1400" dirty="0">
+                <a:ea typeface="+mn-lt"/>
+                <a:cs typeface="+mn-lt"/>
+              </a:rPr>
+              <a:t>. </a:t>
+            </a:r>
+            <a:r>
+              <a:rPr lang="fr-FR" sz="1400" b="0" dirty="0">
+                <a:ea typeface="+mn-lt"/>
+                <a:cs typeface="+mn-lt"/>
+              </a:rPr>
+              <a:t>API </a:t>
+            </a:r>
+            <a:r>
+              <a:rPr lang="fr-FR" sz="1400" b="0" dirty="0" err="1">
+                <a:ea typeface="+mn-lt"/>
+                <a:cs typeface="+mn-lt"/>
+              </a:rPr>
+              <a:t>resp</a:t>
+            </a:r>
+            <a:r>
+              <a:rPr lang="fr-FR" sz="1400" b="0" dirty="0">
+                <a:ea typeface="+mn-lt"/>
+                <a:cs typeface="+mn-lt"/>
+              </a:rPr>
+              <a:t> can </a:t>
+            </a:r>
+            <a:r>
+              <a:rPr lang="fr-FR" sz="1400" b="0" dirty="0" err="1">
+                <a:ea typeface="+mn-lt"/>
+                <a:cs typeface="+mn-lt"/>
+              </a:rPr>
+              <a:t>be</a:t>
+            </a:r>
+            <a:r>
+              <a:rPr lang="fr-FR" sz="1400" b="0" dirty="0">
+                <a:ea typeface="+mn-lt"/>
+                <a:cs typeface="+mn-lt"/>
+              </a:rPr>
+              <a:t> </a:t>
+            </a:r>
+            <a:r>
+              <a:rPr lang="fr-FR" sz="1400" b="0" dirty="0" err="1">
+                <a:ea typeface="+mn-lt"/>
+                <a:cs typeface="+mn-lt"/>
+              </a:rPr>
+              <a:t>stored</a:t>
+            </a:r>
+            <a:r>
+              <a:rPr lang="fr-FR" sz="1400" b="0" dirty="0">
+                <a:ea typeface="+mn-lt"/>
+                <a:cs typeface="+mn-lt"/>
+              </a:rPr>
+              <a:t> to </a:t>
+            </a:r>
+            <a:r>
+              <a:rPr lang="fr-FR" sz="1400" b="0" dirty="0" err="1">
+                <a:ea typeface="+mn-lt"/>
+                <a:cs typeface="+mn-lt"/>
+              </a:rPr>
+              <a:t>improve</a:t>
+            </a:r>
+            <a:r>
+              <a:rPr lang="fr-FR" sz="1400" b="0" dirty="0">
+                <a:ea typeface="+mn-lt"/>
+                <a:cs typeface="+mn-lt"/>
+              </a:rPr>
+              <a:t> perf</a:t>
+            </a:r>
           </a:p>
         </p:txBody>
       </p:sp>
@@ -39262,6 +39460,356 @@
               <a:solidFill>
                 <a:schemeClr val="tx2"/>
               </a:solidFill>
+              <a:ea typeface="+mn-lt"/>
+              <a:cs typeface="+mn-lt"/>
+            </a:endParaRPr>
+          </a:p>
+        </p:txBody>
+      </p:sp>
+      <p:sp>
+        <p:nvSpPr>
+          <p:cNvPr id="8" name="Espace réservé du texte 7">
+            <a:extLst>
+              <a:ext uri="{FF2B5EF4-FFF2-40B4-BE49-F238E27FC236}">
+                <a16:creationId xmlns:a16="http://schemas.microsoft.com/office/drawing/2014/main" id="{0A07E53E-DF7D-282E-DF85-7A00DC268F79}"/>
+              </a:ext>
+            </a:extLst>
+          </p:cNvPr>
+          <p:cNvSpPr txBox="1">
+            <a:spLocks/>
+          </p:cNvSpPr>
+          <p:nvPr/>
+        </p:nvSpPr>
+        <p:spPr>
+          <a:xfrm>
+            <a:off x="960996" y="4915539"/>
+            <a:ext cx="5166396" cy="928308"/>
+          </a:xfrm>
+          <a:prstGeom prst="roundRect">
+            <a:avLst>
+              <a:gd name="adj" fmla="val 16059"/>
+            </a:avLst>
+          </a:prstGeom>
+          <a:ln w="15875">
+            <a:solidFill>
+              <a:schemeClr val="accent1"/>
+            </a:solidFill>
+          </a:ln>
+        </p:spPr>
+        <p:txBody>
+          <a:bodyPr vert="horz" lIns="0" tIns="0" rIns="0" bIns="0" rtlCol="0" anchor="t">
+            <a:noAutofit/>
+          </a:bodyPr>
+          <a:lstStyle>
+            <a:lvl1pPr marL="360000" indent="-360000" algn="l" defTabSz="914400" rtl="0" eaLnBrk="1" latinLnBrk="0" hangingPunct="1">
+              <a:lnSpc>
+                <a:spcPct val="90000"/>
+              </a:lnSpc>
+              <a:spcBef>
+                <a:spcPts val="1000"/>
+              </a:spcBef>
+              <a:buFont typeface="Arial" panose="020B0604020202020204" pitchFamily="34" charset="0"/>
+              <a:buChar char="•"/>
+              <a:defRPr sz="2000" b="1" kern="1200">
+                <a:solidFill>
+                  <a:schemeClr val="tx1"/>
+                </a:solidFill>
+                <a:latin typeface="+mn-lt"/>
+                <a:ea typeface="+mn-ea"/>
+                <a:cs typeface="+mn-cs"/>
+              </a:defRPr>
+            </a:lvl1pPr>
+            <a:lvl2pPr marL="648000" indent="-360000" algn="l" defTabSz="914400" rtl="0" eaLnBrk="1" latinLnBrk="0" hangingPunct="1">
+              <a:lnSpc>
+                <a:spcPct val="90000"/>
+              </a:lnSpc>
+              <a:spcBef>
+                <a:spcPts val="1200"/>
+              </a:spcBef>
+              <a:buFont typeface="Arial" panose="020B0604020202020204" pitchFamily="34" charset="0"/>
+              <a:buChar char="•"/>
+              <a:defRPr sz="1800" b="1" kern="1200">
+                <a:solidFill>
+                  <a:schemeClr val="tx2"/>
+                </a:solidFill>
+                <a:latin typeface="+mn-lt"/>
+                <a:ea typeface="+mn-ea"/>
+                <a:cs typeface="+mn-cs"/>
+              </a:defRPr>
+            </a:lvl2pPr>
+            <a:lvl3pPr marL="648000" indent="-360000" algn="l" defTabSz="914400" rtl="0" eaLnBrk="1" latinLnBrk="0" hangingPunct="1">
+              <a:lnSpc>
+                <a:spcPct val="90000"/>
+              </a:lnSpc>
+              <a:spcBef>
+                <a:spcPts val="1200"/>
+              </a:spcBef>
+              <a:buFont typeface="Arial" panose="020B0604020202020204" pitchFamily="34" charset="0"/>
+              <a:buChar char="•"/>
+              <a:defRPr sz="1800" b="1" kern="1200">
+                <a:solidFill>
+                  <a:schemeClr val="bg1">
+                    <a:lumMod val="65000"/>
+                  </a:schemeClr>
+                </a:solidFill>
+                <a:latin typeface="+mn-lt"/>
+                <a:ea typeface="+mn-ea"/>
+                <a:cs typeface="+mn-cs"/>
+              </a:defRPr>
+            </a:lvl3pPr>
+            <a:lvl4pPr marL="720000" indent="-270000" algn="l" defTabSz="914400" rtl="0" eaLnBrk="1" latinLnBrk="0" hangingPunct="1">
+              <a:lnSpc>
+                <a:spcPct val="90000"/>
+              </a:lnSpc>
+              <a:spcBef>
+                <a:spcPts val="1000"/>
+              </a:spcBef>
+              <a:buFont typeface="Arial" panose="020B0604020202020204" pitchFamily="34" charset="0"/>
+              <a:buChar char="•"/>
+              <a:defRPr sz="1600" kern="1200">
+                <a:solidFill>
+                  <a:schemeClr val="tx2"/>
+                </a:solidFill>
+                <a:latin typeface="+mn-lt"/>
+                <a:ea typeface="+mn-ea"/>
+                <a:cs typeface="+mn-cs"/>
+              </a:defRPr>
+            </a:lvl4pPr>
+            <a:lvl5pPr marL="630000" indent="-270000" algn="l" defTabSz="914400" rtl="0" eaLnBrk="1" latinLnBrk="0" hangingPunct="1">
+              <a:lnSpc>
+                <a:spcPct val="90000"/>
+              </a:lnSpc>
+              <a:spcBef>
+                <a:spcPts val="1000"/>
+              </a:spcBef>
+              <a:buFont typeface="Arial" panose="020B0604020202020204" pitchFamily="34" charset="0"/>
+              <a:buChar char="•"/>
+              <a:defRPr sz="1600" kern="1200">
+                <a:solidFill>
+                  <a:schemeClr val="tx2"/>
+                </a:solidFill>
+                <a:latin typeface="+mn-lt"/>
+                <a:ea typeface="+mn-ea"/>
+                <a:cs typeface="+mn-cs"/>
+              </a:defRPr>
+            </a:lvl5pPr>
+            <a:lvl6pPr marL="2514600" indent="-228600" algn="l" defTabSz="914400" rtl="0" eaLnBrk="1" latinLnBrk="0" hangingPunct="1">
+              <a:lnSpc>
+                <a:spcPct val="90000"/>
+              </a:lnSpc>
+              <a:spcBef>
+                <a:spcPts val="500"/>
+              </a:spcBef>
+              <a:buFont typeface="Arial" panose="020B0604020202020204" pitchFamily="34" charset="0"/>
+              <a:buChar char="•"/>
+              <a:defRPr sz="1800" kern="1200">
+                <a:solidFill>
+                  <a:schemeClr val="tx1"/>
+                </a:solidFill>
+                <a:latin typeface="+mn-lt"/>
+                <a:ea typeface="+mn-ea"/>
+                <a:cs typeface="+mn-cs"/>
+              </a:defRPr>
+            </a:lvl6pPr>
+            <a:lvl7pPr marL="2971800" indent="-228600" algn="l" defTabSz="914400" rtl="0" eaLnBrk="1" latinLnBrk="0" hangingPunct="1">
+              <a:lnSpc>
+                <a:spcPct val="90000"/>
+              </a:lnSpc>
+              <a:spcBef>
+                <a:spcPts val="500"/>
+              </a:spcBef>
+              <a:buFont typeface="Arial" panose="020B0604020202020204" pitchFamily="34" charset="0"/>
+              <a:buChar char="•"/>
+              <a:defRPr sz="1800" kern="1200">
+                <a:solidFill>
+                  <a:schemeClr val="tx1"/>
+                </a:solidFill>
+                <a:latin typeface="+mn-lt"/>
+                <a:ea typeface="+mn-ea"/>
+                <a:cs typeface="+mn-cs"/>
+              </a:defRPr>
+            </a:lvl7pPr>
+            <a:lvl8pPr marL="3429000" indent="-228600" algn="l" defTabSz="914400" rtl="0" eaLnBrk="1" latinLnBrk="0" hangingPunct="1">
+              <a:lnSpc>
+                <a:spcPct val="90000"/>
+              </a:lnSpc>
+              <a:spcBef>
+                <a:spcPts val="500"/>
+              </a:spcBef>
+              <a:buFont typeface="Arial" panose="020B0604020202020204" pitchFamily="34" charset="0"/>
+              <a:buChar char="•"/>
+              <a:defRPr sz="1800" kern="1200">
+                <a:solidFill>
+                  <a:schemeClr val="tx1"/>
+                </a:solidFill>
+                <a:latin typeface="+mn-lt"/>
+                <a:ea typeface="+mn-ea"/>
+                <a:cs typeface="+mn-cs"/>
+              </a:defRPr>
+            </a:lvl8pPr>
+            <a:lvl9pPr marL="3886200" indent="-228600" algn="l" defTabSz="914400" rtl="0" eaLnBrk="1" latinLnBrk="0" hangingPunct="1">
+              <a:lnSpc>
+                <a:spcPct val="90000"/>
+              </a:lnSpc>
+              <a:spcBef>
+                <a:spcPts val="500"/>
+              </a:spcBef>
+              <a:buFont typeface="Arial" panose="020B0604020202020204" pitchFamily="34" charset="0"/>
+              <a:buChar char="•"/>
+              <a:defRPr sz="1800" kern="1200">
+                <a:solidFill>
+                  <a:schemeClr val="tx1"/>
+                </a:solidFill>
+                <a:latin typeface="+mn-lt"/>
+                <a:ea typeface="+mn-ea"/>
+                <a:cs typeface="+mn-cs"/>
+              </a:defRPr>
+            </a:lvl9pPr>
+          </a:lstStyle>
+          <a:p>
+            <a:pPr marL="0" indent="0" algn="ctr">
+              <a:spcBef>
+                <a:spcPts val="600"/>
+              </a:spcBef>
+              <a:buFont typeface="Arial" panose="020B0604020202020204" pitchFamily="34" charset="0"/>
+              <a:buNone/>
+            </a:pPr>
+            <a:r>
+              <a:rPr lang="en-US" sz="1800" noProof="0" dirty="0"/>
+              <a:t>Advantages</a:t>
+            </a:r>
+            <a:endParaRPr lang="fr-FR" sz="1800" dirty="0"/>
+          </a:p>
+          <a:p>
+            <a:pPr marL="287655" lvl="1" indent="-215900">
+              <a:spcBef>
+                <a:spcPts val="600"/>
+              </a:spcBef>
+            </a:pPr>
+            <a:r>
+              <a:rPr lang="fr-FR" sz="1400" dirty="0" err="1">
+                <a:ea typeface="+mn-lt"/>
+                <a:cs typeface="+mn-lt"/>
+              </a:rPr>
+              <a:t>Scalability</a:t>
+            </a:r>
+            <a:r>
+              <a:rPr lang="fr-FR" sz="1400" dirty="0">
+                <a:ea typeface="+mn-lt"/>
+                <a:cs typeface="+mn-lt"/>
+              </a:rPr>
+              <a:t>.</a:t>
+            </a:r>
+            <a:r>
+              <a:rPr lang="fr-FR" sz="1400" b="0" dirty="0">
+                <a:ea typeface="+mn-lt"/>
+                <a:cs typeface="+mn-lt"/>
+              </a:rPr>
+              <a:t> </a:t>
+            </a:r>
+            <a:r>
+              <a:rPr lang="fr-FR" sz="1400" b="0" dirty="0" err="1">
+                <a:ea typeface="+mn-lt"/>
+                <a:cs typeface="+mn-lt"/>
+              </a:rPr>
+              <a:t>Stateless</a:t>
+            </a:r>
+            <a:r>
+              <a:rPr lang="fr-FR" sz="1400" b="0" dirty="0">
+                <a:ea typeface="+mn-lt"/>
+                <a:cs typeface="+mn-lt"/>
+              </a:rPr>
+              <a:t>-&gt; less </a:t>
+            </a:r>
+            <a:r>
+              <a:rPr lang="fr-FR" sz="1400" b="0" dirty="0" err="1">
+                <a:ea typeface="+mn-lt"/>
+                <a:cs typeface="+mn-lt"/>
+              </a:rPr>
+              <a:t>storage</a:t>
+            </a:r>
+            <a:r>
+              <a:rPr lang="fr-FR" sz="1400" b="0" dirty="0">
+                <a:ea typeface="+mn-lt"/>
+                <a:cs typeface="+mn-lt"/>
+              </a:rPr>
+              <a:t> / </a:t>
+            </a:r>
+            <a:r>
+              <a:rPr lang="fr-FR" sz="1400" b="0" dirty="0" err="1">
+                <a:ea typeface="+mn-lt"/>
+                <a:cs typeface="+mn-lt"/>
+              </a:rPr>
+              <a:t>Caching</a:t>
+            </a:r>
+            <a:r>
+              <a:rPr lang="fr-FR" sz="1400" b="0" dirty="0">
+                <a:ea typeface="+mn-lt"/>
+                <a:cs typeface="+mn-lt"/>
+              </a:rPr>
+              <a:t> -&gt; less </a:t>
+            </a:r>
+            <a:r>
+              <a:rPr lang="fr-FR" sz="1400" b="0" dirty="0" err="1">
+                <a:ea typeface="+mn-lt"/>
+                <a:cs typeface="+mn-lt"/>
+              </a:rPr>
+              <a:t>comm</a:t>
+            </a:r>
+            <a:endParaRPr lang="fr-FR" sz="1400" b="0" dirty="0">
+              <a:ea typeface="+mn-lt"/>
+              <a:cs typeface="+mn-lt"/>
+            </a:endParaRPr>
+          </a:p>
+          <a:p>
+            <a:pPr marL="287655" lvl="1" indent="-215900">
+              <a:spcBef>
+                <a:spcPts val="600"/>
+              </a:spcBef>
+            </a:pPr>
+            <a:r>
+              <a:rPr lang="fr-FR" sz="1400" dirty="0" err="1">
+                <a:ea typeface="+mn-lt"/>
+                <a:cs typeface="+mn-lt"/>
+              </a:rPr>
+              <a:t>Flexibility</a:t>
+            </a:r>
+            <a:r>
+              <a:rPr lang="fr-FR" sz="1400" dirty="0">
+                <a:ea typeface="+mn-lt"/>
+                <a:cs typeface="+mn-lt"/>
+              </a:rPr>
+              <a:t>.</a:t>
+            </a:r>
+            <a:r>
+              <a:rPr lang="fr-FR" sz="1400" b="0" dirty="0">
+                <a:ea typeface="+mn-lt"/>
+                <a:cs typeface="+mn-lt"/>
+              </a:rPr>
+              <a:t> </a:t>
+            </a:r>
+            <a:r>
+              <a:rPr lang="fr-FR" sz="1400" b="0">
+                <a:ea typeface="+mn-lt"/>
+                <a:cs typeface="+mn-lt"/>
+              </a:rPr>
+              <a:t>Technology</a:t>
+            </a:r>
+            <a:r>
+              <a:rPr lang="fr-FR" sz="1400" b="0" dirty="0">
+                <a:ea typeface="+mn-lt"/>
+                <a:cs typeface="+mn-lt"/>
+              </a:rPr>
+              <a:t> </a:t>
+            </a:r>
+            <a:r>
+              <a:rPr lang="fr-FR" sz="1400" b="0" dirty="0" err="1">
+                <a:ea typeface="+mn-lt"/>
+                <a:cs typeface="+mn-lt"/>
+              </a:rPr>
+              <a:t>independant</a:t>
+            </a:r>
+            <a:endParaRPr lang="fr-FR" sz="1400" b="0" dirty="0">
               <a:ea typeface="+mn-lt"/>
               <a:cs typeface="+mn-lt"/>
             </a:endParaRPr>
@@ -40227,15 +40775,6 @@
 </file>
 
 <file path=customXml/item1.xml><?xml version="1.0" encoding="utf-8"?>
-<?mso-contentType ?>
-<FormTemplates xmlns="http://schemas.microsoft.com/sharepoint/v3/contenttype/forms">
-  <Display>DocumentLibraryForm</Display>
-  <Edit>DocumentLibraryForm</Edit>
-  <New>DocumentLibraryForm</New>
-</FormTemplates>
-</file>
-
-<file path=customXml/item2.xml><?xml version="1.0" encoding="utf-8"?>
 <p:properties xmlns:p="http://schemas.microsoft.com/office/2006/metadata/properties" xmlns:xsi="http://www.w3.org/2001/XMLSchema-instance" xmlns:pc="http://schemas.microsoft.com/office/infopath/2007/PartnerControls">
   <documentManagement>
     <lcf76f155ced4ddcb4097134ff3c332f xmlns="4686bda6-deda-4a53-9ce5-2ab192257292">
@@ -40244,6 +40783,15 @@
     <TaxCatchAll xmlns="718058b2-8753-44ce-95b0-d0067b5629da" xsi:nil="true"/>
   </documentManagement>
 </p:properties>
+</file>
+
+<file path=customXml/item2.xml><?xml version="1.0" encoding="utf-8"?>
+<?mso-contentType ?>
+<FormTemplates xmlns="http://schemas.microsoft.com/sharepoint/v3/contenttype/forms">
+  <Display>DocumentLibraryForm</Display>
+  <Edit>DocumentLibraryForm</Edit>
+  <New>DocumentLibraryForm</New>
+</FormTemplates>
 </file>
 
 <file path=customXml/item3.xml><?xml version="1.0" encoding="utf-8"?>
@@ -40476,20 +41024,20 @@
 </file>
 
 <file path=customXml/itemProps1.xml><?xml version="1.0" encoding="utf-8"?>
-<ds:datastoreItem xmlns:ds="http://schemas.openxmlformats.org/officeDocument/2006/customXml" ds:itemID="{34397568-BCFC-4083-81F0-E6CAD2F36C27}">
-  <ds:schemaRefs>
-    <ds:schemaRef ds:uri="http://schemas.microsoft.com/sharepoint/v3/contenttype/forms"/>
-  </ds:schemaRefs>
-</ds:datastoreItem>
-</file>
-
-<file path=customXml/itemProps2.xml><?xml version="1.0" encoding="utf-8"?>
 <ds:datastoreItem xmlns:ds="http://schemas.openxmlformats.org/officeDocument/2006/customXml" ds:itemID="{04039FE3-5222-47C8-842D-2F3B0E099BAA}">
   <ds:schemaRefs>
     <ds:schemaRef ds:uri="4686bda6-deda-4a53-9ce5-2ab192257292"/>
     <ds:schemaRef ds:uri="718058b2-8753-44ce-95b0-d0067b5629da"/>
     <ds:schemaRef ds:uri="http://schemas.microsoft.com/office/2006/metadata/properties"/>
     <ds:schemaRef ds:uri="http://schemas.microsoft.com/office/infopath/2007/PartnerControls"/>
+  </ds:schemaRefs>
+</ds:datastoreItem>
+</file>
+
+<file path=customXml/itemProps2.xml><?xml version="1.0" encoding="utf-8"?>
+<ds:datastoreItem xmlns:ds="http://schemas.openxmlformats.org/officeDocument/2006/customXml" ds:itemID="{34397568-BCFC-4083-81F0-E6CAD2F36C27}">
+  <ds:schemaRefs>
+    <ds:schemaRef ds:uri="http://schemas.microsoft.com/sharepoint/v3/contenttype/forms"/>
   </ds:schemaRefs>
 </ds:datastoreItem>
 </file>
